--- a/Foundation_F3/F3-L12_Unit_Assessment_My_Family_and_Home.pptx
+++ b/Foundation_F3/F3-L12_Unit_Assessment_My_Family_and_Home.pptx
@@ -1,6 +1,6 @@
 
 <file path=ppt/presentation.xml><?xml version="1.0" encoding="utf-8"?>
-<p:presentation xmlns:a="http://schemas.openxmlformats.org/drawingml/2006/main" xmlns:r="http://schemas.openxmlformats.org/officeDocument/2006/relationships" xmlns:p="http://schemas.openxmlformats.org/presentationml/2006/main" saveSubsetFonts="1" autoCompressPictures="0">
+<p:presentation xmlns:a="http://schemas.openxmlformats.org/drawingml/2006/main" xmlns:r="http://schemas.openxmlformats.org/officeDocument/2006/relationships" xmlns:p="http://schemas.openxmlformats.org/presentationml/2006/main" embedTrueTypeFonts="1" saveSubsetFonts="1" autoCompressPictures="0">
   <p:sldMasterIdLst>
     <p:sldMasterId id="2147483648" r:id="rId1"/>
   </p:sldMasterIdLst>
@@ -33,6 +33,13 @@
   </p:notesMasterIdLst>
   <p:sldSz cx="12192000" cy="6858000"/>
   <p:notesSz cx="6858000" cy="12192000"/>
+  <p:embeddedFontLst>
+    <p:embeddedFont>
+      <p:font typeface="Amiri" pitchFamily="2" charset="-78"/>
+      <p:regular r:id="rIdFont1"/>
+      <p:bold r:id="rIdFont2"/>
+    </p:embeddedFont>
+  </p:embeddedFontLst>
   <p:defaultTextStyle>
     <a:lvl1pPr marL="0" algn="l" defTabSz="914400" rtl="0" eaLnBrk="1" latinLnBrk="0" hangingPunct="1">
       <a:defRPr sz="1800" kern="1200">
@@ -389,8 +396,7 @@
           <a:schemeClr val="tx1"/>
         </a:solidFill>
         <a:latin typeface="+mn-lt"/>
-        <a:ea typeface="+mn-ea"/>
-        <a:cs typeface="+mn-cs"/>
+        <a:cs typeface="Amiri" pitchFamily="2" charset="-78"/>
       </a:defRPr>
     </a:lvl1pPr>
     <a:lvl2pPr marL="457200" algn="l" defTabSz="914400" rtl="0" eaLnBrk="1" latinLnBrk="0" hangingPunct="1">
@@ -399,8 +405,7 @@
           <a:schemeClr val="tx1"/>
         </a:solidFill>
         <a:latin typeface="+mn-lt"/>
-        <a:ea typeface="+mn-ea"/>
-        <a:cs typeface="+mn-cs"/>
+        <a:cs typeface="Amiri" pitchFamily="2" charset="-78"/>
       </a:defRPr>
     </a:lvl2pPr>
     <a:lvl3pPr marL="914400" algn="l" defTabSz="914400" rtl="0" eaLnBrk="1" latinLnBrk="0" hangingPunct="1">
@@ -409,8 +414,7 @@
           <a:schemeClr val="tx1"/>
         </a:solidFill>
         <a:latin typeface="+mn-lt"/>
-        <a:ea typeface="+mn-ea"/>
-        <a:cs typeface="+mn-cs"/>
+        <a:cs typeface="Amiri" pitchFamily="2" charset="-78"/>
       </a:defRPr>
     </a:lvl3pPr>
     <a:lvl4pPr marL="1371600" algn="l" defTabSz="914400" rtl="0" eaLnBrk="1" latinLnBrk="0" hangingPunct="1">
@@ -419,8 +423,7 @@
           <a:schemeClr val="tx1"/>
         </a:solidFill>
         <a:latin typeface="+mn-lt"/>
-        <a:ea typeface="+mn-ea"/>
-        <a:cs typeface="+mn-cs"/>
+        <a:cs typeface="Amiri" pitchFamily="2" charset="-78"/>
       </a:defRPr>
     </a:lvl4pPr>
     <a:lvl5pPr marL="1828800" algn="l" defTabSz="914400" rtl="0" eaLnBrk="1" latinLnBrk="0" hangingPunct="1">
@@ -429,8 +432,7 @@
           <a:schemeClr val="tx1"/>
         </a:solidFill>
         <a:latin typeface="+mn-lt"/>
-        <a:ea typeface="+mn-ea"/>
-        <a:cs typeface="+mn-cs"/>
+        <a:cs typeface="Amiri" pitchFamily="2" charset="-78"/>
       </a:defRPr>
     </a:lvl5pPr>
     <a:lvl6pPr marL="2286000" algn="l" defTabSz="914400" rtl="0" eaLnBrk="1" latinLnBrk="0" hangingPunct="1">
@@ -439,8 +441,7 @@
           <a:schemeClr val="tx1"/>
         </a:solidFill>
         <a:latin typeface="+mn-lt"/>
-        <a:ea typeface="+mn-ea"/>
-        <a:cs typeface="+mn-cs"/>
+        <a:cs typeface="Amiri" pitchFamily="2" charset="-78"/>
       </a:defRPr>
     </a:lvl6pPr>
     <a:lvl7pPr marL="2743200" algn="l" defTabSz="914400" rtl="0" eaLnBrk="1" latinLnBrk="0" hangingPunct="1">
@@ -449,8 +450,7 @@
           <a:schemeClr val="tx1"/>
         </a:solidFill>
         <a:latin typeface="+mn-lt"/>
-        <a:ea typeface="+mn-ea"/>
-        <a:cs typeface="+mn-cs"/>
+        <a:cs typeface="Amiri" pitchFamily="2" charset="-78"/>
       </a:defRPr>
     </a:lvl7pPr>
     <a:lvl8pPr marL="3200400" algn="l" defTabSz="914400" rtl="0" eaLnBrk="1" latinLnBrk="0" hangingPunct="1">
@@ -459,8 +459,7 @@
           <a:schemeClr val="tx1"/>
         </a:solidFill>
         <a:latin typeface="+mn-lt"/>
-        <a:ea typeface="+mn-ea"/>
-        <a:cs typeface="+mn-cs"/>
+        <a:cs typeface="Amiri" pitchFamily="2" charset="-78"/>
       </a:defRPr>
     </a:lvl8pPr>
     <a:lvl9pPr marL="3657600" algn="l" defTabSz="914400" rtl="0" eaLnBrk="1" latinLnBrk="0" hangingPunct="1">
@@ -469,8 +468,7 @@
           <a:schemeClr val="tx1"/>
         </a:solidFill>
         <a:latin typeface="+mn-lt"/>
-        <a:ea typeface="+mn-ea"/>
-        <a:cs typeface="+mn-cs"/>
+        <a:cs typeface="Amiri" pitchFamily="2" charset="-78"/>
       </a:defRPr>
     </a:lvl9pPr>
   </p:notesStyle>
@@ -2520,8 +2518,7 @@
             <a:schemeClr val="tx1"/>
           </a:solidFill>
           <a:latin typeface="+mj-lt"/>
-          <a:ea typeface="+mj-ea"/>
-          <a:cs typeface="+mj-cs"/>
+          <a:cs typeface="Amiri" pitchFamily="2" charset="-78"/>
         </a:defRPr>
       </a:lvl1pPr>
     </p:titleStyle>
@@ -2537,8 +2534,7 @@
             <a:schemeClr val="tx1"/>
           </a:solidFill>
           <a:latin typeface="+mn-lt"/>
-          <a:ea typeface="+mn-ea"/>
-          <a:cs typeface="+mn-cs"/>
+          <a:cs typeface="Amiri" pitchFamily="2" charset="-78"/>
         </a:defRPr>
       </a:lvl1pPr>
       <a:lvl2pPr marL="742950" indent="-285750" algn="l" defTabSz="914400" rtl="0" eaLnBrk="1" latinLnBrk="0" hangingPunct="1">
@@ -2552,8 +2548,7 @@
             <a:schemeClr val="tx1"/>
           </a:solidFill>
           <a:latin typeface="+mn-lt"/>
-          <a:ea typeface="+mn-ea"/>
-          <a:cs typeface="+mn-cs"/>
+          <a:cs typeface="Amiri" pitchFamily="2" charset="-78"/>
         </a:defRPr>
       </a:lvl2pPr>
       <a:lvl3pPr marL="1143000" indent="-228600" algn="l" defTabSz="914400" rtl="0" eaLnBrk="1" latinLnBrk="0" hangingPunct="1">
@@ -2567,8 +2562,7 @@
             <a:schemeClr val="tx1"/>
           </a:solidFill>
           <a:latin typeface="+mn-lt"/>
-          <a:ea typeface="+mn-ea"/>
-          <a:cs typeface="+mn-cs"/>
+          <a:cs typeface="Amiri" pitchFamily="2" charset="-78"/>
         </a:defRPr>
       </a:lvl3pPr>
       <a:lvl4pPr marL="1600200" indent="-228600" algn="l" defTabSz="914400" rtl="0" eaLnBrk="1" latinLnBrk="0" hangingPunct="1">
@@ -2582,8 +2576,7 @@
             <a:schemeClr val="tx1"/>
           </a:solidFill>
           <a:latin typeface="+mn-lt"/>
-          <a:ea typeface="+mn-ea"/>
-          <a:cs typeface="+mn-cs"/>
+          <a:cs typeface="Amiri" pitchFamily="2" charset="-78"/>
         </a:defRPr>
       </a:lvl4pPr>
       <a:lvl5pPr marL="2057400" indent="-228600" algn="l" defTabSz="914400" rtl="0" eaLnBrk="1" latinLnBrk="0" hangingPunct="1">
@@ -2597,8 +2590,7 @@
             <a:schemeClr val="tx1"/>
           </a:solidFill>
           <a:latin typeface="+mn-lt"/>
-          <a:ea typeface="+mn-ea"/>
-          <a:cs typeface="+mn-cs"/>
+          <a:cs typeface="Amiri" pitchFamily="2" charset="-78"/>
         </a:defRPr>
       </a:lvl5pPr>
       <a:lvl6pPr marL="2514600" indent="-228600" algn="l" defTabSz="914400" rtl="0" eaLnBrk="1" latinLnBrk="0" hangingPunct="1">
@@ -2612,8 +2604,7 @@
             <a:schemeClr val="tx1"/>
           </a:solidFill>
           <a:latin typeface="+mn-lt"/>
-          <a:ea typeface="+mn-ea"/>
-          <a:cs typeface="+mn-cs"/>
+          <a:cs typeface="Amiri" pitchFamily="2" charset="-78"/>
         </a:defRPr>
       </a:lvl6pPr>
       <a:lvl7pPr marL="2971800" indent="-228600" algn="l" defTabSz="914400" rtl="0" eaLnBrk="1" latinLnBrk="0" hangingPunct="1">
@@ -2627,8 +2618,7 @@
             <a:schemeClr val="tx1"/>
           </a:solidFill>
           <a:latin typeface="+mn-lt"/>
-          <a:ea typeface="+mn-ea"/>
-          <a:cs typeface="+mn-cs"/>
+          <a:cs typeface="Amiri" pitchFamily="2" charset="-78"/>
         </a:defRPr>
       </a:lvl7pPr>
       <a:lvl8pPr marL="3429000" indent="-228600" algn="l" defTabSz="914400" rtl="0" eaLnBrk="1" latinLnBrk="0" hangingPunct="1">
@@ -2642,8 +2632,7 @@
             <a:schemeClr val="tx1"/>
           </a:solidFill>
           <a:latin typeface="+mn-lt"/>
-          <a:ea typeface="+mn-ea"/>
-          <a:cs typeface="+mn-cs"/>
+          <a:cs typeface="Amiri" pitchFamily="2" charset="-78"/>
         </a:defRPr>
       </a:lvl8pPr>
       <a:lvl9pPr marL="3886200" indent="-228600" algn="l" defTabSz="914400" rtl="0" eaLnBrk="1" latinLnBrk="0" hangingPunct="1">
@@ -2657,8 +2646,7 @@
             <a:schemeClr val="tx1"/>
           </a:solidFill>
           <a:latin typeface="+mn-lt"/>
-          <a:ea typeface="+mn-ea"/>
-          <a:cs typeface="+mn-cs"/>
+          <a:cs typeface="Amiri" pitchFamily="2" charset="-78"/>
         </a:defRPr>
       </a:lvl9pPr>
     </p:bodyStyle>
@@ -2672,8 +2660,7 @@
             <a:schemeClr val="tx1"/>
           </a:solidFill>
           <a:latin typeface="+mn-lt"/>
-          <a:ea typeface="+mn-ea"/>
-          <a:cs typeface="+mn-cs"/>
+          <a:cs typeface="Amiri" pitchFamily="2" charset="-78"/>
         </a:defRPr>
       </a:lvl1pPr>
       <a:lvl2pPr marL="457200" algn="l" defTabSz="914400" rtl="0" eaLnBrk="1" latinLnBrk="0" hangingPunct="1">
@@ -2682,8 +2669,7 @@
             <a:schemeClr val="tx1"/>
           </a:solidFill>
           <a:latin typeface="+mn-lt"/>
-          <a:ea typeface="+mn-ea"/>
-          <a:cs typeface="+mn-cs"/>
+          <a:cs typeface="Amiri" pitchFamily="2" charset="-78"/>
         </a:defRPr>
       </a:lvl2pPr>
       <a:lvl3pPr marL="914400" algn="l" defTabSz="914400" rtl="0" eaLnBrk="1" latinLnBrk="0" hangingPunct="1">
@@ -2692,8 +2678,7 @@
             <a:schemeClr val="tx1"/>
           </a:solidFill>
           <a:latin typeface="+mn-lt"/>
-          <a:ea typeface="+mn-ea"/>
-          <a:cs typeface="+mn-cs"/>
+          <a:cs typeface="Amiri" pitchFamily="2" charset="-78"/>
         </a:defRPr>
       </a:lvl3pPr>
       <a:lvl4pPr marL="1371600" algn="l" defTabSz="914400" rtl="0" eaLnBrk="1" latinLnBrk="0" hangingPunct="1">
@@ -2702,8 +2687,7 @@
             <a:schemeClr val="tx1"/>
           </a:solidFill>
           <a:latin typeface="+mn-lt"/>
-          <a:ea typeface="+mn-ea"/>
-          <a:cs typeface="+mn-cs"/>
+          <a:cs typeface="Amiri" pitchFamily="2" charset="-78"/>
         </a:defRPr>
       </a:lvl4pPr>
       <a:lvl5pPr marL="1828800" algn="l" defTabSz="914400" rtl="0" eaLnBrk="1" latinLnBrk="0" hangingPunct="1">
@@ -2712,8 +2696,7 @@
             <a:schemeClr val="tx1"/>
           </a:solidFill>
           <a:latin typeface="+mn-lt"/>
-          <a:ea typeface="+mn-ea"/>
-          <a:cs typeface="+mn-cs"/>
+          <a:cs typeface="Amiri" pitchFamily="2" charset="-78"/>
         </a:defRPr>
       </a:lvl5pPr>
       <a:lvl6pPr marL="2286000" algn="l" defTabSz="914400" rtl="0" eaLnBrk="1" latinLnBrk="0" hangingPunct="1">
@@ -2722,8 +2705,7 @@
             <a:schemeClr val="tx1"/>
           </a:solidFill>
           <a:latin typeface="+mn-lt"/>
-          <a:ea typeface="+mn-ea"/>
-          <a:cs typeface="+mn-cs"/>
+          <a:cs typeface="Amiri" pitchFamily="2" charset="-78"/>
         </a:defRPr>
       </a:lvl6pPr>
       <a:lvl7pPr marL="2743200" algn="l" defTabSz="914400" rtl="0" eaLnBrk="1" latinLnBrk="0" hangingPunct="1">
@@ -2732,8 +2714,7 @@
             <a:schemeClr val="tx1"/>
           </a:solidFill>
           <a:latin typeface="+mn-lt"/>
-          <a:ea typeface="+mn-ea"/>
-          <a:cs typeface="+mn-cs"/>
+          <a:cs typeface="Amiri" pitchFamily="2" charset="-78"/>
         </a:defRPr>
       </a:lvl7pPr>
       <a:lvl8pPr marL="3200400" algn="l" defTabSz="914400" rtl="0" eaLnBrk="1" latinLnBrk="0" hangingPunct="1">
@@ -2742,8 +2723,7 @@
             <a:schemeClr val="tx1"/>
           </a:solidFill>
           <a:latin typeface="+mn-lt"/>
-          <a:ea typeface="+mn-ea"/>
-          <a:cs typeface="+mn-cs"/>
+          <a:cs typeface="Amiri" pitchFamily="2" charset="-78"/>
         </a:defRPr>
       </a:lvl8pPr>
       <a:lvl9pPr marL="3657600" algn="l" defTabSz="914400" rtl="0" eaLnBrk="1" latinLnBrk="0" hangingPunct="1">
@@ -2752,8 +2732,7 @@
             <a:schemeClr val="tx1"/>
           </a:solidFill>
           <a:latin typeface="+mn-lt"/>
-          <a:ea typeface="+mn-ea"/>
-          <a:cs typeface="+mn-cs"/>
+          <a:cs typeface="Amiri" pitchFamily="2" charset="-78"/>
         </a:defRPr>
       </a:lvl9pPr>
     </p:otherStyle>
@@ -2913,9 +2892,8 @@
                 <a:solidFill>
                   <a:srgbClr val="D4AF37"/>
                 </a:solidFill>
-                <a:latin typeface="Amiri" pitchFamily="34" charset="0"/>
-                <a:ea typeface="Amiri" pitchFamily="34" charset="-122"/>
-                <a:cs typeface="Amiri" pitchFamily="34" charset="-120"/>
+                <a:latin typeface="Amiri" pitchFamily="2" charset="-78"/>
+                <a:cs typeface="Amiri" pitchFamily="2" charset="-78"/>
               </a:rPr>
               <a:t>م</a:t>
             </a:r>
@@ -2953,8 +2931,7 @@
                   <a:srgbClr val="FFFFFF"/>
                 </a:solidFill>
                 <a:latin typeface="Cambria" pitchFamily="34" charset="0"/>
-                <a:ea typeface="Cambria" pitchFamily="34" charset="-122"/>
-                <a:cs typeface="Cambria" pitchFamily="34" charset="-120"/>
+                <a:cs typeface="Amiri" pitchFamily="2" charset="-78"/>
               </a:rPr>
               <a:t>Al Madina Online School</a:t>
             </a:r>
@@ -2970,8 +2947,7 @@
                   <a:srgbClr val="D4AF37"/>
                 </a:solidFill>
                 <a:latin typeface="Calibri" pitchFamily="34" charset="0"/>
-                <a:ea typeface="Calibri" pitchFamily="34" charset="-122"/>
-                <a:cs typeface="Calibri" pitchFamily="34" charset="-120"/>
+                <a:cs typeface="Amiri" pitchFamily="2" charset="-78"/>
               </a:rPr>
               <a:t>ARABIC DEPARTMENT · MIFTAH ARABIC</a:t>
             </a:r>
@@ -3009,8 +2985,7 @@
                   <a:srgbClr val="D4AF37"/>
                 </a:solidFill>
                 <a:latin typeface="Calibri" pitchFamily="34" charset="0"/>
-                <a:ea typeface="Calibri" pitchFamily="34" charset="-122"/>
-                <a:cs typeface="Calibri" pitchFamily="34" charset="-120"/>
+                <a:cs typeface="Amiri" pitchFamily="2" charset="-78"/>
               </a:rPr>
               <a:t>CAMBRIDGE IGCSE ARABIC 0544  ·  YEAR 7  ·  FOUNDATION F3  ·  F3-L12</a:t>
             </a:r>
@@ -3048,8 +3023,7 @@
                   <a:srgbClr val="9FB3D1"/>
                 </a:solidFill>
                 <a:latin typeface="Cambria" pitchFamily="34" charset="0"/>
-                <a:ea typeface="Cambria" pitchFamily="34" charset="-122"/>
-                <a:cs typeface="Cambria" pitchFamily="34" charset="-120"/>
+                <a:cs typeface="Amiri" pitchFamily="2" charset="-78"/>
               </a:rPr>
               <a:t>F3-L12</a:t>
             </a:r>
@@ -3087,8 +3061,7 @@
                   <a:srgbClr val="FFFFFF"/>
                 </a:solidFill>
                 <a:latin typeface="Cambria" pitchFamily="34" charset="0"/>
-                <a:ea typeface="Cambria" pitchFamily="34" charset="-122"/>
-                <a:cs typeface="Cambria" pitchFamily="34" charset="-120"/>
+                <a:cs typeface="Amiri" pitchFamily="2" charset="-78"/>
               </a:rPr>
               <a:t>Unit Assessment: My Family and Home</a:t>
             </a:r>
@@ -3125,9 +3098,8 @@
                 <a:solidFill>
                   <a:srgbClr val="D4AF37"/>
                 </a:solidFill>
-                <a:latin typeface="Amiri" pitchFamily="34" charset="0"/>
-                <a:ea typeface="Amiri" pitchFamily="34" charset="-122"/>
-                <a:cs typeface="Amiri" pitchFamily="34" charset="-120"/>
+                <a:latin typeface="Amiri" pitchFamily="2" charset="-78"/>
+                <a:cs typeface="Amiri" pitchFamily="2" charset="-78"/>
               </a:rPr>
               <a:t>تَقْيِيمُ الوَحْدَةِ — عَائِلَتِي وَبَيْتِي</a:t>
             </a:r>
@@ -3165,8 +3137,7 @@
                   <a:srgbClr val="C6D2E6"/>
                 </a:solidFill>
                 <a:latin typeface="Calibri" pitchFamily="34" charset="0"/>
-                <a:ea typeface="Calibri" pitchFamily="34" charset="-122"/>
-                <a:cs typeface="Calibri" pitchFamily="34" charset="-120"/>
+                <a:cs typeface="Amiri" pitchFamily="2" charset="-78"/>
               </a:rPr>
               <a:t>Show what you can understand and produce about family and home across listening, reading, writing and speaking — then set one precise, evidence-based target for F4.</a:t>
             </a:r>
@@ -3231,8 +3202,7 @@
                   <a:srgbClr val="D4AF37"/>
                 </a:solidFill>
                 <a:latin typeface="Calibri" pitchFamily="34" charset="0"/>
-                <a:ea typeface="Calibri" pitchFamily="34" charset="-122"/>
-                <a:cs typeface="Calibri" pitchFamily="34" charset="-120"/>
+                <a:cs typeface="Amiri" pitchFamily="2" charset="-78"/>
               </a:rPr>
               <a:t>LESSON</a:t>
             </a:r>
@@ -3248,8 +3218,7 @@
                   <a:srgbClr val="FFFFFF"/>
                 </a:solidFill>
                 <a:latin typeface="Calibri" pitchFamily="34" charset="0"/>
-                <a:ea typeface="Calibri" pitchFamily="34" charset="-122"/>
-                <a:cs typeface="Calibri" pitchFamily="34" charset="-120"/>
+                <a:cs typeface="Amiri" pitchFamily="2" charset="-78"/>
               </a:rPr>
               <a:t>F3-L12 · Foundation F3 · My Family &amp; Home</a:t>
             </a:r>
@@ -3314,8 +3283,7 @@
                   <a:srgbClr val="D4AF37"/>
                 </a:solidFill>
                 <a:latin typeface="Calibri" pitchFamily="34" charset="0"/>
-                <a:ea typeface="Calibri" pitchFamily="34" charset="-122"/>
-                <a:cs typeface="Calibri" pitchFamily="34" charset="-120"/>
+                <a:cs typeface="Amiri" pitchFamily="2" charset="-78"/>
               </a:rPr>
               <a:t>DURATION</a:t>
             </a:r>
@@ -3331,8 +3299,7 @@
                   <a:srgbClr val="FFFFFF"/>
                 </a:solidFill>
                 <a:latin typeface="Calibri" pitchFamily="34" charset="0"/>
-                <a:ea typeface="Calibri" pitchFamily="34" charset="-122"/>
-                <a:cs typeface="Calibri" pitchFamily="34" charset="-120"/>
+                <a:cs typeface="Amiri" pitchFamily="2" charset="-78"/>
               </a:rPr>
               <a:t>60 minutes · Teams</a:t>
             </a:r>
@@ -3397,8 +3364,7 @@
                   <a:srgbClr val="D4AF37"/>
                 </a:solidFill>
                 <a:latin typeface="Calibri" pitchFamily="34" charset="0"/>
-                <a:ea typeface="Calibri" pitchFamily="34" charset="-122"/>
-                <a:cs typeface="Calibri" pitchFamily="34" charset="-120"/>
+                <a:cs typeface="Amiri" pitchFamily="2" charset="-78"/>
               </a:rPr>
               <a:t>LEVEL</a:t>
             </a:r>
@@ -3414,8 +3380,7 @@
                   <a:srgbClr val="FFFFFF"/>
                 </a:solidFill>
                 <a:latin typeface="Calibri" pitchFamily="34" charset="0"/>
-                <a:ea typeface="Calibri" pitchFamily="34" charset="-122"/>
-                <a:cs typeface="Calibri" pitchFamily="34" charset="-120"/>
+                <a:cs typeface="Amiri" pitchFamily="2" charset="-78"/>
               </a:rPr>
               <a:t>Foundation · end of unit F3</a:t>
             </a:r>
@@ -3480,8 +3445,7 @@
                   <a:srgbClr val="D4AF37"/>
                 </a:solidFill>
                 <a:latin typeface="Calibri" pitchFamily="34" charset="0"/>
-                <a:ea typeface="Calibri" pitchFamily="34" charset="-122"/>
-                <a:cs typeface="Calibri" pitchFamily="34" charset="-120"/>
+                <a:cs typeface="Amiri" pitchFamily="2" charset="-78"/>
               </a:rPr>
               <a:t>ON THE WEBSITE</a:t>
             </a:r>
@@ -3497,8 +3461,7 @@
                   <a:srgbClr val="FFFFFF"/>
                 </a:solidFill>
                 <a:latin typeface="Calibri" pitchFamily="34" charset="0"/>
-                <a:ea typeface="Calibri" pitchFamily="34" charset="-122"/>
-                <a:cs typeface="Calibri" pitchFamily="34" charset="-120"/>
+                <a:cs typeface="Amiri" pitchFamily="2" charset="-78"/>
               </a:rPr>
               <a:t>Pathways › Foundation › F3 › F3-L12</a:t>
             </a:r>
@@ -3592,9 +3555,8 @@
                 <a:solidFill>
                   <a:srgbClr val="D4AF37"/>
                 </a:solidFill>
-                <a:latin typeface="Amiri" pitchFamily="34" charset="0"/>
-                <a:ea typeface="Amiri" pitchFamily="34" charset="-122"/>
-                <a:cs typeface="Amiri" pitchFamily="34" charset="-120"/>
+                <a:latin typeface="Amiri" pitchFamily="2" charset="-78"/>
+                <a:cs typeface="Amiri" pitchFamily="2" charset="-78"/>
               </a:rPr>
               <a:t>م</a:t>
             </a:r>
@@ -3632,8 +3594,7 @@
                   <a:srgbClr val="1B3B6F"/>
                 </a:solidFill>
                 <a:latin typeface="Cambria" pitchFamily="34" charset="0"/>
-                <a:ea typeface="Cambria" pitchFamily="34" charset="-122"/>
-                <a:cs typeface="Cambria" pitchFamily="34" charset="-120"/>
+                <a:cs typeface="Amiri" pitchFamily="2" charset="-78"/>
               </a:rPr>
               <a:t>Al Madina Online School</a:t>
             </a:r>
@@ -3671,8 +3632,7 @@
                   <a:srgbClr val="8A6D1E"/>
                 </a:solidFill>
                 <a:latin typeface="Calibri" pitchFamily="34" charset="0"/>
-                <a:ea typeface="Calibri" pitchFamily="34" charset="-122"/>
-                <a:cs typeface="Calibri" pitchFamily="34" charset="-120"/>
+                <a:cs typeface="Amiri" pitchFamily="2" charset="-78"/>
               </a:rPr>
               <a:t>ARABIC DEPARTMENT · MIFTAH ARABIC · IGCSE 0544</a:t>
             </a:r>
@@ -3737,8 +3697,7 @@
                   <a:srgbClr val="FFFFFF"/>
                 </a:solidFill>
                 <a:latin typeface="Calibri" pitchFamily="34" charset="0"/>
-                <a:ea typeface="Calibri" pitchFamily="34" charset="-122"/>
-                <a:cs typeface="Calibri" pitchFamily="34" charset="-120"/>
+                <a:cs typeface="Amiri" pitchFamily="2" charset="-78"/>
               </a:rPr>
               <a:t>F3-L12 · F3 Assessment</a:t>
             </a:r>
@@ -3803,8 +3762,7 @@
                   <a:srgbClr val="FFFFFF"/>
                 </a:solidFill>
                 <a:latin typeface="Calibri" pitchFamily="34" charset="0"/>
-                <a:ea typeface="Calibri" pitchFamily="34" charset="-122"/>
-                <a:cs typeface="Calibri" pitchFamily="34" charset="-120"/>
+                <a:cs typeface="Amiri" pitchFamily="2" charset="-78"/>
               </a:rPr>
               <a:t>I DO</a:t>
             </a:r>
@@ -3842,8 +3800,7 @@
                   <a:srgbClr val="6B4C9A"/>
                 </a:solidFill>
                 <a:latin typeface="Calibri" pitchFamily="34" charset="0"/>
-                <a:ea typeface="Calibri" pitchFamily="34" charset="-122"/>
-                <a:cs typeface="Calibri" pitchFamily="34" charset="-120"/>
+                <a:cs typeface="Amiri" pitchFamily="2" charset="-78"/>
               </a:rPr>
               <a:t>LISTENING · TEXT 2 · ANSWERS</a:t>
             </a:r>
@@ -3881,8 +3838,7 @@
                   <a:srgbClr val="1B3B6F"/>
                 </a:solidFill>
                 <a:latin typeface="Cambria" pitchFamily="34" charset="0"/>
-                <a:ea typeface="Cambria" pitchFamily="34" charset="-122"/>
-                <a:cs typeface="Cambria" pitchFamily="34" charset="-120"/>
+                <a:cs typeface="Amiri" pitchFamily="2" charset="-78"/>
               </a:rPr>
               <a:t>Text 2 · Answers</a:t>
             </a:r>
@@ -3919,9 +3875,8 @@
                 <a:solidFill>
                   <a:srgbClr val="8A6D1E"/>
                 </a:solidFill>
-                <a:latin typeface="Amiri" pitchFamily="34" charset="0"/>
-                <a:ea typeface="Amiri" pitchFamily="34" charset="-122"/>
-                <a:cs typeface="Amiri" pitchFamily="34" charset="-120"/>
+                <a:latin typeface="Amiri" pitchFamily="2" charset="-78"/>
+                <a:cs typeface="Amiri" pitchFamily="2" charset="-78"/>
               </a:rPr>
               <a:t>الإِجَابَاتُ</a:t>
             </a:r>
@@ -3959,8 +3914,7 @@
                   <a:srgbClr val="8A93A0"/>
                 </a:solidFill>
                 <a:latin typeface="Calibri" pitchFamily="34" charset="0"/>
-                <a:ea typeface="Calibri" pitchFamily="34" charset="-122"/>
-                <a:cs typeface="Calibri" pitchFamily="34" charset="-120"/>
+                <a:cs typeface="Amiri" pitchFamily="2" charset="-78"/>
               </a:rPr>
               <a:t>Miftah Arabic · Foundation F3 · My Family &amp; Home · F3-L12</a:t>
             </a:r>
@@ -4057,8 +4011,7 @@
                   <a:srgbClr val="FFFFFF"/>
                 </a:solidFill>
                 <a:latin typeface="Calibri" pitchFamily="34" charset="0"/>
-                <a:ea typeface="Calibri" pitchFamily="34" charset="-122"/>
-                <a:cs typeface="Calibri" pitchFamily="34" charset="-120"/>
+                <a:cs typeface="Amiri" pitchFamily="2" charset="-78"/>
               </a:rPr>
               <a:t>1</a:t>
             </a:r>
@@ -4096,8 +4049,7 @@
                   <a:srgbClr val="1B3B6F"/>
                 </a:solidFill>
                 <a:latin typeface="Calibri" pitchFamily="34" charset="0"/>
-                <a:ea typeface="Calibri" pitchFamily="34" charset="-122"/>
-                <a:cs typeface="Calibri" pitchFamily="34" charset="-120"/>
+                <a:cs typeface="Amiri" pitchFamily="2" charset="-78"/>
               </a:rPr>
               <a:t>Who is the older sibling?</a:t>
             </a:r>
@@ -4160,8 +4112,7 @@
                   <a:srgbClr val="1B3B6F"/>
                 </a:solidFill>
                 <a:latin typeface="Calibri" pitchFamily="34" charset="0"/>
-                <a:ea typeface="Calibri" pitchFamily="34" charset="-122"/>
-                <a:cs typeface="Calibri" pitchFamily="34" charset="-120"/>
+                <a:cs typeface="Amiri" pitchFamily="2" charset="-78"/>
               </a:rPr>
               <a:t>A</a:t>
             </a:r>
@@ -4199,8 +4150,7 @@
                   <a:srgbClr val="9AA1AB"/>
                 </a:solidFill>
                 <a:latin typeface="Calibri" pitchFamily="34" charset="0"/>
-                <a:ea typeface="Calibri" pitchFamily="34" charset="-122"/>
-                <a:cs typeface="Calibri" pitchFamily="34" charset="-120"/>
+                <a:cs typeface="Amiri" pitchFamily="2" charset="-78"/>
               </a:rPr>
               <a:t>Maryam</a:t>
             </a:r>
@@ -4290,8 +4240,7 @@
                   <a:srgbClr val="FFFFFF"/>
                 </a:solidFill>
                 <a:latin typeface="Calibri" pitchFamily="34" charset="0"/>
-                <a:ea typeface="Calibri" pitchFamily="34" charset="-122"/>
-                <a:cs typeface="Calibri" pitchFamily="34" charset="-120"/>
+                <a:cs typeface="Amiri" pitchFamily="2" charset="-78"/>
               </a:rPr>
               <a:t>B</a:t>
             </a:r>
@@ -4329,8 +4278,7 @@
                   <a:srgbClr val="1F2A37"/>
                 </a:solidFill>
                 <a:latin typeface="Calibri" pitchFamily="34" charset="0"/>
-                <a:ea typeface="Calibri" pitchFamily="34" charset="-122"/>
-                <a:cs typeface="Calibri" pitchFamily="34" charset="-120"/>
+                <a:cs typeface="Amiri" pitchFamily="2" charset="-78"/>
               </a:rPr>
               <a:t>Yusuf</a:t>
             </a:r>
@@ -4393,8 +4341,7 @@
                   <a:srgbClr val="1B3B6F"/>
                 </a:solidFill>
                 <a:latin typeface="Calibri" pitchFamily="34" charset="0"/>
-                <a:ea typeface="Calibri" pitchFamily="34" charset="-122"/>
-                <a:cs typeface="Calibri" pitchFamily="34" charset="-120"/>
+                <a:cs typeface="Amiri" pitchFamily="2" charset="-78"/>
               </a:rPr>
               <a:t>C</a:t>
             </a:r>
@@ -4432,8 +4379,7 @@
                   <a:srgbClr val="9AA1AB"/>
                 </a:solidFill>
                 <a:latin typeface="Calibri" pitchFamily="34" charset="0"/>
-                <a:ea typeface="Calibri" pitchFamily="34" charset="-122"/>
-                <a:cs typeface="Calibri" pitchFamily="34" charset="-120"/>
+                <a:cs typeface="Amiri" pitchFamily="2" charset="-78"/>
               </a:rPr>
               <a:t>Neither</a:t>
             </a:r>
@@ -4471,8 +4417,7 @@
                   <a:srgbClr val="8A6D1E"/>
                 </a:solidFill>
                 <a:latin typeface="Calibri" pitchFamily="34" charset="0"/>
-                <a:ea typeface="Calibri" pitchFamily="34" charset="-122"/>
-                <a:cs typeface="Calibri" pitchFamily="34" charset="-120"/>
+                <a:cs typeface="Amiri" pitchFamily="2" charset="-78"/>
               </a:rPr>
               <a:t>Yusuf says </a:t>
             </a:r>
@@ -4484,9 +4429,8 @@
                 <a:solidFill>
                   <a:srgbClr val="8A6D1E"/>
                 </a:solidFill>
-                <a:latin typeface="Amiri" pitchFamily="34" charset="0"/>
-                <a:ea typeface="Amiri" pitchFamily="34" charset="-122"/>
-                <a:cs typeface="Amiri" pitchFamily="34" charset="-120"/>
+                <a:latin typeface="Amiri" pitchFamily="2" charset="-78"/>
+                <a:cs typeface="Amiri" pitchFamily="2" charset="-78"/>
               </a:rPr>
               <a:t>أَنَا الأَخُ الأَكْبَرُ</a:t>
             </a:r>
@@ -4499,8 +4443,7 @@
                   <a:srgbClr val="8A6D1E"/>
                 </a:solidFill>
                 <a:latin typeface="Calibri" pitchFamily="34" charset="0"/>
-                <a:ea typeface="Calibri" pitchFamily="34" charset="-122"/>
-                <a:cs typeface="Calibri" pitchFamily="34" charset="-120"/>
+                <a:cs typeface="Amiri" pitchFamily="2" charset="-78"/>
               </a:rPr>
               <a:t>.</a:t>
             </a:r>
@@ -4597,8 +4540,7 @@
                   <a:srgbClr val="FFFFFF"/>
                 </a:solidFill>
                 <a:latin typeface="Calibri" pitchFamily="34" charset="0"/>
-                <a:ea typeface="Calibri" pitchFamily="34" charset="-122"/>
-                <a:cs typeface="Calibri" pitchFamily="34" charset="-120"/>
+                <a:cs typeface="Amiri" pitchFamily="2" charset="-78"/>
               </a:rPr>
               <a:t>2</a:t>
             </a:r>
@@ -4636,8 +4578,7 @@
                   <a:srgbClr val="1B3B6F"/>
                 </a:solidFill>
                 <a:latin typeface="Calibri" pitchFamily="34" charset="0"/>
-                <a:ea typeface="Calibri" pitchFamily="34" charset="-122"/>
-                <a:cs typeface="Calibri" pitchFamily="34" charset="-120"/>
+                <a:cs typeface="Amiri" pitchFamily="2" charset="-78"/>
               </a:rPr>
               <a:t>Who likes reading in the bedroom?</a:t>
             </a:r>
@@ -4700,8 +4641,7 @@
                   <a:srgbClr val="1B3B6F"/>
                 </a:solidFill>
                 <a:latin typeface="Calibri" pitchFamily="34" charset="0"/>
-                <a:ea typeface="Calibri" pitchFamily="34" charset="-122"/>
-                <a:cs typeface="Calibri" pitchFamily="34" charset="-120"/>
+                <a:cs typeface="Amiri" pitchFamily="2" charset="-78"/>
               </a:rPr>
               <a:t>A</a:t>
             </a:r>
@@ -4739,8 +4679,7 @@
                   <a:srgbClr val="9AA1AB"/>
                 </a:solidFill>
                 <a:latin typeface="Calibri" pitchFamily="34" charset="0"/>
-                <a:ea typeface="Calibri" pitchFamily="34" charset="-122"/>
-                <a:cs typeface="Calibri" pitchFamily="34" charset="-120"/>
+                <a:cs typeface="Amiri" pitchFamily="2" charset="-78"/>
               </a:rPr>
               <a:t>Both</a:t>
             </a:r>
@@ -4830,8 +4769,7 @@
                   <a:srgbClr val="FFFFFF"/>
                 </a:solidFill>
                 <a:latin typeface="Calibri" pitchFamily="34" charset="0"/>
-                <a:ea typeface="Calibri" pitchFamily="34" charset="-122"/>
-                <a:cs typeface="Calibri" pitchFamily="34" charset="-120"/>
+                <a:cs typeface="Amiri" pitchFamily="2" charset="-78"/>
               </a:rPr>
               <a:t>B</a:t>
             </a:r>
@@ -4869,8 +4807,7 @@
                   <a:srgbClr val="1F2A37"/>
                 </a:solidFill>
                 <a:latin typeface="Calibri" pitchFamily="34" charset="0"/>
-                <a:ea typeface="Calibri" pitchFamily="34" charset="-122"/>
-                <a:cs typeface="Calibri" pitchFamily="34" charset="-120"/>
+                <a:cs typeface="Amiri" pitchFamily="2" charset="-78"/>
               </a:rPr>
               <a:t>Yusuf</a:t>
             </a:r>
@@ -4933,8 +4870,7 @@
                   <a:srgbClr val="1B3B6F"/>
                 </a:solidFill>
                 <a:latin typeface="Calibri" pitchFamily="34" charset="0"/>
-                <a:ea typeface="Calibri" pitchFamily="34" charset="-122"/>
-                <a:cs typeface="Calibri" pitchFamily="34" charset="-120"/>
+                <a:cs typeface="Amiri" pitchFamily="2" charset="-78"/>
               </a:rPr>
               <a:t>C</a:t>
             </a:r>
@@ -4972,8 +4908,7 @@
                   <a:srgbClr val="9AA1AB"/>
                 </a:solidFill>
                 <a:latin typeface="Calibri" pitchFamily="34" charset="0"/>
-                <a:ea typeface="Calibri" pitchFamily="34" charset="-122"/>
-                <a:cs typeface="Calibri" pitchFamily="34" charset="-120"/>
+                <a:cs typeface="Amiri" pitchFamily="2" charset="-78"/>
               </a:rPr>
               <a:t>Maryam</a:t>
             </a:r>
@@ -5011,8 +4946,7 @@
                   <a:srgbClr val="8A6D1E"/>
                 </a:solidFill>
                 <a:latin typeface="Calibri" pitchFamily="34" charset="0"/>
-                <a:ea typeface="Calibri" pitchFamily="34" charset="-122"/>
-                <a:cs typeface="Calibri" pitchFamily="34" charset="-120"/>
+                <a:cs typeface="Amiri" pitchFamily="2" charset="-78"/>
               </a:rPr>
               <a:t>Yusuf says </a:t>
             </a:r>
@@ -5024,9 +4958,8 @@
                 <a:solidFill>
                   <a:srgbClr val="8A6D1E"/>
                 </a:solidFill>
-                <a:latin typeface="Amiri" pitchFamily="34" charset="0"/>
-                <a:ea typeface="Amiri" pitchFamily="34" charset="-122"/>
-                <a:cs typeface="Amiri" pitchFamily="34" charset="-120"/>
+                <a:latin typeface="Amiri" pitchFamily="2" charset="-78"/>
+                <a:cs typeface="Amiri" pitchFamily="2" charset="-78"/>
               </a:rPr>
               <a:t>أُحِبُّ القِرَاءَةَ فِي غُرْفَتِي</a:t>
             </a:r>
@@ -5039,8 +4972,7 @@
                   <a:srgbClr val="8A6D1E"/>
                 </a:solidFill>
                 <a:latin typeface="Calibri" pitchFamily="34" charset="0"/>
-                <a:ea typeface="Calibri" pitchFamily="34" charset="-122"/>
-                <a:cs typeface="Calibri" pitchFamily="34" charset="-120"/>
+                <a:cs typeface="Amiri" pitchFamily="2" charset="-78"/>
               </a:rPr>
               <a:t>.</a:t>
             </a:r>
@@ -5137,8 +5069,7 @@
                   <a:srgbClr val="FFFFFF"/>
                 </a:solidFill>
                 <a:latin typeface="Calibri" pitchFamily="34" charset="0"/>
-                <a:ea typeface="Calibri" pitchFamily="34" charset="-122"/>
-                <a:cs typeface="Calibri" pitchFamily="34" charset="-120"/>
+                <a:cs typeface="Amiri" pitchFamily="2" charset="-78"/>
               </a:rPr>
               <a:t>3</a:t>
             </a:r>
@@ -5176,8 +5107,7 @@
                   <a:srgbClr val="1B3B6F"/>
                 </a:solidFill>
                 <a:latin typeface="Calibri" pitchFamily="34" charset="0"/>
-                <a:ea typeface="Calibri" pitchFamily="34" charset="-122"/>
-                <a:cs typeface="Calibri" pitchFamily="34" charset="-120"/>
+                <a:cs typeface="Amiri" pitchFamily="2" charset="-78"/>
               </a:rPr>
               <a:t>Who is described as funny?</a:t>
             </a:r>
@@ -5240,8 +5170,7 @@
                   <a:srgbClr val="1B3B6F"/>
                 </a:solidFill>
                 <a:latin typeface="Calibri" pitchFamily="34" charset="0"/>
-                <a:ea typeface="Calibri" pitchFamily="34" charset="-122"/>
-                <a:cs typeface="Calibri" pitchFamily="34" charset="-120"/>
+                <a:cs typeface="Amiri" pitchFamily="2" charset="-78"/>
               </a:rPr>
               <a:t>A</a:t>
             </a:r>
@@ -5279,8 +5208,7 @@
                   <a:srgbClr val="9AA1AB"/>
                 </a:solidFill>
                 <a:latin typeface="Calibri" pitchFamily="34" charset="0"/>
-                <a:ea typeface="Calibri" pitchFamily="34" charset="-122"/>
-                <a:cs typeface="Calibri" pitchFamily="34" charset="-120"/>
+                <a:cs typeface="Amiri" pitchFamily="2" charset="-78"/>
               </a:rPr>
               <a:t>Both</a:t>
             </a:r>
@@ -5343,8 +5271,7 @@
                   <a:srgbClr val="1B3B6F"/>
                 </a:solidFill>
                 <a:latin typeface="Calibri" pitchFamily="34" charset="0"/>
-                <a:ea typeface="Calibri" pitchFamily="34" charset="-122"/>
-                <a:cs typeface="Calibri" pitchFamily="34" charset="-120"/>
+                <a:cs typeface="Amiri" pitchFamily="2" charset="-78"/>
               </a:rPr>
               <a:t>B</a:t>
             </a:r>
@@ -5382,8 +5309,7 @@
                   <a:srgbClr val="9AA1AB"/>
                 </a:solidFill>
                 <a:latin typeface="Calibri" pitchFamily="34" charset="0"/>
-                <a:ea typeface="Calibri" pitchFamily="34" charset="-122"/>
-                <a:cs typeface="Calibri" pitchFamily="34" charset="-120"/>
+                <a:cs typeface="Amiri" pitchFamily="2" charset="-78"/>
               </a:rPr>
               <a:t>Yusuf</a:t>
             </a:r>
@@ -5473,8 +5399,7 @@
                   <a:srgbClr val="FFFFFF"/>
                 </a:solidFill>
                 <a:latin typeface="Calibri" pitchFamily="34" charset="0"/>
-                <a:ea typeface="Calibri" pitchFamily="34" charset="-122"/>
-                <a:cs typeface="Calibri" pitchFamily="34" charset="-120"/>
+                <a:cs typeface="Amiri" pitchFamily="2" charset="-78"/>
               </a:rPr>
               <a:t>C</a:t>
             </a:r>
@@ -5512,8 +5437,7 @@
                   <a:srgbClr val="1F2A37"/>
                 </a:solidFill>
                 <a:latin typeface="Calibri" pitchFamily="34" charset="0"/>
-                <a:ea typeface="Calibri" pitchFamily="34" charset="-122"/>
-                <a:cs typeface="Calibri" pitchFamily="34" charset="-120"/>
+                <a:cs typeface="Amiri" pitchFamily="2" charset="-78"/>
               </a:rPr>
               <a:t>Maryam</a:t>
             </a:r>
@@ -5551,8 +5475,7 @@
                   <a:srgbClr val="8A6D1E"/>
                 </a:solidFill>
                 <a:latin typeface="Calibri" pitchFamily="34" charset="0"/>
-                <a:ea typeface="Calibri" pitchFamily="34" charset="-122"/>
-                <a:cs typeface="Calibri" pitchFamily="34" charset="-120"/>
+                <a:cs typeface="Amiri" pitchFamily="2" charset="-78"/>
               </a:rPr>
               <a:t>Maryam says </a:t>
             </a:r>
@@ -5564,9 +5487,8 @@
                 <a:solidFill>
                   <a:srgbClr val="8A6D1E"/>
                 </a:solidFill>
-                <a:latin typeface="Amiri" pitchFamily="34" charset="0"/>
-                <a:ea typeface="Amiri" pitchFamily="34" charset="-122"/>
-                <a:cs typeface="Amiri" pitchFamily="34" charset="-120"/>
+                <a:latin typeface="Amiri" pitchFamily="2" charset="-78"/>
+                <a:cs typeface="Amiri" pitchFamily="2" charset="-78"/>
               </a:rPr>
               <a:t>أَنَا</a:t>
             </a:r>
@@ -5579,8 +5501,7 @@
                   <a:srgbClr val="8A6D1E"/>
                 </a:solidFill>
                 <a:latin typeface="Calibri" pitchFamily="34" charset="0"/>
-                <a:ea typeface="Calibri" pitchFamily="34" charset="-122"/>
-                <a:cs typeface="Calibri" pitchFamily="34" charset="-120"/>
+                <a:cs typeface="Amiri" pitchFamily="2" charset="-78"/>
               </a:rPr>
               <a:t> ... </a:t>
             </a:r>
@@ -5592,9 +5513,8 @@
                 <a:solidFill>
                   <a:srgbClr val="8A6D1E"/>
                 </a:solidFill>
-                <a:latin typeface="Amiri" pitchFamily="34" charset="0"/>
-                <a:ea typeface="Amiri" pitchFamily="34" charset="-122"/>
-                <a:cs typeface="Amiri" pitchFamily="34" charset="-120"/>
+                <a:latin typeface="Amiri" pitchFamily="2" charset="-78"/>
+                <a:cs typeface="Amiri" pitchFamily="2" charset="-78"/>
               </a:rPr>
               <a:t>مُضْحِكَةٌ</a:t>
             </a:r>
@@ -5607,8 +5527,7 @@
                   <a:srgbClr val="8A6D1E"/>
                 </a:solidFill>
                 <a:latin typeface="Calibri" pitchFamily="34" charset="0"/>
-                <a:ea typeface="Calibri" pitchFamily="34" charset="-122"/>
-                <a:cs typeface="Calibri" pitchFamily="34" charset="-120"/>
+                <a:cs typeface="Amiri" pitchFamily="2" charset="-78"/>
               </a:rPr>
               <a:t>.</a:t>
             </a:r>
@@ -5705,8 +5624,7 @@
                   <a:srgbClr val="FFFFFF"/>
                 </a:solidFill>
                 <a:latin typeface="Calibri" pitchFamily="34" charset="0"/>
-                <a:ea typeface="Calibri" pitchFamily="34" charset="-122"/>
-                <a:cs typeface="Calibri" pitchFamily="34" charset="-120"/>
+                <a:cs typeface="Amiri" pitchFamily="2" charset="-78"/>
               </a:rPr>
               <a:t>4</a:t>
             </a:r>
@@ -5744,8 +5662,7 @@
                   <a:srgbClr val="1B3B6F"/>
                 </a:solidFill>
                 <a:latin typeface="Calibri" pitchFamily="34" charset="0"/>
-                <a:ea typeface="Calibri" pitchFamily="34" charset="-122"/>
-                <a:cs typeface="Calibri" pitchFamily="34" charset="-120"/>
+                <a:cs typeface="Amiri" pitchFamily="2" charset="-78"/>
               </a:rPr>
               <a:t>Who has a computer in the bedroom?</a:t>
             </a:r>
@@ -5835,8 +5752,7 @@
                   <a:srgbClr val="FFFFFF"/>
                 </a:solidFill>
                 <a:latin typeface="Calibri" pitchFamily="34" charset="0"/>
-                <a:ea typeface="Calibri" pitchFamily="34" charset="-122"/>
-                <a:cs typeface="Calibri" pitchFamily="34" charset="-120"/>
+                <a:cs typeface="Amiri" pitchFamily="2" charset="-78"/>
               </a:rPr>
               <a:t>A</a:t>
             </a:r>
@@ -5874,8 +5790,7 @@
                   <a:srgbClr val="1F2A37"/>
                 </a:solidFill>
                 <a:latin typeface="Calibri" pitchFamily="34" charset="0"/>
-                <a:ea typeface="Calibri" pitchFamily="34" charset="-122"/>
-                <a:cs typeface="Calibri" pitchFamily="34" charset="-120"/>
+                <a:cs typeface="Amiri" pitchFamily="2" charset="-78"/>
               </a:rPr>
               <a:t>Yusuf</a:t>
             </a:r>
@@ -5938,8 +5853,7 @@
                   <a:srgbClr val="1B3B6F"/>
                 </a:solidFill>
                 <a:latin typeface="Calibri" pitchFamily="34" charset="0"/>
-                <a:ea typeface="Calibri" pitchFamily="34" charset="-122"/>
-                <a:cs typeface="Calibri" pitchFamily="34" charset="-120"/>
+                <a:cs typeface="Amiri" pitchFamily="2" charset="-78"/>
               </a:rPr>
               <a:t>B</a:t>
             </a:r>
@@ -5977,8 +5891,7 @@
                   <a:srgbClr val="9AA1AB"/>
                 </a:solidFill>
                 <a:latin typeface="Calibri" pitchFamily="34" charset="0"/>
-                <a:ea typeface="Calibri" pitchFamily="34" charset="-122"/>
-                <a:cs typeface="Calibri" pitchFamily="34" charset="-120"/>
+                <a:cs typeface="Amiri" pitchFamily="2" charset="-78"/>
               </a:rPr>
               <a:t>Neither</a:t>
             </a:r>
@@ -6041,8 +5954,7 @@
                   <a:srgbClr val="1B3B6F"/>
                 </a:solidFill>
                 <a:latin typeface="Calibri" pitchFamily="34" charset="0"/>
-                <a:ea typeface="Calibri" pitchFamily="34" charset="-122"/>
-                <a:cs typeface="Calibri" pitchFamily="34" charset="-120"/>
+                <a:cs typeface="Amiri" pitchFamily="2" charset="-78"/>
               </a:rPr>
               <a:t>C</a:t>
             </a:r>
@@ -6080,8 +5992,7 @@
                   <a:srgbClr val="9AA1AB"/>
                 </a:solidFill>
                 <a:latin typeface="Calibri" pitchFamily="34" charset="0"/>
-                <a:ea typeface="Calibri" pitchFamily="34" charset="-122"/>
-                <a:cs typeface="Calibri" pitchFamily="34" charset="-120"/>
+                <a:cs typeface="Amiri" pitchFamily="2" charset="-78"/>
               </a:rPr>
               <a:t>Maryam</a:t>
             </a:r>
@@ -6119,8 +6030,7 @@
                   <a:srgbClr val="8A6D1E"/>
                 </a:solidFill>
                 <a:latin typeface="Calibri" pitchFamily="34" charset="0"/>
-                <a:ea typeface="Calibri" pitchFamily="34" charset="-122"/>
-                <a:cs typeface="Calibri" pitchFamily="34" charset="-120"/>
+                <a:cs typeface="Amiri" pitchFamily="2" charset="-78"/>
               </a:rPr>
               <a:t>Yusuf says </a:t>
             </a:r>
@@ -6132,9 +6042,8 @@
                 <a:solidFill>
                   <a:srgbClr val="8A6D1E"/>
                 </a:solidFill>
-                <a:latin typeface="Amiri" pitchFamily="34" charset="0"/>
-                <a:ea typeface="Amiri" pitchFamily="34" charset="-122"/>
-                <a:cs typeface="Amiri" pitchFamily="34" charset="-120"/>
+                <a:latin typeface="Amiri" pitchFamily="2" charset="-78"/>
+                <a:cs typeface="Amiri" pitchFamily="2" charset="-78"/>
               </a:rPr>
               <a:t>فِيهَا مَكْتَبٌ وَحَاسُوبٌ</a:t>
             </a:r>
@@ -6147,8 +6056,7 @@
                   <a:srgbClr val="8A6D1E"/>
                 </a:solidFill>
                 <a:latin typeface="Calibri" pitchFamily="34" charset="0"/>
-                <a:ea typeface="Calibri" pitchFamily="34" charset="-122"/>
-                <a:cs typeface="Calibri" pitchFamily="34" charset="-120"/>
+                <a:cs typeface="Amiri" pitchFamily="2" charset="-78"/>
               </a:rPr>
               <a:t>.</a:t>
             </a:r>
@@ -6245,8 +6153,7 @@
                   <a:srgbClr val="FFFFFF"/>
                 </a:solidFill>
                 <a:latin typeface="Calibri" pitchFamily="34" charset="0"/>
-                <a:ea typeface="Calibri" pitchFamily="34" charset="-122"/>
-                <a:cs typeface="Calibri" pitchFamily="34" charset="-120"/>
+                <a:cs typeface="Amiri" pitchFamily="2" charset="-78"/>
               </a:rPr>
               <a:t>5</a:t>
             </a:r>
@@ -6284,8 +6191,7 @@
                   <a:srgbClr val="1B3B6F"/>
                 </a:solidFill>
                 <a:latin typeface="Calibri" pitchFamily="34" charset="0"/>
-                <a:ea typeface="Calibri" pitchFamily="34" charset="-122"/>
-                <a:cs typeface="Calibri" pitchFamily="34" charset="-120"/>
+                <a:cs typeface="Amiri" pitchFamily="2" charset="-78"/>
               </a:rPr>
               <a:t>True or false: Maryam's room is blue.</a:t>
             </a:r>
@@ -6375,8 +6281,7 @@
                   <a:srgbClr val="FFFFFF"/>
                 </a:solidFill>
                 <a:latin typeface="Calibri" pitchFamily="34" charset="0"/>
-                <a:ea typeface="Calibri" pitchFamily="34" charset="-122"/>
-                <a:cs typeface="Calibri" pitchFamily="34" charset="-120"/>
+                <a:cs typeface="Amiri" pitchFamily="2" charset="-78"/>
               </a:rPr>
               <a:t>A</a:t>
             </a:r>
@@ -6414,8 +6319,7 @@
                   <a:srgbClr val="1F2A37"/>
                 </a:solidFill>
                 <a:latin typeface="Calibri" pitchFamily="34" charset="0"/>
-                <a:ea typeface="Calibri" pitchFamily="34" charset="-122"/>
-                <a:cs typeface="Calibri" pitchFamily="34" charset="-120"/>
+                <a:cs typeface="Amiri" pitchFamily="2" charset="-78"/>
               </a:rPr>
               <a:t>False</a:t>
             </a:r>
@@ -6478,8 +6382,7 @@
                   <a:srgbClr val="1B3B6F"/>
                 </a:solidFill>
                 <a:latin typeface="Calibri" pitchFamily="34" charset="0"/>
-                <a:ea typeface="Calibri" pitchFamily="34" charset="-122"/>
-                <a:cs typeface="Calibri" pitchFamily="34" charset="-120"/>
+                <a:cs typeface="Amiri" pitchFamily="2" charset="-78"/>
               </a:rPr>
               <a:t>B</a:t>
             </a:r>
@@ -6517,8 +6420,7 @@
                   <a:srgbClr val="9AA1AB"/>
                 </a:solidFill>
                 <a:latin typeface="Calibri" pitchFamily="34" charset="0"/>
-                <a:ea typeface="Calibri" pitchFamily="34" charset="-122"/>
-                <a:cs typeface="Calibri" pitchFamily="34" charset="-120"/>
+                <a:cs typeface="Amiri" pitchFamily="2" charset="-78"/>
               </a:rPr>
               <a:t>True</a:t>
             </a:r>
@@ -6556,8 +6458,7 @@
                   <a:srgbClr val="8A6D1E"/>
                 </a:solidFill>
                 <a:latin typeface="Calibri" pitchFamily="34" charset="0"/>
-                <a:ea typeface="Calibri" pitchFamily="34" charset="-122"/>
-                <a:cs typeface="Calibri" pitchFamily="34" charset="-120"/>
+                <a:cs typeface="Amiri" pitchFamily="2" charset="-78"/>
               </a:rPr>
               <a:t>Her room is pink: </a:t>
             </a:r>
@@ -6569,9 +6470,8 @@
                 <a:solidFill>
                   <a:srgbClr val="8A6D1E"/>
                 </a:solidFill>
-                <a:latin typeface="Amiri" pitchFamily="34" charset="0"/>
-                <a:ea typeface="Amiri" pitchFamily="34" charset="-122"/>
-                <a:cs typeface="Amiri" pitchFamily="34" charset="-120"/>
+                <a:latin typeface="Amiri" pitchFamily="2" charset="-78"/>
+                <a:cs typeface="Amiri" pitchFamily="2" charset="-78"/>
               </a:rPr>
               <a:t>غُرْفَتِي وَرْدِيَّةٌ</a:t>
             </a:r>
@@ -6584,8 +6484,7 @@
                   <a:srgbClr val="8A6D1E"/>
                 </a:solidFill>
                 <a:latin typeface="Calibri" pitchFamily="34" charset="0"/>
-                <a:ea typeface="Calibri" pitchFamily="34" charset="-122"/>
-                <a:cs typeface="Calibri" pitchFamily="34" charset="-120"/>
+                <a:cs typeface="Amiri" pitchFamily="2" charset="-78"/>
               </a:rPr>
               <a:t>.</a:t>
             </a:r>
@@ -6682,8 +6581,7 @@
                   <a:srgbClr val="FFFFFF"/>
                 </a:solidFill>
                 <a:latin typeface="Calibri" pitchFamily="34" charset="0"/>
-                <a:ea typeface="Calibri" pitchFamily="34" charset="-122"/>
-                <a:cs typeface="Calibri" pitchFamily="34" charset="-120"/>
+                <a:cs typeface="Amiri" pitchFamily="2" charset="-78"/>
               </a:rPr>
               <a:t>6</a:t>
             </a:r>
@@ -6721,8 +6619,7 @@
                   <a:srgbClr val="1B3B6F"/>
                 </a:solidFill>
                 <a:latin typeface="Calibri" pitchFamily="34" charset="0"/>
-                <a:ea typeface="Calibri" pitchFamily="34" charset="-122"/>
-                <a:cs typeface="Calibri" pitchFamily="34" charset="-120"/>
+                <a:cs typeface="Amiri" pitchFamily="2" charset="-78"/>
               </a:rPr>
               <a:t>True or false: Maryam has a white bed.</a:t>
             </a:r>
@@ -6785,8 +6682,7 @@
                   <a:srgbClr val="1B3B6F"/>
                 </a:solidFill>
                 <a:latin typeface="Calibri" pitchFamily="34" charset="0"/>
-                <a:ea typeface="Calibri" pitchFamily="34" charset="-122"/>
-                <a:cs typeface="Calibri" pitchFamily="34" charset="-120"/>
+                <a:cs typeface="Amiri" pitchFamily="2" charset="-78"/>
               </a:rPr>
               <a:t>A</a:t>
             </a:r>
@@ -6824,8 +6720,7 @@
                   <a:srgbClr val="9AA1AB"/>
                 </a:solidFill>
                 <a:latin typeface="Calibri" pitchFamily="34" charset="0"/>
-                <a:ea typeface="Calibri" pitchFamily="34" charset="-122"/>
-                <a:cs typeface="Calibri" pitchFamily="34" charset="-120"/>
+                <a:cs typeface="Amiri" pitchFamily="2" charset="-78"/>
               </a:rPr>
               <a:t>False</a:t>
             </a:r>
@@ -6915,8 +6810,7 @@
                   <a:srgbClr val="FFFFFF"/>
                 </a:solidFill>
                 <a:latin typeface="Calibri" pitchFamily="34" charset="0"/>
-                <a:ea typeface="Calibri" pitchFamily="34" charset="-122"/>
-                <a:cs typeface="Calibri" pitchFamily="34" charset="-120"/>
+                <a:cs typeface="Amiri" pitchFamily="2" charset="-78"/>
               </a:rPr>
               <a:t>B</a:t>
             </a:r>
@@ -6954,8 +6848,7 @@
                   <a:srgbClr val="1F2A37"/>
                 </a:solidFill>
                 <a:latin typeface="Calibri" pitchFamily="34" charset="0"/>
-                <a:ea typeface="Calibri" pitchFamily="34" charset="-122"/>
-                <a:cs typeface="Calibri" pitchFamily="34" charset="-120"/>
+                <a:cs typeface="Amiri" pitchFamily="2" charset="-78"/>
               </a:rPr>
               <a:t>True</a:t>
             </a:r>
@@ -6993,8 +6886,7 @@
                   <a:srgbClr val="8A6D1E"/>
                 </a:solidFill>
                 <a:latin typeface="Calibri" pitchFamily="34" charset="0"/>
-                <a:ea typeface="Calibri" pitchFamily="34" charset="-122"/>
-                <a:cs typeface="Calibri" pitchFamily="34" charset="-120"/>
+                <a:cs typeface="Amiri" pitchFamily="2" charset="-78"/>
               </a:rPr>
               <a:t>She says </a:t>
             </a:r>
@@ -7006,9 +6898,8 @@
                 <a:solidFill>
                   <a:srgbClr val="8A6D1E"/>
                 </a:solidFill>
-                <a:latin typeface="Amiri" pitchFamily="34" charset="0"/>
-                <a:ea typeface="Amiri" pitchFamily="34" charset="-122"/>
-                <a:cs typeface="Amiri" pitchFamily="34" charset="-120"/>
+                <a:latin typeface="Amiri" pitchFamily="2" charset="-78"/>
+                <a:cs typeface="Amiri" pitchFamily="2" charset="-78"/>
               </a:rPr>
               <a:t>سَرِيرٌ أَبْيَضُ</a:t>
             </a:r>
@@ -7021,8 +6912,7 @@
                   <a:srgbClr val="8A6D1E"/>
                 </a:solidFill>
                 <a:latin typeface="Calibri" pitchFamily="34" charset="0"/>
-                <a:ea typeface="Calibri" pitchFamily="34" charset="-122"/>
-                <a:cs typeface="Calibri" pitchFamily="34" charset="-120"/>
+                <a:cs typeface="Amiri" pitchFamily="2" charset="-78"/>
               </a:rPr>
               <a:t>.</a:t>
             </a:r>
@@ -7119,8 +7009,7 @@
                   <a:srgbClr val="FFFFFF"/>
                 </a:solidFill>
                 <a:latin typeface="Calibri" pitchFamily="34" charset="0"/>
-                <a:ea typeface="Calibri" pitchFamily="34" charset="-122"/>
-                <a:cs typeface="Calibri" pitchFamily="34" charset="-120"/>
+                <a:cs typeface="Amiri" pitchFamily="2" charset="-78"/>
               </a:rPr>
               <a:t>7</a:t>
             </a:r>
@@ -7158,8 +7047,7 @@
                   <a:srgbClr val="1B3B6F"/>
                 </a:solidFill>
                 <a:latin typeface="Calibri" pitchFamily="34" charset="0"/>
-                <a:ea typeface="Calibri" pitchFamily="34" charset="-122"/>
-                <a:cs typeface="Calibri" pitchFamily="34" charset="-120"/>
+                <a:cs typeface="Amiri" pitchFamily="2" charset="-78"/>
               </a:rPr>
               <a:t>True or false: Both siblings help their mother.</a:t>
             </a:r>
@@ -7222,8 +7110,7 @@
                   <a:srgbClr val="1B3B6F"/>
                 </a:solidFill>
                 <a:latin typeface="Calibri" pitchFamily="34" charset="0"/>
-                <a:ea typeface="Calibri" pitchFamily="34" charset="-122"/>
-                <a:cs typeface="Calibri" pitchFamily="34" charset="-120"/>
+                <a:cs typeface="Amiri" pitchFamily="2" charset="-78"/>
               </a:rPr>
               <a:t>A</a:t>
             </a:r>
@@ -7261,8 +7148,7 @@
                   <a:srgbClr val="9AA1AB"/>
                 </a:solidFill>
                 <a:latin typeface="Calibri" pitchFamily="34" charset="0"/>
-                <a:ea typeface="Calibri" pitchFamily="34" charset="-122"/>
-                <a:cs typeface="Calibri" pitchFamily="34" charset="-120"/>
+                <a:cs typeface="Amiri" pitchFamily="2" charset="-78"/>
               </a:rPr>
               <a:t>False</a:t>
             </a:r>
@@ -7352,8 +7238,7 @@
                   <a:srgbClr val="FFFFFF"/>
                 </a:solidFill>
                 <a:latin typeface="Calibri" pitchFamily="34" charset="0"/>
-                <a:ea typeface="Calibri" pitchFamily="34" charset="-122"/>
-                <a:cs typeface="Calibri" pitchFamily="34" charset="-120"/>
+                <a:cs typeface="Amiri" pitchFamily="2" charset="-78"/>
               </a:rPr>
               <a:t>B</a:t>
             </a:r>
@@ -7391,8 +7276,7 @@
                   <a:srgbClr val="1F2A37"/>
                 </a:solidFill>
                 <a:latin typeface="Calibri" pitchFamily="34" charset="0"/>
-                <a:ea typeface="Calibri" pitchFamily="34" charset="-122"/>
-                <a:cs typeface="Calibri" pitchFamily="34" charset="-120"/>
+                <a:cs typeface="Amiri" pitchFamily="2" charset="-78"/>
               </a:rPr>
               <a:t>True</a:t>
             </a:r>
@@ -7430,8 +7314,7 @@
                   <a:srgbClr val="8A6D1E"/>
                 </a:solidFill>
                 <a:latin typeface="Calibri" pitchFamily="34" charset="0"/>
-                <a:ea typeface="Calibri" pitchFamily="34" charset="-122"/>
-                <a:cs typeface="Calibri" pitchFamily="34" charset="-120"/>
+                <a:cs typeface="Amiri" pitchFamily="2" charset="-78"/>
               </a:rPr>
               <a:t>The final sentence says </a:t>
             </a:r>
@@ -7443,9 +7326,8 @@
                 <a:solidFill>
                   <a:srgbClr val="8A6D1E"/>
                 </a:solidFill>
-                <a:latin typeface="Amiri" pitchFamily="34" charset="0"/>
-                <a:ea typeface="Amiri" pitchFamily="34" charset="-122"/>
-                <a:cs typeface="Amiri" pitchFamily="34" charset="-120"/>
+                <a:latin typeface="Amiri" pitchFamily="2" charset="-78"/>
+                <a:cs typeface="Amiri" pitchFamily="2" charset="-78"/>
               </a:rPr>
               <a:t>كِلَانَا يُسَاعِدُ أُمَّنَا</a:t>
             </a:r>
@@ -7458,8 +7340,7 @@
                   <a:srgbClr val="8A6D1E"/>
                 </a:solidFill>
                 <a:latin typeface="Calibri" pitchFamily="34" charset="0"/>
-                <a:ea typeface="Calibri" pitchFamily="34" charset="-122"/>
-                <a:cs typeface="Calibri" pitchFamily="34" charset="-120"/>
+                <a:cs typeface="Amiri" pitchFamily="2" charset="-78"/>
               </a:rPr>
               <a:t>.</a:t>
             </a:r>
@@ -7556,8 +7437,7 @@
                   <a:srgbClr val="FFFFFF"/>
                 </a:solidFill>
                 <a:latin typeface="Calibri" pitchFamily="34" charset="0"/>
-                <a:ea typeface="Calibri" pitchFamily="34" charset="-122"/>
-                <a:cs typeface="Calibri" pitchFamily="34" charset="-120"/>
+                <a:cs typeface="Amiri" pitchFamily="2" charset="-78"/>
               </a:rPr>
               <a:t>8</a:t>
             </a:r>
@@ -7595,8 +7475,7 @@
                   <a:srgbClr val="1B3B6F"/>
                 </a:solidFill>
                 <a:latin typeface="Calibri" pitchFamily="34" charset="0"/>
-                <a:ea typeface="Calibri" pitchFamily="34" charset="-122"/>
-                <a:cs typeface="Calibri" pitchFamily="34" charset="-120"/>
+                <a:cs typeface="Amiri" pitchFamily="2" charset="-78"/>
               </a:rPr>
               <a:t>True or false: Yusuf is the younger sibling.</a:t>
             </a:r>
@@ -7686,8 +7565,7 @@
                   <a:srgbClr val="FFFFFF"/>
                 </a:solidFill>
                 <a:latin typeface="Calibri" pitchFamily="34" charset="0"/>
-                <a:ea typeface="Calibri" pitchFamily="34" charset="-122"/>
-                <a:cs typeface="Calibri" pitchFamily="34" charset="-120"/>
+                <a:cs typeface="Amiri" pitchFamily="2" charset="-78"/>
               </a:rPr>
               <a:t>A</a:t>
             </a:r>
@@ -7725,8 +7603,7 @@
                   <a:srgbClr val="1F2A37"/>
                 </a:solidFill>
                 <a:latin typeface="Calibri" pitchFamily="34" charset="0"/>
-                <a:ea typeface="Calibri" pitchFamily="34" charset="-122"/>
-                <a:cs typeface="Calibri" pitchFamily="34" charset="-120"/>
+                <a:cs typeface="Amiri" pitchFamily="2" charset="-78"/>
               </a:rPr>
               <a:t>False</a:t>
             </a:r>
@@ -7789,8 +7666,7 @@
                   <a:srgbClr val="1B3B6F"/>
                 </a:solidFill>
                 <a:latin typeface="Calibri" pitchFamily="34" charset="0"/>
-                <a:ea typeface="Calibri" pitchFamily="34" charset="-122"/>
-                <a:cs typeface="Calibri" pitchFamily="34" charset="-120"/>
+                <a:cs typeface="Amiri" pitchFamily="2" charset="-78"/>
               </a:rPr>
               <a:t>B</a:t>
             </a:r>
@@ -7828,8 +7704,7 @@
                   <a:srgbClr val="9AA1AB"/>
                 </a:solidFill>
                 <a:latin typeface="Calibri" pitchFamily="34" charset="0"/>
-                <a:ea typeface="Calibri" pitchFamily="34" charset="-122"/>
-                <a:cs typeface="Calibri" pitchFamily="34" charset="-120"/>
+                <a:cs typeface="Amiri" pitchFamily="2" charset="-78"/>
               </a:rPr>
               <a:t>True</a:t>
             </a:r>
@@ -7867,8 +7742,7 @@
                   <a:srgbClr val="8A6D1E"/>
                 </a:solidFill>
                 <a:latin typeface="Calibri" pitchFamily="34" charset="0"/>
-                <a:ea typeface="Calibri" pitchFamily="34" charset="-122"/>
-                <a:cs typeface="Calibri" pitchFamily="34" charset="-120"/>
+                <a:cs typeface="Amiri" pitchFamily="2" charset="-78"/>
               </a:rPr>
               <a:t>He is the older brother.</a:t>
             </a:r>
@@ -7906,8 +7780,7 @@
                   <a:srgbClr val="8A93A0"/>
                 </a:solidFill>
                 <a:latin typeface="Calibri" pitchFamily="34" charset="0"/>
-                <a:ea typeface="Calibri" pitchFamily="34" charset="-122"/>
-                <a:cs typeface="Calibri" pitchFamily="34" charset="-120"/>
+                <a:cs typeface="Amiri" pitchFamily="2" charset="-78"/>
               </a:rPr>
               <a:t>10 / 22</a:t>
             </a:r>
@@ -8001,9 +7874,8 @@
                 <a:solidFill>
                   <a:srgbClr val="D4AF37"/>
                 </a:solidFill>
-                <a:latin typeface="Amiri" pitchFamily="34" charset="0"/>
-                <a:ea typeface="Amiri" pitchFamily="34" charset="-122"/>
-                <a:cs typeface="Amiri" pitchFamily="34" charset="-120"/>
+                <a:latin typeface="Amiri" pitchFamily="2" charset="-78"/>
+                <a:cs typeface="Amiri" pitchFamily="2" charset="-78"/>
               </a:rPr>
               <a:t>م</a:t>
             </a:r>
@@ -8041,8 +7913,7 @@
                   <a:srgbClr val="1B3B6F"/>
                 </a:solidFill>
                 <a:latin typeface="Cambria" pitchFamily="34" charset="0"/>
-                <a:ea typeface="Cambria" pitchFamily="34" charset="-122"/>
-                <a:cs typeface="Cambria" pitchFamily="34" charset="-120"/>
+                <a:cs typeface="Amiri" pitchFamily="2" charset="-78"/>
               </a:rPr>
               <a:t>Al Madina Online School</a:t>
             </a:r>
@@ -8080,8 +7951,7 @@
                   <a:srgbClr val="8A6D1E"/>
                 </a:solidFill>
                 <a:latin typeface="Calibri" pitchFamily="34" charset="0"/>
-                <a:ea typeface="Calibri" pitchFamily="34" charset="-122"/>
-                <a:cs typeface="Calibri" pitchFamily="34" charset="-120"/>
+                <a:cs typeface="Amiri" pitchFamily="2" charset="-78"/>
               </a:rPr>
               <a:t>ARABIC DEPARTMENT · MIFTAH ARABIC · IGCSE 0544</a:t>
             </a:r>
@@ -8146,8 +8016,7 @@
                   <a:srgbClr val="FFFFFF"/>
                 </a:solidFill>
                 <a:latin typeface="Calibri" pitchFamily="34" charset="0"/>
-                <a:ea typeface="Calibri" pitchFamily="34" charset="-122"/>
-                <a:cs typeface="Calibri" pitchFamily="34" charset="-120"/>
+                <a:cs typeface="Amiri" pitchFamily="2" charset="-78"/>
               </a:rPr>
               <a:t>F3-L12 · F3 Assessment</a:t>
             </a:r>
@@ -8212,8 +8081,7 @@
                   <a:srgbClr val="FFFFFF"/>
                 </a:solidFill>
                 <a:latin typeface="Calibri" pitchFamily="34" charset="0"/>
-                <a:ea typeface="Calibri" pitchFamily="34" charset="-122"/>
-                <a:cs typeface="Calibri" pitchFamily="34" charset="-120"/>
+                <a:cs typeface="Amiri" pitchFamily="2" charset="-78"/>
               </a:rPr>
               <a:t>I DO · 2 MIN</a:t>
             </a:r>
@@ -8251,8 +8119,7 @@
                   <a:srgbClr val="6B4C9A"/>
                 </a:solidFill>
                 <a:latin typeface="Calibri" pitchFamily="34" charset="0"/>
-                <a:ea typeface="Calibri" pitchFamily="34" charset="-122"/>
-                <a:cs typeface="Calibri" pitchFamily="34" charset="-120"/>
+                <a:cs typeface="Amiri" pitchFamily="2" charset="-78"/>
               </a:rPr>
               <a:t>LISTENING · HEARD WORDS · 4 MARKS (WEBSITE)</a:t>
             </a:r>
@@ -8290,8 +8157,7 @@
                   <a:srgbClr val="1B3B6F"/>
                 </a:solidFill>
                 <a:latin typeface="Cambria" pitchFamily="34" charset="0"/>
-                <a:ea typeface="Cambria" pitchFamily="34" charset="-122"/>
-                <a:cs typeface="Cambria" pitchFamily="34" charset="-120"/>
+                <a:cs typeface="Amiri" pitchFamily="2" charset="-78"/>
               </a:rPr>
               <a:t>Write two Arabic words you heard</a:t>
             </a:r>
@@ -8328,9 +8194,8 @@
                 <a:solidFill>
                   <a:srgbClr val="8A6D1E"/>
                 </a:solidFill>
-                <a:latin typeface="Amiri" pitchFamily="34" charset="0"/>
-                <a:ea typeface="Amiri" pitchFamily="34" charset="-122"/>
-                <a:cs typeface="Amiri" pitchFamily="34" charset="-120"/>
+                <a:latin typeface="Amiri" pitchFamily="2" charset="-78"/>
+                <a:cs typeface="Amiri" pitchFamily="2" charset="-78"/>
               </a:rPr>
               <a:t>كَلِمَتَانِ سَمِعْتَهُمَا</a:t>
             </a:r>
@@ -8368,8 +8233,7 @@
                   <a:srgbClr val="8A93A0"/>
                 </a:solidFill>
                 <a:latin typeface="Calibri" pitchFamily="34" charset="0"/>
-                <a:ea typeface="Calibri" pitchFamily="34" charset="-122"/>
-                <a:cs typeface="Calibri" pitchFamily="34" charset="-120"/>
+                <a:cs typeface="Amiri" pitchFamily="2" charset="-78"/>
               </a:rPr>
               <a:t>Miftah Arabic · Foundation F3 · My Family &amp; Home · F3-L12</a:t>
             </a:r>
@@ -8432,8 +8296,7 @@
                   <a:srgbClr val="FFFFFF"/>
                 </a:solidFill>
                 <a:latin typeface="Calibri" pitchFamily="34" charset="0"/>
-                <a:ea typeface="Calibri" pitchFamily="34" charset="-122"/>
-                <a:cs typeface="Calibri" pitchFamily="34" charset="-120"/>
+                <a:cs typeface="Amiri" pitchFamily="2" charset="-78"/>
               </a:rPr>
               <a:t>What to write</a:t>
             </a:r>
@@ -8471,8 +8334,7 @@
                   <a:srgbClr val="FFFFFF"/>
                 </a:solidFill>
                 <a:latin typeface="Calibri" pitchFamily="34" charset="0"/>
-                <a:ea typeface="Calibri" pitchFamily="34" charset="-122"/>
-                <a:cs typeface="Calibri" pitchFamily="34" charset="-120"/>
+                <a:cs typeface="Amiri" pitchFamily="2" charset="-78"/>
               </a:rPr>
               <a:t>Marks</a:t>
             </a:r>
@@ -8537,8 +8399,7 @@
                   <a:srgbClr val="5A6472"/>
                 </a:solidFill>
                 <a:latin typeface="Calibri" pitchFamily="34" charset="0"/>
-                <a:ea typeface="Calibri" pitchFamily="34" charset="-122"/>
-                <a:cs typeface="Calibri" pitchFamily="34" charset="-120"/>
+                <a:cs typeface="Amiri" pitchFamily="2" charset="-78"/>
               </a:rPr>
               <a:t>Word 1: any Arabic word that appears in Text 1 or Text 2, spelt so it can be recognised.</a:t>
             </a:r>
@@ -8576,8 +8437,7 @@
                   <a:srgbClr val="5A6472"/>
                 </a:solidFill>
                 <a:latin typeface="Calibri" pitchFamily="34" charset="0"/>
-                <a:ea typeface="Calibri" pitchFamily="34" charset="-122"/>
-                <a:cs typeface="Calibri" pitchFamily="34" charset="-120"/>
+                <a:cs typeface="Amiri" pitchFamily="2" charset="-78"/>
               </a:rPr>
               <a:t>2</a:t>
             </a:r>
@@ -8642,8 +8502,7 @@
                   <a:srgbClr val="FFFFFF"/>
                 </a:solidFill>
                 <a:latin typeface="Calibri" pitchFamily="34" charset="0"/>
-                <a:ea typeface="Calibri" pitchFamily="34" charset="-122"/>
-                <a:cs typeface="Calibri" pitchFamily="34" charset="-120"/>
+                <a:cs typeface="Amiri" pitchFamily="2" charset="-78"/>
               </a:rPr>
               <a:t>CORE</a:t>
             </a:r>
@@ -8708,8 +8567,7 @@
                   <a:srgbClr val="5A6472"/>
                 </a:solidFill>
                 <a:latin typeface="Calibri" pitchFamily="34" charset="0"/>
-                <a:ea typeface="Calibri" pitchFamily="34" charset="-122"/>
-                <a:cs typeface="Calibri" pitchFamily="34" charset="-120"/>
+                <a:cs typeface="Amiri" pitchFamily="2" charset="-78"/>
               </a:rPr>
               <a:t>Word 2: a different word from the texts (for example a room, a colour or a family member).</a:t>
             </a:r>
@@ -8747,8 +8605,7 @@
                   <a:srgbClr val="5A6472"/>
                 </a:solidFill>
                 <a:latin typeface="Calibri" pitchFamily="34" charset="0"/>
-                <a:ea typeface="Calibri" pitchFamily="34" charset="-122"/>
-                <a:cs typeface="Calibri" pitchFamily="34" charset="-120"/>
+                <a:cs typeface="Amiri" pitchFamily="2" charset="-78"/>
               </a:rPr>
               <a:t>2</a:t>
             </a:r>
@@ -8813,8 +8670,7 @@
                   <a:srgbClr val="FFFFFF"/>
                 </a:solidFill>
                 <a:latin typeface="Calibri" pitchFamily="34" charset="0"/>
-                <a:ea typeface="Calibri" pitchFamily="34" charset="-122"/>
-                <a:cs typeface="Calibri" pitchFamily="34" charset="-120"/>
+                <a:cs typeface="Amiri" pitchFamily="2" charset="-78"/>
               </a:rPr>
               <a:t>CORE</a:t>
             </a:r>
@@ -8852,8 +8708,7 @@
                   <a:srgbClr val="1B3B6F"/>
                 </a:solidFill>
                 <a:latin typeface="Calibri" pitchFamily="34" charset="0"/>
-                <a:ea typeface="Calibri" pitchFamily="34" charset="-122"/>
-                <a:cs typeface="Calibri" pitchFamily="34" charset="-120"/>
+                <a:cs typeface="Amiri" pitchFamily="2" charset="-78"/>
               </a:rPr>
               <a:t>Type or write your two words now. Listening total: Text 1 (8) + Text 2 (8) + heard words (4) = 20.</a:t>
             </a:r>
@@ -8891,8 +8746,7 @@
                   <a:srgbClr val="8A93A0"/>
                 </a:solidFill>
                 <a:latin typeface="Calibri" pitchFamily="34" charset="0"/>
-                <a:ea typeface="Calibri" pitchFamily="34" charset="-122"/>
-                <a:cs typeface="Calibri" pitchFamily="34" charset="-120"/>
+                <a:cs typeface="Amiri" pitchFamily="2" charset="-78"/>
               </a:rPr>
               <a:t>11 / 22</a:t>
             </a:r>
@@ -8986,9 +8840,8 @@
                 <a:solidFill>
                   <a:srgbClr val="D4AF37"/>
                 </a:solidFill>
-                <a:latin typeface="Amiri" pitchFamily="34" charset="0"/>
-                <a:ea typeface="Amiri" pitchFamily="34" charset="-122"/>
-                <a:cs typeface="Amiri" pitchFamily="34" charset="-120"/>
+                <a:latin typeface="Amiri" pitchFamily="2" charset="-78"/>
+                <a:cs typeface="Amiri" pitchFamily="2" charset="-78"/>
               </a:rPr>
               <a:t>م</a:t>
             </a:r>
@@ -9026,8 +8879,7 @@
                   <a:srgbClr val="1B3B6F"/>
                 </a:solidFill>
                 <a:latin typeface="Cambria" pitchFamily="34" charset="0"/>
-                <a:ea typeface="Cambria" pitchFamily="34" charset="-122"/>
-                <a:cs typeface="Cambria" pitchFamily="34" charset="-120"/>
+                <a:cs typeface="Amiri" pitchFamily="2" charset="-78"/>
               </a:rPr>
               <a:t>Al Madina Online School</a:t>
             </a:r>
@@ -9065,8 +8917,7 @@
                   <a:srgbClr val="8A6D1E"/>
                 </a:solidFill>
                 <a:latin typeface="Calibri" pitchFamily="34" charset="0"/>
-                <a:ea typeface="Calibri" pitchFamily="34" charset="-122"/>
-                <a:cs typeface="Calibri" pitchFamily="34" charset="-120"/>
+                <a:cs typeface="Amiri" pitchFamily="2" charset="-78"/>
               </a:rPr>
               <a:t>ARABIC DEPARTMENT · MIFTAH ARABIC · IGCSE 0544</a:t>
             </a:r>
@@ -9131,8 +8982,7 @@
                   <a:srgbClr val="FFFFFF"/>
                 </a:solidFill>
                 <a:latin typeface="Calibri" pitchFamily="34" charset="0"/>
-                <a:ea typeface="Calibri" pitchFamily="34" charset="-122"/>
-                <a:cs typeface="Calibri" pitchFamily="34" charset="-120"/>
+                <a:cs typeface="Amiri" pitchFamily="2" charset="-78"/>
               </a:rPr>
               <a:t>F3-L12 · F3 Assessment</a:t>
             </a:r>
@@ -9197,8 +9047,7 @@
                   <a:srgbClr val="FFFFFF"/>
                 </a:solidFill>
                 <a:latin typeface="Calibri" pitchFamily="34" charset="0"/>
-                <a:ea typeface="Calibri" pitchFamily="34" charset="-122"/>
-                <a:cs typeface="Calibri" pitchFamily="34" charset="-120"/>
+                <a:cs typeface="Amiri" pitchFamily="2" charset="-78"/>
               </a:rPr>
               <a:t>WE DO · 2 MIN</a:t>
             </a:r>
@@ -9236,8 +9085,7 @@
                   <a:srgbClr val="2F6FB0"/>
                 </a:solidFill>
                 <a:latin typeface="Calibri" pitchFamily="34" charset="0"/>
-                <a:ea typeface="Calibri" pitchFamily="34" charset="-122"/>
-                <a:cs typeface="Calibri" pitchFamily="34" charset="-120"/>
+                <a:cs typeface="Amiri" pitchFamily="2" charset="-78"/>
               </a:rPr>
               <a:t>READING · PART B · PARTLY VOWELLED TEXT (WEBSITE)</a:t>
             </a:r>
@@ -9275,8 +9123,7 @@
                   <a:srgbClr val="1B3B6F"/>
                 </a:solidFill>
                 <a:latin typeface="Cambria" pitchFamily="34" charset="0"/>
-                <a:ea typeface="Cambria" pitchFamily="34" charset="-122"/>
-                <a:cs typeface="Cambria" pitchFamily="34" charset="-120"/>
+                <a:cs typeface="Amiri" pitchFamily="2" charset="-78"/>
               </a:rPr>
               <a:t>Reading · Samir’s home</a:t>
             </a:r>
@@ -9313,9 +9160,8 @@
                 <a:solidFill>
                   <a:srgbClr val="8A6D1E"/>
                 </a:solidFill>
-                <a:latin typeface="Amiri" pitchFamily="34" charset="0"/>
-                <a:ea typeface="Amiri" pitchFamily="34" charset="-122"/>
-                <a:cs typeface="Amiri" pitchFamily="34" charset="-120"/>
+                <a:latin typeface="Amiri" pitchFamily="2" charset="-78"/>
+                <a:cs typeface="Amiri" pitchFamily="2" charset="-78"/>
               </a:rPr>
               <a:t>القِرَاءَةُ</a:t>
             </a:r>
@@ -9353,8 +9199,7 @@
                   <a:srgbClr val="8A93A0"/>
                 </a:solidFill>
                 <a:latin typeface="Calibri" pitchFamily="34" charset="0"/>
-                <a:ea typeface="Calibri" pitchFamily="34" charset="-122"/>
-                <a:cs typeface="Calibri" pitchFamily="34" charset="-120"/>
+                <a:cs typeface="Amiri" pitchFamily="2" charset="-78"/>
               </a:rPr>
               <a:t>Miftah Arabic · Foundation F3 · My Family &amp; Home · F3-L12</a:t>
             </a:r>
@@ -9428,9 +9273,8 @@
                 <a:solidFill>
                   <a:srgbClr val="1F2A37"/>
                 </a:solidFill>
-                <a:latin typeface="Amiri" pitchFamily="34" charset="0"/>
-                <a:ea typeface="Amiri" pitchFamily="34" charset="-122"/>
-                <a:cs typeface="Amiri" pitchFamily="34" charset="-120"/>
+                <a:latin typeface="Amiri" pitchFamily="2" charset="-78"/>
+                <a:cs typeface="Amiri" pitchFamily="2" charset="-78"/>
               </a:rPr>
               <a:t>اِسْمِي سَامِرٌ، وَأَسْكُنُ مَعَ أُسْرَتِي فِي شَقَّةٍ وَاسِعَةٍ قَرِيبَةٍ مِنَ المَدْرَسَةِ. عِنْدِي أَخٌ أَصْغَرُ وَأُخْتٌ كُبْرَى. أَبِي مُعَلِّمٌ هَادِئٌ، وَأُمِّي طَبِيبَةٌ لَطِيفَةٌ. فِي شَقَّتِنَا ثَلَاثُ غُرَفِ نَوْمٍ وَغُرْفَةُ جُلُوسٍ كَبِيرَةٌ. فِي غُرْفَتِي سَرِيرٌ وَمَكْتَبٌ وَرُفُوفٌ. المَكْتَبُ تَحْتَ النَّافِذَةِ، وَالحَاسُوبُ عَلَيْهِ. أُحِبُّ غُرْفَتِي لِأَنَّهَا مُرَتَّبَةٌ وَمُضِيئَةٌ. فِي المَسَاءِ أَدْرُسُ أَوَّلًا، ثُمَّ أَجْلِسُ مَعَ عَائِلَتِي فِي غُرْفَةِ الجُلُوسِ.</a:t>
             </a:r>
@@ -9468,8 +9312,7 @@
                   <a:srgbClr val="8A93A0"/>
                 </a:solidFill>
                 <a:latin typeface="Calibri" pitchFamily="34" charset="0"/>
-                <a:ea typeface="Calibri" pitchFamily="34" charset="-122"/>
-                <a:cs typeface="Calibri" pitchFamily="34" charset="-120"/>
+                <a:cs typeface="Amiri" pitchFamily="2" charset="-78"/>
               </a:rPr>
               <a:t>12 / 22</a:t>
             </a:r>
@@ -9563,9 +9406,8 @@
                 <a:solidFill>
                   <a:srgbClr val="D4AF37"/>
                 </a:solidFill>
-                <a:latin typeface="Amiri" pitchFamily="34" charset="0"/>
-                <a:ea typeface="Amiri" pitchFamily="34" charset="-122"/>
-                <a:cs typeface="Amiri" pitchFamily="34" charset="-120"/>
+                <a:latin typeface="Amiri" pitchFamily="2" charset="-78"/>
+                <a:cs typeface="Amiri" pitchFamily="2" charset="-78"/>
               </a:rPr>
               <a:t>م</a:t>
             </a:r>
@@ -9603,8 +9445,7 @@
                   <a:srgbClr val="1B3B6F"/>
                 </a:solidFill>
                 <a:latin typeface="Cambria" pitchFamily="34" charset="0"/>
-                <a:ea typeface="Cambria" pitchFamily="34" charset="-122"/>
-                <a:cs typeface="Cambria" pitchFamily="34" charset="-120"/>
+                <a:cs typeface="Amiri" pitchFamily="2" charset="-78"/>
               </a:rPr>
               <a:t>Al Madina Online School</a:t>
             </a:r>
@@ -9642,8 +9483,7 @@
                   <a:srgbClr val="8A6D1E"/>
                 </a:solidFill>
                 <a:latin typeface="Calibri" pitchFamily="34" charset="0"/>
-                <a:ea typeface="Calibri" pitchFamily="34" charset="-122"/>
-                <a:cs typeface="Calibri" pitchFamily="34" charset="-120"/>
+                <a:cs typeface="Amiri" pitchFamily="2" charset="-78"/>
               </a:rPr>
               <a:t>ARABIC DEPARTMENT · MIFTAH ARABIC · IGCSE 0544</a:t>
             </a:r>
@@ -9708,8 +9548,7 @@
                   <a:srgbClr val="FFFFFF"/>
                 </a:solidFill>
                 <a:latin typeface="Calibri" pitchFamily="34" charset="0"/>
-                <a:ea typeface="Calibri" pitchFamily="34" charset="-122"/>
-                <a:cs typeface="Calibri" pitchFamily="34" charset="-120"/>
+                <a:cs typeface="Amiri" pitchFamily="2" charset="-78"/>
               </a:rPr>
               <a:t>F3-L12 · F3 Assessment</a:t>
             </a:r>
@@ -9774,8 +9613,7 @@
                   <a:srgbClr val="FFFFFF"/>
                 </a:solidFill>
                 <a:latin typeface="Calibri" pitchFamily="34" charset="0"/>
-                <a:ea typeface="Calibri" pitchFamily="34" charset="-122"/>
-                <a:cs typeface="Calibri" pitchFamily="34" charset="-120"/>
+                <a:cs typeface="Amiri" pitchFamily="2" charset="-78"/>
               </a:rPr>
               <a:t>WE DO · 8 MIN</a:t>
             </a:r>
@@ -9813,8 +9651,7 @@
                   <a:srgbClr val="2F6FB0"/>
                 </a:solidFill>
                 <a:latin typeface="Calibri" pitchFamily="34" charset="0"/>
-                <a:ea typeface="Calibri" pitchFamily="34" charset="-122"/>
-                <a:cs typeface="Calibri" pitchFamily="34" charset="-120"/>
+                <a:cs typeface="Amiri" pitchFamily="2" charset="-78"/>
               </a:rPr>
               <a:t>READING · 10 MARKS · ANSWER IN COMPLETE ARABIC SENTENCES (WEBSITE)</a:t>
             </a:r>
@@ -9852,8 +9689,7 @@
                   <a:srgbClr val="1B3B6F"/>
                 </a:solidFill>
                 <a:latin typeface="Cambria" pitchFamily="34" charset="0"/>
-                <a:ea typeface="Cambria" pitchFamily="34" charset="-122"/>
-                <a:cs typeface="Cambria" pitchFamily="34" charset="-120"/>
+                <a:cs typeface="Amiri" pitchFamily="2" charset="-78"/>
               </a:rPr>
               <a:t>Six questions about Samir</a:t>
             </a:r>
@@ -9890,9 +9726,8 @@
                 <a:solidFill>
                   <a:srgbClr val="8A6D1E"/>
                 </a:solidFill>
-                <a:latin typeface="Amiri" pitchFamily="34" charset="0"/>
-                <a:ea typeface="Amiri" pitchFamily="34" charset="-122"/>
-                <a:cs typeface="Amiri" pitchFamily="34" charset="-120"/>
+                <a:latin typeface="Amiri" pitchFamily="2" charset="-78"/>
+                <a:cs typeface="Amiri" pitchFamily="2" charset="-78"/>
               </a:rPr>
               <a:t>أَسْئِلَةُ القِرَاءَةِ</a:t>
             </a:r>
@@ -9930,8 +9765,7 @@
                   <a:srgbClr val="8A93A0"/>
                 </a:solidFill>
                 <a:latin typeface="Calibri" pitchFamily="34" charset="0"/>
-                <a:ea typeface="Calibri" pitchFamily="34" charset="-122"/>
-                <a:cs typeface="Calibri" pitchFamily="34" charset="-120"/>
+                <a:cs typeface="Amiri" pitchFamily="2" charset="-78"/>
               </a:rPr>
               <a:t>Miftah Arabic · Foundation F3 · My Family &amp; Home · F3-L12</a:t>
             </a:r>
@@ -9994,8 +9828,7 @@
                   <a:srgbClr val="FFFFFF"/>
                 </a:solidFill>
                 <a:latin typeface="Calibri" pitchFamily="34" charset="0"/>
-                <a:ea typeface="Calibri" pitchFamily="34" charset="-122"/>
-                <a:cs typeface="Calibri" pitchFamily="34" charset="-120"/>
+                <a:cs typeface="Amiri" pitchFamily="2" charset="-78"/>
               </a:rPr>
               <a:t>Marks</a:t>
             </a:r>
@@ -10033,8 +9866,7 @@
                   <a:srgbClr val="FFFFFF"/>
                 </a:solidFill>
                 <a:latin typeface="Calibri" pitchFamily="34" charset="0"/>
-                <a:ea typeface="Calibri" pitchFamily="34" charset="-122"/>
-                <a:cs typeface="Calibri" pitchFamily="34" charset="-120"/>
+                <a:cs typeface="Amiri" pitchFamily="2" charset="-78"/>
               </a:rPr>
               <a:t>Question</a:t>
             </a:r>
@@ -10072,8 +9904,7 @@
                   <a:srgbClr val="FFFFFF"/>
                 </a:solidFill>
                 <a:latin typeface="Calibri" pitchFamily="34" charset="0"/>
-                <a:ea typeface="Calibri" pitchFamily="34" charset="-122"/>
-                <a:cs typeface="Calibri" pitchFamily="34" charset="-120"/>
+                <a:cs typeface="Amiri" pitchFamily="2" charset="-78"/>
               </a:rPr>
               <a:t>In English</a:t>
             </a:r>
@@ -10138,8 +9969,7 @@
                   <a:srgbClr val="5A6472"/>
                 </a:solidFill>
                 <a:latin typeface="Calibri" pitchFamily="34" charset="0"/>
-                <a:ea typeface="Calibri" pitchFamily="34" charset="-122"/>
-                <a:cs typeface="Calibri" pitchFamily="34" charset="-120"/>
+                <a:cs typeface="Amiri" pitchFamily="2" charset="-78"/>
               </a:rPr>
               <a:t>1</a:t>
             </a:r>
@@ -10176,9 +10006,8 @@
                 <a:solidFill>
                   <a:srgbClr val="1B3B6F"/>
                 </a:solidFill>
-                <a:latin typeface="Amiri" pitchFamily="34" charset="0"/>
-                <a:ea typeface="Amiri" pitchFamily="34" charset="-122"/>
-                <a:cs typeface="Amiri" pitchFamily="34" charset="-120"/>
+                <a:latin typeface="Amiri" pitchFamily="2" charset="-78"/>
+                <a:cs typeface="Amiri" pitchFamily="2" charset="-78"/>
               </a:rPr>
               <a:t>١ مَعَ مَنْ يَسْكُنُ سَامِرٌ؟</a:t>
             </a:r>
@@ -10216,8 +10045,7 @@
                   <a:srgbClr val="5A6472"/>
                 </a:solidFill>
                 <a:latin typeface="Calibri" pitchFamily="34" charset="0"/>
-                <a:ea typeface="Calibri" pitchFamily="34" charset="-122"/>
-                <a:cs typeface="Calibri" pitchFamily="34" charset="-120"/>
+                <a:cs typeface="Amiri" pitchFamily="2" charset="-78"/>
               </a:rPr>
               <a:t>Who does Samir live with?</a:t>
             </a:r>
@@ -10282,8 +10110,7 @@
                   <a:srgbClr val="FFFFFF"/>
                 </a:solidFill>
                 <a:latin typeface="Calibri" pitchFamily="34" charset="0"/>
-                <a:ea typeface="Calibri" pitchFamily="34" charset="-122"/>
-                <a:cs typeface="Calibri" pitchFamily="34" charset="-120"/>
+                <a:cs typeface="Amiri" pitchFamily="2" charset="-78"/>
               </a:rPr>
               <a:t>CORE</a:t>
             </a:r>
@@ -10348,8 +10175,7 @@
                   <a:srgbClr val="5A6472"/>
                 </a:solidFill>
                 <a:latin typeface="Calibri" pitchFamily="34" charset="0"/>
-                <a:ea typeface="Calibri" pitchFamily="34" charset="-122"/>
-                <a:cs typeface="Calibri" pitchFamily="34" charset="-120"/>
+                <a:cs typeface="Amiri" pitchFamily="2" charset="-78"/>
               </a:rPr>
               <a:t>1</a:t>
             </a:r>
@@ -10386,9 +10212,8 @@
                 <a:solidFill>
                   <a:srgbClr val="1B3B6F"/>
                 </a:solidFill>
-                <a:latin typeface="Amiri" pitchFamily="34" charset="0"/>
-                <a:ea typeface="Amiri" pitchFamily="34" charset="-122"/>
-                <a:cs typeface="Amiri" pitchFamily="34" charset="-120"/>
+                <a:latin typeface="Amiri" pitchFamily="2" charset="-78"/>
+                <a:cs typeface="Amiri" pitchFamily="2" charset="-78"/>
               </a:rPr>
               <a:t>٢ مَا عَمَلُ أَبِيهِ؟</a:t>
             </a:r>
@@ -10426,8 +10251,7 @@
                   <a:srgbClr val="5A6472"/>
                 </a:solidFill>
                 <a:latin typeface="Calibri" pitchFamily="34" charset="0"/>
-                <a:ea typeface="Calibri" pitchFamily="34" charset="-122"/>
-                <a:cs typeface="Calibri" pitchFamily="34" charset="-120"/>
+                <a:cs typeface="Amiri" pitchFamily="2" charset="-78"/>
               </a:rPr>
               <a:t>What is his father’s job?</a:t>
             </a:r>
@@ -10492,8 +10316,7 @@
                   <a:srgbClr val="FFFFFF"/>
                 </a:solidFill>
                 <a:latin typeface="Calibri" pitchFamily="34" charset="0"/>
-                <a:ea typeface="Calibri" pitchFamily="34" charset="-122"/>
-                <a:cs typeface="Calibri" pitchFamily="34" charset="-120"/>
+                <a:cs typeface="Amiri" pitchFamily="2" charset="-78"/>
               </a:rPr>
               <a:t>CORE</a:t>
             </a:r>
@@ -10558,8 +10381,7 @@
                   <a:srgbClr val="5A6472"/>
                 </a:solidFill>
                 <a:latin typeface="Calibri" pitchFamily="34" charset="0"/>
-                <a:ea typeface="Calibri" pitchFamily="34" charset="-122"/>
-                <a:cs typeface="Calibri" pitchFamily="34" charset="-120"/>
+                <a:cs typeface="Amiri" pitchFamily="2" charset="-78"/>
               </a:rPr>
               <a:t>2</a:t>
             </a:r>
@@ -10596,9 +10418,8 @@
                 <a:solidFill>
                   <a:srgbClr val="1B3B6F"/>
                 </a:solidFill>
-                <a:latin typeface="Amiri" pitchFamily="34" charset="0"/>
-                <a:ea typeface="Amiri" pitchFamily="34" charset="-122"/>
-                <a:cs typeface="Amiri" pitchFamily="34" charset="-120"/>
+                <a:latin typeface="Amiri" pitchFamily="2" charset="-78"/>
+                <a:cs typeface="Amiri" pitchFamily="2" charset="-78"/>
               </a:rPr>
               <a:t>٣ كَمْ غُرْفَةَ نَوْمٍ فِي الشَّقَّةِ؟</a:t>
             </a:r>
@@ -10636,8 +10457,7 @@
                   <a:srgbClr val="5A6472"/>
                 </a:solidFill>
                 <a:latin typeface="Calibri" pitchFamily="34" charset="0"/>
-                <a:ea typeface="Calibri" pitchFamily="34" charset="-122"/>
-                <a:cs typeface="Calibri" pitchFamily="34" charset="-120"/>
+                <a:cs typeface="Amiri" pitchFamily="2" charset="-78"/>
               </a:rPr>
               <a:t>How many bedrooms?</a:t>
             </a:r>
@@ -10702,8 +10522,7 @@
                   <a:srgbClr val="FFFFFF"/>
                 </a:solidFill>
                 <a:latin typeface="Calibri" pitchFamily="34" charset="0"/>
-                <a:ea typeface="Calibri" pitchFamily="34" charset="-122"/>
-                <a:cs typeface="Calibri" pitchFamily="34" charset="-120"/>
+                <a:cs typeface="Amiri" pitchFamily="2" charset="-78"/>
               </a:rPr>
               <a:t>CORE</a:t>
             </a:r>
@@ -10768,8 +10587,7 @@
                   <a:srgbClr val="5A6472"/>
                 </a:solidFill>
                 <a:latin typeface="Calibri" pitchFamily="34" charset="0"/>
-                <a:ea typeface="Calibri" pitchFamily="34" charset="-122"/>
-                <a:cs typeface="Calibri" pitchFamily="34" charset="-120"/>
+                <a:cs typeface="Amiri" pitchFamily="2" charset="-78"/>
               </a:rPr>
               <a:t>2</a:t>
             </a:r>
@@ -10806,9 +10624,8 @@
                 <a:solidFill>
                   <a:srgbClr val="1B3B6F"/>
                 </a:solidFill>
-                <a:latin typeface="Amiri" pitchFamily="34" charset="0"/>
-                <a:ea typeface="Amiri" pitchFamily="34" charset="-122"/>
-                <a:cs typeface="Amiri" pitchFamily="34" charset="-120"/>
+                <a:latin typeface="Amiri" pitchFamily="2" charset="-78"/>
+                <a:cs typeface="Amiri" pitchFamily="2" charset="-78"/>
               </a:rPr>
               <a:t>٤ أَيْنَ المَكْتَبُ وَالحَاسُوبُ؟</a:t>
             </a:r>
@@ -10846,8 +10663,7 @@
                   <a:srgbClr val="5A6472"/>
                 </a:solidFill>
                 <a:latin typeface="Calibri" pitchFamily="34" charset="0"/>
-                <a:ea typeface="Calibri" pitchFamily="34" charset="-122"/>
-                <a:cs typeface="Calibri" pitchFamily="34" charset="-120"/>
+                <a:cs typeface="Amiri" pitchFamily="2" charset="-78"/>
               </a:rPr>
               <a:t>Where are the desk and computer?</a:t>
             </a:r>
@@ -10912,8 +10728,7 @@
                   <a:srgbClr val="5A6472"/>
                 </a:solidFill>
                 <a:latin typeface="Calibri" pitchFamily="34" charset="0"/>
-                <a:ea typeface="Calibri" pitchFamily="34" charset="-122"/>
-                <a:cs typeface="Calibri" pitchFamily="34" charset="-120"/>
+                <a:cs typeface="Amiri" pitchFamily="2" charset="-78"/>
               </a:rPr>
               <a:t>2</a:t>
             </a:r>
@@ -10950,9 +10765,8 @@
                 <a:solidFill>
                   <a:srgbClr val="1B3B6F"/>
                 </a:solidFill>
-                <a:latin typeface="Amiri" pitchFamily="34" charset="0"/>
-                <a:ea typeface="Amiri" pitchFamily="34" charset="-122"/>
-                <a:cs typeface="Amiri" pitchFamily="34" charset="-120"/>
+                <a:latin typeface="Amiri" pitchFamily="2" charset="-78"/>
+                <a:cs typeface="Amiri" pitchFamily="2" charset="-78"/>
               </a:rPr>
               <a:t>٥ مَاذَا يُحِبُّ سَامِرٌ فِي بَيْتِهِ؟ وَلِمَاذَا؟</a:t>
             </a:r>
@@ -10990,8 +10804,7 @@
                   <a:srgbClr val="5A6472"/>
                 </a:solidFill>
                 <a:latin typeface="Calibri" pitchFamily="34" charset="0"/>
-                <a:ea typeface="Calibri" pitchFamily="34" charset="-122"/>
-                <a:cs typeface="Calibri" pitchFamily="34" charset="-120"/>
+                <a:cs typeface="Amiri" pitchFamily="2" charset="-78"/>
               </a:rPr>
               <a:t>What does he like, and why?</a:t>
             </a:r>
@@ -11056,8 +10869,7 @@
                   <a:srgbClr val="5A6472"/>
                 </a:solidFill>
                 <a:latin typeface="Calibri" pitchFamily="34" charset="0"/>
-                <a:ea typeface="Calibri" pitchFamily="34" charset="-122"/>
-                <a:cs typeface="Calibri" pitchFamily="34" charset="-120"/>
+                <a:cs typeface="Amiri" pitchFamily="2" charset="-78"/>
               </a:rPr>
               <a:t>2</a:t>
             </a:r>
@@ -11094,9 +10906,8 @@
                 <a:solidFill>
                   <a:srgbClr val="1B3B6F"/>
                 </a:solidFill>
-                <a:latin typeface="Amiri" pitchFamily="34" charset="0"/>
-                <a:ea typeface="Amiri" pitchFamily="34" charset="-122"/>
-                <a:cs typeface="Amiri" pitchFamily="34" charset="-120"/>
+                <a:latin typeface="Amiri" pitchFamily="2" charset="-78"/>
+                <a:cs typeface="Amiri" pitchFamily="2" charset="-78"/>
               </a:rPr>
               <a:t>٦ مَاذَا يَفْعَلُ فِي المَسَاءِ؟</a:t>
             </a:r>
@@ -11134,8 +10945,7 @@
                   <a:srgbClr val="5A6472"/>
                 </a:solidFill>
                 <a:latin typeface="Calibri" pitchFamily="34" charset="0"/>
-                <a:ea typeface="Calibri" pitchFamily="34" charset="-122"/>
-                <a:cs typeface="Calibri" pitchFamily="34" charset="-120"/>
+                <a:cs typeface="Amiri" pitchFamily="2" charset="-78"/>
               </a:rPr>
               <a:t>What does he do in the evening?</a:t>
             </a:r>
@@ -11173,8 +10983,7 @@
                   <a:srgbClr val="1B3B6F"/>
                 </a:solidFill>
                 <a:latin typeface="Calibri" pitchFamily="34" charset="0"/>
-                <a:ea typeface="Calibri" pitchFamily="34" charset="-122"/>
-                <a:cs typeface="Calibri" pitchFamily="34" charset="-120"/>
+                <a:cs typeface="Amiri" pitchFamily="2" charset="-78"/>
               </a:rPr>
               <a:t>Number your answers 1–6. Core: a short Arabic phrase from the text still earns the first mark.</a:t>
             </a:r>
@@ -11212,8 +11021,7 @@
                   <a:srgbClr val="8A93A0"/>
                 </a:solidFill>
                 <a:latin typeface="Calibri" pitchFamily="34" charset="0"/>
-                <a:ea typeface="Calibri" pitchFamily="34" charset="-122"/>
-                <a:cs typeface="Calibri" pitchFamily="34" charset="-120"/>
+                <a:cs typeface="Amiri" pitchFamily="2" charset="-78"/>
               </a:rPr>
               <a:t>13 / 22</a:t>
             </a:r>
@@ -11307,9 +11115,8 @@
                 <a:solidFill>
                   <a:srgbClr val="D4AF37"/>
                 </a:solidFill>
-                <a:latin typeface="Amiri" pitchFamily="34" charset="0"/>
-                <a:ea typeface="Amiri" pitchFamily="34" charset="-122"/>
-                <a:cs typeface="Amiri" pitchFamily="34" charset="-120"/>
+                <a:latin typeface="Amiri" pitchFamily="2" charset="-78"/>
+                <a:cs typeface="Amiri" pitchFamily="2" charset="-78"/>
               </a:rPr>
               <a:t>م</a:t>
             </a:r>
@@ -11347,8 +11154,7 @@
                   <a:srgbClr val="1B3B6F"/>
                 </a:solidFill>
                 <a:latin typeface="Cambria" pitchFamily="34" charset="0"/>
-                <a:ea typeface="Cambria" pitchFamily="34" charset="-122"/>
-                <a:cs typeface="Cambria" pitchFamily="34" charset="-120"/>
+                <a:cs typeface="Amiri" pitchFamily="2" charset="-78"/>
               </a:rPr>
               <a:t>Al Madina Online School</a:t>
             </a:r>
@@ -11386,8 +11192,7 @@
                   <a:srgbClr val="8A6D1E"/>
                 </a:solidFill>
                 <a:latin typeface="Calibri" pitchFamily="34" charset="0"/>
-                <a:ea typeface="Calibri" pitchFamily="34" charset="-122"/>
-                <a:cs typeface="Calibri" pitchFamily="34" charset="-120"/>
+                <a:cs typeface="Amiri" pitchFamily="2" charset="-78"/>
               </a:rPr>
               <a:t>ARABIC DEPARTMENT · MIFTAH ARABIC · IGCSE 0544</a:t>
             </a:r>
@@ -11452,8 +11257,7 @@
                   <a:srgbClr val="FFFFFF"/>
                 </a:solidFill>
                 <a:latin typeface="Calibri" pitchFamily="34" charset="0"/>
-                <a:ea typeface="Calibri" pitchFamily="34" charset="-122"/>
-                <a:cs typeface="Calibri" pitchFamily="34" charset="-120"/>
+                <a:cs typeface="Amiri" pitchFamily="2" charset="-78"/>
               </a:rPr>
               <a:t>F3-L12 · F3 Assessment</a:t>
             </a:r>
@@ -11518,8 +11322,7 @@
                   <a:srgbClr val="FFFFFF"/>
                 </a:solidFill>
                 <a:latin typeface="Calibri" pitchFamily="34" charset="0"/>
-                <a:ea typeface="Calibri" pitchFamily="34" charset="-122"/>
-                <a:cs typeface="Calibri" pitchFamily="34" charset="-120"/>
+                <a:cs typeface="Amiri" pitchFamily="2" charset="-78"/>
               </a:rPr>
               <a:t>WE DO · 1 MIN</a:t>
             </a:r>
@@ -11557,8 +11360,7 @@
                   <a:srgbClr val="2F6FB0"/>
                 </a:solidFill>
                 <a:latin typeface="Calibri" pitchFamily="34" charset="0"/>
-                <a:ea typeface="Calibri" pitchFamily="34" charset="-122"/>
-                <a:cs typeface="Calibri" pitchFamily="34" charset="-120"/>
+                <a:cs typeface="Amiri" pitchFamily="2" charset="-78"/>
               </a:rPr>
               <a:t>READING · WEBSITE MODEL ANSWERS · SHOW AFTER THE SECTION</a:t>
             </a:r>
@@ -11596,8 +11398,7 @@
                   <a:srgbClr val="1B3B6F"/>
                 </a:solidFill>
                 <a:latin typeface="Cambria" pitchFamily="34" charset="0"/>
-                <a:ea typeface="Cambria" pitchFamily="34" charset="-122"/>
-                <a:cs typeface="Cambria" pitchFamily="34" charset="-120"/>
+                <a:cs typeface="Amiri" pitchFamily="2" charset="-78"/>
               </a:rPr>
               <a:t>Reading: model answers</a:t>
             </a:r>
@@ -11634,9 +11435,8 @@
                 <a:solidFill>
                   <a:srgbClr val="8A6D1E"/>
                 </a:solidFill>
-                <a:latin typeface="Amiri" pitchFamily="34" charset="0"/>
-                <a:ea typeface="Amiri" pitchFamily="34" charset="-122"/>
-                <a:cs typeface="Amiri" pitchFamily="34" charset="-120"/>
+                <a:latin typeface="Amiri" pitchFamily="2" charset="-78"/>
+                <a:cs typeface="Amiri" pitchFamily="2" charset="-78"/>
               </a:rPr>
               <a:t>الإِجَابَاتُ النَّمُوذَجِيَّةُ</a:t>
             </a:r>
@@ -11674,8 +11474,7 @@
                   <a:srgbClr val="8A93A0"/>
                 </a:solidFill>
                 <a:latin typeface="Calibri" pitchFamily="34" charset="0"/>
-                <a:ea typeface="Calibri" pitchFamily="34" charset="-122"/>
-                <a:cs typeface="Calibri" pitchFamily="34" charset="-120"/>
+                <a:cs typeface="Amiri" pitchFamily="2" charset="-78"/>
               </a:rPr>
               <a:t>Miftah Arabic · Foundation F3 · My Family &amp; Home · F3-L12</a:t>
             </a:r>
@@ -11739,9 +11538,8 @@
                 <a:solidFill>
                   <a:srgbClr val="1B3B6F"/>
                 </a:solidFill>
-                <a:latin typeface="Amiri" pitchFamily="34" charset="0"/>
-                <a:ea typeface="Amiri" pitchFamily="34" charset="-122"/>
-                <a:cs typeface="Amiri" pitchFamily="34" charset="-120"/>
+                <a:latin typeface="Amiri" pitchFamily="2" charset="-78"/>
+                <a:cs typeface="Amiri" pitchFamily="2" charset="-78"/>
               </a:rPr>
               <a:t>١ يَسْكُنُ سَامِرٌ مَعَ أُسْرَتِهِ. · ٢ أَبُوهُ مُعَلِّمٌ.</a:t>
             </a:r>
@@ -11779,8 +11577,7 @@
                   <a:srgbClr val="1F2A37"/>
                 </a:solidFill>
                 <a:latin typeface="Calibri" pitchFamily="34" charset="0"/>
-                <a:ea typeface="Calibri" pitchFamily="34" charset="-122"/>
-                <a:cs typeface="Calibri" pitchFamily="34" charset="-120"/>
+                <a:cs typeface="Amiri" pitchFamily="2" charset="-78"/>
               </a:rPr>
               <a:t>1 with his family · 2 a teacher</a:t>
             </a:r>
@@ -11844,9 +11641,8 @@
                 <a:solidFill>
                   <a:srgbClr val="1B3B6F"/>
                 </a:solidFill>
-                <a:latin typeface="Amiri" pitchFamily="34" charset="0"/>
-                <a:ea typeface="Amiri" pitchFamily="34" charset="-122"/>
-                <a:cs typeface="Amiri" pitchFamily="34" charset="-120"/>
+                <a:latin typeface="Amiri" pitchFamily="2" charset="-78"/>
+                <a:cs typeface="Amiri" pitchFamily="2" charset="-78"/>
               </a:rPr>
               <a:t>٣ فِي الشَّقَّةِ ثَلَاثُ غُرَفِ نَوْمٍ.</a:t>
             </a:r>
@@ -11884,8 +11680,7 @@
                   <a:srgbClr val="1F2A37"/>
                 </a:solidFill>
                 <a:latin typeface="Calibri" pitchFamily="34" charset="0"/>
-                <a:ea typeface="Calibri" pitchFamily="34" charset="-122"/>
-                <a:cs typeface="Calibri" pitchFamily="34" charset="-120"/>
+                <a:cs typeface="Amiri" pitchFamily="2" charset="-78"/>
               </a:rPr>
               <a:t>3 three bedrooms</a:t>
             </a:r>
@@ -11949,9 +11744,8 @@
                 <a:solidFill>
                   <a:srgbClr val="1B3B6F"/>
                 </a:solidFill>
-                <a:latin typeface="Amiri" pitchFamily="34" charset="0"/>
-                <a:ea typeface="Amiri" pitchFamily="34" charset="-122"/>
-                <a:cs typeface="Amiri" pitchFamily="34" charset="-120"/>
+                <a:latin typeface="Amiri" pitchFamily="2" charset="-78"/>
+                <a:cs typeface="Amiri" pitchFamily="2" charset="-78"/>
               </a:rPr>
               <a:t>٤ المَكْتَبُ تَحْتَ النَّافِذَةِ، وَالحَاسُوبُ عَلَى المَكْتَبِ.</a:t>
             </a:r>
@@ -11989,8 +11783,7 @@
                   <a:srgbClr val="1F2A37"/>
                 </a:solidFill>
                 <a:latin typeface="Calibri" pitchFamily="34" charset="0"/>
-                <a:ea typeface="Calibri" pitchFamily="34" charset="-122"/>
-                <a:cs typeface="Calibri" pitchFamily="34" charset="-120"/>
+                <a:cs typeface="Amiri" pitchFamily="2" charset="-78"/>
               </a:rPr>
               <a:t>4 desk under the window, computer on the desk</a:t>
             </a:r>
@@ -12054,9 +11847,8 @@
                 <a:solidFill>
                   <a:srgbClr val="1B3B6F"/>
                 </a:solidFill>
-                <a:latin typeface="Amiri" pitchFamily="34" charset="0"/>
-                <a:ea typeface="Amiri" pitchFamily="34" charset="-122"/>
-                <a:cs typeface="Amiri" pitchFamily="34" charset="-120"/>
+                <a:latin typeface="Amiri" pitchFamily="2" charset="-78"/>
+                <a:cs typeface="Amiri" pitchFamily="2" charset="-78"/>
               </a:rPr>
               <a:t>٥ يُحِبُّ غُرْفَتَهُ لِأَنَّهَا مُرَتَّبَةٌ وَمُضِيئَةٌ.</a:t>
             </a:r>
@@ -12094,8 +11886,7 @@
                   <a:srgbClr val="1F2A37"/>
                 </a:solidFill>
                 <a:latin typeface="Calibri" pitchFamily="34" charset="0"/>
-                <a:ea typeface="Calibri" pitchFamily="34" charset="-122"/>
-                <a:cs typeface="Calibri" pitchFamily="34" charset="-120"/>
+                <a:cs typeface="Amiri" pitchFamily="2" charset="-78"/>
               </a:rPr>
               <a:t>5 his room — tidy and bright</a:t>
             </a:r>
@@ -12159,9 +11950,8 @@
                 <a:solidFill>
                   <a:srgbClr val="1B3B6F"/>
                 </a:solidFill>
-                <a:latin typeface="Amiri" pitchFamily="34" charset="0"/>
-                <a:ea typeface="Amiri" pitchFamily="34" charset="-122"/>
-                <a:cs typeface="Amiri" pitchFamily="34" charset="-120"/>
+                <a:latin typeface="Amiri" pitchFamily="2" charset="-78"/>
+                <a:cs typeface="Amiri" pitchFamily="2" charset="-78"/>
               </a:rPr>
               <a:t>٦ يَدْرُسُ أَوَّلًا، ثُمَّ يَجْلِسُ مَعَ عَائِلَتِهِ.</a:t>
             </a:r>
@@ -12199,8 +11989,7 @@
                   <a:srgbClr val="1F2A37"/>
                 </a:solidFill>
                 <a:latin typeface="Calibri" pitchFamily="34" charset="0"/>
-                <a:ea typeface="Calibri" pitchFamily="34" charset="-122"/>
-                <a:cs typeface="Calibri" pitchFamily="34" charset="-120"/>
+                <a:cs typeface="Amiri" pitchFamily="2" charset="-78"/>
               </a:rPr>
               <a:t>6 studies first, then sits with his family</a:t>
             </a:r>
@@ -12238,8 +12027,7 @@
                   <a:srgbClr val="8A93A0"/>
                 </a:solidFill>
                 <a:latin typeface="Calibri" pitchFamily="34" charset="0"/>
-                <a:ea typeface="Calibri" pitchFamily="34" charset="-122"/>
-                <a:cs typeface="Calibri" pitchFamily="34" charset="-120"/>
+                <a:cs typeface="Amiri" pitchFamily="2" charset="-78"/>
               </a:rPr>
               <a:t>14 / 22</a:t>
             </a:r>
@@ -12333,9 +12121,8 @@
                 <a:solidFill>
                   <a:srgbClr val="D4AF37"/>
                 </a:solidFill>
-                <a:latin typeface="Amiri" pitchFamily="34" charset="0"/>
-                <a:ea typeface="Amiri" pitchFamily="34" charset="-122"/>
-                <a:cs typeface="Amiri" pitchFamily="34" charset="-120"/>
+                <a:latin typeface="Amiri" pitchFamily="2" charset="-78"/>
+                <a:cs typeface="Amiri" pitchFamily="2" charset="-78"/>
               </a:rPr>
               <a:t>م</a:t>
             </a:r>
@@ -12373,8 +12160,7 @@
                   <a:srgbClr val="1B3B6F"/>
                 </a:solidFill>
                 <a:latin typeface="Cambria" pitchFamily="34" charset="0"/>
-                <a:ea typeface="Cambria" pitchFamily="34" charset="-122"/>
-                <a:cs typeface="Cambria" pitchFamily="34" charset="-120"/>
+                <a:cs typeface="Amiri" pitchFamily="2" charset="-78"/>
               </a:rPr>
               <a:t>Al Madina Online School</a:t>
             </a:r>
@@ -12412,8 +12198,7 @@
                   <a:srgbClr val="8A6D1E"/>
                 </a:solidFill>
                 <a:latin typeface="Calibri" pitchFamily="34" charset="0"/>
-                <a:ea typeface="Calibri" pitchFamily="34" charset="-122"/>
-                <a:cs typeface="Calibri" pitchFamily="34" charset="-120"/>
+                <a:cs typeface="Amiri" pitchFamily="2" charset="-78"/>
               </a:rPr>
               <a:t>ARABIC DEPARTMENT · MIFTAH ARABIC · IGCSE 0544</a:t>
             </a:r>
@@ -12478,8 +12263,7 @@
                   <a:srgbClr val="FFFFFF"/>
                 </a:solidFill>
                 <a:latin typeface="Calibri" pitchFamily="34" charset="0"/>
-                <a:ea typeface="Calibri" pitchFamily="34" charset="-122"/>
-                <a:cs typeface="Calibri" pitchFamily="34" charset="-120"/>
+                <a:cs typeface="Amiri" pitchFamily="2" charset="-78"/>
               </a:rPr>
               <a:t>F3-L12 · F3 Assessment</a:t>
             </a:r>
@@ -12544,8 +12328,7 @@
                   <a:srgbClr val="FFFFFF"/>
                 </a:solidFill>
                 <a:latin typeface="Calibri" pitchFamily="34" charset="0"/>
-                <a:ea typeface="Calibri" pitchFamily="34" charset="-122"/>
-                <a:cs typeface="Calibri" pitchFamily="34" charset="-120"/>
+                <a:cs typeface="Amiri" pitchFamily="2" charset="-78"/>
               </a:rPr>
               <a:t>YOU DO · 3 MIN</a:t>
             </a:r>
@@ -12583,8 +12366,7 @@
                   <a:srgbClr val="1E6B52"/>
                 </a:solidFill>
                 <a:latin typeface="Calibri" pitchFamily="34" charset="0"/>
-                <a:ea typeface="Calibri" pitchFamily="34" charset="-122"/>
-                <a:cs typeface="Calibri" pitchFamily="34" charset="-120"/>
+                <a:cs typeface="Amiri" pitchFamily="2" charset="-78"/>
               </a:rPr>
               <a:t>WRITING · QUESTION 1 · 5 MARKS (WEBSITE)</a:t>
             </a:r>
@@ -12622,8 +12404,7 @@
                   <a:srgbClr val="1B3B6F"/>
                 </a:solidFill>
                 <a:latin typeface="Cambria" pitchFamily="34" charset="0"/>
-                <a:ea typeface="Cambria" pitchFamily="34" charset="-122"/>
-                <a:cs typeface="Cambria" pitchFamily="34" charset="-120"/>
+                <a:cs typeface="Amiri" pitchFamily="2" charset="-78"/>
               </a:rPr>
               <a:t>Label five room items in Arabic</a:t>
             </a:r>
@@ -12660,9 +12441,8 @@
                 <a:solidFill>
                   <a:srgbClr val="8A6D1E"/>
                 </a:solidFill>
-                <a:latin typeface="Amiri" pitchFamily="34" charset="0"/>
-                <a:ea typeface="Amiri" pitchFamily="34" charset="-122"/>
-                <a:cs typeface="Amiri" pitchFamily="34" charset="-120"/>
+                <a:latin typeface="Amiri" pitchFamily="2" charset="-78"/>
+                <a:cs typeface="Amiri" pitchFamily="2" charset="-78"/>
               </a:rPr>
               <a:t>السُّؤَالُ الأَوَّلُ</a:t>
             </a:r>
@@ -12700,8 +12480,7 @@
                   <a:srgbClr val="8A93A0"/>
                 </a:solidFill>
                 <a:latin typeface="Calibri" pitchFamily="34" charset="0"/>
-                <a:ea typeface="Calibri" pitchFamily="34" charset="-122"/>
-                <a:cs typeface="Calibri" pitchFamily="34" charset="-120"/>
+                <a:cs typeface="Amiri" pitchFamily="2" charset="-78"/>
               </a:rPr>
               <a:t>Miftah Arabic · Foundation F3 · My Family &amp; Home · F3-L12</a:t>
             </a:r>
@@ -12764,8 +12543,7 @@
                   <a:srgbClr val="FFFFFF"/>
                 </a:solidFill>
                 <a:latin typeface="Calibri" pitchFamily="34" charset="0"/>
-                <a:ea typeface="Calibri" pitchFamily="34" charset="-122"/>
-                <a:cs typeface="Calibri" pitchFamily="34" charset="-120"/>
+                <a:cs typeface="Amiri" pitchFamily="2" charset="-78"/>
               </a:rPr>
               <a:t>Write the Arabic noun</a:t>
             </a:r>
@@ -12803,8 +12581,7 @@
                   <a:srgbClr val="FFFFFF"/>
                 </a:solidFill>
                 <a:latin typeface="Calibri" pitchFamily="34" charset="0"/>
-                <a:ea typeface="Calibri" pitchFamily="34" charset="-122"/>
-                <a:cs typeface="Calibri" pitchFamily="34" charset="-120"/>
+                <a:cs typeface="Amiri" pitchFamily="2" charset="-78"/>
               </a:rPr>
               <a:t>Item (English)</a:t>
             </a:r>
@@ -12842,8 +12619,7 @@
                   <a:srgbClr val="FFFFFF"/>
                 </a:solidFill>
                 <a:latin typeface="Calibri" pitchFamily="34" charset="0"/>
-                <a:ea typeface="Calibri" pitchFamily="34" charset="-122"/>
-                <a:cs typeface="Calibri" pitchFamily="34" charset="-120"/>
+                <a:cs typeface="Amiri" pitchFamily="2" charset="-78"/>
               </a:rPr>
               <a:t>No.</a:t>
             </a:r>
@@ -12908,8 +12684,7 @@
                   <a:srgbClr val="5A6472"/>
                 </a:solidFill>
                 <a:latin typeface="Calibri" pitchFamily="34" charset="0"/>
-                <a:ea typeface="Calibri" pitchFamily="34" charset="-122"/>
-                <a:cs typeface="Calibri" pitchFamily="34" charset="-120"/>
+                <a:cs typeface="Amiri" pitchFamily="2" charset="-78"/>
               </a:rPr>
               <a:t>______________</a:t>
             </a:r>
@@ -12947,8 +12722,7 @@
                   <a:srgbClr val="5A6472"/>
                 </a:solidFill>
                 <a:latin typeface="Calibri" pitchFamily="34" charset="0"/>
-                <a:ea typeface="Calibri" pitchFamily="34" charset="-122"/>
-                <a:cs typeface="Calibri" pitchFamily="34" charset="-120"/>
+                <a:cs typeface="Amiri" pitchFamily="2" charset="-78"/>
               </a:rPr>
               <a:t>bed</a:t>
             </a:r>
@@ -12986,8 +12760,7 @@
                   <a:srgbClr val="5A6472"/>
                 </a:solidFill>
                 <a:latin typeface="Calibri" pitchFamily="34" charset="0"/>
-                <a:ea typeface="Calibri" pitchFamily="34" charset="-122"/>
-                <a:cs typeface="Calibri" pitchFamily="34" charset="-120"/>
+                <a:cs typeface="Amiri" pitchFamily="2" charset="-78"/>
               </a:rPr>
               <a:t>1</a:t>
             </a:r>
@@ -13052,8 +12825,7 @@
                   <a:srgbClr val="FFFFFF"/>
                 </a:solidFill>
                 <a:latin typeface="Calibri" pitchFamily="34" charset="0"/>
-                <a:ea typeface="Calibri" pitchFamily="34" charset="-122"/>
-                <a:cs typeface="Calibri" pitchFamily="34" charset="-120"/>
+                <a:cs typeface="Amiri" pitchFamily="2" charset="-78"/>
               </a:rPr>
               <a:t>CORE</a:t>
             </a:r>
@@ -13118,8 +12890,7 @@
                   <a:srgbClr val="5A6472"/>
                 </a:solidFill>
                 <a:latin typeface="Calibri" pitchFamily="34" charset="0"/>
-                <a:ea typeface="Calibri" pitchFamily="34" charset="-122"/>
-                <a:cs typeface="Calibri" pitchFamily="34" charset="-120"/>
+                <a:cs typeface="Amiri" pitchFamily="2" charset="-78"/>
               </a:rPr>
               <a:t>______________</a:t>
             </a:r>
@@ -13157,8 +12928,7 @@
                   <a:srgbClr val="5A6472"/>
                 </a:solidFill>
                 <a:latin typeface="Calibri" pitchFamily="34" charset="0"/>
-                <a:ea typeface="Calibri" pitchFamily="34" charset="-122"/>
-                <a:cs typeface="Calibri" pitchFamily="34" charset="-120"/>
+                <a:cs typeface="Amiri" pitchFamily="2" charset="-78"/>
               </a:rPr>
               <a:t>wardrobe</a:t>
             </a:r>
@@ -13196,8 +12966,7 @@
                   <a:srgbClr val="5A6472"/>
                 </a:solidFill>
                 <a:latin typeface="Calibri" pitchFamily="34" charset="0"/>
-                <a:ea typeface="Calibri" pitchFamily="34" charset="-122"/>
-                <a:cs typeface="Calibri" pitchFamily="34" charset="-120"/>
+                <a:cs typeface="Amiri" pitchFamily="2" charset="-78"/>
               </a:rPr>
               <a:t>2</a:t>
             </a:r>
@@ -13262,8 +13031,7 @@
                   <a:srgbClr val="FFFFFF"/>
                 </a:solidFill>
                 <a:latin typeface="Calibri" pitchFamily="34" charset="0"/>
-                <a:ea typeface="Calibri" pitchFamily="34" charset="-122"/>
-                <a:cs typeface="Calibri" pitchFamily="34" charset="-120"/>
+                <a:cs typeface="Amiri" pitchFamily="2" charset="-78"/>
               </a:rPr>
               <a:t>CORE</a:t>
             </a:r>
@@ -13328,8 +13096,7 @@
                   <a:srgbClr val="5A6472"/>
                 </a:solidFill>
                 <a:latin typeface="Calibri" pitchFamily="34" charset="0"/>
-                <a:ea typeface="Calibri" pitchFamily="34" charset="-122"/>
-                <a:cs typeface="Calibri" pitchFamily="34" charset="-120"/>
+                <a:cs typeface="Amiri" pitchFamily="2" charset="-78"/>
               </a:rPr>
               <a:t>______________</a:t>
             </a:r>
@@ -13367,8 +13134,7 @@
                   <a:srgbClr val="5A6472"/>
                 </a:solidFill>
                 <a:latin typeface="Calibri" pitchFamily="34" charset="0"/>
-                <a:ea typeface="Calibri" pitchFamily="34" charset="-122"/>
-                <a:cs typeface="Calibri" pitchFamily="34" charset="-120"/>
+                <a:cs typeface="Amiri" pitchFamily="2" charset="-78"/>
               </a:rPr>
               <a:t>desk</a:t>
             </a:r>
@@ -13406,8 +13172,7 @@
                   <a:srgbClr val="5A6472"/>
                 </a:solidFill>
                 <a:latin typeface="Calibri" pitchFamily="34" charset="0"/>
-                <a:ea typeface="Calibri" pitchFamily="34" charset="-122"/>
-                <a:cs typeface="Calibri" pitchFamily="34" charset="-120"/>
+                <a:cs typeface="Amiri" pitchFamily="2" charset="-78"/>
               </a:rPr>
               <a:t>3</a:t>
             </a:r>
@@ -13472,8 +13237,7 @@
                   <a:srgbClr val="FFFFFF"/>
                 </a:solidFill>
                 <a:latin typeface="Calibri" pitchFamily="34" charset="0"/>
-                <a:ea typeface="Calibri" pitchFamily="34" charset="-122"/>
-                <a:cs typeface="Calibri" pitchFamily="34" charset="-120"/>
+                <a:cs typeface="Amiri" pitchFamily="2" charset="-78"/>
               </a:rPr>
               <a:t>CORE</a:t>
             </a:r>
@@ -13538,8 +13302,7 @@
                   <a:srgbClr val="5A6472"/>
                 </a:solidFill>
                 <a:latin typeface="Calibri" pitchFamily="34" charset="0"/>
-                <a:ea typeface="Calibri" pitchFamily="34" charset="-122"/>
-                <a:cs typeface="Calibri" pitchFamily="34" charset="-120"/>
+                <a:cs typeface="Amiri" pitchFamily="2" charset="-78"/>
               </a:rPr>
               <a:t>______________</a:t>
             </a:r>
@@ -13577,8 +13340,7 @@
                   <a:srgbClr val="5A6472"/>
                 </a:solidFill>
                 <a:latin typeface="Calibri" pitchFamily="34" charset="0"/>
-                <a:ea typeface="Calibri" pitchFamily="34" charset="-122"/>
-                <a:cs typeface="Calibri" pitchFamily="34" charset="-120"/>
+                <a:cs typeface="Amiri" pitchFamily="2" charset="-78"/>
               </a:rPr>
               <a:t>window</a:t>
             </a:r>
@@ -13616,8 +13378,7 @@
                   <a:srgbClr val="5A6472"/>
                 </a:solidFill>
                 <a:latin typeface="Calibri" pitchFamily="34" charset="0"/>
-                <a:ea typeface="Calibri" pitchFamily="34" charset="-122"/>
-                <a:cs typeface="Calibri" pitchFamily="34" charset="-120"/>
+                <a:cs typeface="Amiri" pitchFamily="2" charset="-78"/>
               </a:rPr>
               <a:t>4</a:t>
             </a:r>
@@ -13682,8 +13443,7 @@
                   <a:srgbClr val="FFFFFF"/>
                 </a:solidFill>
                 <a:latin typeface="Calibri" pitchFamily="34" charset="0"/>
-                <a:ea typeface="Calibri" pitchFamily="34" charset="-122"/>
-                <a:cs typeface="Calibri" pitchFamily="34" charset="-120"/>
+                <a:cs typeface="Amiri" pitchFamily="2" charset="-78"/>
               </a:rPr>
               <a:t>CORE</a:t>
             </a:r>
@@ -13748,8 +13508,7 @@
                   <a:srgbClr val="5A6472"/>
                 </a:solidFill>
                 <a:latin typeface="Calibri" pitchFamily="34" charset="0"/>
-                <a:ea typeface="Calibri" pitchFamily="34" charset="-122"/>
-                <a:cs typeface="Calibri" pitchFamily="34" charset="-120"/>
+                <a:cs typeface="Amiri" pitchFamily="2" charset="-78"/>
               </a:rPr>
               <a:t>______________</a:t>
             </a:r>
@@ -13787,8 +13546,7 @@
                   <a:srgbClr val="5A6472"/>
                 </a:solidFill>
                 <a:latin typeface="Calibri" pitchFamily="34" charset="0"/>
-                <a:ea typeface="Calibri" pitchFamily="34" charset="-122"/>
-                <a:cs typeface="Calibri" pitchFamily="34" charset="-120"/>
+                <a:cs typeface="Amiri" pitchFamily="2" charset="-78"/>
               </a:rPr>
               <a:t>lamp</a:t>
             </a:r>
@@ -13826,8 +13584,7 @@
                   <a:srgbClr val="5A6472"/>
                 </a:solidFill>
                 <a:latin typeface="Calibri" pitchFamily="34" charset="0"/>
-                <a:ea typeface="Calibri" pitchFamily="34" charset="-122"/>
-                <a:cs typeface="Calibri" pitchFamily="34" charset="-120"/>
+                <a:cs typeface="Amiri" pitchFamily="2" charset="-78"/>
               </a:rPr>
               <a:t>5</a:t>
             </a:r>
@@ -13892,8 +13649,7 @@
                   <a:srgbClr val="FFFFFF"/>
                 </a:solidFill>
                 <a:latin typeface="Calibri" pitchFamily="34" charset="0"/>
-                <a:ea typeface="Calibri" pitchFamily="34" charset="-122"/>
-                <a:cs typeface="Calibri" pitchFamily="34" charset="-120"/>
+                <a:cs typeface="Amiri" pitchFamily="2" charset="-78"/>
               </a:rPr>
               <a:t>CORE</a:t>
             </a:r>
@@ -13931,8 +13687,7 @@
                   <a:srgbClr val="1B3B6F"/>
                 </a:solidFill>
                 <a:latin typeface="Calibri" pitchFamily="34" charset="0"/>
-                <a:ea typeface="Calibri" pitchFamily="34" charset="-122"/>
-                <a:cs typeface="Calibri" pitchFamily="34" charset="-120"/>
+                <a:cs typeface="Amiri" pitchFamily="2" charset="-78"/>
               </a:rPr>
               <a:t>One mark for each recognisable Arabic noun (with or without al-).</a:t>
             </a:r>
@@ -13970,8 +13725,7 @@
                   <a:srgbClr val="8A93A0"/>
                 </a:solidFill>
                 <a:latin typeface="Calibri" pitchFamily="34" charset="0"/>
-                <a:ea typeface="Calibri" pitchFamily="34" charset="-122"/>
-                <a:cs typeface="Calibri" pitchFamily="34" charset="-120"/>
+                <a:cs typeface="Amiri" pitchFamily="2" charset="-78"/>
               </a:rPr>
               <a:t>15 / 22</a:t>
             </a:r>
@@ -14065,9 +13819,8 @@
                 <a:solidFill>
                   <a:srgbClr val="D4AF37"/>
                 </a:solidFill>
-                <a:latin typeface="Amiri" pitchFamily="34" charset="0"/>
-                <a:ea typeface="Amiri" pitchFamily="34" charset="-122"/>
-                <a:cs typeface="Amiri" pitchFamily="34" charset="-120"/>
+                <a:latin typeface="Amiri" pitchFamily="2" charset="-78"/>
+                <a:cs typeface="Amiri" pitchFamily="2" charset="-78"/>
               </a:rPr>
               <a:t>م</a:t>
             </a:r>
@@ -14105,8 +13858,7 @@
                   <a:srgbClr val="1B3B6F"/>
                 </a:solidFill>
                 <a:latin typeface="Cambria" pitchFamily="34" charset="0"/>
-                <a:ea typeface="Cambria" pitchFamily="34" charset="-122"/>
-                <a:cs typeface="Cambria" pitchFamily="34" charset="-120"/>
+                <a:cs typeface="Amiri" pitchFamily="2" charset="-78"/>
               </a:rPr>
               <a:t>Al Madina Online School</a:t>
             </a:r>
@@ -14144,8 +13896,7 @@
                   <a:srgbClr val="8A6D1E"/>
                 </a:solidFill>
                 <a:latin typeface="Calibri" pitchFamily="34" charset="0"/>
-                <a:ea typeface="Calibri" pitchFamily="34" charset="-122"/>
-                <a:cs typeface="Calibri" pitchFamily="34" charset="-120"/>
+                <a:cs typeface="Amiri" pitchFamily="2" charset="-78"/>
               </a:rPr>
               <a:t>ARABIC DEPARTMENT · MIFTAH ARABIC · IGCSE 0544</a:t>
             </a:r>
@@ -14210,8 +13961,7 @@
                   <a:srgbClr val="FFFFFF"/>
                 </a:solidFill>
                 <a:latin typeface="Calibri" pitchFamily="34" charset="0"/>
-                <a:ea typeface="Calibri" pitchFamily="34" charset="-122"/>
-                <a:cs typeface="Calibri" pitchFamily="34" charset="-120"/>
+                <a:cs typeface="Amiri" pitchFamily="2" charset="-78"/>
               </a:rPr>
               <a:t>F3-L12 · F3 Assessment</a:t>
             </a:r>
@@ -14276,8 +14026,7 @@
                   <a:srgbClr val="FFFFFF"/>
                 </a:solidFill>
                 <a:latin typeface="Calibri" pitchFamily="34" charset="0"/>
-                <a:ea typeface="Calibri" pitchFamily="34" charset="-122"/>
-                <a:cs typeface="Calibri" pitchFamily="34" charset="-120"/>
+                <a:cs typeface="Amiri" pitchFamily="2" charset="-78"/>
               </a:rPr>
               <a:t>YOU DO · 13 MIN</a:t>
             </a:r>
@@ -14315,8 +14064,7 @@
                   <a:srgbClr val="1E6B52"/>
                 </a:solidFill>
                 <a:latin typeface="Calibri" pitchFamily="34" charset="0"/>
-                <a:ea typeface="Calibri" pitchFamily="34" charset="-122"/>
-                <a:cs typeface="Calibri" pitchFamily="34" charset="-120"/>
+                <a:cs typeface="Amiri" pitchFamily="2" charset="-78"/>
               </a:rPr>
               <a:t>WRITING · QUESTION 2 · 15 MARKS (WEBSITE)</a:t>
             </a:r>
@@ -14354,8 +14102,7 @@
                   <a:srgbClr val="1B3B6F"/>
                 </a:solidFill>
                 <a:latin typeface="Cambria" pitchFamily="34" charset="0"/>
-                <a:ea typeface="Cambria" pitchFamily="34" charset="-122"/>
-                <a:cs typeface="Cambria" pitchFamily="34" charset="-120"/>
+                <a:cs typeface="Amiri" pitchFamily="2" charset="-78"/>
               </a:rPr>
               <a:t>Write 60–80 words about your home and family</a:t>
             </a:r>
@@ -14392,9 +14139,8 @@
                 <a:solidFill>
                   <a:srgbClr val="8A6D1E"/>
                 </a:solidFill>
-                <a:latin typeface="Amiri" pitchFamily="34" charset="0"/>
-                <a:ea typeface="Amiri" pitchFamily="34" charset="-122"/>
-                <a:cs typeface="Amiri" pitchFamily="34" charset="-120"/>
+                <a:latin typeface="Amiri" pitchFamily="2" charset="-78"/>
+                <a:cs typeface="Amiri" pitchFamily="2" charset="-78"/>
               </a:rPr>
               <a:t>السُّؤَالُ الثَّانِي</a:t>
             </a:r>
@@ -14432,8 +14178,7 @@
                   <a:srgbClr val="8A93A0"/>
                 </a:solidFill>
                 <a:latin typeface="Calibri" pitchFamily="34" charset="0"/>
-                <a:ea typeface="Calibri" pitchFamily="34" charset="-122"/>
-                <a:cs typeface="Calibri" pitchFamily="34" charset="-120"/>
+                <a:cs typeface="Amiri" pitchFamily="2" charset="-78"/>
               </a:rPr>
               <a:t>Miftah Arabic · Foundation F3 · My Family &amp; Home · F3-L12</a:t>
             </a:r>
@@ -14496,8 +14241,7 @@
                   <a:srgbClr val="FFFFFF"/>
                 </a:solidFill>
                 <a:latin typeface="Calibri" pitchFamily="34" charset="0"/>
-                <a:ea typeface="Calibri" pitchFamily="34" charset="-122"/>
-                <a:cs typeface="Calibri" pitchFamily="34" charset="-120"/>
+                <a:cs typeface="Amiri" pitchFamily="2" charset="-78"/>
               </a:rPr>
               <a:t>Mark scheme (15)</a:t>
             </a:r>
@@ -14535,8 +14279,7 @@
                   <a:srgbClr val="FFFFFF"/>
                 </a:solidFill>
                 <a:latin typeface="Calibri" pitchFamily="34" charset="0"/>
-                <a:ea typeface="Calibri" pitchFamily="34" charset="-122"/>
-                <a:cs typeface="Calibri" pitchFamily="34" charset="-120"/>
+                <a:cs typeface="Amiri" pitchFamily="2" charset="-78"/>
               </a:rPr>
               <a:t>Include all five points</a:t>
             </a:r>
@@ -14601,8 +14344,7 @@
                   <a:srgbClr val="5A6472"/>
                 </a:solidFill>
                 <a:latin typeface="Calibri" pitchFamily="34" charset="0"/>
-                <a:ea typeface="Calibri" pitchFamily="34" charset="-122"/>
-                <a:cs typeface="Calibri" pitchFamily="34" charset="-120"/>
+                <a:cs typeface="Amiri" pitchFamily="2" charset="-78"/>
               </a:rPr>
               <a:t>Task completion /5</a:t>
             </a:r>
@@ -14640,8 +14382,7 @@
                   <a:srgbClr val="5A6472"/>
                 </a:solidFill>
                 <a:latin typeface="Calibri" pitchFamily="34" charset="0"/>
-                <a:ea typeface="Calibri" pitchFamily="34" charset="-122"/>
-                <a:cs typeface="Calibri" pitchFamily="34" charset="-120"/>
+                <a:cs typeface="Amiri" pitchFamily="2" charset="-78"/>
               </a:rPr>
               <a:t>1 · Describe your family and one person.</a:t>
             </a:r>
@@ -14706,8 +14447,7 @@
                   <a:srgbClr val="FFFFFF"/>
                 </a:solidFill>
                 <a:latin typeface="Calibri" pitchFamily="34" charset="0"/>
-                <a:ea typeface="Calibri" pitchFamily="34" charset="-122"/>
-                <a:cs typeface="Calibri" pitchFamily="34" charset="-120"/>
+                <a:cs typeface="Amiri" pitchFamily="2" charset="-78"/>
               </a:rPr>
               <a:t>CORE</a:t>
             </a:r>
@@ -14772,8 +14512,7 @@
                   <a:srgbClr val="5A6472"/>
                 </a:solidFill>
                 <a:latin typeface="Calibri" pitchFamily="34" charset="0"/>
-                <a:ea typeface="Calibri" pitchFamily="34" charset="-122"/>
-                <a:cs typeface="Calibri" pitchFamily="34" charset="-120"/>
+                <a:cs typeface="Amiri" pitchFamily="2" charset="-78"/>
               </a:rPr>
               <a:t>all five points, 60–80 words</a:t>
             </a:r>
@@ -14811,8 +14550,7 @@
                   <a:srgbClr val="5A6472"/>
                 </a:solidFill>
                 <a:latin typeface="Calibri" pitchFamily="34" charset="0"/>
-                <a:ea typeface="Calibri" pitchFamily="34" charset="-122"/>
-                <a:cs typeface="Calibri" pitchFamily="34" charset="-120"/>
+                <a:cs typeface="Amiri" pitchFamily="2" charset="-78"/>
               </a:rPr>
               <a:t>2 · Describe your home and the number of rooms.</a:t>
             </a:r>
@@ -14877,8 +14615,7 @@
                   <a:srgbClr val="FFFFFF"/>
                 </a:solidFill>
                 <a:latin typeface="Calibri" pitchFamily="34" charset="0"/>
-                <a:ea typeface="Calibri" pitchFamily="34" charset="-122"/>
-                <a:cs typeface="Calibri" pitchFamily="34" charset="-120"/>
+                <a:cs typeface="Amiri" pitchFamily="2" charset="-78"/>
               </a:rPr>
               <a:t>CORE</a:t>
             </a:r>
@@ -14943,8 +14680,7 @@
                   <a:srgbClr val="5A6472"/>
                 </a:solidFill>
                 <a:latin typeface="Calibri" pitchFamily="34" charset="0"/>
-                <a:ea typeface="Calibri" pitchFamily="34" charset="-122"/>
-                <a:cs typeface="Calibri" pitchFamily="34" charset="-120"/>
+                <a:cs typeface="Amiri" pitchFamily="2" charset="-78"/>
               </a:rPr>
               <a:t>Range /5 — connectors, adjectives,</a:t>
             </a:r>
@@ -14982,8 +14718,7 @@
                   <a:srgbClr val="5A6472"/>
                 </a:solidFill>
                 <a:latin typeface="Calibri" pitchFamily="34" charset="0"/>
-                <a:ea typeface="Calibri" pitchFamily="34" charset="-122"/>
-                <a:cs typeface="Calibri" pitchFamily="34" charset="-120"/>
+                <a:cs typeface="Amiri" pitchFamily="2" charset="-78"/>
               </a:rPr>
               <a:t>3 · Describe one room: furniture, colours, positions.</a:t>
             </a:r>
@@ -15048,8 +14783,7 @@
                   <a:srgbClr val="FFFFFF"/>
                 </a:solidFill>
                 <a:latin typeface="Calibri" pitchFamily="34" charset="0"/>
-                <a:ea typeface="Calibri" pitchFamily="34" charset="-122"/>
-                <a:cs typeface="Calibri" pitchFamily="34" charset="-120"/>
+                <a:cs typeface="Amiri" pitchFamily="2" charset="-78"/>
               </a:rPr>
               <a:t>CORE</a:t>
             </a:r>
@@ -15114,8 +14848,7 @@
                   <a:srgbClr val="5A6472"/>
                 </a:solidFill>
                 <a:latin typeface="Calibri" pitchFamily="34" charset="0"/>
-                <a:ea typeface="Calibri" pitchFamily="34" charset="-122"/>
-                <a:cs typeface="Calibri" pitchFamily="34" charset="-120"/>
+                <a:cs typeface="Amiri" pitchFamily="2" charset="-78"/>
               </a:rPr>
               <a:t>positions, possessives, reasons</a:t>
             </a:r>
@@ -15153,8 +14886,7 @@
                   <a:srgbClr val="5A6472"/>
                 </a:solidFill>
                 <a:latin typeface="Calibri" pitchFamily="34" charset="0"/>
-                <a:ea typeface="Calibri" pitchFamily="34" charset="-122"/>
-                <a:cs typeface="Calibri" pitchFamily="34" charset="-120"/>
+                <a:cs typeface="Amiri" pitchFamily="2" charset="-78"/>
               </a:rPr>
               <a:t>4 · Mention your neighbourhood or one routine.</a:t>
             </a:r>
@@ -15219,8 +14951,7 @@
                   <a:srgbClr val="FFFFFF"/>
                 </a:solidFill>
                 <a:latin typeface="Calibri" pitchFamily="34" charset="0"/>
-                <a:ea typeface="Calibri" pitchFamily="34" charset="-122"/>
-                <a:cs typeface="Calibri" pitchFamily="34" charset="-120"/>
+                <a:cs typeface="Amiri" pitchFamily="2" charset="-78"/>
               </a:rPr>
               <a:t>CORE</a:t>
             </a:r>
@@ -15285,8 +15016,7 @@
                   <a:srgbClr val="5A6472"/>
                 </a:solidFill>
                 <a:latin typeface="Calibri" pitchFamily="34" charset="0"/>
-                <a:ea typeface="Calibri" pitchFamily="34" charset="-122"/>
-                <a:cs typeface="Calibri" pitchFamily="34" charset="-120"/>
+                <a:cs typeface="Amiri" pitchFamily="2" charset="-78"/>
               </a:rPr>
               <a:t>Accuracy /5 — agreement, -hu / -hā, spelling</a:t>
             </a:r>
@@ -15324,8 +15054,7 @@
                   <a:srgbClr val="5A6472"/>
                 </a:solidFill>
                 <a:latin typeface="Calibri" pitchFamily="34" charset="0"/>
-                <a:ea typeface="Calibri" pitchFamily="34" charset="-122"/>
-                <a:cs typeface="Calibri" pitchFamily="34" charset="-120"/>
+                <a:cs typeface="Amiri" pitchFamily="2" charset="-78"/>
               </a:rPr>
               <a:t>5 · Give an opinion and a reason.</a:t>
             </a:r>
@@ -15390,8 +15119,7 @@
                   <a:srgbClr val="FFFFFF"/>
                 </a:solidFill>
                 <a:latin typeface="Calibri" pitchFamily="34" charset="0"/>
-                <a:ea typeface="Calibri" pitchFamily="34" charset="-122"/>
-                <a:cs typeface="Calibri" pitchFamily="34" charset="-120"/>
+                <a:cs typeface="Amiri" pitchFamily="2" charset="-78"/>
               </a:rPr>
               <a:t>CORE</a:t>
             </a:r>
@@ -15429,8 +15157,7 @@
                   <a:srgbClr val="1B3B6F"/>
                 </a:solidFill>
                 <a:latin typeface="Calibri" pitchFamily="34" charset="0"/>
-                <a:ea typeface="Calibri" pitchFamily="34" charset="-122"/>
-                <a:cs typeface="Calibri" pitchFamily="34" charset="-120"/>
+                <a:cs typeface="Amiri" pitchFamily="2" charset="-78"/>
               </a:rPr>
               <a:t>Do not copy a model. Use your own or fictional details. Leave space to improve one sentence after feedback.</a:t>
             </a:r>
@@ -15468,8 +15195,7 @@
                   <a:srgbClr val="8A93A0"/>
                 </a:solidFill>
                 <a:latin typeface="Calibri" pitchFamily="34" charset="0"/>
-                <a:ea typeface="Calibri" pitchFamily="34" charset="-122"/>
-                <a:cs typeface="Calibri" pitchFamily="34" charset="-120"/>
+                <a:cs typeface="Amiri" pitchFamily="2" charset="-78"/>
               </a:rPr>
               <a:t>16 / 22</a:t>
             </a:r>
@@ -15563,9 +15289,8 @@
                 <a:solidFill>
                   <a:srgbClr val="D4AF37"/>
                 </a:solidFill>
-                <a:latin typeface="Amiri" pitchFamily="34" charset="0"/>
-                <a:ea typeface="Amiri" pitchFamily="34" charset="-122"/>
-                <a:cs typeface="Amiri" pitchFamily="34" charset="-120"/>
+                <a:latin typeface="Amiri" pitchFamily="2" charset="-78"/>
+                <a:cs typeface="Amiri" pitchFamily="2" charset="-78"/>
               </a:rPr>
               <a:t>م</a:t>
             </a:r>
@@ -15603,8 +15328,7 @@
                   <a:srgbClr val="1B3B6F"/>
                 </a:solidFill>
                 <a:latin typeface="Cambria" pitchFamily="34" charset="0"/>
-                <a:ea typeface="Cambria" pitchFamily="34" charset="-122"/>
-                <a:cs typeface="Cambria" pitchFamily="34" charset="-120"/>
+                <a:cs typeface="Amiri" pitchFamily="2" charset="-78"/>
               </a:rPr>
               <a:t>Al Madina Online School</a:t>
             </a:r>
@@ -15642,8 +15366,7 @@
                   <a:srgbClr val="8A6D1E"/>
                 </a:solidFill>
                 <a:latin typeface="Calibri" pitchFamily="34" charset="0"/>
-                <a:ea typeface="Calibri" pitchFamily="34" charset="-122"/>
-                <a:cs typeface="Calibri" pitchFamily="34" charset="-120"/>
+                <a:cs typeface="Amiri" pitchFamily="2" charset="-78"/>
               </a:rPr>
               <a:t>ARABIC DEPARTMENT · MIFTAH ARABIC · IGCSE 0544</a:t>
             </a:r>
@@ -15708,8 +15431,7 @@
                   <a:srgbClr val="FFFFFF"/>
                 </a:solidFill>
                 <a:latin typeface="Calibri" pitchFamily="34" charset="0"/>
-                <a:ea typeface="Calibri" pitchFamily="34" charset="-122"/>
-                <a:cs typeface="Calibri" pitchFamily="34" charset="-120"/>
+                <a:cs typeface="Amiri" pitchFamily="2" charset="-78"/>
               </a:rPr>
               <a:t>F3-L12 · F3 Assessment</a:t>
             </a:r>
@@ -15774,8 +15496,7 @@
                   <a:srgbClr val="FFFFFF"/>
                 </a:solidFill>
                 <a:latin typeface="Calibri" pitchFamily="34" charset="0"/>
-                <a:ea typeface="Calibri" pitchFamily="34" charset="-122"/>
-                <a:cs typeface="Calibri" pitchFamily="34" charset="-120"/>
+                <a:cs typeface="Amiri" pitchFamily="2" charset="-78"/>
               </a:rPr>
               <a:t>FEEDBACK · 1 MIN</a:t>
             </a:r>
@@ -15813,8 +15534,7 @@
                   <a:srgbClr val="8A6D1E"/>
                 </a:solidFill>
                 <a:latin typeface="Calibri" pitchFamily="34" charset="0"/>
-                <a:ea typeface="Calibri" pitchFamily="34" charset="-122"/>
-                <a:cs typeface="Calibri" pitchFamily="34" charset="-120"/>
+                <a:cs typeface="Amiri" pitchFamily="2" charset="-78"/>
               </a:rPr>
               <a:t>WRITING · THE WEBSITE FULL-MARK MODEL · SHOW AFTER WRITING</a:t>
             </a:r>
@@ -15852,8 +15572,7 @@
                   <a:srgbClr val="1B3B6F"/>
                 </a:solidFill>
                 <a:latin typeface="Cambria" pitchFamily="34" charset="0"/>
-                <a:ea typeface="Cambria" pitchFamily="34" charset="-122"/>
-                <a:cs typeface="Cambria" pitchFamily="34" charset="-120"/>
+                <a:cs typeface="Amiri" pitchFamily="2" charset="-78"/>
               </a:rPr>
               <a:t>A full-mark response</a:t>
             </a:r>
@@ -15890,9 +15609,8 @@
                 <a:solidFill>
                   <a:srgbClr val="8A6D1E"/>
                 </a:solidFill>
-                <a:latin typeface="Amiri" pitchFamily="34" charset="0"/>
-                <a:ea typeface="Amiri" pitchFamily="34" charset="-122"/>
-                <a:cs typeface="Amiri" pitchFamily="34" charset="-120"/>
+                <a:latin typeface="Amiri" pitchFamily="2" charset="-78"/>
+                <a:cs typeface="Amiri" pitchFamily="2" charset="-78"/>
               </a:rPr>
               <a:t>نَمُوذَجُ الدَّرَجَةِ الكَامِلَةِ</a:t>
             </a:r>
@@ -15930,8 +15648,7 @@
                   <a:srgbClr val="8A93A0"/>
                 </a:solidFill>
                 <a:latin typeface="Calibri" pitchFamily="34" charset="0"/>
-                <a:ea typeface="Calibri" pitchFamily="34" charset="-122"/>
-                <a:cs typeface="Calibri" pitchFamily="34" charset="-120"/>
+                <a:cs typeface="Amiri" pitchFamily="2" charset="-78"/>
               </a:rPr>
               <a:t>Miftah Arabic · Foundation F3 · My Family &amp; Home · F3-L12</a:t>
             </a:r>
@@ -15995,9 +15712,8 @@
                 <a:solidFill>
                   <a:srgbClr val="1B3B6F"/>
                 </a:solidFill>
-                <a:latin typeface="Amiri" pitchFamily="34" charset="0"/>
-                <a:ea typeface="Amiri" pitchFamily="34" charset="-122"/>
-                <a:cs typeface="Amiri" pitchFamily="34" charset="-120"/>
+                <a:latin typeface="Amiri" pitchFamily="2" charset="-78"/>
+                <a:cs typeface="Amiri" pitchFamily="2" charset="-78"/>
               </a:rPr>
               <a:t>أَسْكُنُ مَعَ عَائِلَتِي فِي بَيْتٍ مُتَوَسِّطٍ. عِنْدِي أَبٌ وَأُمٌّ وَأُخْتَانِ.</a:t>
             </a:r>
@@ -16035,8 +15751,7 @@
                   <a:srgbClr val="1F2A37"/>
                 </a:solidFill>
                 <a:latin typeface="Calibri" pitchFamily="34" charset="0"/>
-                <a:ea typeface="Calibri" pitchFamily="34" charset="-122"/>
-                <a:cs typeface="Calibri" pitchFamily="34" charset="-120"/>
+                <a:cs typeface="Amiri" pitchFamily="2" charset="-78"/>
               </a:rPr>
               <a:t>home + family</a:t>
             </a:r>
@@ -16100,9 +15815,8 @@
                 <a:solidFill>
                   <a:srgbClr val="1B3B6F"/>
                 </a:solidFill>
-                <a:latin typeface="Amiri" pitchFamily="34" charset="0"/>
-                <a:ea typeface="Amiri" pitchFamily="34" charset="-122"/>
-                <a:cs typeface="Amiri" pitchFamily="34" charset="-120"/>
+                <a:latin typeface="Amiri" pitchFamily="2" charset="-78"/>
+                <a:cs typeface="Amiri" pitchFamily="2" charset="-78"/>
               </a:rPr>
               <a:t>أَبِي طَوِيلٌ وَهَادِئٌ، وَأُمِّي لَطِيفَةٌ وَمُتَعَاوِنَةٌ.</a:t>
             </a:r>
@@ -16140,8 +15854,7 @@
                   <a:srgbClr val="1F2A37"/>
                 </a:solidFill>
                 <a:latin typeface="Calibri" pitchFamily="34" charset="0"/>
-                <a:ea typeface="Calibri" pitchFamily="34" charset="-122"/>
-                <a:cs typeface="Calibri" pitchFamily="34" charset="-120"/>
+                <a:cs typeface="Amiri" pitchFamily="2" charset="-78"/>
               </a:rPr>
               <a:t>describe people (m. · f.)</a:t>
             </a:r>
@@ -16205,9 +15918,8 @@
                 <a:solidFill>
                   <a:srgbClr val="1B3B6F"/>
                 </a:solidFill>
-                <a:latin typeface="Amiri" pitchFamily="34" charset="0"/>
-                <a:ea typeface="Amiri" pitchFamily="34" charset="-122"/>
-                <a:cs typeface="Amiri" pitchFamily="34" charset="-120"/>
+                <a:latin typeface="Amiri" pitchFamily="2" charset="-78"/>
+                <a:cs typeface="Amiri" pitchFamily="2" charset="-78"/>
               </a:rPr>
               <a:t>فِي بَيْتِنَا أَرْبَعُ غُرَفٍ وَمَطْبَخٌ وَحَمَّامَانِ. غُرْفَتِي المُفَضَّلَةُ هِيَ غُرْفَةُ النَّوْمِ.</a:t>
             </a:r>
@@ -16245,8 +15957,7 @@
                   <a:srgbClr val="1F2A37"/>
                 </a:solidFill>
                 <a:latin typeface="Calibri" pitchFamily="34" charset="0"/>
-                <a:ea typeface="Calibri" pitchFamily="34" charset="-122"/>
-                <a:cs typeface="Calibri" pitchFamily="34" charset="-120"/>
+                <a:cs typeface="Amiri" pitchFamily="2" charset="-78"/>
               </a:rPr>
               <a:t>rooms + number · favourite room</a:t>
             </a:r>
@@ -16310,9 +16021,8 @@
                 <a:solidFill>
                   <a:srgbClr val="1B3B6F"/>
                 </a:solidFill>
-                <a:latin typeface="Amiri" pitchFamily="34" charset="0"/>
-                <a:ea typeface="Amiri" pitchFamily="34" charset="-122"/>
-                <a:cs typeface="Amiri" pitchFamily="34" charset="-120"/>
+                <a:latin typeface="Amiri" pitchFamily="2" charset="-78"/>
+                <a:cs typeface="Amiri" pitchFamily="2" charset="-78"/>
               </a:rPr>
               <a:t>فِيهَا سَرِيرٌ أَبْيَضُ وَمَكْتَبٌ بُنِّيٌّ بِجَانِبِ النَّافِذَةِ.</a:t>
             </a:r>
@@ -16350,8 +16060,7 @@
                   <a:srgbClr val="1F2A37"/>
                 </a:solidFill>
                 <a:latin typeface="Calibri" pitchFamily="34" charset="0"/>
-                <a:ea typeface="Calibri" pitchFamily="34" charset="-122"/>
-                <a:cs typeface="Calibri" pitchFamily="34" charset="-120"/>
+                <a:cs typeface="Amiri" pitchFamily="2" charset="-78"/>
               </a:rPr>
               <a:t>furniture · colours · position</a:t>
             </a:r>
@@ -16415,9 +16124,8 @@
                 <a:solidFill>
                   <a:srgbClr val="1B3B6F"/>
                 </a:solidFill>
-                <a:latin typeface="Amiri" pitchFamily="34" charset="0"/>
-                <a:ea typeface="Amiri" pitchFamily="34" charset="-122"/>
-                <a:cs typeface="Amiri" pitchFamily="34" charset="-120"/>
+                <a:latin typeface="Amiri" pitchFamily="2" charset="-78"/>
+                <a:cs typeface="Amiri" pitchFamily="2" charset="-78"/>
               </a:rPr>
               <a:t>حَيُّنَا هَادِئٌ، وَقُرْبَ بَيْتِنَا حَدِيقَةٌ عَامَّةٌ.</a:t>
             </a:r>
@@ -16455,8 +16163,7 @@
                   <a:srgbClr val="1F2A37"/>
                 </a:solidFill>
                 <a:latin typeface="Calibri" pitchFamily="34" charset="0"/>
-                <a:ea typeface="Calibri" pitchFamily="34" charset="-122"/>
-                <a:cs typeface="Calibri" pitchFamily="34" charset="-120"/>
+                <a:cs typeface="Amiri" pitchFamily="2" charset="-78"/>
               </a:rPr>
               <a:t>neighbourhood</a:t>
             </a:r>
@@ -16494,8 +16201,7 @@
                   <a:srgbClr val="8A93A0"/>
                 </a:solidFill>
                 <a:latin typeface="Calibri" pitchFamily="34" charset="0"/>
-                <a:ea typeface="Calibri" pitchFamily="34" charset="-122"/>
-                <a:cs typeface="Calibri" pitchFamily="34" charset="-120"/>
+                <a:cs typeface="Amiri" pitchFamily="2" charset="-78"/>
               </a:rPr>
               <a:t>17 / 22</a:t>
             </a:r>
@@ -16589,9 +16295,8 @@
                 <a:solidFill>
                   <a:srgbClr val="D4AF37"/>
                 </a:solidFill>
-                <a:latin typeface="Amiri" pitchFamily="34" charset="0"/>
-                <a:ea typeface="Amiri" pitchFamily="34" charset="-122"/>
-                <a:cs typeface="Amiri" pitchFamily="34" charset="-120"/>
+                <a:latin typeface="Amiri" pitchFamily="2" charset="-78"/>
+                <a:cs typeface="Amiri" pitchFamily="2" charset="-78"/>
               </a:rPr>
               <a:t>م</a:t>
             </a:r>
@@ -16629,8 +16334,7 @@
                   <a:srgbClr val="1B3B6F"/>
                 </a:solidFill>
                 <a:latin typeface="Cambria" pitchFamily="34" charset="0"/>
-                <a:ea typeface="Cambria" pitchFamily="34" charset="-122"/>
-                <a:cs typeface="Cambria" pitchFamily="34" charset="-120"/>
+                <a:cs typeface="Amiri" pitchFamily="2" charset="-78"/>
               </a:rPr>
               <a:t>Al Madina Online School</a:t>
             </a:r>
@@ -16668,8 +16372,7 @@
                   <a:srgbClr val="8A6D1E"/>
                 </a:solidFill>
                 <a:latin typeface="Calibri" pitchFamily="34" charset="0"/>
-                <a:ea typeface="Calibri" pitchFamily="34" charset="-122"/>
-                <a:cs typeface="Calibri" pitchFamily="34" charset="-120"/>
+                <a:cs typeface="Amiri" pitchFamily="2" charset="-78"/>
               </a:rPr>
               <a:t>ARABIC DEPARTMENT · MIFTAH ARABIC · IGCSE 0544</a:t>
             </a:r>
@@ -16734,8 +16437,7 @@
                   <a:srgbClr val="FFFFFF"/>
                 </a:solidFill>
                 <a:latin typeface="Calibri" pitchFamily="34" charset="0"/>
-                <a:ea typeface="Calibri" pitchFamily="34" charset="-122"/>
-                <a:cs typeface="Calibri" pitchFamily="34" charset="-120"/>
+                <a:cs typeface="Amiri" pitchFamily="2" charset="-78"/>
               </a:rPr>
               <a:t>F3-L12 · F3 Assessment</a:t>
             </a:r>
@@ -16800,8 +16502,7 @@
                   <a:srgbClr val="FFFFFF"/>
                 </a:solidFill>
                 <a:latin typeface="Calibri" pitchFamily="34" charset="0"/>
-                <a:ea typeface="Calibri" pitchFamily="34" charset="-122"/>
-                <a:cs typeface="Calibri" pitchFamily="34" charset="-120"/>
+                <a:cs typeface="Amiri" pitchFamily="2" charset="-78"/>
               </a:rPr>
               <a:t>YOU DO · 8 MIN</a:t>
             </a:r>
@@ -16839,8 +16540,7 @@
                   <a:srgbClr val="1E6B52"/>
                 </a:solidFill>
                 <a:latin typeface="Calibri" pitchFamily="34" charset="0"/>
-                <a:ea typeface="Calibri" pitchFamily="34" charset="-122"/>
-                <a:cs typeface="Calibri" pitchFamily="34" charset="-120"/>
+                <a:cs typeface="Amiri" pitchFamily="2" charset="-78"/>
               </a:rPr>
               <a:t>SPEAKING · PART D · 10 MARKS (WEBSITE)</a:t>
             </a:r>
@@ -16878,8 +16578,7 @@
                   <a:srgbClr val="1B3B6F"/>
                 </a:solidFill>
                 <a:latin typeface="Cambria" pitchFamily="34" charset="0"/>
-                <a:ea typeface="Cambria" pitchFamily="34" charset="-122"/>
-                <a:cs typeface="Cambria" pitchFamily="34" charset="-120"/>
+                <a:cs typeface="Amiri" pitchFamily="2" charset="-78"/>
               </a:rPr>
               <a:t>Answer five questions</a:t>
             </a:r>
@@ -16916,9 +16615,8 @@
                 <a:solidFill>
                   <a:srgbClr val="8A6D1E"/>
                 </a:solidFill>
-                <a:latin typeface="Amiri" pitchFamily="34" charset="0"/>
-                <a:ea typeface="Amiri" pitchFamily="34" charset="-122"/>
-                <a:cs typeface="Amiri" pitchFamily="34" charset="-120"/>
+                <a:latin typeface="Amiri" pitchFamily="2" charset="-78"/>
+                <a:cs typeface="Amiri" pitchFamily="2" charset="-78"/>
               </a:rPr>
               <a:t>القِسْمُ الرَّابِعُ — التَّحَدُّثُ</a:t>
             </a:r>
@@ -16956,8 +16654,7 @@
                   <a:srgbClr val="8A93A0"/>
                 </a:solidFill>
                 <a:latin typeface="Calibri" pitchFamily="34" charset="0"/>
-                <a:ea typeface="Calibri" pitchFamily="34" charset="-122"/>
-                <a:cs typeface="Calibri" pitchFamily="34" charset="-120"/>
+                <a:cs typeface="Amiri" pitchFamily="2" charset="-78"/>
               </a:rPr>
               <a:t>Miftah Arabic · Foundation F3 · My Family &amp; Home · F3-L12</a:t>
             </a:r>
@@ -17020,8 +16717,7 @@
                   <a:srgbClr val="FFFFFF"/>
                 </a:solidFill>
                 <a:latin typeface="Calibri" pitchFamily="34" charset="0"/>
-                <a:ea typeface="Calibri" pitchFamily="34" charset="-122"/>
-                <a:cs typeface="Calibri" pitchFamily="34" charset="-120"/>
+                <a:cs typeface="Amiri" pitchFamily="2" charset="-78"/>
               </a:rPr>
               <a:t>Question</a:t>
             </a:r>
@@ -17059,8 +16755,7 @@
                   <a:srgbClr val="FFFFFF"/>
                 </a:solidFill>
                 <a:latin typeface="Calibri" pitchFamily="34" charset="0"/>
-                <a:ea typeface="Calibri" pitchFamily="34" charset="-122"/>
-                <a:cs typeface="Calibri" pitchFamily="34" charset="-120"/>
+                <a:cs typeface="Amiri" pitchFamily="2" charset="-78"/>
               </a:rPr>
               <a:t>In English</a:t>
             </a:r>
@@ -17124,9 +16819,8 @@
                 <a:solidFill>
                   <a:srgbClr val="1B3B6F"/>
                 </a:solidFill>
-                <a:latin typeface="Amiri" pitchFamily="34" charset="0"/>
-                <a:ea typeface="Amiri" pitchFamily="34" charset="-122"/>
-                <a:cs typeface="Amiri" pitchFamily="34" charset="-120"/>
+                <a:latin typeface="Amiri" pitchFamily="2" charset="-78"/>
+                <a:cs typeface="Amiri" pitchFamily="2" charset="-78"/>
               </a:rPr>
               <a:t>١ صِفْ عَائِلَتَكَ. / صِفِي عَائِلَتَكِ.</a:t>
             </a:r>
@@ -17164,8 +16858,7 @@
                   <a:srgbClr val="5A6472"/>
                 </a:solidFill>
                 <a:latin typeface="Calibri" pitchFamily="34" charset="0"/>
-                <a:ea typeface="Calibri" pitchFamily="34" charset="-122"/>
-                <a:cs typeface="Calibri" pitchFamily="34" charset="-120"/>
+                <a:cs typeface="Amiri" pitchFamily="2" charset="-78"/>
               </a:rPr>
               <a:t>Describe your family.</a:t>
             </a:r>
@@ -17230,8 +16923,7 @@
                   <a:srgbClr val="FFFFFF"/>
                 </a:solidFill>
                 <a:latin typeface="Calibri" pitchFamily="34" charset="0"/>
-                <a:ea typeface="Calibri" pitchFamily="34" charset="-122"/>
-                <a:cs typeface="Calibri" pitchFamily="34" charset="-120"/>
+                <a:cs typeface="Amiri" pitchFamily="2" charset="-78"/>
               </a:rPr>
               <a:t>CORE</a:t>
             </a:r>
@@ -17295,9 +16987,8 @@
                 <a:solidFill>
                   <a:srgbClr val="1B3B6F"/>
                 </a:solidFill>
-                <a:latin typeface="Amiri" pitchFamily="34" charset="0"/>
-                <a:ea typeface="Amiri" pitchFamily="34" charset="-122"/>
-                <a:cs typeface="Amiri" pitchFamily="34" charset="-120"/>
+                <a:latin typeface="Amiri" pitchFamily="2" charset="-78"/>
+                <a:cs typeface="Amiri" pitchFamily="2" charset="-78"/>
               </a:rPr>
               <a:t>٢ صِفْ شَخْصًا وَاحِدًا مِنْ عَائِلَتِكَ.</a:t>
             </a:r>
@@ -17335,8 +17026,7 @@
                   <a:srgbClr val="5A6472"/>
                 </a:solidFill>
                 <a:latin typeface="Calibri" pitchFamily="34" charset="0"/>
-                <a:ea typeface="Calibri" pitchFamily="34" charset="-122"/>
-                <a:cs typeface="Calibri" pitchFamily="34" charset="-120"/>
+                <a:cs typeface="Amiri" pitchFamily="2" charset="-78"/>
               </a:rPr>
               <a:t>Describe one family member.</a:t>
             </a:r>
@@ -17401,8 +17091,7 @@
                   <a:srgbClr val="FFFFFF"/>
                 </a:solidFill>
                 <a:latin typeface="Calibri" pitchFamily="34" charset="0"/>
-                <a:ea typeface="Calibri" pitchFamily="34" charset="-122"/>
-                <a:cs typeface="Calibri" pitchFamily="34" charset="-120"/>
+                <a:cs typeface="Amiri" pitchFamily="2" charset="-78"/>
               </a:rPr>
               <a:t>CORE</a:t>
             </a:r>
@@ -17466,9 +17155,8 @@
                 <a:solidFill>
                   <a:srgbClr val="1B3B6F"/>
                 </a:solidFill>
-                <a:latin typeface="Amiri" pitchFamily="34" charset="0"/>
-                <a:ea typeface="Amiri" pitchFamily="34" charset="-122"/>
-                <a:cs typeface="Amiri" pitchFamily="34" charset="-120"/>
+                <a:latin typeface="Amiri" pitchFamily="2" charset="-78"/>
+                <a:cs typeface="Amiri" pitchFamily="2" charset="-78"/>
               </a:rPr>
               <a:t>٣ صِفْ بَيْتَكَ. / صِفِي بَيْتَكِ.</a:t>
             </a:r>
@@ -17506,8 +17194,7 @@
                   <a:srgbClr val="5A6472"/>
                 </a:solidFill>
                 <a:latin typeface="Calibri" pitchFamily="34" charset="0"/>
-                <a:ea typeface="Calibri" pitchFamily="34" charset="-122"/>
-                <a:cs typeface="Calibri" pitchFamily="34" charset="-120"/>
+                <a:cs typeface="Amiri" pitchFamily="2" charset="-78"/>
               </a:rPr>
               <a:t>Describe your home.</a:t>
             </a:r>
@@ -17572,8 +17259,7 @@
                   <a:srgbClr val="FFFFFF"/>
                 </a:solidFill>
                 <a:latin typeface="Calibri" pitchFamily="34" charset="0"/>
-                <a:ea typeface="Calibri" pitchFamily="34" charset="-122"/>
-                <a:cs typeface="Calibri" pitchFamily="34" charset="-120"/>
+                <a:cs typeface="Amiri" pitchFamily="2" charset="-78"/>
               </a:rPr>
               <a:t>CORE</a:t>
             </a:r>
@@ -17637,9 +17323,8 @@
                 <a:solidFill>
                   <a:srgbClr val="1B3B6F"/>
                 </a:solidFill>
-                <a:latin typeface="Amiri" pitchFamily="34" charset="0"/>
-                <a:ea typeface="Amiri" pitchFamily="34" charset="-122"/>
-                <a:cs typeface="Amiri" pitchFamily="34" charset="-120"/>
+                <a:latin typeface="Amiri" pitchFamily="2" charset="-78"/>
+                <a:cs typeface="Amiri" pitchFamily="2" charset="-78"/>
               </a:rPr>
               <a:t>٤ مَا هِيَ غُرْفَتُكَ المُفَضَّلَةُ؟ وَلِمَاذَا؟</a:t>
             </a:r>
@@ -17677,8 +17362,7 @@
                   <a:srgbClr val="5A6472"/>
                 </a:solidFill>
                 <a:latin typeface="Calibri" pitchFamily="34" charset="0"/>
-                <a:ea typeface="Calibri" pitchFamily="34" charset="-122"/>
-                <a:cs typeface="Calibri" pitchFamily="34" charset="-120"/>
+                <a:cs typeface="Amiri" pitchFamily="2" charset="-78"/>
               </a:rPr>
               <a:t>Your favourite room and why?</a:t>
             </a:r>
@@ -17743,8 +17427,7 @@
                   <a:srgbClr val="FFFFFF"/>
                 </a:solidFill>
                 <a:latin typeface="Calibri" pitchFamily="34" charset="0"/>
-                <a:ea typeface="Calibri" pitchFamily="34" charset="-122"/>
-                <a:cs typeface="Calibri" pitchFamily="34" charset="-120"/>
+                <a:cs typeface="Amiri" pitchFamily="2" charset="-78"/>
               </a:rPr>
               <a:t>CORE</a:t>
             </a:r>
@@ -17808,9 +17491,8 @@
                 <a:solidFill>
                   <a:srgbClr val="1B3B6F"/>
                 </a:solidFill>
-                <a:latin typeface="Amiri" pitchFamily="34" charset="0"/>
-                <a:ea typeface="Amiri" pitchFamily="34" charset="-122"/>
-                <a:cs typeface="Amiri" pitchFamily="34" charset="-120"/>
+                <a:latin typeface="Amiri" pitchFamily="2" charset="-78"/>
+                <a:cs typeface="Amiri" pitchFamily="2" charset="-78"/>
               </a:rPr>
               <a:t>٥ مَاذَا يُوجَدُ قُرْبَ بَيْتِكَ؟</a:t>
             </a:r>
@@ -17848,8 +17530,7 @@
                   <a:srgbClr val="5A6472"/>
                 </a:solidFill>
                 <a:latin typeface="Calibri" pitchFamily="34" charset="0"/>
-                <a:ea typeface="Calibri" pitchFamily="34" charset="-122"/>
-                <a:cs typeface="Calibri" pitchFamily="34" charset="-120"/>
+                <a:cs typeface="Amiri" pitchFamily="2" charset="-78"/>
               </a:rPr>
               <a:t>What is near your home?</a:t>
             </a:r>
@@ -17914,8 +17595,7 @@
                   <a:srgbClr val="FFFFFF"/>
                 </a:solidFill>
                 <a:latin typeface="Calibri" pitchFamily="34" charset="0"/>
-                <a:ea typeface="Calibri" pitchFamily="34" charset="-122"/>
-                <a:cs typeface="Calibri" pitchFamily="34" charset="-120"/>
+                <a:cs typeface="Amiri" pitchFamily="2" charset="-78"/>
               </a:rPr>
               <a:t>CORE</a:t>
             </a:r>
@@ -17953,8 +17633,7 @@
                   <a:srgbClr val="1B3B6F"/>
                 </a:solidFill>
                 <a:latin typeface="Calibri" pitchFamily="34" charset="0"/>
-                <a:ea typeface="Calibri" pitchFamily="34" charset="-122"/>
-                <a:cs typeface="Calibri" pitchFamily="34" charset="-120"/>
+                <a:cs typeface="Amiri" pitchFamily="2" charset="-78"/>
               </a:rPr>
               <a:t>Prepare cue words only (3 minutes): a direct answer, one detail, one opinion or reason — not a memorised script.</a:t>
             </a:r>
@@ -17992,8 +17671,7 @@
                   <a:srgbClr val="8A93A0"/>
                 </a:solidFill>
                 <a:latin typeface="Calibri" pitchFamily="34" charset="0"/>
-                <a:ea typeface="Calibri" pitchFamily="34" charset="-122"/>
-                <a:cs typeface="Calibri" pitchFamily="34" charset="-120"/>
+                <a:cs typeface="Amiri" pitchFamily="2" charset="-78"/>
               </a:rPr>
               <a:t>18 / 22</a:t>
             </a:r>
@@ -18087,9 +17765,8 @@
                 <a:solidFill>
                   <a:srgbClr val="D4AF37"/>
                 </a:solidFill>
-                <a:latin typeface="Amiri" pitchFamily="34" charset="0"/>
-                <a:ea typeface="Amiri" pitchFamily="34" charset="-122"/>
-                <a:cs typeface="Amiri" pitchFamily="34" charset="-120"/>
+                <a:latin typeface="Amiri" pitchFamily="2" charset="-78"/>
+                <a:cs typeface="Amiri" pitchFamily="2" charset="-78"/>
               </a:rPr>
               <a:t>م</a:t>
             </a:r>
@@ -18127,8 +17804,7 @@
                   <a:srgbClr val="1B3B6F"/>
                 </a:solidFill>
                 <a:latin typeface="Cambria" pitchFamily="34" charset="0"/>
-                <a:ea typeface="Cambria" pitchFamily="34" charset="-122"/>
-                <a:cs typeface="Cambria" pitchFamily="34" charset="-120"/>
+                <a:cs typeface="Amiri" pitchFamily="2" charset="-78"/>
               </a:rPr>
               <a:t>Al Madina Online School</a:t>
             </a:r>
@@ -18166,8 +17842,7 @@
                   <a:srgbClr val="8A6D1E"/>
                 </a:solidFill>
                 <a:latin typeface="Calibri" pitchFamily="34" charset="0"/>
-                <a:ea typeface="Calibri" pitchFamily="34" charset="-122"/>
-                <a:cs typeface="Calibri" pitchFamily="34" charset="-120"/>
+                <a:cs typeface="Amiri" pitchFamily="2" charset="-78"/>
               </a:rPr>
               <a:t>ARABIC DEPARTMENT · MIFTAH ARABIC · IGCSE 0544</a:t>
             </a:r>
@@ -18232,8 +17907,7 @@
                   <a:srgbClr val="FFFFFF"/>
                 </a:solidFill>
                 <a:latin typeface="Calibri" pitchFamily="34" charset="0"/>
-                <a:ea typeface="Calibri" pitchFamily="34" charset="-122"/>
-                <a:cs typeface="Calibri" pitchFamily="34" charset="-120"/>
+                <a:cs typeface="Amiri" pitchFamily="2" charset="-78"/>
               </a:rPr>
               <a:t>F3-L12 · F3 Assessment</a:t>
             </a:r>
@@ -18298,8 +17972,7 @@
                   <a:srgbClr val="FFFFFF"/>
                 </a:solidFill>
                 <a:latin typeface="Calibri" pitchFamily="34" charset="0"/>
-                <a:ea typeface="Calibri" pitchFamily="34" charset="-122"/>
-                <a:cs typeface="Calibri" pitchFamily="34" charset="-120"/>
+                <a:cs typeface="Amiri" pitchFamily="2" charset="-78"/>
               </a:rPr>
               <a:t>FEEDBACK · 3 MIN</a:t>
             </a:r>
@@ -18337,8 +18010,7 @@
                   <a:srgbClr val="8A6D1E"/>
                 </a:solidFill>
                 <a:latin typeface="Calibri" pitchFamily="34" charset="0"/>
-                <a:ea typeface="Calibri" pitchFamily="34" charset="-122"/>
-                <a:cs typeface="Calibri" pitchFamily="34" charset="-120"/>
+                <a:cs typeface="Amiri" pitchFamily="2" charset="-78"/>
               </a:rPr>
               <a:t>RESULTS · RECORD YOUR SCORE AND SET ONE F4 TARGET (WEBSITE)</a:t>
             </a:r>
@@ -18376,8 +18048,7 @@
                   <a:srgbClr val="1B3B6F"/>
                 </a:solidFill>
                 <a:latin typeface="Cambria" pitchFamily="34" charset="0"/>
-                <a:ea typeface="Cambria" pitchFamily="34" charset="-122"/>
-                <a:cs typeface="Cambria" pitchFamily="34" charset="-120"/>
+                <a:cs typeface="Amiri" pitchFamily="2" charset="-78"/>
               </a:rPr>
               <a:t>My F3 score profile</a:t>
             </a:r>
@@ -18414,9 +18085,8 @@
                 <a:solidFill>
                   <a:srgbClr val="8A6D1E"/>
                 </a:solidFill>
-                <a:latin typeface="Amiri" pitchFamily="34" charset="0"/>
-                <a:ea typeface="Amiri" pitchFamily="34" charset="-122"/>
-                <a:cs typeface="Amiri" pitchFamily="34" charset="-120"/>
+                <a:latin typeface="Amiri" pitchFamily="2" charset="-78"/>
+                <a:cs typeface="Amiri" pitchFamily="2" charset="-78"/>
               </a:rPr>
               <a:t>النَّتِيجَةُ وَهَدَفُ الوَحْدَةِ الرَّابِعَةِ</a:t>
             </a:r>
@@ -18454,8 +18124,7 @@
                   <a:srgbClr val="8A93A0"/>
                 </a:solidFill>
                 <a:latin typeface="Calibri" pitchFamily="34" charset="0"/>
-                <a:ea typeface="Calibri" pitchFamily="34" charset="-122"/>
-                <a:cs typeface="Calibri" pitchFamily="34" charset="-120"/>
+                <a:cs typeface="Amiri" pitchFamily="2" charset="-78"/>
               </a:rPr>
               <a:t>Miftah Arabic · Foundation F3 · My Family &amp; Home · F3-L12</a:t>
             </a:r>
@@ -18518,8 +18187,7 @@
                   <a:srgbClr val="FFFFFF"/>
                 </a:solidFill>
                 <a:latin typeface="Calibri" pitchFamily="34" charset="0"/>
-                <a:ea typeface="Calibri" pitchFamily="34" charset="-122"/>
-                <a:cs typeface="Calibri" pitchFamily="34" charset="-120"/>
+                <a:cs typeface="Amiri" pitchFamily="2" charset="-78"/>
               </a:rPr>
               <a:t>Section</a:t>
             </a:r>
@@ -18557,8 +18225,7 @@
                   <a:srgbClr val="FFFFFF"/>
                 </a:solidFill>
                 <a:latin typeface="Calibri" pitchFamily="34" charset="0"/>
-                <a:ea typeface="Calibri" pitchFamily="34" charset="-122"/>
-                <a:cs typeface="Calibri" pitchFamily="34" charset="-120"/>
+                <a:cs typeface="Amiri" pitchFamily="2" charset="-78"/>
               </a:rPr>
               <a:t>My score</a:t>
             </a:r>
@@ -18596,8 +18263,7 @@
                   <a:srgbClr val="FFFFFF"/>
                 </a:solidFill>
                 <a:latin typeface="Calibri" pitchFamily="34" charset="0"/>
-                <a:ea typeface="Calibri" pitchFamily="34" charset="-122"/>
-                <a:cs typeface="Calibri" pitchFamily="34" charset="-120"/>
+                <a:cs typeface="Amiri" pitchFamily="2" charset="-78"/>
               </a:rPr>
               <a:t>Guide (total /60) · teacher guide, not an exam grade</a:t>
             </a:r>
@@ -18662,8 +18328,7 @@
                   <a:srgbClr val="5A6472"/>
                 </a:solidFill>
                 <a:latin typeface="Calibri" pitchFamily="34" charset="0"/>
-                <a:ea typeface="Calibri" pitchFamily="34" charset="-122"/>
-                <a:cs typeface="Calibri" pitchFamily="34" charset="-120"/>
+                <a:cs typeface="Amiri" pitchFamily="2" charset="-78"/>
               </a:rPr>
               <a:t>A · Listening</a:t>
             </a:r>
@@ -18701,8 +18366,7 @@
                   <a:srgbClr val="5A6472"/>
                 </a:solidFill>
                 <a:latin typeface="Calibri" pitchFamily="34" charset="0"/>
-                <a:ea typeface="Calibri" pitchFamily="34" charset="-122"/>
-                <a:cs typeface="Calibri" pitchFamily="34" charset="-120"/>
+                <a:cs typeface="Amiri" pitchFamily="2" charset="-78"/>
               </a:rPr>
               <a:t>/20</a:t>
             </a:r>
@@ -18740,8 +18404,7 @@
                   <a:srgbClr val="5A6472"/>
                 </a:solidFill>
                 <a:latin typeface="Calibri" pitchFamily="34" charset="0"/>
-                <a:ea typeface="Calibri" pitchFamily="34" charset="-122"/>
-                <a:cs typeface="Calibri" pitchFamily="34" charset="-120"/>
+                <a:cs typeface="Amiri" pitchFamily="2" charset="-78"/>
               </a:rPr>
               <a:t>54–60 Excellent — secure F3 foundation</a:t>
             </a:r>
@@ -18806,8 +18469,7 @@
                   <a:srgbClr val="FFFFFF"/>
                 </a:solidFill>
                 <a:latin typeface="Calibri" pitchFamily="34" charset="0"/>
-                <a:ea typeface="Calibri" pitchFamily="34" charset="-122"/>
-                <a:cs typeface="Calibri" pitchFamily="34" charset="-120"/>
+                <a:cs typeface="Amiri" pitchFamily="2" charset="-78"/>
               </a:rPr>
               <a:t>CORE</a:t>
             </a:r>
@@ -18872,8 +18534,7 @@
                   <a:srgbClr val="5A6472"/>
                 </a:solidFill>
                 <a:latin typeface="Calibri" pitchFamily="34" charset="0"/>
-                <a:ea typeface="Calibri" pitchFamily="34" charset="-122"/>
-                <a:cs typeface="Calibri" pitchFamily="34" charset="-120"/>
+                <a:cs typeface="Amiri" pitchFamily="2" charset="-78"/>
               </a:rPr>
               <a:t>B · Reading</a:t>
             </a:r>
@@ -18911,8 +18572,7 @@
                   <a:srgbClr val="5A6472"/>
                 </a:solidFill>
                 <a:latin typeface="Calibri" pitchFamily="34" charset="0"/>
-                <a:ea typeface="Calibri" pitchFamily="34" charset="-122"/>
-                <a:cs typeface="Calibri" pitchFamily="34" charset="-120"/>
+                <a:cs typeface="Amiri" pitchFamily="2" charset="-78"/>
               </a:rPr>
               <a:t>/10</a:t>
             </a:r>
@@ -18950,8 +18610,7 @@
                   <a:srgbClr val="5A6472"/>
                 </a:solidFill>
                 <a:latin typeface="Calibri" pitchFamily="34" charset="0"/>
-                <a:ea typeface="Calibri" pitchFamily="34" charset="-122"/>
-                <a:cs typeface="Calibri" pitchFamily="34" charset="-120"/>
+                <a:cs typeface="Amiri" pitchFamily="2" charset="-78"/>
               </a:rPr>
               <a:t>42–53 Good — ready for F4 with one practice target</a:t>
             </a:r>
@@ -19016,8 +18675,7 @@
                   <a:srgbClr val="FFFFFF"/>
                 </a:solidFill>
                 <a:latin typeface="Calibri" pitchFamily="34" charset="0"/>
-                <a:ea typeface="Calibri" pitchFamily="34" charset="-122"/>
-                <a:cs typeface="Calibri" pitchFamily="34" charset="-120"/>
+                <a:cs typeface="Amiri" pitchFamily="2" charset="-78"/>
               </a:rPr>
               <a:t>CORE</a:t>
             </a:r>
@@ -19082,8 +18740,7 @@
                   <a:srgbClr val="5A6472"/>
                 </a:solidFill>
                 <a:latin typeface="Calibri" pitchFamily="34" charset="0"/>
-                <a:ea typeface="Calibri" pitchFamily="34" charset="-122"/>
-                <a:cs typeface="Calibri" pitchFamily="34" charset="-120"/>
+                <a:cs typeface="Amiri" pitchFamily="2" charset="-78"/>
               </a:rPr>
               <a:t>C · Writing</a:t>
             </a:r>
@@ -19121,8 +18778,7 @@
                   <a:srgbClr val="5A6472"/>
                 </a:solidFill>
                 <a:latin typeface="Calibri" pitchFamily="34" charset="0"/>
-                <a:ea typeface="Calibri" pitchFamily="34" charset="-122"/>
-                <a:cs typeface="Calibri" pitchFamily="34" charset="-120"/>
+                <a:cs typeface="Amiri" pitchFamily="2" charset="-78"/>
               </a:rPr>
               <a:t>/20</a:t>
             </a:r>
@@ -19160,8 +18816,7 @@
                   <a:srgbClr val="5A6472"/>
                 </a:solidFill>
                 <a:latin typeface="Calibri" pitchFamily="34" charset="0"/>
-                <a:ea typeface="Calibri" pitchFamily="34" charset="-122"/>
-                <a:cs typeface="Calibri" pitchFamily="34" charset="-120"/>
+                <a:cs typeface="Amiri" pitchFamily="2" charset="-78"/>
               </a:rPr>
               <a:t>30–41 Satisfactory — targeted F3 retrieval early in F4</a:t>
             </a:r>
@@ -19226,8 +18881,7 @@
                   <a:srgbClr val="FFFFFF"/>
                 </a:solidFill>
                 <a:latin typeface="Calibri" pitchFamily="34" charset="0"/>
-                <a:ea typeface="Calibri" pitchFamily="34" charset="-122"/>
-                <a:cs typeface="Calibri" pitchFamily="34" charset="-120"/>
+                <a:cs typeface="Amiri" pitchFamily="2" charset="-78"/>
               </a:rPr>
               <a:t>CORE</a:t>
             </a:r>
@@ -19292,8 +18946,7 @@
                   <a:srgbClr val="5A6472"/>
                 </a:solidFill>
                 <a:latin typeface="Calibri" pitchFamily="34" charset="0"/>
-                <a:ea typeface="Calibri" pitchFamily="34" charset="-122"/>
-                <a:cs typeface="Calibri" pitchFamily="34" charset="-120"/>
+                <a:cs typeface="Amiri" pitchFamily="2" charset="-78"/>
               </a:rPr>
               <a:t>D · Speaking</a:t>
             </a:r>
@@ -19331,8 +18984,7 @@
                   <a:srgbClr val="5A6472"/>
                 </a:solidFill>
                 <a:latin typeface="Calibri" pitchFamily="34" charset="0"/>
-                <a:ea typeface="Calibri" pitchFamily="34" charset="-122"/>
-                <a:cs typeface="Calibri" pitchFamily="34" charset="-120"/>
+                <a:cs typeface="Amiri" pitchFamily="2" charset="-78"/>
               </a:rPr>
               <a:t>/10</a:t>
             </a:r>
@@ -19370,8 +19022,7 @@
                   <a:srgbClr val="5A6472"/>
                 </a:solidFill>
                 <a:latin typeface="Calibri" pitchFamily="34" charset="0"/>
-                <a:ea typeface="Calibri" pitchFamily="34" charset="-122"/>
-                <a:cs typeface="Calibri" pitchFamily="34" charset="-120"/>
+                <a:cs typeface="Amiri" pitchFamily="2" charset="-78"/>
               </a:rPr>
               <a:t>Below 30 — catch-up on the lowest skill before F4</a:t>
             </a:r>
@@ -19436,8 +19087,7 @@
                   <a:srgbClr val="FFFFFF"/>
                 </a:solidFill>
                 <a:latin typeface="Calibri" pitchFamily="34" charset="0"/>
-                <a:ea typeface="Calibri" pitchFamily="34" charset="-122"/>
-                <a:cs typeface="Calibri" pitchFamily="34" charset="-120"/>
+                <a:cs typeface="Amiri" pitchFamily="2" charset="-78"/>
               </a:rPr>
               <a:t>CORE</a:t>
             </a:r>
@@ -19475,8 +19125,7 @@
                   <a:srgbClr val="1B3B6F"/>
                 </a:solidFill>
                 <a:latin typeface="Calibri" pitchFamily="34" charset="0"/>
-                <a:ea typeface="Calibri" pitchFamily="34" charset="-122"/>
-                <a:cs typeface="Calibri" pitchFamily="34" charset="-120"/>
+                <a:cs typeface="Amiri" pitchFamily="2" charset="-78"/>
               </a:rPr>
               <a:t>Website reflection frames: anā fakhūr(a) bi- … (I am proud of) · taqaddamtu fī … (I improved in) · hadafī fī F4 … (my F4 target).</a:t>
             </a:r>
@@ -19514,8 +19163,7 @@
                   <a:srgbClr val="8A93A0"/>
                 </a:solidFill>
                 <a:latin typeface="Calibri" pitchFamily="34" charset="0"/>
-                <a:ea typeface="Calibri" pitchFamily="34" charset="-122"/>
-                <a:cs typeface="Calibri" pitchFamily="34" charset="-120"/>
+                <a:cs typeface="Amiri" pitchFamily="2" charset="-78"/>
               </a:rPr>
               <a:t>19 / 22</a:t>
             </a:r>
@@ -19609,9 +19257,8 @@
                 <a:solidFill>
                   <a:srgbClr val="D4AF37"/>
                 </a:solidFill>
-                <a:latin typeface="Amiri" pitchFamily="34" charset="0"/>
-                <a:ea typeface="Amiri" pitchFamily="34" charset="-122"/>
-                <a:cs typeface="Amiri" pitchFamily="34" charset="-120"/>
+                <a:latin typeface="Amiri" pitchFamily="2" charset="-78"/>
+                <a:cs typeface="Amiri" pitchFamily="2" charset="-78"/>
               </a:rPr>
               <a:t>م</a:t>
             </a:r>
@@ -19649,8 +19296,7 @@
                   <a:srgbClr val="1B3B6F"/>
                 </a:solidFill>
                 <a:latin typeface="Cambria" pitchFamily="34" charset="0"/>
-                <a:ea typeface="Cambria" pitchFamily="34" charset="-122"/>
-                <a:cs typeface="Cambria" pitchFamily="34" charset="-120"/>
+                <a:cs typeface="Amiri" pitchFamily="2" charset="-78"/>
               </a:rPr>
               <a:t>Al Madina Online School</a:t>
             </a:r>
@@ -19688,8 +19334,7 @@
                   <a:srgbClr val="8A6D1E"/>
                 </a:solidFill>
                 <a:latin typeface="Calibri" pitchFamily="34" charset="0"/>
-                <a:ea typeface="Calibri" pitchFamily="34" charset="-122"/>
-                <a:cs typeface="Calibri" pitchFamily="34" charset="-120"/>
+                <a:cs typeface="Amiri" pitchFamily="2" charset="-78"/>
               </a:rPr>
               <a:t>ARABIC DEPARTMENT · MIFTAH ARABIC · IGCSE 0544</a:t>
             </a:r>
@@ -19754,8 +19399,7 @@
                   <a:srgbClr val="FFFFFF"/>
                 </a:solidFill>
                 <a:latin typeface="Calibri" pitchFamily="34" charset="0"/>
-                <a:ea typeface="Calibri" pitchFamily="34" charset="-122"/>
-                <a:cs typeface="Calibri" pitchFamily="34" charset="-120"/>
+                <a:cs typeface="Amiri" pitchFamily="2" charset="-78"/>
               </a:rPr>
               <a:t>F3-L12 · F3 Assessment</a:t>
             </a:r>
@@ -19820,8 +19464,7 @@
                   <a:srgbClr val="FFFFFF"/>
                 </a:solidFill>
                 <a:latin typeface="Calibri" pitchFamily="34" charset="0"/>
-                <a:ea typeface="Calibri" pitchFamily="34" charset="-122"/>
-                <a:cs typeface="Calibri" pitchFamily="34" charset="-120"/>
+                <a:cs typeface="Amiri" pitchFamily="2" charset="-78"/>
               </a:rPr>
               <a:t>WELCOME · 1 MIN</a:t>
             </a:r>
@@ -19859,8 +19502,7 @@
                   <a:srgbClr val="5A6472"/>
                 </a:solidFill>
                 <a:latin typeface="Calibri" pitchFamily="34" charset="0"/>
-                <a:ea typeface="Calibri" pitchFamily="34" charset="-122"/>
-                <a:cs typeface="Calibri" pitchFamily="34" charset="-120"/>
+                <a:cs typeface="Amiri" pitchFamily="2" charset="-78"/>
               </a:rPr>
               <a:t>BEFORE WE BEGIN</a:t>
             </a:r>
@@ -19898,8 +19540,7 @@
                   <a:srgbClr val="1B3B6F"/>
                 </a:solidFill>
                 <a:latin typeface="Cambria" pitchFamily="34" charset="0"/>
-                <a:ea typeface="Cambria" pitchFamily="34" charset="-122"/>
-                <a:cs typeface="Cambria" pitchFamily="34" charset="-120"/>
+                <a:cs typeface="Amiri" pitchFamily="2" charset="-78"/>
               </a:rPr>
               <a:t>Our online classroom</a:t>
             </a:r>
@@ -19936,9 +19577,8 @@
                 <a:solidFill>
                   <a:srgbClr val="8A6D1E"/>
                 </a:solidFill>
-                <a:latin typeface="Amiri" pitchFamily="34" charset="0"/>
-                <a:ea typeface="Amiri" pitchFamily="34" charset="-122"/>
-                <a:cs typeface="Amiri" pitchFamily="34" charset="-120"/>
+                <a:latin typeface="Amiri" pitchFamily="2" charset="-78"/>
+                <a:cs typeface="Amiri" pitchFamily="2" charset="-78"/>
               </a:rPr>
               <a:t>آدَابُ الصَّفِّ</a:t>
             </a:r>
@@ -19976,8 +19616,7 @@
                   <a:srgbClr val="8A93A0"/>
                 </a:solidFill>
                 <a:latin typeface="Calibri" pitchFamily="34" charset="0"/>
-                <a:ea typeface="Calibri" pitchFamily="34" charset="-122"/>
-                <a:cs typeface="Calibri" pitchFamily="34" charset="-120"/>
+                <a:cs typeface="Amiri" pitchFamily="2" charset="-78"/>
               </a:rPr>
               <a:t>Miftah Arabic · Foundation F3 · My Family &amp; Home · F3-L12</a:t>
             </a:r>
@@ -20098,8 +19737,7 @@
                   <a:srgbClr val="1B3B6F"/>
                 </a:solidFill>
                 <a:latin typeface="Calibri" pitchFamily="34" charset="0"/>
-                <a:ea typeface="Calibri" pitchFamily="34" charset="-122"/>
-                <a:cs typeface="Calibri" pitchFamily="34" charset="-120"/>
+                <a:cs typeface="Amiri" pitchFamily="2" charset="-78"/>
               </a:rPr>
               <a:t>Camera on</a:t>
             </a:r>
@@ -20115,8 +19753,7 @@
                   <a:srgbClr val="5A6472"/>
                 </a:solidFill>
                 <a:latin typeface="Calibri" pitchFamily="34" charset="0"/>
-                <a:ea typeface="Calibri" pitchFamily="34" charset="-122"/>
-                <a:cs typeface="Calibri" pitchFamily="34" charset="-120"/>
+                <a:cs typeface="Amiri" pitchFamily="2" charset="-78"/>
               </a:rPr>
               <a:t>So I can see you learning and help you quickly.</a:t>
             </a:r>
@@ -20237,8 +19874,7 @@
                   <a:srgbClr val="1B3B6F"/>
                 </a:solidFill>
                 <a:latin typeface="Calibri" pitchFamily="34" charset="0"/>
-                <a:ea typeface="Calibri" pitchFamily="34" charset="-122"/>
-                <a:cs typeface="Calibri" pitchFamily="34" charset="-120"/>
+                <a:cs typeface="Amiri" pitchFamily="2" charset="-78"/>
               </a:rPr>
               <a:t>Mic muted</a:t>
             </a:r>
@@ -20254,8 +19890,7 @@
                   <a:srgbClr val="5A6472"/>
                 </a:solidFill>
                 <a:latin typeface="Calibri" pitchFamily="34" charset="0"/>
-                <a:ea typeface="Calibri" pitchFamily="34" charset="-122"/>
-                <a:cs typeface="Calibri" pitchFamily="34" charset="-120"/>
+                <a:cs typeface="Amiri" pitchFamily="2" charset="-78"/>
               </a:rPr>
               <a:t>Unmute only when invited to speak.</a:t>
             </a:r>
@@ -20376,8 +20011,7 @@
                   <a:srgbClr val="1B3B6F"/>
                 </a:solidFill>
                 <a:latin typeface="Calibri" pitchFamily="34" charset="0"/>
-                <a:ea typeface="Calibri" pitchFamily="34" charset="-122"/>
-                <a:cs typeface="Calibri" pitchFamily="34" charset="-120"/>
+                <a:cs typeface="Amiri" pitchFamily="2" charset="-78"/>
               </a:rPr>
               <a:t>Chat for learning</a:t>
             </a:r>
@@ -20393,8 +20027,7 @@
                   <a:srgbClr val="5A6472"/>
                 </a:solidFill>
                 <a:latin typeface="Calibri" pitchFamily="34" charset="0"/>
-                <a:ea typeface="Calibri" pitchFamily="34" charset="-122"/>
-                <a:cs typeface="Calibri" pitchFamily="34" charset="-120"/>
+                <a:cs typeface="Amiri" pitchFamily="2" charset="-78"/>
               </a:rPr>
               <a:t>Answers, questions and Arabic only.</a:t>
             </a:r>
@@ -20515,8 +20148,7 @@
                   <a:srgbClr val="1B3B6F"/>
                 </a:solidFill>
                 <a:latin typeface="Calibri" pitchFamily="34" charset="0"/>
-                <a:ea typeface="Calibri" pitchFamily="34" charset="-122"/>
-                <a:cs typeface="Calibri" pitchFamily="34" charset="-120"/>
+                <a:cs typeface="Amiri" pitchFamily="2" charset="-78"/>
               </a:rPr>
               <a:t>Raise your hand</a:t>
             </a:r>
@@ -20532,8 +20164,7 @@
                   <a:srgbClr val="5A6472"/>
                 </a:solidFill>
                 <a:latin typeface="Calibri" pitchFamily="34" charset="0"/>
-                <a:ea typeface="Calibri" pitchFamily="34" charset="-122"/>
-                <a:cs typeface="Calibri" pitchFamily="34" charset="-120"/>
+                <a:cs typeface="Amiri" pitchFamily="2" charset="-78"/>
               </a:rPr>
               <a:t>Use the hand button to ask for help.</a:t>
             </a:r>
@@ -20605,8 +20236,7 @@
                   <a:srgbClr val="1B3B6F"/>
                 </a:solidFill>
                 <a:latin typeface="Calibri" pitchFamily="34" charset="0"/>
-                <a:ea typeface="Calibri" pitchFamily="34" charset="-122"/>
-                <a:cs typeface="Calibri" pitchFamily="34" charset="-120"/>
+                <a:cs typeface="Amiri" pitchFamily="2" charset="-78"/>
               </a:rPr>
               <a:t>HOW WE TALK — THE ORACY CODE</a:t>
             </a:r>
@@ -20669,8 +20299,7 @@
                   <a:srgbClr val="D4AF37"/>
                 </a:solidFill>
                 <a:latin typeface="Arial" pitchFamily="34" charset="0"/>
-                <a:ea typeface="Arial" pitchFamily="34" charset="-122"/>
-                <a:cs typeface="Arial" pitchFamily="34" charset="-120"/>
+                <a:cs typeface="Amiri" pitchFamily="2" charset="-78"/>
               </a:rPr>
               <a:t>●</a:t>
             </a:r>
@@ -20708,8 +20337,7 @@
                   <a:srgbClr val="1B3B6F"/>
                 </a:solidFill>
                 <a:latin typeface="Calibri" pitchFamily="34" charset="0"/>
-                <a:ea typeface="Calibri" pitchFamily="34" charset="-122"/>
-                <a:cs typeface="Calibri" pitchFamily="34" charset="-120"/>
+                <a:cs typeface="Amiri" pitchFamily="2" charset="-78"/>
               </a:rPr>
               <a:t>Think</a:t>
             </a:r>
@@ -20725,8 +20353,7 @@
                   <a:srgbClr val="5A6472"/>
                 </a:solidFill>
                 <a:latin typeface="Calibri" pitchFamily="34" charset="0"/>
-                <a:ea typeface="Calibri" pitchFamily="34" charset="-122"/>
-                <a:cs typeface="Calibri" pitchFamily="34" charset="-120"/>
+                <a:cs typeface="Amiri" pitchFamily="2" charset="-78"/>
               </a:rPr>
               <a:t>silent preparation</a:t>
             </a:r>
@@ -20789,8 +20416,7 @@
                   <a:srgbClr val="D4AF37"/>
                 </a:solidFill>
                 <a:latin typeface="Arial" pitchFamily="34" charset="0"/>
-                <a:ea typeface="Arial" pitchFamily="34" charset="-122"/>
-                <a:cs typeface="Arial" pitchFamily="34" charset="-120"/>
+                <a:cs typeface="Amiri" pitchFamily="2" charset="-78"/>
               </a:rPr>
               <a:t>↔</a:t>
             </a:r>
@@ -20828,8 +20454,7 @@
                   <a:srgbClr val="1B3B6F"/>
                 </a:solidFill>
                 <a:latin typeface="Calibri" pitchFamily="34" charset="0"/>
-                <a:ea typeface="Calibri" pitchFamily="34" charset="-122"/>
-                <a:cs typeface="Calibri" pitchFamily="34" charset="-120"/>
+                <a:cs typeface="Amiri" pitchFamily="2" charset="-78"/>
               </a:rPr>
               <a:t>Rehearse</a:t>
             </a:r>
@@ -20845,8 +20470,7 @@
                   <a:srgbClr val="5A6472"/>
                 </a:solidFill>
                 <a:latin typeface="Calibri" pitchFamily="34" charset="0"/>
-                <a:ea typeface="Calibri" pitchFamily="34" charset="-122"/>
-                <a:cs typeface="Calibri" pitchFamily="34" charset="-120"/>
+                <a:cs typeface="Amiri" pitchFamily="2" charset="-78"/>
               </a:rPr>
               <a:t>both partners speak</a:t>
             </a:r>
@@ -20909,8 +20533,7 @@
                   <a:srgbClr val="D4AF37"/>
                 </a:solidFill>
                 <a:latin typeface="Arial" pitchFamily="34" charset="0"/>
-                <a:ea typeface="Arial" pitchFamily="34" charset="-122"/>
-                <a:cs typeface="Arial" pitchFamily="34" charset="-120"/>
+                <a:cs typeface="Amiri" pitchFamily="2" charset="-78"/>
               </a:rPr>
               <a:t>+</a:t>
             </a:r>
@@ -20948,8 +20571,7 @@
                   <a:srgbClr val="1B3B6F"/>
                 </a:solidFill>
                 <a:latin typeface="Calibri" pitchFamily="34" charset="0"/>
-                <a:ea typeface="Calibri" pitchFamily="34" charset="-122"/>
-                <a:cs typeface="Calibri" pitchFamily="34" charset="-120"/>
+                <a:cs typeface="Amiri" pitchFamily="2" charset="-78"/>
               </a:rPr>
               <a:t>Build</a:t>
             </a:r>
@@ -20965,8 +20587,7 @@
                   <a:srgbClr val="5A6472"/>
                 </a:solidFill>
                 <a:latin typeface="Calibri" pitchFamily="34" charset="0"/>
-                <a:ea typeface="Calibri" pitchFamily="34" charset="-122"/>
-                <a:cs typeface="Calibri" pitchFamily="34" charset="-120"/>
+                <a:cs typeface="Amiri" pitchFamily="2" charset="-78"/>
               </a:rPr>
               <a:t>add a reason or detail</a:t>
             </a:r>
@@ -21029,8 +20650,7 @@
                   <a:srgbClr val="D4AF37"/>
                 </a:solidFill>
                 <a:latin typeface="Arial" pitchFamily="34" charset="0"/>
-                <a:ea typeface="Arial" pitchFamily="34" charset="-122"/>
-                <a:cs typeface="Arial" pitchFamily="34" charset="-120"/>
+                <a:cs typeface="Amiri" pitchFamily="2" charset="-78"/>
               </a:rPr>
               <a:t>?</a:t>
             </a:r>
@@ -21068,8 +20688,7 @@
                   <a:srgbClr val="1B3B6F"/>
                 </a:solidFill>
                 <a:latin typeface="Calibri" pitchFamily="34" charset="0"/>
-                <a:ea typeface="Calibri" pitchFamily="34" charset="-122"/>
-                <a:cs typeface="Calibri" pitchFamily="34" charset="-120"/>
+                <a:cs typeface="Amiri" pitchFamily="2" charset="-78"/>
               </a:rPr>
               <a:t>Challenge</a:t>
             </a:r>
@@ -21085,8 +20704,7 @@
                   <a:srgbClr val="5A6472"/>
                 </a:solidFill>
                 <a:latin typeface="Calibri" pitchFamily="34" charset="0"/>
-                <a:ea typeface="Calibri" pitchFamily="34" charset="-122"/>
-                <a:cs typeface="Calibri" pitchFamily="34" charset="-120"/>
+                <a:cs typeface="Amiri" pitchFamily="2" charset="-78"/>
               </a:rPr>
               <a:t>question respectfully</a:t>
             </a:r>
@@ -21149,8 +20767,7 @@
                   <a:srgbClr val="D4AF37"/>
                 </a:solidFill>
                 <a:latin typeface="Arial" pitchFamily="34" charset="0"/>
-                <a:ea typeface="Arial" pitchFamily="34" charset="-122"/>
-                <a:cs typeface="Arial" pitchFamily="34" charset="-120"/>
+                <a:cs typeface="Amiri" pitchFamily="2" charset="-78"/>
               </a:rPr>
               <a:t>◎</a:t>
             </a:r>
@@ -21188,8 +20805,7 @@
                   <a:srgbClr val="1B3B6F"/>
                 </a:solidFill>
                 <a:latin typeface="Calibri" pitchFamily="34" charset="0"/>
-                <a:ea typeface="Calibri" pitchFamily="34" charset="-122"/>
-                <a:cs typeface="Calibri" pitchFamily="34" charset="-120"/>
+                <a:cs typeface="Amiri" pitchFamily="2" charset="-78"/>
               </a:rPr>
               <a:t>Share</a:t>
             </a:r>
@@ -21205,8 +20821,7 @@
                   <a:srgbClr val="5A6472"/>
                 </a:solidFill>
                 <a:latin typeface="Calibri" pitchFamily="34" charset="0"/>
-                <a:ea typeface="Calibri" pitchFamily="34" charset="-122"/>
-                <a:cs typeface="Calibri" pitchFamily="34" charset="-120"/>
+                <a:cs typeface="Amiri" pitchFamily="2" charset="-78"/>
               </a:rPr>
               <a:t>anyone may be invited</a:t>
             </a:r>
@@ -21269,8 +20884,7 @@
                   <a:srgbClr val="D4AF37"/>
                 </a:solidFill>
                 <a:latin typeface="Arial" pitchFamily="34" charset="0"/>
-                <a:ea typeface="Arial" pitchFamily="34" charset="-122"/>
-                <a:cs typeface="Arial" pitchFamily="34" charset="-120"/>
+                <a:cs typeface="Amiri" pitchFamily="2" charset="-78"/>
               </a:rPr>
               <a:t>↺</a:t>
             </a:r>
@@ -21308,8 +20922,7 @@
                   <a:srgbClr val="1B3B6F"/>
                 </a:solidFill>
                 <a:latin typeface="Calibri" pitchFamily="34" charset="0"/>
-                <a:ea typeface="Calibri" pitchFamily="34" charset="-122"/>
-                <a:cs typeface="Calibri" pitchFamily="34" charset="-120"/>
+                <a:cs typeface="Amiri" pitchFamily="2" charset="-78"/>
               </a:rPr>
               <a:t>Summarise</a:t>
             </a:r>
@@ -21325,8 +20938,7 @@
                   <a:srgbClr val="5A6472"/>
                 </a:solidFill>
                 <a:latin typeface="Calibri" pitchFamily="34" charset="0"/>
-                <a:ea typeface="Calibri" pitchFamily="34" charset="-122"/>
-                <a:cs typeface="Calibri" pitchFamily="34" charset="-120"/>
+                <a:cs typeface="Amiri" pitchFamily="2" charset="-78"/>
               </a:rPr>
               <a:t>say it more precisely</a:t>
             </a:r>
@@ -21364,8 +20976,7 @@
                   <a:srgbClr val="8A6D1E"/>
                 </a:solidFill>
                 <a:latin typeface="Calibri" pitchFamily="34" charset="0"/>
-                <a:ea typeface="Calibri" pitchFamily="34" charset="-122"/>
-                <a:cs typeface="Calibri" pitchFamily="34" charset="-120"/>
+                <a:cs typeface="Amiri" pitchFamily="2" charset="-78"/>
               </a:rPr>
               <a:t>I will always give you thinking and practice time before I ask anyone. Reading aloud is by invitation — you can always say “pass, please come back to me”.</a:t>
             </a:r>
@@ -21403,8 +21014,7 @@
                   <a:srgbClr val="8A93A0"/>
                 </a:solidFill>
                 <a:latin typeface="Calibri" pitchFamily="34" charset="0"/>
-                <a:ea typeface="Calibri" pitchFamily="34" charset="-122"/>
-                <a:cs typeface="Calibri" pitchFamily="34" charset="-120"/>
+                <a:cs typeface="Amiri" pitchFamily="2" charset="-78"/>
               </a:rPr>
               <a:t>2 / 22</a:t>
             </a:r>
@@ -21498,9 +21108,8 @@
                 <a:solidFill>
                   <a:srgbClr val="D4AF37"/>
                 </a:solidFill>
-                <a:latin typeface="Amiri" pitchFamily="34" charset="0"/>
-                <a:ea typeface="Amiri" pitchFamily="34" charset="-122"/>
-                <a:cs typeface="Amiri" pitchFamily="34" charset="-120"/>
+                <a:latin typeface="Amiri" pitchFamily="2" charset="-78"/>
+                <a:cs typeface="Amiri" pitchFamily="2" charset="-78"/>
               </a:rPr>
               <a:t>م</a:t>
             </a:r>
@@ -21538,8 +21147,7 @@
                   <a:srgbClr val="1B3B6F"/>
                 </a:solidFill>
                 <a:latin typeface="Cambria" pitchFamily="34" charset="0"/>
-                <a:ea typeface="Cambria" pitchFamily="34" charset="-122"/>
-                <a:cs typeface="Cambria" pitchFamily="34" charset="-120"/>
+                <a:cs typeface="Amiri" pitchFamily="2" charset="-78"/>
               </a:rPr>
               <a:t>Al Madina Online School</a:t>
             </a:r>
@@ -21577,8 +21185,7 @@
                   <a:srgbClr val="8A6D1E"/>
                 </a:solidFill>
                 <a:latin typeface="Calibri" pitchFamily="34" charset="0"/>
-                <a:ea typeface="Calibri" pitchFamily="34" charset="-122"/>
-                <a:cs typeface="Calibri" pitchFamily="34" charset="-120"/>
+                <a:cs typeface="Amiri" pitchFamily="2" charset="-78"/>
               </a:rPr>
               <a:t>ARABIC DEPARTMENT · MIFTAH ARABIC · IGCSE 0544</a:t>
             </a:r>
@@ -21643,8 +21250,7 @@
                   <a:srgbClr val="FFFFFF"/>
                 </a:solidFill>
                 <a:latin typeface="Calibri" pitchFamily="34" charset="0"/>
-                <a:ea typeface="Calibri" pitchFamily="34" charset="-122"/>
-                <a:cs typeface="Calibri" pitchFamily="34" charset="-120"/>
+                <a:cs typeface="Amiri" pitchFamily="2" charset="-78"/>
               </a:rPr>
               <a:t>F3-L12 · F3 Assessment</a:t>
             </a:r>
@@ -21709,8 +21315,7 @@
                   <a:srgbClr val="FFFFFF"/>
                 </a:solidFill>
                 <a:latin typeface="Calibri" pitchFamily="34" charset="0"/>
-                <a:ea typeface="Calibri" pitchFamily="34" charset="-122"/>
-                <a:cs typeface="Calibri" pitchFamily="34" charset="-120"/>
+                <a:cs typeface="Amiri" pitchFamily="2" charset="-78"/>
               </a:rPr>
               <a:t>FEEDBACK · 1 MIN</a:t>
             </a:r>
@@ -21748,8 +21353,7 @@
                   <a:srgbClr val="8A6D1E"/>
                 </a:solidFill>
                 <a:latin typeface="Calibri" pitchFamily="34" charset="0"/>
-                <a:ea typeface="Calibri" pitchFamily="34" charset="-122"/>
-                <a:cs typeface="Calibri" pitchFamily="34" charset="-120"/>
+                <a:cs typeface="Amiri" pitchFamily="2" charset="-78"/>
               </a:rPr>
               <a:t>FEEDBACK · SUCCESS CRITERIA</a:t>
             </a:r>
@@ -21787,8 +21391,7 @@
                   <a:srgbClr val="1B3B6F"/>
                 </a:solidFill>
                 <a:latin typeface="Cambria" pitchFamily="34" charset="0"/>
-                <a:ea typeface="Cambria" pitchFamily="34" charset="-122"/>
-                <a:cs typeface="Cambria" pitchFamily="34" charset="-120"/>
+                <a:cs typeface="Amiri" pitchFamily="2" charset="-78"/>
               </a:rPr>
               <a:t>Check your work</a:t>
             </a:r>
@@ -21825,9 +21428,8 @@
                 <a:solidFill>
                   <a:srgbClr val="8A6D1E"/>
                 </a:solidFill>
-                <a:latin typeface="Amiri" pitchFamily="34" charset="0"/>
-                <a:ea typeface="Amiri" pitchFamily="34" charset="-122"/>
-                <a:cs typeface="Amiri" pitchFamily="34" charset="-120"/>
+                <a:latin typeface="Amiri" pitchFamily="2" charset="-78"/>
+                <a:cs typeface="Amiri" pitchFamily="2" charset="-78"/>
               </a:rPr>
               <a:t>قَيِّمْ عَمَلَكَ</a:t>
             </a:r>
@@ -21865,8 +21467,7 @@
                   <a:srgbClr val="8A93A0"/>
                 </a:solidFill>
                 <a:latin typeface="Calibri" pitchFamily="34" charset="0"/>
-                <a:ea typeface="Calibri" pitchFamily="34" charset="-122"/>
-                <a:cs typeface="Calibri" pitchFamily="34" charset="-120"/>
+                <a:cs typeface="Amiri" pitchFamily="2" charset="-78"/>
               </a:rPr>
               <a:t>Miftah Arabic · Foundation F3 · My Family &amp; Home · F3-L12</a:t>
             </a:r>
@@ -21963,8 +21564,7 @@
                   <a:srgbClr val="1F2A37"/>
                 </a:solidFill>
                 <a:latin typeface="Calibri" pitchFamily="34" charset="0"/>
-                <a:ea typeface="Calibri" pitchFamily="34" charset="-122"/>
-                <a:cs typeface="Calibri" pitchFamily="34" charset="-120"/>
+                <a:cs typeface="Amiri" pitchFamily="2" charset="-78"/>
               </a:rPr>
               <a:t>I can name family members, rooms and furniture.</a:t>
             </a:r>
@@ -22029,8 +21629,7 @@
                   <a:srgbClr val="FFFFFF"/>
                 </a:solidFill>
                 <a:latin typeface="Calibri" pitchFamily="34" charset="0"/>
-                <a:ea typeface="Calibri" pitchFamily="34" charset="-122"/>
-                <a:cs typeface="Calibri" pitchFamily="34" charset="-120"/>
+                <a:cs typeface="Amiri" pitchFamily="2" charset="-78"/>
               </a:rPr>
               <a:t>CORE</a:t>
             </a:r>
@@ -22127,8 +21726,7 @@
                   <a:srgbClr val="1F2A37"/>
                 </a:solidFill>
                 <a:latin typeface="Calibri" pitchFamily="34" charset="0"/>
-                <a:ea typeface="Calibri" pitchFamily="34" charset="-122"/>
-                <a:cs typeface="Calibri" pitchFamily="34" charset="-120"/>
+                <a:cs typeface="Amiri" pitchFamily="2" charset="-78"/>
               </a:rPr>
               <a:t>I can say what is in my home and where it is.</a:t>
             </a:r>
@@ -22193,8 +21791,7 @@
                   <a:srgbClr val="FFFFFF"/>
                 </a:solidFill>
                 <a:latin typeface="Calibri" pitchFamily="34" charset="0"/>
-                <a:ea typeface="Calibri" pitchFamily="34" charset="-122"/>
-                <a:cs typeface="Calibri" pitchFamily="34" charset="-120"/>
+                <a:cs typeface="Amiri" pitchFamily="2" charset="-78"/>
               </a:rPr>
               <a:t>CORE</a:t>
             </a:r>
@@ -22291,8 +21888,7 @@
                   <a:srgbClr val="1F2A37"/>
                 </a:solidFill>
                 <a:latin typeface="Calibri" pitchFamily="34" charset="0"/>
-                <a:ea typeface="Calibri" pitchFamily="34" charset="-122"/>
-                <a:cs typeface="Calibri" pitchFamily="34" charset="-120"/>
+                <a:cs typeface="Amiri" pitchFamily="2" charset="-78"/>
               </a:rPr>
               <a:t>I can describe people and rooms with accurate agreement.</a:t>
             </a:r>
@@ -22357,8 +21953,7 @@
                   <a:srgbClr val="FFFFFF"/>
                 </a:solidFill>
                 <a:latin typeface="Calibri" pitchFamily="34" charset="0"/>
-                <a:ea typeface="Calibri" pitchFamily="34" charset="-122"/>
-                <a:cs typeface="Calibri" pitchFamily="34" charset="-120"/>
+                <a:cs typeface="Amiri" pitchFamily="2" charset="-78"/>
               </a:rPr>
               <a:t>DEVELOP</a:t>
             </a:r>
@@ -22455,8 +22050,7 @@
                   <a:srgbClr val="1F2A37"/>
                 </a:solidFill>
                 <a:latin typeface="Calibri" pitchFamily="34" charset="0"/>
-                <a:ea typeface="Calibri" pitchFamily="34" charset="-122"/>
-                <a:cs typeface="Calibri" pitchFamily="34" charset="-120"/>
+                <a:cs typeface="Amiri" pitchFamily="2" charset="-78"/>
               </a:rPr>
               <a:t>I can find exact evidence in a text and answer in Arabic.</a:t>
             </a:r>
@@ -22521,8 +22115,7 @@
                   <a:srgbClr val="FFFFFF"/>
                 </a:solidFill>
                 <a:latin typeface="Calibri" pitchFamily="34" charset="0"/>
-                <a:ea typeface="Calibri" pitchFamily="34" charset="-122"/>
-                <a:cs typeface="Calibri" pitchFamily="34" charset="-120"/>
+                <a:cs typeface="Amiri" pitchFamily="2" charset="-78"/>
               </a:rPr>
               <a:t>DEVELOP</a:t>
             </a:r>
@@ -22619,8 +22212,7 @@
                   <a:srgbClr val="1F2A37"/>
                 </a:solidFill>
                 <a:latin typeface="Calibri" pitchFamily="34" charset="0"/>
-                <a:ea typeface="Calibri" pitchFamily="34" charset="-122"/>
-                <a:cs typeface="Calibri" pitchFamily="34" charset="-120"/>
+                <a:cs typeface="Amiri" pitchFamily="2" charset="-78"/>
               </a:rPr>
               <a:t>I can write 60–80 connected words with reasons.</a:t>
             </a:r>
@@ -22685,8 +22277,7 @@
                   <a:srgbClr val="FFFFFF"/>
                 </a:solidFill>
                 <a:latin typeface="Calibri" pitchFamily="34" charset="0"/>
-                <a:ea typeface="Calibri" pitchFamily="34" charset="-122"/>
-                <a:cs typeface="Calibri" pitchFamily="34" charset="-120"/>
+                <a:cs typeface="Amiri" pitchFamily="2" charset="-78"/>
               </a:rPr>
               <a:t>STRETCH</a:t>
             </a:r>
@@ -22758,8 +22349,7 @@
                   <a:srgbClr val="2E8B57"/>
                 </a:solidFill>
                 <a:latin typeface="Calibri" pitchFamily="34" charset="0"/>
-                <a:ea typeface="Calibri" pitchFamily="34" charset="-122"/>
-                <a:cs typeface="Calibri" pitchFamily="34" charset="-120"/>
+                <a:cs typeface="Amiri" pitchFamily="2" charset="-78"/>
               </a:rPr>
               <a:t>WWW</a:t>
             </a:r>
@@ -22775,8 +22365,7 @@
                   <a:srgbClr val="1F2A37"/>
                 </a:solidFill>
                 <a:latin typeface="Calibri" pitchFamily="34" charset="0"/>
-                <a:ea typeface="Calibri" pitchFamily="34" charset="-122"/>
-                <a:cs typeface="Calibri" pitchFamily="34" charset="-120"/>
+                <a:cs typeface="Amiri" pitchFamily="2" charset="-78"/>
               </a:rPr>
               <a:t>What went well? One thing you did accurately.</a:t>
             </a:r>
@@ -22848,8 +22437,7 @@
                   <a:srgbClr val="C9780A"/>
                 </a:solidFill>
                 <a:latin typeface="Calibri" pitchFamily="34" charset="0"/>
-                <a:ea typeface="Calibri" pitchFamily="34" charset="-122"/>
-                <a:cs typeface="Calibri" pitchFamily="34" charset="-120"/>
+                <a:cs typeface="Amiri" pitchFamily="2" charset="-78"/>
               </a:rPr>
               <a:t>EBI</a:t>
             </a:r>
@@ -22865,8 +22453,7 @@
                   <a:srgbClr val="1F2A37"/>
                 </a:solidFill>
                 <a:latin typeface="Calibri" pitchFamily="34" charset="0"/>
-                <a:ea typeface="Calibri" pitchFamily="34" charset="-122"/>
-                <a:cs typeface="Calibri" pitchFamily="34" charset="-120"/>
+                <a:cs typeface="Amiri" pitchFamily="2" charset="-78"/>
               </a:rPr>
               <a:t>Even better if… One thing you will fix or add.</a:t>
             </a:r>
@@ -22904,8 +22491,7 @@
                   <a:srgbClr val="8A93A0"/>
                 </a:solidFill>
                 <a:latin typeface="Calibri" pitchFamily="34" charset="0"/>
-                <a:ea typeface="Calibri" pitchFamily="34" charset="-122"/>
-                <a:cs typeface="Calibri" pitchFamily="34" charset="-120"/>
+                <a:cs typeface="Amiri" pitchFamily="2" charset="-78"/>
               </a:rPr>
               <a:t>20 / 22</a:t>
             </a:r>
@@ -22999,9 +22585,8 @@
                 <a:solidFill>
                   <a:srgbClr val="D4AF37"/>
                 </a:solidFill>
-                <a:latin typeface="Amiri" pitchFamily="34" charset="0"/>
-                <a:ea typeface="Amiri" pitchFamily="34" charset="-122"/>
-                <a:cs typeface="Amiri" pitchFamily="34" charset="-120"/>
+                <a:latin typeface="Amiri" pitchFamily="2" charset="-78"/>
+                <a:cs typeface="Amiri" pitchFamily="2" charset="-78"/>
               </a:rPr>
               <a:t>م</a:t>
             </a:r>
@@ -23039,8 +22624,7 @@
                   <a:srgbClr val="1B3B6F"/>
                 </a:solidFill>
                 <a:latin typeface="Cambria" pitchFamily="34" charset="0"/>
-                <a:ea typeface="Cambria" pitchFamily="34" charset="-122"/>
-                <a:cs typeface="Cambria" pitchFamily="34" charset="-120"/>
+                <a:cs typeface="Amiri" pitchFamily="2" charset="-78"/>
               </a:rPr>
               <a:t>Al Madina Online School</a:t>
             </a:r>
@@ -23078,8 +22662,7 @@
                   <a:srgbClr val="8A6D1E"/>
                 </a:solidFill>
                 <a:latin typeface="Calibri" pitchFamily="34" charset="0"/>
-                <a:ea typeface="Calibri" pitchFamily="34" charset="-122"/>
-                <a:cs typeface="Calibri" pitchFamily="34" charset="-120"/>
+                <a:cs typeface="Amiri" pitchFamily="2" charset="-78"/>
               </a:rPr>
               <a:t>ARABIC DEPARTMENT · MIFTAH ARABIC · IGCSE 0544</a:t>
             </a:r>
@@ -23144,8 +22727,7 @@
                   <a:srgbClr val="FFFFFF"/>
                 </a:solidFill>
                 <a:latin typeface="Calibri" pitchFamily="34" charset="0"/>
-                <a:ea typeface="Calibri" pitchFamily="34" charset="-122"/>
-                <a:cs typeface="Calibri" pitchFamily="34" charset="-120"/>
+                <a:cs typeface="Amiri" pitchFamily="2" charset="-78"/>
               </a:rPr>
               <a:t>F3-L12 · F3 Assessment</a:t>
             </a:r>
@@ -23210,8 +22792,7 @@
                   <a:srgbClr val="FFFFFF"/>
                 </a:solidFill>
                 <a:latin typeface="Calibri" pitchFamily="34" charset="0"/>
-                <a:ea typeface="Calibri" pitchFamily="34" charset="-122"/>
-                <a:cs typeface="Calibri" pitchFamily="34" charset="-120"/>
+                <a:cs typeface="Amiri" pitchFamily="2" charset="-78"/>
               </a:rPr>
               <a:t>PREPARATION · 2 MIN</a:t>
             </a:r>
@@ -23249,8 +22830,7 @@
                   <a:srgbClr val="C45A3C"/>
                 </a:solidFill>
                 <a:latin typeface="Calibri" pitchFamily="34" charset="0"/>
-                <a:ea typeface="Calibri" pitchFamily="34" charset="-122"/>
-                <a:cs typeface="Calibri" pitchFamily="34" charset="-120"/>
+                <a:cs typeface="Amiri" pitchFamily="2" charset="-78"/>
               </a:rPr>
               <a:t>PREPARATION FOR NEXT LESSON · ABOUT 10 MINUTES</a:t>
             </a:r>
@@ -23288,8 +22868,7 @@
                   <a:srgbClr val="1B3B6F"/>
                 </a:solidFill>
                 <a:latin typeface="Cambria" pitchFamily="34" charset="0"/>
-                <a:ea typeface="Cambria" pitchFamily="34" charset="-122"/>
-                <a:cs typeface="Cambria" pitchFamily="34" charset="-120"/>
+                <a:cs typeface="Amiri" pitchFamily="2" charset="-78"/>
               </a:rPr>
               <a:t>Before F4-L01: get ready at home</a:t>
             </a:r>
@@ -23326,9 +22905,8 @@
                 <a:solidFill>
                   <a:srgbClr val="8A6D1E"/>
                 </a:solidFill>
-                <a:latin typeface="Amiri" pitchFamily="34" charset="0"/>
-                <a:ea typeface="Amiri" pitchFamily="34" charset="-122"/>
-                <a:cs typeface="Amiri" pitchFamily="34" charset="-120"/>
+                <a:latin typeface="Amiri" pitchFamily="2" charset="-78"/>
+                <a:cs typeface="Amiri" pitchFamily="2" charset="-78"/>
               </a:rPr>
               <a:t>التَّحْضِيرُ لِلدَّرْسِ القَادِمِ</a:t>
             </a:r>
@@ -23366,8 +22944,7 @@
                   <a:srgbClr val="8A93A0"/>
                 </a:solidFill>
                 <a:latin typeface="Calibri" pitchFamily="34" charset="0"/>
-                <a:ea typeface="Calibri" pitchFamily="34" charset="-122"/>
-                <a:cs typeface="Calibri" pitchFamily="34" charset="-120"/>
+                <a:cs typeface="Amiri" pitchFamily="2" charset="-78"/>
               </a:rPr>
               <a:t>Miftah Arabic · Foundation F3 · My Family &amp; Home · F3-L12</a:t>
             </a:r>
@@ -23488,8 +23065,7 @@
                   <a:srgbClr val="C45A3C"/>
                 </a:solidFill>
                 <a:latin typeface="Calibri" pitchFamily="34" charset="0"/>
-                <a:ea typeface="Calibri" pitchFamily="34" charset="-122"/>
-                <a:cs typeface="Calibri" pitchFamily="34" charset="-120"/>
+                <a:cs typeface="Amiri" pitchFamily="2" charset="-78"/>
               </a:rPr>
               <a:t>LEARN THESE 5 WORDS</a:t>
             </a:r>
@@ -23505,8 +23081,7 @@
                   <a:srgbClr val="5A6472"/>
                 </a:solidFill>
                 <a:latin typeface="Calibri" pitchFamily="34" charset="0"/>
-                <a:ea typeface="Calibri" pitchFamily="34" charset="-122"/>
-                <a:cs typeface="Calibri" pitchFamily="34" charset="-120"/>
+                <a:cs typeface="Amiri" pitchFamily="2" charset="-78"/>
               </a:rPr>
               <a:t>for F4-L01 · School Subjects — What Do You Study?</a:t>
             </a:r>
@@ -23543,9 +23118,8 @@
                 <a:solidFill>
                   <a:srgbClr val="1B3B6F"/>
                 </a:solidFill>
-                <a:latin typeface="Amiri" pitchFamily="34" charset="0"/>
-                <a:ea typeface="Amiri" pitchFamily="34" charset="-122"/>
-                <a:cs typeface="Amiri" pitchFamily="34" charset="-120"/>
+                <a:latin typeface="Amiri" pitchFamily="2" charset="-78"/>
+                <a:cs typeface="Amiri" pitchFamily="2" charset="-78"/>
               </a:rPr>
               <a:t>الرِّيَاضِيَّاتُ</a:t>
             </a:r>
@@ -23583,8 +23157,7 @@
                   <a:srgbClr val="1F2A37"/>
                 </a:solidFill>
                 <a:latin typeface="Calibri" pitchFamily="34" charset="0"/>
-                <a:ea typeface="Calibri" pitchFamily="34" charset="-122"/>
-                <a:cs typeface="Calibri" pitchFamily="34" charset="-120"/>
+                <a:cs typeface="Amiri" pitchFamily="2" charset="-78"/>
               </a:rPr>
               <a:t>mathematics</a:t>
             </a:r>
@@ -23597,8 +23170,7 @@
                   <a:srgbClr val="5A6472"/>
                 </a:solidFill>
                 <a:latin typeface="Calibri" pitchFamily="34" charset="0"/>
-                <a:ea typeface="Calibri" pitchFamily="34" charset="-122"/>
-                <a:cs typeface="Calibri" pitchFamily="34" charset="-120"/>
+                <a:cs typeface="Amiri" pitchFamily="2" charset="-78"/>
               </a:rPr>
               <a:t>  f.</a:t>
             </a:r>
@@ -23635,9 +23207,8 @@
                 <a:solidFill>
                   <a:srgbClr val="1B3B6F"/>
                 </a:solidFill>
-                <a:latin typeface="Amiri" pitchFamily="34" charset="0"/>
-                <a:ea typeface="Amiri" pitchFamily="34" charset="-122"/>
-                <a:cs typeface="Amiri" pitchFamily="34" charset="-120"/>
+                <a:latin typeface="Amiri" pitchFamily="2" charset="-78"/>
+                <a:cs typeface="Amiri" pitchFamily="2" charset="-78"/>
               </a:rPr>
               <a:t>العُلُومُ</a:t>
             </a:r>
@@ -23675,8 +23246,7 @@
                   <a:srgbClr val="1F2A37"/>
                 </a:solidFill>
                 <a:latin typeface="Calibri" pitchFamily="34" charset="0"/>
-                <a:ea typeface="Calibri" pitchFamily="34" charset="-122"/>
-                <a:cs typeface="Calibri" pitchFamily="34" charset="-120"/>
+                <a:cs typeface="Amiri" pitchFamily="2" charset="-78"/>
               </a:rPr>
               <a:t>science</a:t>
             </a:r>
@@ -23689,8 +23259,7 @@
                   <a:srgbClr val="5A6472"/>
                 </a:solidFill>
                 <a:latin typeface="Calibri" pitchFamily="34" charset="0"/>
-                <a:ea typeface="Calibri" pitchFamily="34" charset="-122"/>
-                <a:cs typeface="Calibri" pitchFamily="34" charset="-120"/>
+                <a:cs typeface="Amiri" pitchFamily="2" charset="-78"/>
               </a:rPr>
               <a:t>  f.</a:t>
             </a:r>
@@ -23727,9 +23296,8 @@
                 <a:solidFill>
                   <a:srgbClr val="1B3B6F"/>
                 </a:solidFill>
-                <a:latin typeface="Amiri" pitchFamily="34" charset="0"/>
-                <a:ea typeface="Amiri" pitchFamily="34" charset="-122"/>
-                <a:cs typeface="Amiri" pitchFamily="34" charset="-120"/>
+                <a:latin typeface="Amiri" pitchFamily="2" charset="-78"/>
+                <a:cs typeface="Amiri" pitchFamily="2" charset="-78"/>
               </a:rPr>
               <a:t>التَّارِيخُ</a:t>
             </a:r>
@@ -23767,8 +23335,7 @@
                   <a:srgbClr val="1F2A37"/>
                 </a:solidFill>
                 <a:latin typeface="Calibri" pitchFamily="34" charset="0"/>
-                <a:ea typeface="Calibri" pitchFamily="34" charset="-122"/>
-                <a:cs typeface="Calibri" pitchFamily="34" charset="-120"/>
+                <a:cs typeface="Amiri" pitchFamily="2" charset="-78"/>
               </a:rPr>
               <a:t>history</a:t>
             </a:r>
@@ -23781,8 +23348,7 @@
                   <a:srgbClr val="5A6472"/>
                 </a:solidFill>
                 <a:latin typeface="Calibri" pitchFamily="34" charset="0"/>
-                <a:ea typeface="Calibri" pitchFamily="34" charset="-122"/>
-                <a:cs typeface="Calibri" pitchFamily="34" charset="-120"/>
+                <a:cs typeface="Amiri" pitchFamily="2" charset="-78"/>
               </a:rPr>
               <a:t>  m.</a:t>
             </a:r>
@@ -23819,9 +23385,8 @@
                 <a:solidFill>
                   <a:srgbClr val="1B3B6F"/>
                 </a:solidFill>
-                <a:latin typeface="Amiri" pitchFamily="34" charset="0"/>
-                <a:ea typeface="Amiri" pitchFamily="34" charset="-122"/>
-                <a:cs typeface="Amiri" pitchFamily="34" charset="-120"/>
+                <a:latin typeface="Amiri" pitchFamily="2" charset="-78"/>
+                <a:cs typeface="Amiri" pitchFamily="2" charset="-78"/>
               </a:rPr>
               <a:t>الجُغْرَافِيَا</a:t>
             </a:r>
@@ -23859,8 +23424,7 @@
                   <a:srgbClr val="1F2A37"/>
                 </a:solidFill>
                 <a:latin typeface="Calibri" pitchFamily="34" charset="0"/>
-                <a:ea typeface="Calibri" pitchFamily="34" charset="-122"/>
-                <a:cs typeface="Calibri" pitchFamily="34" charset="-120"/>
+                <a:cs typeface="Amiri" pitchFamily="2" charset="-78"/>
               </a:rPr>
               <a:t>geography</a:t>
             </a:r>
@@ -23873,8 +23437,7 @@
                   <a:srgbClr val="5A6472"/>
                 </a:solidFill>
                 <a:latin typeface="Calibri" pitchFamily="34" charset="0"/>
-                <a:ea typeface="Calibri" pitchFamily="34" charset="-122"/>
-                <a:cs typeface="Calibri" pitchFamily="34" charset="-120"/>
+                <a:cs typeface="Amiri" pitchFamily="2" charset="-78"/>
               </a:rPr>
               <a:t>  f.</a:t>
             </a:r>
@@ -23911,9 +23474,8 @@
                 <a:solidFill>
                   <a:srgbClr val="1B3B6F"/>
                 </a:solidFill>
-                <a:latin typeface="Amiri" pitchFamily="34" charset="0"/>
-                <a:ea typeface="Amiri" pitchFamily="34" charset="-122"/>
-                <a:cs typeface="Amiri" pitchFamily="34" charset="-120"/>
+                <a:latin typeface="Amiri" pitchFamily="2" charset="-78"/>
+                <a:cs typeface="Amiri" pitchFamily="2" charset="-78"/>
               </a:rPr>
               <a:t>الفَنُّ</a:t>
             </a:r>
@@ -23951,8 +23513,7 @@
                   <a:srgbClr val="1F2A37"/>
                 </a:solidFill>
                 <a:latin typeface="Calibri" pitchFamily="34" charset="0"/>
-                <a:ea typeface="Calibri" pitchFamily="34" charset="-122"/>
-                <a:cs typeface="Calibri" pitchFamily="34" charset="-120"/>
+                <a:cs typeface="Amiri" pitchFamily="2" charset="-78"/>
               </a:rPr>
               <a:t>art</a:t>
             </a:r>
@@ -23965,8 +23526,7 @@
                   <a:srgbClr val="5A6472"/>
                 </a:solidFill>
                 <a:latin typeface="Calibri" pitchFamily="34" charset="0"/>
-                <a:ea typeface="Calibri" pitchFamily="34" charset="-122"/>
-                <a:cs typeface="Calibri" pitchFamily="34" charset="-120"/>
+                <a:cs typeface="Amiri" pitchFamily="2" charset="-78"/>
               </a:rPr>
               <a:t>  m.</a:t>
             </a:r>
@@ -24004,8 +23564,7 @@
                   <a:srgbClr val="C45A3C"/>
                 </a:solidFill>
                 <a:latin typeface="Calibri" pitchFamily="34" charset="0"/>
-                <a:ea typeface="Calibri" pitchFamily="34" charset="-122"/>
-                <a:cs typeface="Calibri" pitchFamily="34" charset="-120"/>
+                <a:cs typeface="Amiri" pitchFamily="2" charset="-78"/>
               </a:rPr>
               <a:t>AND ANSWER ONE QUESTION</a:t>
             </a:r>
@@ -24043,8 +23602,7 @@
                   <a:srgbClr val="1F2A37"/>
                 </a:solidFill>
                 <a:latin typeface="Calibri" pitchFamily="34" charset="0"/>
-                <a:ea typeface="Calibri" pitchFamily="34" charset="-122"/>
-                <a:cs typeface="Calibri" pitchFamily="34" charset="-120"/>
+                <a:cs typeface="Amiri" pitchFamily="2" charset="-78"/>
               </a:rPr>
               <a:t>Write your F4 target: one skill, one repeated action, one check date.</a:t>
             </a:r>
@@ -24081,9 +23639,8 @@
                 <a:solidFill>
                   <a:srgbClr val="1B3B6F"/>
                 </a:solidFill>
-                <a:latin typeface="Amiri" pitchFamily="34" charset="0"/>
-                <a:ea typeface="Amiri" pitchFamily="34" charset="-122"/>
-                <a:cs typeface="Amiri" pitchFamily="34" charset="-120"/>
+                <a:latin typeface="Amiri" pitchFamily="2" charset="-78"/>
+                <a:cs typeface="Amiri" pitchFamily="2" charset="-78"/>
               </a:rPr>
               <a:t>هَدَفِي …</a:t>
             </a:r>
@@ -24121,8 +23678,7 @@
                   <a:srgbClr val="1B3B6F"/>
                 </a:solidFill>
                 <a:latin typeface="Calibri" pitchFamily="34" charset="0"/>
-                <a:ea typeface="Calibri" pitchFamily="34" charset="-122"/>
-                <a:cs typeface="Calibri" pitchFamily="34" charset="-120"/>
+                <a:cs typeface="Amiri" pitchFamily="2" charset="-78"/>
               </a:rPr>
               <a:t>HOMEWORK — CHOOSE YOUR ROUTE</a:t>
             </a:r>
@@ -24221,8 +23777,7 @@
                   <a:srgbClr val="FFFFFF"/>
                 </a:solidFill>
                 <a:latin typeface="Calibri" pitchFamily="34" charset="0"/>
-                <a:ea typeface="Calibri" pitchFamily="34" charset="-122"/>
-                <a:cs typeface="Calibri" pitchFamily="34" charset="-120"/>
+                <a:cs typeface="Amiri" pitchFamily="2" charset="-78"/>
               </a:rPr>
               <a:t>CORE</a:t>
             </a:r>
@@ -24260,8 +23815,7 @@
                   <a:srgbClr val="1F2A37"/>
                 </a:solidFill>
                 <a:latin typeface="Calibri" pitchFamily="34" charset="0"/>
-                <a:ea typeface="Calibri" pitchFamily="34" charset="-122"/>
-                <a:cs typeface="Calibri" pitchFamily="34" charset="-120"/>
+                <a:cs typeface="Amiri" pitchFamily="2" charset="-78"/>
               </a:rPr>
               <a:t>Redo the website F3-L12 section with your lowest score; learn the five school subjects.</a:t>
             </a:r>
@@ -24360,8 +23914,7 @@
                   <a:srgbClr val="FFFFFF"/>
                 </a:solidFill>
                 <a:latin typeface="Calibri" pitchFamily="34" charset="0"/>
-                <a:ea typeface="Calibri" pitchFamily="34" charset="-122"/>
-                <a:cs typeface="Calibri" pitchFamily="34" charset="-120"/>
+                <a:cs typeface="Amiri" pitchFamily="2" charset="-78"/>
               </a:rPr>
               <a:t>DEVELOP</a:t>
             </a:r>
@@ -24399,8 +23952,7 @@
                   <a:srgbClr val="1F2A37"/>
                 </a:solidFill>
                 <a:latin typeface="Calibri" pitchFamily="34" charset="0"/>
-                <a:ea typeface="Calibri" pitchFamily="34" charset="-122"/>
-                <a:cs typeface="Calibri" pitchFamily="34" charset="-120"/>
+                <a:cs typeface="Amiri" pitchFamily="2" charset="-78"/>
               </a:rPr>
               <a:t>Improve one sentence of your assessed writing, then learn the five subjects.</a:t>
             </a:r>
@@ -24499,8 +24051,7 @@
                   <a:srgbClr val="FFFFFF"/>
                 </a:solidFill>
                 <a:latin typeface="Calibri" pitchFamily="34" charset="0"/>
-                <a:ea typeface="Calibri" pitchFamily="34" charset="-122"/>
-                <a:cs typeface="Calibri" pitchFamily="34" charset="-120"/>
+                <a:cs typeface="Amiri" pitchFamily="2" charset="-78"/>
               </a:rPr>
               <a:t>STRETCH</a:t>
             </a:r>
@@ -24538,8 +24089,7 @@
                   <a:srgbClr val="1F2A37"/>
                 </a:solidFill>
                 <a:latin typeface="Calibri" pitchFamily="34" charset="0"/>
-                <a:ea typeface="Calibri" pitchFamily="34" charset="-122"/>
-                <a:cs typeface="Calibri" pitchFamily="34" charset="-120"/>
+                <a:cs typeface="Amiri" pitchFamily="2" charset="-78"/>
               </a:rPr>
               <a:t>Write three sentences: I study … · I like … because … (using the five subjects).</a:t>
             </a:r>
@@ -24577,8 +24127,7 @@
                   <a:srgbClr val="8A93A0"/>
                 </a:solidFill>
                 <a:latin typeface="Calibri" pitchFamily="34" charset="0"/>
-                <a:ea typeface="Calibri" pitchFamily="34" charset="-122"/>
-                <a:cs typeface="Calibri" pitchFamily="34" charset="-120"/>
+                <a:cs typeface="Amiri" pitchFamily="2" charset="-78"/>
               </a:rPr>
               <a:t>21 / 22</a:t>
             </a:r>
@@ -24722,8 +24271,7 @@
                   <a:srgbClr val="D4AF37"/>
                 </a:solidFill>
                 <a:latin typeface="Calibri" pitchFamily="34" charset="0"/>
-                <a:ea typeface="Calibri" pitchFamily="34" charset="-122"/>
-                <a:cs typeface="Calibri" pitchFamily="34" charset="-120"/>
+                <a:cs typeface="Amiri" pitchFamily="2" charset="-78"/>
               </a:rPr>
               <a:t>F3-L12 COMPLETE</a:t>
             </a:r>
@@ -24760,9 +24308,8 @@
                 <a:solidFill>
                   <a:srgbClr val="FFFFFF"/>
                 </a:solidFill>
-                <a:latin typeface="Amiri" pitchFamily="34" charset="0"/>
-                <a:ea typeface="Amiri" pitchFamily="34" charset="-122"/>
-                <a:cs typeface="Amiri" pitchFamily="34" charset="-120"/>
+                <a:latin typeface="Amiri" pitchFamily="2" charset="-78"/>
+                <a:cs typeface="Amiri" pitchFamily="2" charset="-78"/>
               </a:rPr>
               <a:t>أَحْسَنْتُمْ! إِلَى اللِّقَاءِ</a:t>
             </a:r>
@@ -24800,8 +24347,7 @@
                   <a:srgbClr val="C6D2E6"/>
                 </a:solidFill>
                 <a:latin typeface="Calibri" pitchFamily="34" charset="0"/>
-                <a:ea typeface="Calibri" pitchFamily="34" charset="-122"/>
-                <a:cs typeface="Calibri" pitchFamily="34" charset="-120"/>
+                <a:cs typeface="Amiri" pitchFamily="2" charset="-78"/>
               </a:rPr>
               <a:t>Well done — see you next lesson.</a:t>
             </a:r>
@@ -24839,8 +24385,7 @@
                   <a:srgbClr val="D4AF37"/>
                 </a:solidFill>
                 <a:latin typeface="Calibri" pitchFamily="34" charset="0"/>
-                <a:ea typeface="Calibri" pitchFamily="34" charset="-122"/>
-                <a:cs typeface="Calibri" pitchFamily="34" charset="-120"/>
+                <a:cs typeface="Amiri" pitchFamily="2" charset="-78"/>
               </a:rPr>
               <a:t>NEXT LESSON</a:t>
             </a:r>
@@ -24878,8 +24423,7 @@
                   <a:srgbClr val="FFFFFF"/>
                 </a:solidFill>
                 <a:latin typeface="Cambria" pitchFamily="34" charset="0"/>
-                <a:ea typeface="Cambria" pitchFamily="34" charset="-122"/>
-                <a:cs typeface="Cambria" pitchFamily="34" charset="-120"/>
+                <a:cs typeface="Amiri" pitchFamily="2" charset="-78"/>
               </a:rPr>
               <a:t>F4-L01 · School Subjects — What Do You Study?</a:t>
             </a:r>
@@ -24916,9 +24460,8 @@
                 <a:solidFill>
                   <a:srgbClr val="D4AF37"/>
                 </a:solidFill>
-                <a:latin typeface="Amiri" pitchFamily="34" charset="0"/>
-                <a:ea typeface="Amiri" pitchFamily="34" charset="-122"/>
-                <a:cs typeface="Amiri" pitchFamily="34" charset="-120"/>
+                <a:latin typeface="Amiri" pitchFamily="2" charset="-78"/>
+                <a:cs typeface="Amiri" pitchFamily="2" charset="-78"/>
               </a:rPr>
               <a:t>المَوَادُّ الدِّرَاسِيَّةُ</a:t>
             </a:r>
@@ -24956,8 +24499,7 @@
                   <a:srgbClr val="FFFFFF"/>
                 </a:solidFill>
                 <a:latin typeface="Calibri" pitchFamily="34" charset="0"/>
-                <a:ea typeface="Calibri" pitchFamily="34" charset="-122"/>
-                <a:cs typeface="Calibri" pitchFamily="34" charset="-120"/>
+                <a:cs typeface="Amiri" pitchFamily="2" charset="-78"/>
               </a:rPr>
               <a:t>F3 complete — well done! Learn 5 school subjects for F4.</a:t>
             </a:r>
@@ -25051,9 +24593,8 @@
                 <a:solidFill>
                   <a:srgbClr val="D4AF37"/>
                 </a:solidFill>
-                <a:latin typeface="Amiri" pitchFamily="34" charset="0"/>
-                <a:ea typeface="Amiri" pitchFamily="34" charset="-122"/>
-                <a:cs typeface="Amiri" pitchFamily="34" charset="-120"/>
+                <a:latin typeface="Amiri" pitchFamily="2" charset="-78"/>
+                <a:cs typeface="Amiri" pitchFamily="2" charset="-78"/>
               </a:rPr>
               <a:t>م</a:t>
             </a:r>
@@ -25091,8 +24632,7 @@
                   <a:srgbClr val="1B3B6F"/>
                 </a:solidFill>
                 <a:latin typeface="Cambria" pitchFamily="34" charset="0"/>
-                <a:ea typeface="Cambria" pitchFamily="34" charset="-122"/>
-                <a:cs typeface="Cambria" pitchFamily="34" charset="-120"/>
+                <a:cs typeface="Amiri" pitchFamily="2" charset="-78"/>
               </a:rPr>
               <a:t>Al Madina Online School</a:t>
             </a:r>
@@ -25130,8 +24670,7 @@
                   <a:srgbClr val="8A6D1E"/>
                 </a:solidFill>
                 <a:latin typeface="Calibri" pitchFamily="34" charset="0"/>
-                <a:ea typeface="Calibri" pitchFamily="34" charset="-122"/>
-                <a:cs typeface="Calibri" pitchFamily="34" charset="-120"/>
+                <a:cs typeface="Amiri" pitchFamily="2" charset="-78"/>
               </a:rPr>
               <a:t>ARABIC DEPARTMENT · MIFTAH ARABIC · IGCSE 0544</a:t>
             </a:r>
@@ -25196,8 +24735,7 @@
                   <a:srgbClr val="FFFFFF"/>
                 </a:solidFill>
                 <a:latin typeface="Calibri" pitchFamily="34" charset="0"/>
-                <a:ea typeface="Calibri" pitchFamily="34" charset="-122"/>
-                <a:cs typeface="Calibri" pitchFamily="34" charset="-120"/>
+                <a:cs typeface="Amiri" pitchFamily="2" charset="-78"/>
               </a:rPr>
               <a:t>F3-L12 · F3 Assessment</a:t>
             </a:r>
@@ -25262,8 +24800,7 @@
                   <a:srgbClr val="FFFFFF"/>
                 </a:solidFill>
                 <a:latin typeface="Calibri" pitchFamily="34" charset="0"/>
-                <a:ea typeface="Calibri" pitchFamily="34" charset="-122"/>
-                <a:cs typeface="Calibri" pitchFamily="34" charset="-120"/>
+                <a:cs typeface="Amiri" pitchFamily="2" charset="-78"/>
               </a:rPr>
               <a:t>WELCOME</a:t>
             </a:r>
@@ -25301,8 +24838,7 @@
                   <a:srgbClr val="5A6472"/>
                 </a:solidFill>
                 <a:latin typeface="Calibri" pitchFamily="34" charset="0"/>
-                <a:ea typeface="Calibri" pitchFamily="34" charset="-122"/>
-                <a:cs typeface="Calibri" pitchFamily="34" charset="-120"/>
+                <a:cs typeface="Amiri" pitchFamily="2" charset="-78"/>
               </a:rPr>
               <a:t>TODAY’S LESSON MAP</a:t>
             </a:r>
@@ -25340,8 +24876,7 @@
                   <a:srgbClr val="1B3B6F"/>
                 </a:solidFill>
                 <a:latin typeface="Cambria" pitchFamily="34" charset="0"/>
-                <a:ea typeface="Cambria" pitchFamily="34" charset="-122"/>
-                <a:cs typeface="Cambria" pitchFamily="34" charset="-120"/>
+                <a:cs typeface="Amiri" pitchFamily="2" charset="-78"/>
               </a:rPr>
               <a:t>Our assessment, step by step</a:t>
             </a:r>
@@ -25378,9 +24913,8 @@
                 <a:solidFill>
                   <a:srgbClr val="8A6D1E"/>
                 </a:solidFill>
-                <a:latin typeface="Amiri" pitchFamily="34" charset="0"/>
-                <a:ea typeface="Amiri" pitchFamily="34" charset="-122"/>
-                <a:cs typeface="Amiri" pitchFamily="34" charset="-120"/>
+                <a:latin typeface="Amiri" pitchFamily="2" charset="-78"/>
+                <a:cs typeface="Amiri" pitchFamily="2" charset="-78"/>
               </a:rPr>
               <a:t>خَرِيطَةُ الدَّرْسِ</a:t>
             </a:r>
@@ -25418,8 +24952,7 @@
                   <a:srgbClr val="8A93A0"/>
                 </a:solidFill>
                 <a:latin typeface="Calibri" pitchFamily="34" charset="0"/>
-                <a:ea typeface="Calibri" pitchFamily="34" charset="-122"/>
-                <a:cs typeface="Calibri" pitchFamily="34" charset="-120"/>
+                <a:cs typeface="Amiri" pitchFamily="2" charset="-78"/>
               </a:rPr>
               <a:t>Miftah Arabic · Foundation F3 · My Family &amp; Home · F3-L12</a:t>
             </a:r>
@@ -25518,8 +25051,7 @@
                   <a:srgbClr val="FFFFFF"/>
                 </a:solidFill>
                 <a:latin typeface="Calibri" pitchFamily="34" charset="0"/>
-                <a:ea typeface="Calibri" pitchFamily="34" charset="-122"/>
-                <a:cs typeface="Calibri" pitchFamily="34" charset="-120"/>
+                <a:cs typeface="Amiri" pitchFamily="2" charset="-78"/>
               </a:rPr>
               <a:t>DO NOW</a:t>
             </a:r>
@@ -25557,8 +25089,7 @@
                   <a:srgbClr val="E8EDF5"/>
                 </a:solidFill>
                 <a:latin typeface="Calibri" pitchFamily="34" charset="0"/>
-                <a:ea typeface="Calibri" pitchFamily="34" charset="-122"/>
-                <a:cs typeface="Calibri" pitchFamily="34" charset="-120"/>
+                <a:cs typeface="Amiri" pitchFamily="2" charset="-78"/>
               </a:rPr>
               <a:t>4 min</a:t>
             </a:r>
@@ -25621,8 +25152,7 @@
                   <a:srgbClr val="1B3B6F"/>
                 </a:solidFill>
                 <a:latin typeface="Calibri" pitchFamily="34" charset="0"/>
-                <a:ea typeface="Calibri" pitchFamily="34" charset="-122"/>
-                <a:cs typeface="Calibri" pitchFamily="34" charset="-120"/>
+                <a:cs typeface="Amiri" pitchFamily="2" charset="-78"/>
               </a:rPr>
               <a:t>1</a:t>
             </a:r>
@@ -25660,8 +25190,7 @@
                   <a:srgbClr val="1F2A37"/>
                 </a:solidFill>
                 <a:latin typeface="Calibri" pitchFamily="34" charset="0"/>
-                <a:ea typeface="Calibri" pitchFamily="34" charset="-122"/>
-                <a:cs typeface="Calibri" pitchFamily="34" charset="-120"/>
+                <a:cs typeface="Amiri" pitchFamily="2" charset="-78"/>
               </a:rPr>
               <a:t>Warm-up (not marked).</a:t>
             </a:r>
@@ -25698,9 +25227,8 @@
                 <a:solidFill>
                   <a:srgbClr val="0E7C86"/>
                 </a:solidFill>
-                <a:latin typeface="Amiri" pitchFamily="34" charset="0"/>
-                <a:ea typeface="Amiri" pitchFamily="34" charset="-122"/>
-                <a:cs typeface="Amiri" pitchFamily="34" charset="-120"/>
+                <a:latin typeface="Amiri" pitchFamily="2" charset="-78"/>
+                <a:cs typeface="Amiri" pitchFamily="2" charset="-78"/>
               </a:rPr>
               <a:t>تَهْيِئَةٌ</a:t>
             </a:r>
@@ -25799,8 +25327,7 @@
                   <a:srgbClr val="FFFFFF"/>
                 </a:solidFill>
                 <a:latin typeface="Calibri" pitchFamily="34" charset="0"/>
-                <a:ea typeface="Calibri" pitchFamily="34" charset="-122"/>
-                <a:cs typeface="Calibri" pitchFamily="34" charset="-120"/>
+                <a:cs typeface="Amiri" pitchFamily="2" charset="-78"/>
               </a:rPr>
               <a:t>TEACHER INSTRUCTION</a:t>
             </a:r>
@@ -25838,8 +25365,7 @@
                   <a:srgbClr val="E8EDF5"/>
                 </a:solidFill>
                 <a:latin typeface="Calibri" pitchFamily="34" charset="0"/>
-                <a:ea typeface="Calibri" pitchFamily="34" charset="-122"/>
-                <a:cs typeface="Calibri" pitchFamily="34" charset="-120"/>
+                <a:cs typeface="Amiri" pitchFamily="2" charset="-78"/>
               </a:rPr>
               <a:t>1 min</a:t>
             </a:r>
@@ -25902,8 +25428,7 @@
                   <a:srgbClr val="1B3B6F"/>
                 </a:solidFill>
                 <a:latin typeface="Calibri" pitchFamily="34" charset="0"/>
-                <a:ea typeface="Calibri" pitchFamily="34" charset="-122"/>
-                <a:cs typeface="Calibri" pitchFamily="34" charset="-120"/>
+                <a:cs typeface="Amiri" pitchFamily="2" charset="-78"/>
               </a:rPr>
               <a:t>2</a:t>
             </a:r>
@@ -25941,8 +25466,7 @@
                   <a:srgbClr val="1F2A37"/>
                 </a:solidFill>
                 <a:latin typeface="Calibri" pitchFamily="34" charset="0"/>
-                <a:ea typeface="Calibri" pitchFamily="34" charset="-122"/>
-                <a:cs typeface="Calibri" pitchFamily="34" charset="-120"/>
+                <a:cs typeface="Amiri" pitchFamily="2" charset="-78"/>
               </a:rPr>
               <a:t>The 60-mark map.</a:t>
             </a:r>
@@ -25979,9 +25503,8 @@
                 <a:solidFill>
                   <a:srgbClr val="1B3B6F"/>
                 </a:solidFill>
-                <a:latin typeface="Amiri" pitchFamily="34" charset="0"/>
-                <a:ea typeface="Amiri" pitchFamily="34" charset="-122"/>
-                <a:cs typeface="Amiri" pitchFamily="34" charset="-120"/>
+                <a:latin typeface="Amiri" pitchFamily="2" charset="-78"/>
+                <a:cs typeface="Amiri" pitchFamily="2" charset="-78"/>
               </a:rPr>
               <a:t>خُطَّةُ التَّقْيِيمِ</a:t>
             </a:r>
@@ -26080,8 +25603,7 @@
                   <a:srgbClr val="FFFFFF"/>
                 </a:solidFill>
                 <a:latin typeface="Calibri" pitchFamily="34" charset="0"/>
-                <a:ea typeface="Calibri" pitchFamily="34" charset="-122"/>
-                <a:cs typeface="Calibri" pitchFamily="34" charset="-120"/>
+                <a:cs typeface="Amiri" pitchFamily="2" charset="-78"/>
               </a:rPr>
               <a:t>I DO</a:t>
             </a:r>
@@ -26119,8 +25641,7 @@
                   <a:srgbClr val="E8EDF5"/>
                 </a:solidFill>
                 <a:latin typeface="Calibri" pitchFamily="34" charset="0"/>
-                <a:ea typeface="Calibri" pitchFamily="34" charset="-122"/>
-                <a:cs typeface="Calibri" pitchFamily="34" charset="-120"/>
+                <a:cs typeface="Amiri" pitchFamily="2" charset="-78"/>
               </a:rPr>
               <a:t>15 min</a:t>
             </a:r>
@@ -26183,8 +25704,7 @@
                   <a:srgbClr val="1B3B6F"/>
                 </a:solidFill>
                 <a:latin typeface="Calibri" pitchFamily="34" charset="0"/>
-                <a:ea typeface="Calibri" pitchFamily="34" charset="-122"/>
-                <a:cs typeface="Calibri" pitchFamily="34" charset="-120"/>
+                <a:cs typeface="Amiri" pitchFamily="2" charset="-78"/>
               </a:rPr>
               <a:t>3</a:t>
             </a:r>
@@ -26222,8 +25742,7 @@
                   <a:srgbClr val="1F2A37"/>
                 </a:solidFill>
                 <a:latin typeface="Calibri" pitchFamily="34" charset="0"/>
-                <a:ea typeface="Calibri" pitchFamily="34" charset="-122"/>
-                <a:cs typeface="Calibri" pitchFamily="34" charset="-120"/>
+                <a:cs typeface="Amiri" pitchFamily="2" charset="-78"/>
               </a:rPr>
               <a:t>Listening: 20 marks.</a:t>
             </a:r>
@@ -26260,9 +25779,8 @@
                 <a:solidFill>
                   <a:srgbClr val="6B4C9A"/>
                 </a:solidFill>
-                <a:latin typeface="Amiri" pitchFamily="34" charset="0"/>
-                <a:ea typeface="Amiri" pitchFamily="34" charset="-122"/>
-                <a:cs typeface="Amiri" pitchFamily="34" charset="-120"/>
+                <a:latin typeface="Amiri" pitchFamily="2" charset="-78"/>
+                <a:cs typeface="Amiri" pitchFamily="2" charset="-78"/>
               </a:rPr>
               <a:t>الاِسْتِمَاعُ</a:t>
             </a:r>
@@ -26361,8 +25879,7 @@
                   <a:srgbClr val="FFFFFF"/>
                 </a:solidFill>
                 <a:latin typeface="Calibri" pitchFamily="34" charset="0"/>
-                <a:ea typeface="Calibri" pitchFamily="34" charset="-122"/>
-                <a:cs typeface="Calibri" pitchFamily="34" charset="-120"/>
+                <a:cs typeface="Amiri" pitchFamily="2" charset="-78"/>
               </a:rPr>
               <a:t>WE DO</a:t>
             </a:r>
@@ -26400,8 +25917,7 @@
                   <a:srgbClr val="E8EDF5"/>
                 </a:solidFill>
                 <a:latin typeface="Calibri" pitchFamily="34" charset="0"/>
-                <a:ea typeface="Calibri" pitchFamily="34" charset="-122"/>
-                <a:cs typeface="Calibri" pitchFamily="34" charset="-120"/>
+                <a:cs typeface="Amiri" pitchFamily="2" charset="-78"/>
               </a:rPr>
               <a:t>10 min</a:t>
             </a:r>
@@ -26464,8 +25980,7 @@
                   <a:srgbClr val="1B3B6F"/>
                 </a:solidFill>
                 <a:latin typeface="Calibri" pitchFamily="34" charset="0"/>
-                <a:ea typeface="Calibri" pitchFamily="34" charset="-122"/>
-                <a:cs typeface="Calibri" pitchFamily="34" charset="-120"/>
+                <a:cs typeface="Amiri" pitchFamily="2" charset="-78"/>
               </a:rPr>
               <a:t>4</a:t>
             </a:r>
@@ -26503,8 +26018,7 @@
                   <a:srgbClr val="1F2A37"/>
                 </a:solidFill>
                 <a:latin typeface="Calibri" pitchFamily="34" charset="0"/>
-                <a:ea typeface="Calibri" pitchFamily="34" charset="-122"/>
-                <a:cs typeface="Calibri" pitchFamily="34" charset="-120"/>
+                <a:cs typeface="Amiri" pitchFamily="2" charset="-78"/>
               </a:rPr>
               <a:t>Reading: 10 marks.</a:t>
             </a:r>
@@ -26541,9 +26055,8 @@
                 <a:solidFill>
                   <a:srgbClr val="2F6FB0"/>
                 </a:solidFill>
-                <a:latin typeface="Amiri" pitchFamily="34" charset="0"/>
-                <a:ea typeface="Amiri" pitchFamily="34" charset="-122"/>
-                <a:cs typeface="Amiri" pitchFamily="34" charset="-120"/>
+                <a:latin typeface="Amiri" pitchFamily="2" charset="-78"/>
+                <a:cs typeface="Amiri" pitchFamily="2" charset="-78"/>
               </a:rPr>
               <a:t>القِرَاءَةُ</a:t>
             </a:r>
@@ -26642,8 +26155,7 @@
                   <a:srgbClr val="FFFFFF"/>
                 </a:solidFill>
                 <a:latin typeface="Calibri" pitchFamily="34" charset="0"/>
-                <a:ea typeface="Calibri" pitchFamily="34" charset="-122"/>
-                <a:cs typeface="Calibri" pitchFamily="34" charset="-120"/>
+                <a:cs typeface="Amiri" pitchFamily="2" charset="-78"/>
               </a:rPr>
               <a:t>YOU DO</a:t>
             </a:r>
@@ -26681,8 +26193,7 @@
                   <a:srgbClr val="E8EDF5"/>
                 </a:solidFill>
                 <a:latin typeface="Calibri" pitchFamily="34" charset="0"/>
-                <a:ea typeface="Calibri" pitchFamily="34" charset="-122"/>
-                <a:cs typeface="Calibri" pitchFamily="34" charset="-120"/>
+                <a:cs typeface="Amiri" pitchFamily="2" charset="-78"/>
               </a:rPr>
               <a:t>24 min</a:t>
             </a:r>
@@ -26745,8 +26256,7 @@
                   <a:srgbClr val="1B3B6F"/>
                 </a:solidFill>
                 <a:latin typeface="Calibri" pitchFamily="34" charset="0"/>
-                <a:ea typeface="Calibri" pitchFamily="34" charset="-122"/>
-                <a:cs typeface="Calibri" pitchFamily="34" charset="-120"/>
+                <a:cs typeface="Amiri" pitchFamily="2" charset="-78"/>
               </a:rPr>
               <a:t>5</a:t>
             </a:r>
@@ -26784,8 +26294,7 @@
                   <a:srgbClr val="1F2A37"/>
                 </a:solidFill>
                 <a:latin typeface="Calibri" pitchFamily="34" charset="0"/>
-                <a:ea typeface="Calibri" pitchFamily="34" charset="-122"/>
-                <a:cs typeface="Calibri" pitchFamily="34" charset="-120"/>
+                <a:cs typeface="Amiri" pitchFamily="2" charset="-78"/>
               </a:rPr>
               <a:t>Writing 20 + speaking 10.</a:t>
             </a:r>
@@ -26822,9 +26331,8 @@
                 <a:solidFill>
                   <a:srgbClr val="1E6B52"/>
                 </a:solidFill>
-                <a:latin typeface="Amiri" pitchFamily="34" charset="0"/>
-                <a:ea typeface="Amiri" pitchFamily="34" charset="-122"/>
-                <a:cs typeface="Amiri" pitchFamily="34" charset="-120"/>
+                <a:latin typeface="Amiri" pitchFamily="2" charset="-78"/>
+                <a:cs typeface="Amiri" pitchFamily="2" charset="-78"/>
               </a:rPr>
               <a:t>الكِتَابَةُ وَالتَّحَدُّثُ</a:t>
             </a:r>
@@ -26923,8 +26431,7 @@
                   <a:srgbClr val="FFFFFF"/>
                 </a:solidFill>
                 <a:latin typeface="Calibri" pitchFamily="34" charset="0"/>
-                <a:ea typeface="Calibri" pitchFamily="34" charset="-122"/>
-                <a:cs typeface="Calibri" pitchFamily="34" charset="-120"/>
+                <a:cs typeface="Amiri" pitchFamily="2" charset="-78"/>
               </a:rPr>
               <a:t>FEEDBACK</a:t>
             </a:r>
@@ -26962,8 +26469,7 @@
                   <a:srgbClr val="E8EDF5"/>
                 </a:solidFill>
                 <a:latin typeface="Calibri" pitchFamily="34" charset="0"/>
-                <a:ea typeface="Calibri" pitchFamily="34" charset="-122"/>
-                <a:cs typeface="Calibri" pitchFamily="34" charset="-120"/>
+                <a:cs typeface="Amiri" pitchFamily="2" charset="-78"/>
               </a:rPr>
               <a:t>4 min</a:t>
             </a:r>
@@ -27026,8 +26532,7 @@
                   <a:srgbClr val="1B3B6F"/>
                 </a:solidFill>
                 <a:latin typeface="Calibri" pitchFamily="34" charset="0"/>
-                <a:ea typeface="Calibri" pitchFamily="34" charset="-122"/>
-                <a:cs typeface="Calibri" pitchFamily="34" charset="-120"/>
+                <a:cs typeface="Amiri" pitchFamily="2" charset="-78"/>
               </a:rPr>
               <a:t>6</a:t>
             </a:r>
@@ -27065,8 +26570,7 @@
                   <a:srgbClr val="1F2A37"/>
                 </a:solidFill>
                 <a:latin typeface="Calibri" pitchFamily="34" charset="0"/>
-                <a:ea typeface="Calibri" pitchFamily="34" charset="-122"/>
-                <a:cs typeface="Calibri" pitchFamily="34" charset="-120"/>
+                <a:cs typeface="Amiri" pitchFamily="2" charset="-78"/>
               </a:rPr>
               <a:t>My score and my F4 target.</a:t>
             </a:r>
@@ -27103,9 +26607,8 @@
                 <a:solidFill>
                   <a:srgbClr val="8A6D1E"/>
                 </a:solidFill>
-                <a:latin typeface="Amiri" pitchFamily="34" charset="0"/>
-                <a:ea typeface="Amiri" pitchFamily="34" charset="-122"/>
-                <a:cs typeface="Amiri" pitchFamily="34" charset="-120"/>
+                <a:latin typeface="Amiri" pitchFamily="2" charset="-78"/>
+                <a:cs typeface="Amiri" pitchFamily="2" charset="-78"/>
               </a:rPr>
               <a:t>الهَدَفُ</a:t>
             </a:r>
@@ -27204,8 +26707,7 @@
                   <a:srgbClr val="FFFFFF"/>
                 </a:solidFill>
                 <a:latin typeface="Calibri" pitchFamily="34" charset="0"/>
-                <a:ea typeface="Calibri" pitchFamily="34" charset="-122"/>
-                <a:cs typeface="Calibri" pitchFamily="34" charset="-120"/>
+                <a:cs typeface="Amiri" pitchFamily="2" charset="-78"/>
               </a:rPr>
               <a:t>PREPARATION</a:t>
             </a:r>
@@ -27243,8 +26745,7 @@
                   <a:srgbClr val="E8EDF5"/>
                 </a:solidFill>
                 <a:latin typeface="Calibri" pitchFamily="34" charset="0"/>
-                <a:ea typeface="Calibri" pitchFamily="34" charset="-122"/>
-                <a:cs typeface="Calibri" pitchFamily="34" charset="-120"/>
+                <a:cs typeface="Amiri" pitchFamily="2" charset="-78"/>
               </a:rPr>
               <a:t>2 min</a:t>
             </a:r>
@@ -27307,8 +26808,7 @@
                   <a:srgbClr val="1B3B6F"/>
                 </a:solidFill>
                 <a:latin typeface="Calibri" pitchFamily="34" charset="0"/>
-                <a:ea typeface="Calibri" pitchFamily="34" charset="-122"/>
-                <a:cs typeface="Calibri" pitchFamily="34" charset="-120"/>
+                <a:cs typeface="Amiri" pitchFamily="2" charset="-78"/>
               </a:rPr>
               <a:t>7</a:t>
             </a:r>
@@ -27346,8 +26846,7 @@
                   <a:srgbClr val="1F2A37"/>
                 </a:solidFill>
                 <a:latin typeface="Calibri" pitchFamily="34" charset="0"/>
-                <a:ea typeface="Calibri" pitchFamily="34" charset="-122"/>
-                <a:cs typeface="Calibri" pitchFamily="34" charset="-120"/>
+                <a:cs typeface="Amiri" pitchFamily="2" charset="-78"/>
               </a:rPr>
               <a:t>Get ready for F4: school.</a:t>
             </a:r>
@@ -27384,9 +26883,8 @@
                 <a:solidFill>
                   <a:srgbClr val="C45A3C"/>
                 </a:solidFill>
-                <a:latin typeface="Amiri" pitchFamily="34" charset="0"/>
-                <a:ea typeface="Amiri" pitchFamily="34" charset="-122"/>
-                <a:cs typeface="Amiri" pitchFamily="34" charset="-120"/>
+                <a:latin typeface="Amiri" pitchFamily="2" charset="-78"/>
+                <a:cs typeface="Amiri" pitchFamily="2" charset="-78"/>
               </a:rPr>
               <a:t>اِسْتَعِدَّ</a:t>
             </a:r>
@@ -27458,8 +26956,7 @@
                   <a:srgbClr val="1E6B52"/>
                 </a:solidFill>
                 <a:latin typeface="Calibri" pitchFamily="34" charset="0"/>
-                <a:ea typeface="Calibri" pitchFamily="34" charset="-122"/>
-                <a:cs typeface="Calibri" pitchFamily="34" charset="-120"/>
+                <a:cs typeface="Amiri" pitchFamily="2" charset="-78"/>
               </a:rPr>
               <a:t>IF ARABIC FEELS HARD TODAY</a:t>
             </a:r>
@@ -27497,8 +26994,7 @@
                   <a:srgbClr val="1F2A37"/>
                 </a:solidFill>
                 <a:latin typeface="Calibri" pitchFamily="34" charset="0"/>
-                <a:ea typeface="Calibri" pitchFamily="34" charset="-122"/>
-                <a:cs typeface="Calibri" pitchFamily="34" charset="-120"/>
+                <a:cs typeface="Amiri" pitchFamily="2" charset="-78"/>
               </a:rPr>
               <a:t>Start each section with the questions you find easiest. Leave a blank and come back. The warm-up does not count.</a:t>
             </a:r>
@@ -27536,8 +27032,7 @@
                   <a:srgbClr val="8A93A0"/>
                 </a:solidFill>
                 <a:latin typeface="Calibri" pitchFamily="34" charset="0"/>
-                <a:ea typeface="Calibri" pitchFamily="34" charset="-122"/>
-                <a:cs typeface="Calibri" pitchFamily="34" charset="-120"/>
+                <a:cs typeface="Amiri" pitchFamily="2" charset="-78"/>
               </a:rPr>
               <a:t>3 / 22</a:t>
             </a:r>
@@ -27631,9 +27126,8 @@
                 <a:solidFill>
                   <a:srgbClr val="D4AF37"/>
                 </a:solidFill>
-                <a:latin typeface="Amiri" pitchFamily="34" charset="0"/>
-                <a:ea typeface="Amiri" pitchFamily="34" charset="-122"/>
-                <a:cs typeface="Amiri" pitchFamily="34" charset="-120"/>
+                <a:latin typeface="Amiri" pitchFamily="2" charset="-78"/>
+                <a:cs typeface="Amiri" pitchFamily="2" charset="-78"/>
               </a:rPr>
               <a:t>م</a:t>
             </a:r>
@@ -27671,8 +27165,7 @@
                   <a:srgbClr val="1B3B6F"/>
                 </a:solidFill>
                 <a:latin typeface="Cambria" pitchFamily="34" charset="0"/>
-                <a:ea typeface="Cambria" pitchFamily="34" charset="-122"/>
-                <a:cs typeface="Cambria" pitchFamily="34" charset="-120"/>
+                <a:cs typeface="Amiri" pitchFamily="2" charset="-78"/>
               </a:rPr>
               <a:t>Al Madina Online School</a:t>
             </a:r>
@@ -27710,8 +27203,7 @@
                   <a:srgbClr val="8A6D1E"/>
                 </a:solidFill>
                 <a:latin typeface="Calibri" pitchFamily="34" charset="0"/>
-                <a:ea typeface="Calibri" pitchFamily="34" charset="-122"/>
-                <a:cs typeface="Calibri" pitchFamily="34" charset="-120"/>
+                <a:cs typeface="Amiri" pitchFamily="2" charset="-78"/>
               </a:rPr>
               <a:t>ARABIC DEPARTMENT · MIFTAH ARABIC · IGCSE 0544</a:t>
             </a:r>
@@ -27776,8 +27268,7 @@
                   <a:srgbClr val="FFFFFF"/>
                 </a:solidFill>
                 <a:latin typeface="Calibri" pitchFamily="34" charset="0"/>
-                <a:ea typeface="Calibri" pitchFamily="34" charset="-122"/>
-                <a:cs typeface="Calibri" pitchFamily="34" charset="-120"/>
+                <a:cs typeface="Amiri" pitchFamily="2" charset="-78"/>
               </a:rPr>
               <a:t>F3-L12 · F3 Assessment</a:t>
             </a:r>
@@ -27842,8 +27333,7 @@
                   <a:srgbClr val="FFFFFF"/>
                 </a:solidFill>
                 <a:latin typeface="Calibri" pitchFamily="34" charset="0"/>
-                <a:ea typeface="Calibri" pitchFamily="34" charset="-122"/>
-                <a:cs typeface="Calibri" pitchFamily="34" charset="-120"/>
+                <a:cs typeface="Amiri" pitchFamily="2" charset="-78"/>
               </a:rPr>
               <a:t>DO NOW · 5 MIN</a:t>
             </a:r>
@@ -27881,8 +27371,7 @@
                   <a:srgbClr val="0E7C86"/>
                 </a:solidFill>
                 <a:latin typeface="Calibri" pitchFamily="34" charset="0"/>
-                <a:ea typeface="Calibri" pitchFamily="34" charset="-122"/>
-                <a:cs typeface="Calibri" pitchFamily="34" charset="-120"/>
+                <a:cs typeface="Amiri" pitchFamily="2" charset="-78"/>
               </a:rPr>
               <a:t>DO NOW · ON YOUR OWN · 5 MINUTES</a:t>
             </a:r>
@@ -27920,8 +27409,7 @@
                   <a:srgbClr val="1B3B6F"/>
                 </a:solidFill>
                 <a:latin typeface="Cambria" pitchFamily="34" charset="0"/>
-                <a:ea typeface="Cambria" pitchFamily="34" charset="-122"/>
-                <a:cs typeface="Cambria" pitchFamily="34" charset="-120"/>
+                <a:cs typeface="Amiri" pitchFamily="2" charset="-78"/>
               </a:rPr>
               <a:t>Retrieval: what do you remember?</a:t>
             </a:r>
@@ -27958,9 +27446,8 @@
                 <a:solidFill>
                   <a:srgbClr val="8A6D1E"/>
                 </a:solidFill>
-                <a:latin typeface="Amiri" pitchFamily="34" charset="0"/>
-                <a:ea typeface="Amiri" pitchFamily="34" charset="-122"/>
-                <a:cs typeface="Amiri" pitchFamily="34" charset="-120"/>
+                <a:latin typeface="Amiri" pitchFamily="2" charset="-78"/>
+                <a:cs typeface="Amiri" pitchFamily="2" charset="-78"/>
               </a:rPr>
               <a:t>اِبْدَأِ الآنَ</a:t>
             </a:r>
@@ -27998,8 +27485,7 @@
                   <a:srgbClr val="8A93A0"/>
                 </a:solidFill>
                 <a:latin typeface="Calibri" pitchFamily="34" charset="0"/>
-                <a:ea typeface="Calibri" pitchFamily="34" charset="-122"/>
-                <a:cs typeface="Calibri" pitchFamily="34" charset="-120"/>
+                <a:cs typeface="Amiri" pitchFamily="2" charset="-78"/>
               </a:rPr>
               <a:t>Miftah Arabic · Foundation F3 · My Family &amp; Home · F3-L12</a:t>
             </a:r>
@@ -28096,8 +27582,7 @@
                   <a:srgbClr val="FFFFFF"/>
                 </a:solidFill>
                 <a:latin typeface="Calibri" pitchFamily="34" charset="0"/>
-                <a:ea typeface="Calibri" pitchFamily="34" charset="-122"/>
-                <a:cs typeface="Calibri" pitchFamily="34" charset="-120"/>
+                <a:cs typeface="Amiri" pitchFamily="2" charset="-78"/>
               </a:rPr>
               <a:t>1</a:t>
             </a:r>
@@ -28135,8 +27620,7 @@
                   <a:srgbClr val="1B3B6F"/>
                 </a:solidFill>
                 <a:latin typeface="Calibri" pitchFamily="34" charset="0"/>
-                <a:ea typeface="Calibri" pitchFamily="34" charset="-122"/>
-                <a:cs typeface="Calibri" pitchFamily="34" charset="-120"/>
+                <a:cs typeface="Amiri" pitchFamily="2" charset="-78"/>
               </a:rPr>
               <a:t>What does </a:t>
             </a:r>
@@ -28148,9 +27632,8 @@
                 <a:solidFill>
                   <a:srgbClr val="1B3B6F"/>
                 </a:solidFill>
-                <a:latin typeface="Amiri" pitchFamily="34" charset="0"/>
-                <a:ea typeface="Amiri" pitchFamily="34" charset="-122"/>
-                <a:cs typeface="Amiri" pitchFamily="34" charset="-120"/>
+                <a:latin typeface="Amiri" pitchFamily="2" charset="-78"/>
+                <a:cs typeface="Amiri" pitchFamily="2" charset="-78"/>
               </a:rPr>
               <a:t>تَقْيِيمٌ</a:t>
             </a:r>
@@ -28163,8 +27646,7 @@
                   <a:srgbClr val="1B3B6F"/>
                 </a:solidFill>
                 <a:latin typeface="Calibri" pitchFamily="34" charset="0"/>
-                <a:ea typeface="Calibri" pitchFamily="34" charset="-122"/>
-                <a:cs typeface="Calibri" pitchFamily="34" charset="-120"/>
+                <a:cs typeface="Amiri" pitchFamily="2" charset="-78"/>
               </a:rPr>
               <a:t> mean?</a:t>
             </a:r>
@@ -28227,8 +27709,7 @@
                   <a:srgbClr val="1B3B6F"/>
                 </a:solidFill>
                 <a:latin typeface="Calibri" pitchFamily="34" charset="0"/>
-                <a:ea typeface="Calibri" pitchFamily="34" charset="-122"/>
-                <a:cs typeface="Calibri" pitchFamily="34" charset="-120"/>
+                <a:cs typeface="Amiri" pitchFamily="2" charset="-78"/>
               </a:rPr>
               <a:t>A</a:t>
             </a:r>
@@ -28266,8 +27747,7 @@
                   <a:srgbClr val="1F2A37"/>
                 </a:solidFill>
                 <a:latin typeface="Calibri" pitchFamily="34" charset="0"/>
-                <a:ea typeface="Calibri" pitchFamily="34" charset="-122"/>
-                <a:cs typeface="Calibri" pitchFamily="34" charset="-120"/>
+                <a:cs typeface="Amiri" pitchFamily="2" charset="-78"/>
               </a:rPr>
               <a:t>an achievement</a:t>
             </a:r>
@@ -28330,8 +27810,7 @@
                   <a:srgbClr val="1B3B6F"/>
                 </a:solidFill>
                 <a:latin typeface="Calibri" pitchFamily="34" charset="0"/>
-                <a:ea typeface="Calibri" pitchFamily="34" charset="-122"/>
-                <a:cs typeface="Calibri" pitchFamily="34" charset="-120"/>
+                <a:cs typeface="Amiri" pitchFamily="2" charset="-78"/>
               </a:rPr>
               <a:t>B</a:t>
             </a:r>
@@ -28369,8 +27848,7 @@
                   <a:srgbClr val="1F2A37"/>
                 </a:solidFill>
                 <a:latin typeface="Calibri" pitchFamily="34" charset="0"/>
-                <a:ea typeface="Calibri" pitchFamily="34" charset="-122"/>
-                <a:cs typeface="Calibri" pitchFamily="34" charset="-120"/>
+                <a:cs typeface="Amiri" pitchFamily="2" charset="-78"/>
               </a:rPr>
               <a:t>an assessment</a:t>
             </a:r>
@@ -28433,8 +27911,7 @@
                   <a:srgbClr val="1B3B6F"/>
                 </a:solidFill>
                 <a:latin typeface="Calibri" pitchFamily="34" charset="0"/>
-                <a:ea typeface="Calibri" pitchFamily="34" charset="-122"/>
-                <a:cs typeface="Calibri" pitchFamily="34" charset="-120"/>
+                <a:cs typeface="Amiri" pitchFamily="2" charset="-78"/>
               </a:rPr>
               <a:t>C</a:t>
             </a:r>
@@ -28472,8 +27949,7 @@
                   <a:srgbClr val="1F2A37"/>
                 </a:solidFill>
                 <a:latin typeface="Calibri" pitchFamily="34" charset="0"/>
-                <a:ea typeface="Calibri" pitchFamily="34" charset="-122"/>
-                <a:cs typeface="Calibri" pitchFamily="34" charset="-120"/>
+                <a:cs typeface="Amiri" pitchFamily="2" charset="-78"/>
               </a:rPr>
               <a:t>a result</a:t>
             </a:r>
@@ -28570,8 +28046,7 @@
                   <a:srgbClr val="FFFFFF"/>
                 </a:solidFill>
                 <a:latin typeface="Calibri" pitchFamily="34" charset="0"/>
-                <a:ea typeface="Calibri" pitchFamily="34" charset="-122"/>
-                <a:cs typeface="Calibri" pitchFamily="34" charset="-120"/>
+                <a:cs typeface="Amiri" pitchFamily="2" charset="-78"/>
               </a:rPr>
               <a:t>2</a:t>
             </a:r>
@@ -28609,8 +28084,7 @@
                   <a:srgbClr val="1B3B6F"/>
                 </a:solidFill>
                 <a:latin typeface="Calibri" pitchFamily="34" charset="0"/>
-                <a:ea typeface="Calibri" pitchFamily="34" charset="-122"/>
-                <a:cs typeface="Calibri" pitchFamily="34" charset="-120"/>
+                <a:cs typeface="Amiri" pitchFamily="2" charset="-78"/>
               </a:rPr>
               <a:t>What does </a:t>
             </a:r>
@@ -28622,9 +28096,8 @@
                 <a:solidFill>
                   <a:srgbClr val="1B3B6F"/>
                 </a:solidFill>
-                <a:latin typeface="Amiri" pitchFamily="34" charset="0"/>
-                <a:ea typeface="Amiri" pitchFamily="34" charset="-122"/>
-                <a:cs typeface="Amiri" pitchFamily="34" charset="-120"/>
+                <a:latin typeface="Amiri" pitchFamily="2" charset="-78"/>
+                <a:cs typeface="Amiri" pitchFamily="2" charset="-78"/>
               </a:rPr>
               <a:t>ثِقَةٌ</a:t>
             </a:r>
@@ -28637,8 +28110,7 @@
                   <a:srgbClr val="1B3B6F"/>
                 </a:solidFill>
                 <a:latin typeface="Calibri" pitchFamily="34" charset="0"/>
-                <a:ea typeface="Calibri" pitchFamily="34" charset="-122"/>
-                <a:cs typeface="Calibri" pitchFamily="34" charset="-120"/>
+                <a:cs typeface="Amiri" pitchFamily="2" charset="-78"/>
               </a:rPr>
               <a:t> mean?</a:t>
             </a:r>
@@ -28701,8 +28173,7 @@
                   <a:srgbClr val="1B3B6F"/>
                 </a:solidFill>
                 <a:latin typeface="Calibri" pitchFamily="34" charset="0"/>
-                <a:ea typeface="Calibri" pitchFamily="34" charset="-122"/>
-                <a:cs typeface="Calibri" pitchFamily="34" charset="-120"/>
+                <a:cs typeface="Amiri" pitchFamily="2" charset="-78"/>
               </a:rPr>
               <a:t>A</a:t>
             </a:r>
@@ -28740,8 +28211,7 @@
                   <a:srgbClr val="1F2A37"/>
                 </a:solidFill>
                 <a:latin typeface="Calibri" pitchFamily="34" charset="0"/>
-                <a:ea typeface="Calibri" pitchFamily="34" charset="-122"/>
-                <a:cs typeface="Calibri" pitchFamily="34" charset="-120"/>
+                <a:cs typeface="Amiri" pitchFamily="2" charset="-78"/>
               </a:rPr>
               <a:t>confidence</a:t>
             </a:r>
@@ -28804,8 +28274,7 @@
                   <a:srgbClr val="1B3B6F"/>
                 </a:solidFill>
                 <a:latin typeface="Calibri" pitchFamily="34" charset="0"/>
-                <a:ea typeface="Calibri" pitchFamily="34" charset="-122"/>
-                <a:cs typeface="Calibri" pitchFamily="34" charset="-120"/>
+                <a:cs typeface="Amiri" pitchFamily="2" charset="-78"/>
               </a:rPr>
               <a:t>B</a:t>
             </a:r>
@@ -28843,8 +28312,7 @@
                   <a:srgbClr val="1F2A37"/>
                 </a:solidFill>
                 <a:latin typeface="Calibri" pitchFamily="34" charset="0"/>
-                <a:ea typeface="Calibri" pitchFamily="34" charset="-122"/>
-                <a:cs typeface="Calibri" pitchFamily="34" charset="-120"/>
+                <a:cs typeface="Amiri" pitchFamily="2" charset="-78"/>
               </a:rPr>
               <a:t>progress</a:t>
             </a:r>
@@ -28907,8 +28375,7 @@
                   <a:srgbClr val="1B3B6F"/>
                 </a:solidFill>
                 <a:latin typeface="Calibri" pitchFamily="34" charset="0"/>
-                <a:ea typeface="Calibri" pitchFamily="34" charset="-122"/>
-                <a:cs typeface="Calibri" pitchFamily="34" charset="-120"/>
+                <a:cs typeface="Amiri" pitchFamily="2" charset="-78"/>
               </a:rPr>
               <a:t>C</a:t>
             </a:r>
@@ -28946,8 +28413,7 @@
                   <a:srgbClr val="1F2A37"/>
                 </a:solidFill>
                 <a:latin typeface="Calibri" pitchFamily="34" charset="0"/>
-                <a:ea typeface="Calibri" pitchFamily="34" charset="-122"/>
-                <a:cs typeface="Calibri" pitchFamily="34" charset="-120"/>
+                <a:cs typeface="Amiri" pitchFamily="2" charset="-78"/>
               </a:rPr>
               <a:t>a target</a:t>
             </a:r>
@@ -29044,8 +28510,7 @@
                   <a:srgbClr val="FFFFFF"/>
                 </a:solidFill>
                 <a:latin typeface="Calibri" pitchFamily="34" charset="0"/>
-                <a:ea typeface="Calibri" pitchFamily="34" charset="-122"/>
-                <a:cs typeface="Calibri" pitchFamily="34" charset="-120"/>
+                <a:cs typeface="Amiri" pitchFamily="2" charset="-78"/>
               </a:rPr>
               <a:t>3</a:t>
             </a:r>
@@ -29083,8 +28548,7 @@
                   <a:srgbClr val="1B3B6F"/>
                 </a:solidFill>
                 <a:latin typeface="Calibri" pitchFamily="34" charset="0"/>
-                <a:ea typeface="Calibri" pitchFamily="34" charset="-122"/>
-                <a:cs typeface="Calibri" pitchFamily="34" charset="-120"/>
+                <a:cs typeface="Amiri" pitchFamily="2" charset="-78"/>
               </a:rPr>
               <a:t>Correct:</a:t>
             </a:r>
@@ -29121,9 +28585,8 @@
                 <a:solidFill>
                   <a:srgbClr val="1B3B6F"/>
                 </a:solidFill>
-                <a:latin typeface="Amiri" pitchFamily="34" charset="0"/>
-                <a:ea typeface="Amiri" pitchFamily="34" charset="-122"/>
-                <a:cs typeface="Amiri" pitchFamily="34" charset="-120"/>
+                <a:latin typeface="Amiri" pitchFamily="2" charset="-78"/>
+                <a:cs typeface="Amiri" pitchFamily="2" charset="-78"/>
               </a:rPr>
               <a:t>غُرْفَةُ النَّوْمِ ___ مِنَ المَطْبَخِ.</a:t>
             </a:r>
@@ -29186,8 +28649,7 @@
                   <a:srgbClr val="1B3B6F"/>
                 </a:solidFill>
                 <a:latin typeface="Calibri" pitchFamily="34" charset="0"/>
-                <a:ea typeface="Calibri" pitchFamily="34" charset="-122"/>
-                <a:cs typeface="Calibri" pitchFamily="34" charset="-120"/>
+                <a:cs typeface="Amiri" pitchFamily="2" charset="-78"/>
               </a:rPr>
               <a:t>A</a:t>
             </a:r>
@@ -29224,9 +28686,8 @@
                 <a:solidFill>
                   <a:srgbClr val="1F2A37"/>
                 </a:solidFill>
-                <a:latin typeface="Amiri" pitchFamily="34" charset="0"/>
-                <a:ea typeface="Amiri" pitchFamily="34" charset="-122"/>
-                <a:cs typeface="Amiri" pitchFamily="34" charset="-120"/>
+                <a:latin typeface="Amiri" pitchFamily="2" charset="-78"/>
+                <a:cs typeface="Amiri" pitchFamily="2" charset="-78"/>
               </a:rPr>
               <a:t>قَرِيبٌ</a:t>
             </a:r>
@@ -29289,8 +28750,7 @@
                   <a:srgbClr val="1B3B6F"/>
                 </a:solidFill>
                 <a:latin typeface="Calibri" pitchFamily="34" charset="0"/>
-                <a:ea typeface="Calibri" pitchFamily="34" charset="-122"/>
-                <a:cs typeface="Calibri" pitchFamily="34" charset="-120"/>
+                <a:cs typeface="Amiri" pitchFamily="2" charset="-78"/>
               </a:rPr>
               <a:t>B</a:t>
             </a:r>
@@ -29327,9 +28787,8 @@
                 <a:solidFill>
                   <a:srgbClr val="1F2A37"/>
                 </a:solidFill>
-                <a:latin typeface="Amiri" pitchFamily="34" charset="0"/>
-                <a:ea typeface="Amiri" pitchFamily="34" charset="-122"/>
-                <a:cs typeface="Amiri" pitchFamily="34" charset="-120"/>
+                <a:latin typeface="Amiri" pitchFamily="2" charset="-78"/>
+                <a:cs typeface="Amiri" pitchFamily="2" charset="-78"/>
               </a:rPr>
               <a:t>قَرِيبَاتٌ</a:t>
             </a:r>
@@ -29392,8 +28851,7 @@
                   <a:srgbClr val="1B3B6F"/>
                 </a:solidFill>
                 <a:latin typeface="Calibri" pitchFamily="34" charset="0"/>
-                <a:ea typeface="Calibri" pitchFamily="34" charset="-122"/>
-                <a:cs typeface="Calibri" pitchFamily="34" charset="-120"/>
+                <a:cs typeface="Amiri" pitchFamily="2" charset="-78"/>
               </a:rPr>
               <a:t>C</a:t>
             </a:r>
@@ -29430,9 +28888,8 @@
                 <a:solidFill>
                   <a:srgbClr val="1F2A37"/>
                 </a:solidFill>
-                <a:latin typeface="Amiri" pitchFamily="34" charset="0"/>
-                <a:ea typeface="Amiri" pitchFamily="34" charset="-122"/>
-                <a:cs typeface="Amiri" pitchFamily="34" charset="-120"/>
+                <a:latin typeface="Amiri" pitchFamily="2" charset="-78"/>
+                <a:cs typeface="Amiri" pitchFamily="2" charset="-78"/>
               </a:rPr>
               <a:t>قَرِيبَةٌ</a:t>
             </a:r>
@@ -29529,8 +28986,7 @@
                   <a:srgbClr val="FFFFFF"/>
                 </a:solidFill>
                 <a:latin typeface="Calibri" pitchFamily="34" charset="0"/>
-                <a:ea typeface="Calibri" pitchFamily="34" charset="-122"/>
-                <a:cs typeface="Calibri" pitchFamily="34" charset="-120"/>
+                <a:cs typeface="Amiri" pitchFamily="2" charset="-78"/>
               </a:rPr>
               <a:t>4</a:t>
             </a:r>
@@ -29568,8 +29024,7 @@
                   <a:srgbClr val="1B3B6F"/>
                 </a:solidFill>
                 <a:latin typeface="Calibri" pitchFamily="34" charset="0"/>
-                <a:ea typeface="Calibri" pitchFamily="34" charset="-122"/>
-                <a:cs typeface="Calibri" pitchFamily="34" charset="-120"/>
+                <a:cs typeface="Amiri" pitchFamily="2" charset="-78"/>
               </a:rPr>
               <a:t>Choose the accurate room count.</a:t>
             </a:r>
@@ -29632,8 +29087,7 @@
                   <a:srgbClr val="1B3B6F"/>
                 </a:solidFill>
                 <a:latin typeface="Calibri" pitchFamily="34" charset="0"/>
-                <a:ea typeface="Calibri" pitchFamily="34" charset="-122"/>
-                <a:cs typeface="Calibri" pitchFamily="34" charset="-120"/>
+                <a:cs typeface="Amiri" pitchFamily="2" charset="-78"/>
               </a:rPr>
               <a:t>A</a:t>
             </a:r>
@@ -29670,9 +29124,8 @@
                 <a:solidFill>
                   <a:srgbClr val="1F2A37"/>
                 </a:solidFill>
-                <a:latin typeface="Amiri" pitchFamily="34" charset="0"/>
-                <a:ea typeface="Amiri" pitchFamily="34" charset="-122"/>
-                <a:cs typeface="Amiri" pitchFamily="34" charset="-120"/>
+                <a:latin typeface="Amiri" pitchFamily="2" charset="-78"/>
+                <a:cs typeface="Amiri" pitchFamily="2" charset="-78"/>
               </a:rPr>
               <a:t>ثَلَاثَةُ غُرَفٍ</a:t>
             </a:r>
@@ -29735,8 +29188,7 @@
                   <a:srgbClr val="1B3B6F"/>
                 </a:solidFill>
                 <a:latin typeface="Calibri" pitchFamily="34" charset="0"/>
-                <a:ea typeface="Calibri" pitchFamily="34" charset="-122"/>
-                <a:cs typeface="Calibri" pitchFamily="34" charset="-120"/>
+                <a:cs typeface="Amiri" pitchFamily="2" charset="-78"/>
               </a:rPr>
               <a:t>B</a:t>
             </a:r>
@@ -29773,9 +29225,8 @@
                 <a:solidFill>
                   <a:srgbClr val="1F2A37"/>
                 </a:solidFill>
-                <a:latin typeface="Amiri" pitchFamily="34" charset="0"/>
-                <a:ea typeface="Amiri" pitchFamily="34" charset="-122"/>
-                <a:cs typeface="Amiri" pitchFamily="34" charset="-120"/>
+                <a:latin typeface="Amiri" pitchFamily="2" charset="-78"/>
+                <a:cs typeface="Amiri" pitchFamily="2" charset="-78"/>
               </a:rPr>
               <a:t>ثَلَاثٌ غُرْفَةٌ</a:t>
             </a:r>
@@ -29838,8 +29289,7 @@
                   <a:srgbClr val="1B3B6F"/>
                 </a:solidFill>
                 <a:latin typeface="Calibri" pitchFamily="34" charset="0"/>
-                <a:ea typeface="Calibri" pitchFamily="34" charset="-122"/>
-                <a:cs typeface="Calibri" pitchFamily="34" charset="-120"/>
+                <a:cs typeface="Amiri" pitchFamily="2" charset="-78"/>
               </a:rPr>
               <a:t>C</a:t>
             </a:r>
@@ -29876,9 +29326,8 @@
                 <a:solidFill>
                   <a:srgbClr val="1F2A37"/>
                 </a:solidFill>
-                <a:latin typeface="Amiri" pitchFamily="34" charset="0"/>
-                <a:ea typeface="Amiri" pitchFamily="34" charset="-122"/>
-                <a:cs typeface="Amiri" pitchFamily="34" charset="-120"/>
+                <a:latin typeface="Amiri" pitchFamily="2" charset="-78"/>
+                <a:cs typeface="Amiri" pitchFamily="2" charset="-78"/>
               </a:rPr>
               <a:t>ثَلَاثُ غُرَفٍ</a:t>
             </a:r>
@@ -29975,8 +29424,7 @@
                   <a:srgbClr val="FFFFFF"/>
                 </a:solidFill>
                 <a:latin typeface="Calibri" pitchFamily="34" charset="0"/>
-                <a:ea typeface="Calibri" pitchFamily="34" charset="-122"/>
-                <a:cs typeface="Calibri" pitchFamily="34" charset="-120"/>
+                <a:cs typeface="Amiri" pitchFamily="2" charset="-78"/>
               </a:rPr>
               <a:t>5</a:t>
             </a:r>
@@ -30014,8 +29462,7 @@
                   <a:srgbClr val="1B3B6F"/>
                 </a:solidFill>
                 <a:latin typeface="Calibri" pitchFamily="34" charset="0"/>
-                <a:ea typeface="Calibri" pitchFamily="34" charset="-122"/>
-                <a:cs typeface="Calibri" pitchFamily="34" charset="-120"/>
+                <a:cs typeface="Amiri" pitchFamily="2" charset="-78"/>
               </a:rPr>
               <a:t>Which sentence uses a colour accurately?</a:t>
             </a:r>
@@ -30078,8 +29525,7 @@
                   <a:srgbClr val="1B3B6F"/>
                 </a:solidFill>
                 <a:latin typeface="Calibri" pitchFamily="34" charset="0"/>
-                <a:ea typeface="Calibri" pitchFamily="34" charset="-122"/>
-                <a:cs typeface="Calibri" pitchFamily="34" charset="-120"/>
+                <a:cs typeface="Amiri" pitchFamily="2" charset="-78"/>
               </a:rPr>
               <a:t>A</a:t>
             </a:r>
@@ -30116,9 +29562,8 @@
                 <a:solidFill>
                   <a:srgbClr val="1F2A37"/>
                 </a:solidFill>
-                <a:latin typeface="Amiri" pitchFamily="34" charset="0"/>
-                <a:ea typeface="Amiri" pitchFamily="34" charset="-122"/>
-                <a:cs typeface="Amiri" pitchFamily="34" charset="-120"/>
+                <a:latin typeface="Amiri" pitchFamily="2" charset="-78"/>
+                <a:cs typeface="Amiri" pitchFamily="2" charset="-78"/>
               </a:rPr>
               <a:t>السِّتَارَةُ زَرْقَاءُ.</a:t>
             </a:r>
@@ -30181,8 +29626,7 @@
                   <a:srgbClr val="1B3B6F"/>
                 </a:solidFill>
                 <a:latin typeface="Calibri" pitchFamily="34" charset="0"/>
-                <a:ea typeface="Calibri" pitchFamily="34" charset="-122"/>
-                <a:cs typeface="Calibri" pitchFamily="34" charset="-120"/>
+                <a:cs typeface="Amiri" pitchFamily="2" charset="-78"/>
               </a:rPr>
               <a:t>B</a:t>
             </a:r>
@@ -30219,9 +29663,8 @@
                 <a:solidFill>
                   <a:srgbClr val="1F2A37"/>
                 </a:solidFill>
-                <a:latin typeface="Amiri" pitchFamily="34" charset="0"/>
-                <a:ea typeface="Amiri" pitchFamily="34" charset="-122"/>
-                <a:cs typeface="Amiri" pitchFamily="34" charset="-120"/>
+                <a:latin typeface="Amiri" pitchFamily="2" charset="-78"/>
+                <a:cs typeface="Amiri" pitchFamily="2" charset="-78"/>
               </a:rPr>
               <a:t>السِّتَارَةُ أَزْرَقُ.</a:t>
             </a:r>
@@ -30284,8 +29727,7 @@
                   <a:srgbClr val="1B3B6F"/>
                 </a:solidFill>
                 <a:latin typeface="Calibri" pitchFamily="34" charset="0"/>
-                <a:ea typeface="Calibri" pitchFamily="34" charset="-122"/>
-                <a:cs typeface="Calibri" pitchFamily="34" charset="-120"/>
+                <a:cs typeface="Amiri" pitchFamily="2" charset="-78"/>
               </a:rPr>
               <a:t>C</a:t>
             </a:r>
@@ -30322,9 +29764,8 @@
                 <a:solidFill>
                   <a:srgbClr val="1F2A37"/>
                 </a:solidFill>
-                <a:latin typeface="Amiri" pitchFamily="34" charset="0"/>
-                <a:ea typeface="Amiri" pitchFamily="34" charset="-122"/>
-                <a:cs typeface="Amiri" pitchFamily="34" charset="-120"/>
+                <a:latin typeface="Amiri" pitchFamily="2" charset="-78"/>
+                <a:cs typeface="Amiri" pitchFamily="2" charset="-78"/>
               </a:rPr>
               <a:t>السِّتَارَةُ زَرْقَةٌ.</a:t>
             </a:r>
@@ -30396,8 +29837,7 @@
                   <a:srgbClr val="0E7C86"/>
                 </a:solidFill>
                 <a:latin typeface="Calibri" pitchFamily="34" charset="0"/>
-                <a:ea typeface="Calibri" pitchFamily="34" charset="-122"/>
-                <a:cs typeface="Calibri" pitchFamily="34" charset="-120"/>
+                <a:cs typeface="Amiri" pitchFamily="2" charset="-78"/>
               </a:rPr>
               <a:t>HOW TO ANSWER</a:t>
             </a:r>
@@ -30435,8 +29875,7 @@
                   <a:srgbClr val="1F2A37"/>
                 </a:solidFill>
                 <a:latin typeface="Calibri" pitchFamily="34" charset="0"/>
-                <a:ea typeface="Calibri" pitchFamily="34" charset="-122"/>
-                <a:cs typeface="Calibri" pitchFamily="34" charset="-120"/>
+                <a:cs typeface="Amiri" pitchFamily="2" charset="-78"/>
               </a:rPr>
               <a:t>Work on your own in silence.</a:t>
             </a:r>
@@ -30452,8 +29891,7 @@
                   <a:srgbClr val="1F2A37"/>
                 </a:solidFill>
                 <a:latin typeface="Calibri" pitchFamily="34" charset="0"/>
-                <a:ea typeface="Calibri" pitchFamily="34" charset="-122"/>
-                <a:cs typeface="Calibri" pitchFamily="34" charset="-120"/>
+                <a:cs typeface="Amiri" pitchFamily="2" charset="-78"/>
               </a:rPr>
               <a:t>When the timer ends, type in the chat:</a:t>
             </a:r>
@@ -30491,8 +29929,7 @@
                   <a:srgbClr val="1B3B6F"/>
                 </a:solidFill>
                 <a:latin typeface="Consolas" pitchFamily="34" charset="0"/>
-                <a:ea typeface="Consolas" pitchFamily="34" charset="-122"/>
-                <a:cs typeface="Consolas" pitchFamily="34" charset="-120"/>
+                <a:cs typeface="Amiri" pitchFamily="2" charset="-78"/>
               </a:rPr>
               <a:t>1_  2_  3_  4_  5_</a:t>
             </a:r>
@@ -30530,8 +29967,7 @@
                   <a:srgbClr val="0E7C86"/>
                 </a:solidFill>
                 <a:latin typeface="Calibri" pitchFamily="34" charset="0"/>
-                <a:ea typeface="Calibri" pitchFamily="34" charset="-122"/>
-                <a:cs typeface="Calibri" pitchFamily="34" charset="-120"/>
+                <a:cs typeface="Amiri" pitchFamily="2" charset="-78"/>
               </a:rPr>
               <a:t>⏱  5 : 00</a:t>
             </a:r>
@@ -30569,8 +30005,7 @@
                   <a:srgbClr val="8A93A0"/>
                 </a:solidFill>
                 <a:latin typeface="Calibri" pitchFamily="34" charset="0"/>
-                <a:ea typeface="Calibri" pitchFamily="34" charset="-122"/>
-                <a:cs typeface="Calibri" pitchFamily="34" charset="-120"/>
+                <a:cs typeface="Amiri" pitchFamily="2" charset="-78"/>
               </a:rPr>
               <a:t>4 / 22</a:t>
             </a:r>
@@ -30664,9 +30099,8 @@
                 <a:solidFill>
                   <a:srgbClr val="D4AF37"/>
                 </a:solidFill>
-                <a:latin typeface="Amiri" pitchFamily="34" charset="0"/>
-                <a:ea typeface="Amiri" pitchFamily="34" charset="-122"/>
-                <a:cs typeface="Amiri" pitchFamily="34" charset="-120"/>
+                <a:latin typeface="Amiri" pitchFamily="2" charset="-78"/>
+                <a:cs typeface="Amiri" pitchFamily="2" charset="-78"/>
               </a:rPr>
               <a:t>م</a:t>
             </a:r>
@@ -30704,8 +30138,7 @@
                   <a:srgbClr val="1B3B6F"/>
                 </a:solidFill>
                 <a:latin typeface="Cambria" pitchFamily="34" charset="0"/>
-                <a:ea typeface="Cambria" pitchFamily="34" charset="-122"/>
-                <a:cs typeface="Cambria" pitchFamily="34" charset="-120"/>
+                <a:cs typeface="Amiri" pitchFamily="2" charset="-78"/>
               </a:rPr>
               <a:t>Al Madina Online School</a:t>
             </a:r>
@@ -30743,8 +30176,7 @@
                   <a:srgbClr val="8A6D1E"/>
                 </a:solidFill>
                 <a:latin typeface="Calibri" pitchFamily="34" charset="0"/>
-                <a:ea typeface="Calibri" pitchFamily="34" charset="-122"/>
-                <a:cs typeface="Calibri" pitchFamily="34" charset="-120"/>
+                <a:cs typeface="Amiri" pitchFamily="2" charset="-78"/>
               </a:rPr>
               <a:t>ARABIC DEPARTMENT · MIFTAH ARABIC · IGCSE 0544</a:t>
             </a:r>
@@ -30809,8 +30241,7 @@
                   <a:srgbClr val="FFFFFF"/>
                 </a:solidFill>
                 <a:latin typeface="Calibri" pitchFamily="34" charset="0"/>
-                <a:ea typeface="Calibri" pitchFamily="34" charset="-122"/>
-                <a:cs typeface="Calibri" pitchFamily="34" charset="-120"/>
+                <a:cs typeface="Amiri" pitchFamily="2" charset="-78"/>
               </a:rPr>
               <a:t>F3-L12 · F3 Assessment</a:t>
             </a:r>
@@ -30875,8 +30306,7 @@
                   <a:srgbClr val="FFFFFF"/>
                 </a:solidFill>
                 <a:latin typeface="Calibri" pitchFamily="34" charset="0"/>
-                <a:ea typeface="Calibri" pitchFamily="34" charset="-122"/>
-                <a:cs typeface="Calibri" pitchFamily="34" charset="-120"/>
+                <a:cs typeface="Amiri" pitchFamily="2" charset="-78"/>
               </a:rPr>
               <a:t>DO NOW · 2 MIN</a:t>
             </a:r>
@@ -30914,8 +30344,7 @@
                   <a:srgbClr val="0E7C86"/>
                 </a:solidFill>
                 <a:latin typeface="Calibri" pitchFamily="34" charset="0"/>
-                <a:ea typeface="Calibri" pitchFamily="34" charset="-122"/>
-                <a:cs typeface="Calibri" pitchFamily="34" charset="-120"/>
+                <a:cs typeface="Amiri" pitchFamily="2" charset="-78"/>
               </a:rPr>
               <a:t>DO NOW · ANSWERS AND REASONS</a:t>
             </a:r>
@@ -30953,8 +30382,7 @@
                   <a:srgbClr val="1B3B6F"/>
                 </a:solidFill>
                 <a:latin typeface="Cambria" pitchFamily="34" charset="0"/>
-                <a:ea typeface="Cambria" pitchFamily="34" charset="-122"/>
-                <a:cs typeface="Cambria" pitchFamily="34" charset="-120"/>
+                <a:cs typeface="Amiri" pitchFamily="2" charset="-78"/>
               </a:rPr>
               <a:t>Let’s check — and explain why</a:t>
             </a:r>
@@ -30991,9 +30419,8 @@
                 <a:solidFill>
                   <a:srgbClr val="8A6D1E"/>
                 </a:solidFill>
-                <a:latin typeface="Amiri" pitchFamily="34" charset="0"/>
-                <a:ea typeface="Amiri" pitchFamily="34" charset="-122"/>
-                <a:cs typeface="Amiri" pitchFamily="34" charset="-120"/>
+                <a:latin typeface="Amiri" pitchFamily="2" charset="-78"/>
+                <a:cs typeface="Amiri" pitchFamily="2" charset="-78"/>
               </a:rPr>
               <a:t>الإِجَابَاتُ وَالتَّعْلِيلُ</a:t>
             </a:r>
@@ -31031,8 +30458,7 @@
                   <a:srgbClr val="8A93A0"/>
                 </a:solidFill>
                 <a:latin typeface="Calibri" pitchFamily="34" charset="0"/>
-                <a:ea typeface="Calibri" pitchFamily="34" charset="-122"/>
-                <a:cs typeface="Calibri" pitchFamily="34" charset="-120"/>
+                <a:cs typeface="Amiri" pitchFamily="2" charset="-78"/>
               </a:rPr>
               <a:t>Miftah Arabic · Foundation F3 · My Family &amp; Home · F3-L12</a:t>
             </a:r>
@@ -31129,8 +30555,7 @@
                   <a:srgbClr val="FFFFFF"/>
                 </a:solidFill>
                 <a:latin typeface="Calibri" pitchFamily="34" charset="0"/>
-                <a:ea typeface="Calibri" pitchFamily="34" charset="-122"/>
-                <a:cs typeface="Calibri" pitchFamily="34" charset="-120"/>
+                <a:cs typeface="Amiri" pitchFamily="2" charset="-78"/>
               </a:rPr>
               <a:t>1</a:t>
             </a:r>
@@ -31168,8 +30593,7 @@
                   <a:srgbClr val="1B3B6F"/>
                 </a:solidFill>
                 <a:latin typeface="Calibri" pitchFamily="34" charset="0"/>
-                <a:ea typeface="Calibri" pitchFamily="34" charset="-122"/>
-                <a:cs typeface="Calibri" pitchFamily="34" charset="-120"/>
+                <a:cs typeface="Amiri" pitchFamily="2" charset="-78"/>
               </a:rPr>
               <a:t>What does </a:t>
             </a:r>
@@ -31181,9 +30605,8 @@
                 <a:solidFill>
                   <a:srgbClr val="1B3B6F"/>
                 </a:solidFill>
-                <a:latin typeface="Amiri" pitchFamily="34" charset="0"/>
-                <a:ea typeface="Amiri" pitchFamily="34" charset="-122"/>
-                <a:cs typeface="Amiri" pitchFamily="34" charset="-120"/>
+                <a:latin typeface="Amiri" pitchFamily="2" charset="-78"/>
+                <a:cs typeface="Amiri" pitchFamily="2" charset="-78"/>
               </a:rPr>
               <a:t>تَقْيِيمٌ</a:t>
             </a:r>
@@ -31196,8 +30619,7 @@
                   <a:srgbClr val="1B3B6F"/>
                 </a:solidFill>
                 <a:latin typeface="Calibri" pitchFamily="34" charset="0"/>
-                <a:ea typeface="Calibri" pitchFamily="34" charset="-122"/>
-                <a:cs typeface="Calibri" pitchFamily="34" charset="-120"/>
+                <a:cs typeface="Amiri" pitchFamily="2" charset="-78"/>
               </a:rPr>
               <a:t> mean?</a:t>
             </a:r>
@@ -31260,8 +30682,7 @@
                   <a:srgbClr val="1B3B6F"/>
                 </a:solidFill>
                 <a:latin typeface="Calibri" pitchFamily="34" charset="0"/>
-                <a:ea typeface="Calibri" pitchFamily="34" charset="-122"/>
-                <a:cs typeface="Calibri" pitchFamily="34" charset="-120"/>
+                <a:cs typeface="Amiri" pitchFamily="2" charset="-78"/>
               </a:rPr>
               <a:t>A</a:t>
             </a:r>
@@ -31299,8 +30720,7 @@
                   <a:srgbClr val="9AA1AB"/>
                 </a:solidFill>
                 <a:latin typeface="Calibri" pitchFamily="34" charset="0"/>
-                <a:ea typeface="Calibri" pitchFamily="34" charset="-122"/>
-                <a:cs typeface="Calibri" pitchFamily="34" charset="-120"/>
+                <a:cs typeface="Amiri" pitchFamily="2" charset="-78"/>
               </a:rPr>
               <a:t>an achievement</a:t>
             </a:r>
@@ -31390,8 +30810,7 @@
                   <a:srgbClr val="FFFFFF"/>
                 </a:solidFill>
                 <a:latin typeface="Calibri" pitchFamily="34" charset="0"/>
-                <a:ea typeface="Calibri" pitchFamily="34" charset="-122"/>
-                <a:cs typeface="Calibri" pitchFamily="34" charset="-120"/>
+                <a:cs typeface="Amiri" pitchFamily="2" charset="-78"/>
               </a:rPr>
               <a:t>B</a:t>
             </a:r>
@@ -31429,8 +30848,7 @@
                   <a:srgbClr val="1F2A37"/>
                 </a:solidFill>
                 <a:latin typeface="Calibri" pitchFamily="34" charset="0"/>
-                <a:ea typeface="Calibri" pitchFamily="34" charset="-122"/>
-                <a:cs typeface="Calibri" pitchFamily="34" charset="-120"/>
+                <a:cs typeface="Amiri" pitchFamily="2" charset="-78"/>
               </a:rPr>
               <a:t>an assessment</a:t>
             </a:r>
@@ -31493,8 +30911,7 @@
                   <a:srgbClr val="1B3B6F"/>
                 </a:solidFill>
                 <a:latin typeface="Calibri" pitchFamily="34" charset="0"/>
-                <a:ea typeface="Calibri" pitchFamily="34" charset="-122"/>
-                <a:cs typeface="Calibri" pitchFamily="34" charset="-120"/>
+                <a:cs typeface="Amiri" pitchFamily="2" charset="-78"/>
               </a:rPr>
               <a:t>C</a:t>
             </a:r>
@@ -31532,8 +30949,7 @@
                   <a:srgbClr val="9AA1AB"/>
                 </a:solidFill>
                 <a:latin typeface="Calibri" pitchFamily="34" charset="0"/>
-                <a:ea typeface="Calibri" pitchFamily="34" charset="-122"/>
-                <a:cs typeface="Calibri" pitchFamily="34" charset="-120"/>
+                <a:cs typeface="Amiri" pitchFamily="2" charset="-78"/>
               </a:rPr>
               <a:t>a result</a:t>
             </a:r>
@@ -31571,8 +30987,7 @@
                   <a:srgbClr val="8A6D1E"/>
                 </a:solidFill>
                 <a:latin typeface="Calibri" pitchFamily="34" charset="0"/>
-                <a:ea typeface="Calibri" pitchFamily="34" charset="-122"/>
-                <a:cs typeface="Calibri" pitchFamily="34" charset="-120"/>
+                <a:cs typeface="Amiri" pitchFamily="2" charset="-78"/>
               </a:rPr>
               <a:t>Prepared at home (F3-L11).</a:t>
             </a:r>
@@ -31669,8 +31084,7 @@
                   <a:srgbClr val="FFFFFF"/>
                 </a:solidFill>
                 <a:latin typeface="Calibri" pitchFamily="34" charset="0"/>
-                <a:ea typeface="Calibri" pitchFamily="34" charset="-122"/>
-                <a:cs typeface="Calibri" pitchFamily="34" charset="-120"/>
+                <a:cs typeface="Amiri" pitchFamily="2" charset="-78"/>
               </a:rPr>
               <a:t>2</a:t>
             </a:r>
@@ -31708,8 +31122,7 @@
                   <a:srgbClr val="1B3B6F"/>
                 </a:solidFill>
                 <a:latin typeface="Calibri" pitchFamily="34" charset="0"/>
-                <a:ea typeface="Calibri" pitchFamily="34" charset="-122"/>
-                <a:cs typeface="Calibri" pitchFamily="34" charset="-120"/>
+                <a:cs typeface="Amiri" pitchFamily="2" charset="-78"/>
               </a:rPr>
               <a:t>What does </a:t>
             </a:r>
@@ -31721,9 +31134,8 @@
                 <a:solidFill>
                   <a:srgbClr val="1B3B6F"/>
                 </a:solidFill>
-                <a:latin typeface="Amiri" pitchFamily="34" charset="0"/>
-                <a:ea typeface="Amiri" pitchFamily="34" charset="-122"/>
-                <a:cs typeface="Amiri" pitchFamily="34" charset="-120"/>
+                <a:latin typeface="Amiri" pitchFamily="2" charset="-78"/>
+                <a:cs typeface="Amiri" pitchFamily="2" charset="-78"/>
               </a:rPr>
               <a:t>ثِقَةٌ</a:t>
             </a:r>
@@ -31736,8 +31148,7 @@
                   <a:srgbClr val="1B3B6F"/>
                 </a:solidFill>
                 <a:latin typeface="Calibri" pitchFamily="34" charset="0"/>
-                <a:ea typeface="Calibri" pitchFamily="34" charset="-122"/>
-                <a:cs typeface="Calibri" pitchFamily="34" charset="-120"/>
+                <a:cs typeface="Amiri" pitchFamily="2" charset="-78"/>
               </a:rPr>
               <a:t> mean?</a:t>
             </a:r>
@@ -31827,8 +31238,7 @@
                   <a:srgbClr val="FFFFFF"/>
                 </a:solidFill>
                 <a:latin typeface="Calibri" pitchFamily="34" charset="0"/>
-                <a:ea typeface="Calibri" pitchFamily="34" charset="-122"/>
-                <a:cs typeface="Calibri" pitchFamily="34" charset="-120"/>
+                <a:cs typeface="Amiri" pitchFamily="2" charset="-78"/>
               </a:rPr>
               <a:t>A</a:t>
             </a:r>
@@ -31866,8 +31276,7 @@
                   <a:srgbClr val="1F2A37"/>
                 </a:solidFill>
                 <a:latin typeface="Calibri" pitchFamily="34" charset="0"/>
-                <a:ea typeface="Calibri" pitchFamily="34" charset="-122"/>
-                <a:cs typeface="Calibri" pitchFamily="34" charset="-120"/>
+                <a:cs typeface="Amiri" pitchFamily="2" charset="-78"/>
               </a:rPr>
               <a:t>confidence</a:t>
             </a:r>
@@ -31930,8 +31339,7 @@
                   <a:srgbClr val="1B3B6F"/>
                 </a:solidFill>
                 <a:latin typeface="Calibri" pitchFamily="34" charset="0"/>
-                <a:ea typeface="Calibri" pitchFamily="34" charset="-122"/>
-                <a:cs typeface="Calibri" pitchFamily="34" charset="-120"/>
+                <a:cs typeface="Amiri" pitchFamily="2" charset="-78"/>
               </a:rPr>
               <a:t>B</a:t>
             </a:r>
@@ -31969,8 +31377,7 @@
                   <a:srgbClr val="9AA1AB"/>
                 </a:solidFill>
                 <a:latin typeface="Calibri" pitchFamily="34" charset="0"/>
-                <a:ea typeface="Calibri" pitchFamily="34" charset="-122"/>
-                <a:cs typeface="Calibri" pitchFamily="34" charset="-120"/>
+                <a:cs typeface="Amiri" pitchFamily="2" charset="-78"/>
               </a:rPr>
               <a:t>progress</a:t>
             </a:r>
@@ -32033,8 +31440,7 @@
                   <a:srgbClr val="1B3B6F"/>
                 </a:solidFill>
                 <a:latin typeface="Calibri" pitchFamily="34" charset="0"/>
-                <a:ea typeface="Calibri" pitchFamily="34" charset="-122"/>
-                <a:cs typeface="Calibri" pitchFamily="34" charset="-120"/>
+                <a:cs typeface="Amiri" pitchFamily="2" charset="-78"/>
               </a:rPr>
               <a:t>C</a:t>
             </a:r>
@@ -32072,8 +31478,7 @@
                   <a:srgbClr val="9AA1AB"/>
                 </a:solidFill>
                 <a:latin typeface="Calibri" pitchFamily="34" charset="0"/>
-                <a:ea typeface="Calibri" pitchFamily="34" charset="-122"/>
-                <a:cs typeface="Calibri" pitchFamily="34" charset="-120"/>
+                <a:cs typeface="Amiri" pitchFamily="2" charset="-78"/>
               </a:rPr>
               <a:t>a target</a:t>
             </a:r>
@@ -32111,8 +31516,7 @@
                   <a:srgbClr val="8A6D1E"/>
                 </a:solidFill>
                 <a:latin typeface="Calibri" pitchFamily="34" charset="0"/>
-                <a:ea typeface="Calibri" pitchFamily="34" charset="-122"/>
-                <a:cs typeface="Calibri" pitchFamily="34" charset="-120"/>
+                <a:cs typeface="Amiri" pitchFamily="2" charset="-78"/>
               </a:rPr>
               <a:t>Prepared at home (F3-L11).</a:t>
             </a:r>
@@ -32209,8 +31613,7 @@
                   <a:srgbClr val="FFFFFF"/>
                 </a:solidFill>
                 <a:latin typeface="Calibri" pitchFamily="34" charset="0"/>
-                <a:ea typeface="Calibri" pitchFamily="34" charset="-122"/>
-                <a:cs typeface="Calibri" pitchFamily="34" charset="-120"/>
+                <a:cs typeface="Amiri" pitchFamily="2" charset="-78"/>
               </a:rPr>
               <a:t>3</a:t>
             </a:r>
@@ -32248,8 +31651,7 @@
                   <a:srgbClr val="1B3B6F"/>
                 </a:solidFill>
                 <a:latin typeface="Calibri" pitchFamily="34" charset="0"/>
-                <a:ea typeface="Calibri" pitchFamily="34" charset="-122"/>
-                <a:cs typeface="Calibri" pitchFamily="34" charset="-120"/>
+                <a:cs typeface="Amiri" pitchFamily="2" charset="-78"/>
               </a:rPr>
               <a:t>Correct:</a:t>
             </a:r>
@@ -32286,9 +31688,8 @@
                 <a:solidFill>
                   <a:srgbClr val="1B3B6F"/>
                 </a:solidFill>
-                <a:latin typeface="Amiri" pitchFamily="34" charset="0"/>
-                <a:ea typeface="Amiri" pitchFamily="34" charset="-122"/>
-                <a:cs typeface="Amiri" pitchFamily="34" charset="-120"/>
+                <a:latin typeface="Amiri" pitchFamily="2" charset="-78"/>
+                <a:cs typeface="Amiri" pitchFamily="2" charset="-78"/>
               </a:rPr>
               <a:t>غُرْفَةُ النَّوْمِ ___ مِنَ المَطْبَخِ.</a:t>
             </a:r>
@@ -32351,8 +31752,7 @@
                   <a:srgbClr val="1B3B6F"/>
                 </a:solidFill>
                 <a:latin typeface="Calibri" pitchFamily="34" charset="0"/>
-                <a:ea typeface="Calibri" pitchFamily="34" charset="-122"/>
-                <a:cs typeface="Calibri" pitchFamily="34" charset="-120"/>
+                <a:cs typeface="Amiri" pitchFamily="2" charset="-78"/>
               </a:rPr>
               <a:t>A</a:t>
             </a:r>
@@ -32389,9 +31789,8 @@
                 <a:solidFill>
                   <a:srgbClr val="9AA1AB"/>
                 </a:solidFill>
-                <a:latin typeface="Amiri" pitchFamily="34" charset="0"/>
-                <a:ea typeface="Amiri" pitchFamily="34" charset="-122"/>
-                <a:cs typeface="Amiri" pitchFamily="34" charset="-120"/>
+                <a:latin typeface="Amiri" pitchFamily="2" charset="-78"/>
+                <a:cs typeface="Amiri" pitchFamily="2" charset="-78"/>
               </a:rPr>
               <a:t>قَرِيبٌ</a:t>
             </a:r>
@@ -32454,8 +31853,7 @@
                   <a:srgbClr val="1B3B6F"/>
                 </a:solidFill>
                 <a:latin typeface="Calibri" pitchFamily="34" charset="0"/>
-                <a:ea typeface="Calibri" pitchFamily="34" charset="-122"/>
-                <a:cs typeface="Calibri" pitchFamily="34" charset="-120"/>
+                <a:cs typeface="Amiri" pitchFamily="2" charset="-78"/>
               </a:rPr>
               <a:t>B</a:t>
             </a:r>
@@ -32492,9 +31890,8 @@
                 <a:solidFill>
                   <a:srgbClr val="9AA1AB"/>
                 </a:solidFill>
-                <a:latin typeface="Amiri" pitchFamily="34" charset="0"/>
-                <a:ea typeface="Amiri" pitchFamily="34" charset="-122"/>
-                <a:cs typeface="Amiri" pitchFamily="34" charset="-120"/>
+                <a:latin typeface="Amiri" pitchFamily="2" charset="-78"/>
+                <a:cs typeface="Amiri" pitchFamily="2" charset="-78"/>
               </a:rPr>
               <a:t>قَرِيبَاتٌ</a:t>
             </a:r>
@@ -32584,8 +31981,7 @@
                   <a:srgbClr val="FFFFFF"/>
                 </a:solidFill>
                 <a:latin typeface="Calibri" pitchFamily="34" charset="0"/>
-                <a:ea typeface="Calibri" pitchFamily="34" charset="-122"/>
-                <a:cs typeface="Calibri" pitchFamily="34" charset="-120"/>
+                <a:cs typeface="Amiri" pitchFamily="2" charset="-78"/>
               </a:rPr>
               <a:t>C</a:t>
             </a:r>
@@ -32622,9 +32018,8 @@
                 <a:solidFill>
                   <a:srgbClr val="1F2A37"/>
                 </a:solidFill>
-                <a:latin typeface="Amiri" pitchFamily="34" charset="0"/>
-                <a:ea typeface="Amiri" pitchFamily="34" charset="-122"/>
-                <a:cs typeface="Amiri" pitchFamily="34" charset="-120"/>
+                <a:latin typeface="Amiri" pitchFamily="2" charset="-78"/>
+                <a:cs typeface="Amiri" pitchFamily="2" charset="-78"/>
               </a:rPr>
               <a:t>قَرِيبَةٌ</a:t>
             </a:r>
@@ -32661,9 +32056,8 @@
                 <a:solidFill>
                   <a:srgbClr val="8A6D1E"/>
                 </a:solidFill>
-                <a:latin typeface="Amiri" pitchFamily="34" charset="0"/>
-                <a:ea typeface="Amiri" pitchFamily="34" charset="-122"/>
-                <a:cs typeface="Amiri" pitchFamily="34" charset="-120"/>
+                <a:latin typeface="Amiri" pitchFamily="2" charset="-78"/>
+                <a:cs typeface="Amiri" pitchFamily="2" charset="-78"/>
               </a:rPr>
               <a:t>غُرْفَةٌ</a:t>
             </a:r>
@@ -32676,8 +32070,7 @@
                   <a:srgbClr val="8A6D1E"/>
                 </a:solidFill>
                 <a:latin typeface="Calibri" pitchFamily="34" charset="0"/>
-                <a:ea typeface="Calibri" pitchFamily="34" charset="-122"/>
-                <a:cs typeface="Calibri" pitchFamily="34" charset="-120"/>
+                <a:cs typeface="Amiri" pitchFamily="2" charset="-78"/>
               </a:rPr>
               <a:t> is feminine.</a:t>
             </a:r>
@@ -32774,8 +32167,7 @@
                   <a:srgbClr val="FFFFFF"/>
                 </a:solidFill>
                 <a:latin typeface="Calibri" pitchFamily="34" charset="0"/>
-                <a:ea typeface="Calibri" pitchFamily="34" charset="-122"/>
-                <a:cs typeface="Calibri" pitchFamily="34" charset="-120"/>
+                <a:cs typeface="Amiri" pitchFamily="2" charset="-78"/>
               </a:rPr>
               <a:t>4</a:t>
             </a:r>
@@ -32813,8 +32205,7 @@
                   <a:srgbClr val="1B3B6F"/>
                 </a:solidFill>
                 <a:latin typeface="Calibri" pitchFamily="34" charset="0"/>
-                <a:ea typeface="Calibri" pitchFamily="34" charset="-122"/>
-                <a:cs typeface="Calibri" pitchFamily="34" charset="-120"/>
+                <a:cs typeface="Amiri" pitchFamily="2" charset="-78"/>
               </a:rPr>
               <a:t>Choose the accurate room count.</a:t>
             </a:r>
@@ -32877,8 +32268,7 @@
                   <a:srgbClr val="1B3B6F"/>
                 </a:solidFill>
                 <a:latin typeface="Calibri" pitchFamily="34" charset="0"/>
-                <a:ea typeface="Calibri" pitchFamily="34" charset="-122"/>
-                <a:cs typeface="Calibri" pitchFamily="34" charset="-120"/>
+                <a:cs typeface="Amiri" pitchFamily="2" charset="-78"/>
               </a:rPr>
               <a:t>A</a:t>
             </a:r>
@@ -32915,9 +32305,8 @@
                 <a:solidFill>
                   <a:srgbClr val="9AA1AB"/>
                 </a:solidFill>
-                <a:latin typeface="Amiri" pitchFamily="34" charset="0"/>
-                <a:ea typeface="Amiri" pitchFamily="34" charset="-122"/>
-                <a:cs typeface="Amiri" pitchFamily="34" charset="-120"/>
+                <a:latin typeface="Amiri" pitchFamily="2" charset="-78"/>
+                <a:cs typeface="Amiri" pitchFamily="2" charset="-78"/>
               </a:rPr>
               <a:t>ثَلَاثَةُ غُرَفٍ</a:t>
             </a:r>
@@ -32980,8 +32369,7 @@
                   <a:srgbClr val="1B3B6F"/>
                 </a:solidFill>
                 <a:latin typeface="Calibri" pitchFamily="34" charset="0"/>
-                <a:ea typeface="Calibri" pitchFamily="34" charset="-122"/>
-                <a:cs typeface="Calibri" pitchFamily="34" charset="-120"/>
+                <a:cs typeface="Amiri" pitchFamily="2" charset="-78"/>
               </a:rPr>
               <a:t>B</a:t>
             </a:r>
@@ -33018,9 +32406,8 @@
                 <a:solidFill>
                   <a:srgbClr val="9AA1AB"/>
                 </a:solidFill>
-                <a:latin typeface="Amiri" pitchFamily="34" charset="0"/>
-                <a:ea typeface="Amiri" pitchFamily="34" charset="-122"/>
-                <a:cs typeface="Amiri" pitchFamily="34" charset="-120"/>
+                <a:latin typeface="Amiri" pitchFamily="2" charset="-78"/>
+                <a:cs typeface="Amiri" pitchFamily="2" charset="-78"/>
               </a:rPr>
               <a:t>ثَلَاثٌ غُرْفَةٌ</a:t>
             </a:r>
@@ -33110,8 +32497,7 @@
                   <a:srgbClr val="FFFFFF"/>
                 </a:solidFill>
                 <a:latin typeface="Calibri" pitchFamily="34" charset="0"/>
-                <a:ea typeface="Calibri" pitchFamily="34" charset="-122"/>
-                <a:cs typeface="Calibri" pitchFamily="34" charset="-120"/>
+                <a:cs typeface="Amiri" pitchFamily="2" charset="-78"/>
               </a:rPr>
               <a:t>C</a:t>
             </a:r>
@@ -33148,9 +32534,8 @@
                 <a:solidFill>
                   <a:srgbClr val="1F2A37"/>
                 </a:solidFill>
-                <a:latin typeface="Amiri" pitchFamily="34" charset="0"/>
-                <a:ea typeface="Amiri" pitchFamily="34" charset="-122"/>
-                <a:cs typeface="Amiri" pitchFamily="34" charset="-120"/>
+                <a:latin typeface="Amiri" pitchFamily="2" charset="-78"/>
+                <a:cs typeface="Amiri" pitchFamily="2" charset="-78"/>
               </a:rPr>
               <a:t>ثَلَاثُ غُرَفٍ</a:t>
             </a:r>
@@ -33188,8 +32573,7 @@
                   <a:srgbClr val="8A6D1E"/>
                 </a:solidFill>
                 <a:latin typeface="Calibri" pitchFamily="34" charset="0"/>
-                <a:ea typeface="Calibri" pitchFamily="34" charset="-122"/>
-                <a:cs typeface="Calibri" pitchFamily="34" charset="-120"/>
+                <a:cs typeface="Amiri" pitchFamily="2" charset="-78"/>
               </a:rPr>
               <a:t>Numbers 3–10 show polarity with feminine </a:t>
             </a:r>
@@ -33201,9 +32585,8 @@
                 <a:solidFill>
                   <a:srgbClr val="8A6D1E"/>
                 </a:solidFill>
-                <a:latin typeface="Amiri" pitchFamily="34" charset="0"/>
-                <a:ea typeface="Amiri" pitchFamily="34" charset="-122"/>
-                <a:cs typeface="Amiri" pitchFamily="34" charset="-120"/>
+                <a:latin typeface="Amiri" pitchFamily="2" charset="-78"/>
+                <a:cs typeface="Amiri" pitchFamily="2" charset="-78"/>
               </a:rPr>
               <a:t>غُرْفَةٌ</a:t>
             </a:r>
@@ -33216,8 +32599,7 @@
                   <a:srgbClr val="8A6D1E"/>
                 </a:solidFill>
                 <a:latin typeface="Calibri" pitchFamily="34" charset="0"/>
-                <a:ea typeface="Calibri" pitchFamily="34" charset="-122"/>
-                <a:cs typeface="Calibri" pitchFamily="34" charset="-120"/>
+                <a:cs typeface="Amiri" pitchFamily="2" charset="-78"/>
               </a:rPr>
               <a:t>.</a:t>
             </a:r>
@@ -33314,8 +32696,7 @@
                   <a:srgbClr val="FFFFFF"/>
                 </a:solidFill>
                 <a:latin typeface="Calibri" pitchFamily="34" charset="0"/>
-                <a:ea typeface="Calibri" pitchFamily="34" charset="-122"/>
-                <a:cs typeface="Calibri" pitchFamily="34" charset="-120"/>
+                <a:cs typeface="Amiri" pitchFamily="2" charset="-78"/>
               </a:rPr>
               <a:t>5</a:t>
             </a:r>
@@ -33353,8 +32734,7 @@
                   <a:srgbClr val="1B3B6F"/>
                 </a:solidFill>
                 <a:latin typeface="Calibri" pitchFamily="34" charset="0"/>
-                <a:ea typeface="Calibri" pitchFamily="34" charset="-122"/>
-                <a:cs typeface="Calibri" pitchFamily="34" charset="-120"/>
+                <a:cs typeface="Amiri" pitchFamily="2" charset="-78"/>
               </a:rPr>
               <a:t>Which sentence uses a colour accurately?</a:t>
             </a:r>
@@ -33444,8 +32824,7 @@
                   <a:srgbClr val="FFFFFF"/>
                 </a:solidFill>
                 <a:latin typeface="Calibri" pitchFamily="34" charset="0"/>
-                <a:ea typeface="Calibri" pitchFamily="34" charset="-122"/>
-                <a:cs typeface="Calibri" pitchFamily="34" charset="-120"/>
+                <a:cs typeface="Amiri" pitchFamily="2" charset="-78"/>
               </a:rPr>
               <a:t>A</a:t>
             </a:r>
@@ -33482,9 +32861,8 @@
                 <a:solidFill>
                   <a:srgbClr val="1F2A37"/>
                 </a:solidFill>
-                <a:latin typeface="Amiri" pitchFamily="34" charset="0"/>
-                <a:ea typeface="Amiri" pitchFamily="34" charset="-122"/>
-                <a:cs typeface="Amiri" pitchFamily="34" charset="-120"/>
+                <a:latin typeface="Amiri" pitchFamily="2" charset="-78"/>
+                <a:cs typeface="Amiri" pitchFamily="2" charset="-78"/>
               </a:rPr>
               <a:t>السِّتَارَةُ زَرْقَاءُ.</a:t>
             </a:r>
@@ -33547,8 +32925,7 @@
                   <a:srgbClr val="1B3B6F"/>
                 </a:solidFill>
                 <a:latin typeface="Calibri" pitchFamily="34" charset="0"/>
-                <a:ea typeface="Calibri" pitchFamily="34" charset="-122"/>
-                <a:cs typeface="Calibri" pitchFamily="34" charset="-120"/>
+                <a:cs typeface="Amiri" pitchFamily="2" charset="-78"/>
               </a:rPr>
               <a:t>B</a:t>
             </a:r>
@@ -33585,9 +32962,8 @@
                 <a:solidFill>
                   <a:srgbClr val="9AA1AB"/>
                 </a:solidFill>
-                <a:latin typeface="Amiri" pitchFamily="34" charset="0"/>
-                <a:ea typeface="Amiri" pitchFamily="34" charset="-122"/>
-                <a:cs typeface="Amiri" pitchFamily="34" charset="-120"/>
+                <a:latin typeface="Amiri" pitchFamily="2" charset="-78"/>
+                <a:cs typeface="Amiri" pitchFamily="2" charset="-78"/>
               </a:rPr>
               <a:t>السِّتَارَةُ أَزْرَقُ.</a:t>
             </a:r>
@@ -33650,8 +33026,7 @@
                   <a:srgbClr val="1B3B6F"/>
                 </a:solidFill>
                 <a:latin typeface="Calibri" pitchFamily="34" charset="0"/>
-                <a:ea typeface="Calibri" pitchFamily="34" charset="-122"/>
-                <a:cs typeface="Calibri" pitchFamily="34" charset="-120"/>
+                <a:cs typeface="Amiri" pitchFamily="2" charset="-78"/>
               </a:rPr>
               <a:t>C</a:t>
             </a:r>
@@ -33688,9 +33063,8 @@
                 <a:solidFill>
                   <a:srgbClr val="9AA1AB"/>
                 </a:solidFill>
-                <a:latin typeface="Amiri" pitchFamily="34" charset="0"/>
-                <a:ea typeface="Amiri" pitchFamily="34" charset="-122"/>
-                <a:cs typeface="Amiri" pitchFamily="34" charset="-120"/>
+                <a:latin typeface="Amiri" pitchFamily="2" charset="-78"/>
+                <a:cs typeface="Amiri" pitchFamily="2" charset="-78"/>
               </a:rPr>
               <a:t>السِّتَارَةُ زَرْقَةٌ.</a:t>
             </a:r>
@@ -33728,8 +33102,7 @@
                   <a:srgbClr val="8A6D1E"/>
                 </a:solidFill>
                 <a:latin typeface="Calibri" pitchFamily="34" charset="0"/>
-                <a:ea typeface="Calibri" pitchFamily="34" charset="-122"/>
-                <a:cs typeface="Calibri" pitchFamily="34" charset="-120"/>
+                <a:cs typeface="Amiri" pitchFamily="2" charset="-78"/>
               </a:rPr>
               <a:t>The feminine broken colour form is </a:t>
             </a:r>
@@ -33741,9 +33114,8 @@
                 <a:solidFill>
                   <a:srgbClr val="8A6D1E"/>
                 </a:solidFill>
-                <a:latin typeface="Amiri" pitchFamily="34" charset="0"/>
-                <a:ea typeface="Amiri" pitchFamily="34" charset="-122"/>
-                <a:cs typeface="Amiri" pitchFamily="34" charset="-120"/>
+                <a:latin typeface="Amiri" pitchFamily="2" charset="-78"/>
+                <a:cs typeface="Amiri" pitchFamily="2" charset="-78"/>
               </a:rPr>
               <a:t>زَرْقَاءُ</a:t>
             </a:r>
@@ -33756,8 +33128,7 @@
                   <a:srgbClr val="8A6D1E"/>
                 </a:solidFill>
                 <a:latin typeface="Calibri" pitchFamily="34" charset="0"/>
-                <a:ea typeface="Calibri" pitchFamily="34" charset="-122"/>
-                <a:cs typeface="Calibri" pitchFamily="34" charset="-120"/>
+                <a:cs typeface="Amiri" pitchFamily="2" charset="-78"/>
               </a:rPr>
               <a:t>.</a:t>
             </a:r>
@@ -33829,8 +33200,7 @@
                   <a:srgbClr val="8A6D1E"/>
                 </a:solidFill>
                 <a:latin typeface="Calibri" pitchFamily="34" charset="0"/>
-                <a:ea typeface="Calibri" pitchFamily="34" charset="-122"/>
-                <a:cs typeface="Calibri" pitchFamily="34" charset="-120"/>
+                <a:cs typeface="Amiri" pitchFamily="2" charset="-78"/>
               </a:rPr>
               <a:t>THE KEY IDEA FOR TODAY</a:t>
             </a:r>
@@ -33868,8 +33238,7 @@
                   <a:srgbClr val="1F2A37"/>
                 </a:solidFill>
                 <a:latin typeface="Calibri" pitchFamily="34" charset="0"/>
-                <a:ea typeface="Calibri" pitchFamily="34" charset="-122"/>
-                <a:cs typeface="Calibri" pitchFamily="34" charset="-120"/>
+                <a:cs typeface="Amiri" pitchFamily="2" charset="-78"/>
               </a:rPr>
               <a:t>This warm-up does NOT count. Read every question fully — then look for the evidence.</a:t>
             </a:r>
@@ -33906,9 +33275,8 @@
                 <a:solidFill>
                   <a:srgbClr val="1B3B6F"/>
                 </a:solidFill>
-                <a:latin typeface="Amiri" pitchFamily="34" charset="0"/>
-                <a:ea typeface="Amiri" pitchFamily="34" charset="-122"/>
-                <a:cs typeface="Amiri" pitchFamily="34" charset="-120"/>
+                <a:latin typeface="Amiri" pitchFamily="2" charset="-78"/>
+                <a:cs typeface="Amiri" pitchFamily="2" charset="-78"/>
               </a:rPr>
               <a:t>اِقْرَأْ · اِبْحَثْ عَنِ الدَّلِيلِ · أَجِبْ</a:t>
             </a:r>
@@ -33946,8 +33314,7 @@
                   <a:srgbClr val="8A93A0"/>
                 </a:solidFill>
                 <a:latin typeface="Calibri" pitchFamily="34" charset="0"/>
-                <a:ea typeface="Calibri" pitchFamily="34" charset="-122"/>
-                <a:cs typeface="Calibri" pitchFamily="34" charset="-120"/>
+                <a:cs typeface="Amiri" pitchFamily="2" charset="-78"/>
               </a:rPr>
               <a:t>5 / 22</a:t>
             </a:r>
@@ -34041,9 +33408,8 @@
                 <a:solidFill>
                   <a:srgbClr val="D4AF37"/>
                 </a:solidFill>
-                <a:latin typeface="Amiri" pitchFamily="34" charset="0"/>
-                <a:ea typeface="Amiri" pitchFamily="34" charset="-122"/>
-                <a:cs typeface="Amiri" pitchFamily="34" charset="-120"/>
+                <a:latin typeface="Amiri" pitchFamily="2" charset="-78"/>
+                <a:cs typeface="Amiri" pitchFamily="2" charset="-78"/>
               </a:rPr>
               <a:t>م</a:t>
             </a:r>
@@ -34081,8 +33447,7 @@
                   <a:srgbClr val="1B3B6F"/>
                 </a:solidFill>
                 <a:latin typeface="Cambria" pitchFamily="34" charset="0"/>
-                <a:ea typeface="Cambria" pitchFamily="34" charset="-122"/>
-                <a:cs typeface="Cambria" pitchFamily="34" charset="-120"/>
+                <a:cs typeface="Amiri" pitchFamily="2" charset="-78"/>
               </a:rPr>
               <a:t>Al Madina Online School</a:t>
             </a:r>
@@ -34120,8 +33485,7 @@
                   <a:srgbClr val="8A6D1E"/>
                 </a:solidFill>
                 <a:latin typeface="Calibri" pitchFamily="34" charset="0"/>
-                <a:ea typeface="Calibri" pitchFamily="34" charset="-122"/>
-                <a:cs typeface="Calibri" pitchFamily="34" charset="-120"/>
+                <a:cs typeface="Amiri" pitchFamily="2" charset="-78"/>
               </a:rPr>
               <a:t>ARABIC DEPARTMENT · MIFTAH ARABIC · IGCSE 0544</a:t>
             </a:r>
@@ -34186,8 +33550,7 @@
                   <a:srgbClr val="FFFFFF"/>
                 </a:solidFill>
                 <a:latin typeface="Calibri" pitchFamily="34" charset="0"/>
-                <a:ea typeface="Calibri" pitchFamily="34" charset="-122"/>
-                <a:cs typeface="Calibri" pitchFamily="34" charset="-120"/>
+                <a:cs typeface="Amiri" pitchFamily="2" charset="-78"/>
               </a:rPr>
               <a:t>F3-L12 · F3 Assessment</a:t>
             </a:r>
@@ -34252,8 +33615,7 @@
                   <a:srgbClr val="FFFFFF"/>
                 </a:solidFill>
                 <a:latin typeface="Calibri" pitchFamily="34" charset="0"/>
-                <a:ea typeface="Calibri" pitchFamily="34" charset="-122"/>
-                <a:cs typeface="Calibri" pitchFamily="34" charset="-120"/>
+                <a:cs typeface="Amiri" pitchFamily="2" charset="-78"/>
               </a:rPr>
               <a:t>TEACHER INSTRUCTION · 1 MIN</a:t>
             </a:r>
@@ -34291,8 +33653,7 @@
                   <a:srgbClr val="1B3B6F"/>
                 </a:solidFill>
                 <a:latin typeface="Calibri" pitchFamily="34" charset="0"/>
-                <a:ea typeface="Calibri" pitchFamily="34" charset="-122"/>
-                <a:cs typeface="Calibri" pitchFamily="34" charset="-120"/>
+                <a:cs typeface="Amiri" pitchFamily="2" charset="-78"/>
               </a:rPr>
               <a:t>ASSESSMENT MAP (WEBSITE) · 60 MARKS IN TOTAL</a:t>
             </a:r>
@@ -34330,8 +33691,7 @@
                   <a:srgbClr val="1B3B6F"/>
                 </a:solidFill>
                 <a:latin typeface="Cambria" pitchFamily="34" charset="0"/>
-                <a:ea typeface="Cambria" pitchFamily="34" charset="-122"/>
-                <a:cs typeface="Cambria" pitchFamily="34" charset="-120"/>
+                <a:cs typeface="Amiri" pitchFamily="2" charset="-78"/>
               </a:rPr>
               <a:t>Four sections, sixty marks</a:t>
             </a:r>
@@ -34368,9 +33728,8 @@
                 <a:solidFill>
                   <a:srgbClr val="8A6D1E"/>
                 </a:solidFill>
-                <a:latin typeface="Amiri" pitchFamily="34" charset="0"/>
-                <a:ea typeface="Amiri" pitchFamily="34" charset="-122"/>
-                <a:cs typeface="Amiri" pitchFamily="34" charset="-120"/>
+                <a:latin typeface="Amiri" pitchFamily="2" charset="-78"/>
+                <a:cs typeface="Amiri" pitchFamily="2" charset="-78"/>
               </a:rPr>
               <a:t>خُطَّةُ التَّقْيِيمِ</a:t>
             </a:r>
@@ -34408,8 +33767,7 @@
                   <a:srgbClr val="8A93A0"/>
                 </a:solidFill>
                 <a:latin typeface="Calibri" pitchFamily="34" charset="0"/>
-                <a:ea typeface="Calibri" pitchFamily="34" charset="-122"/>
-                <a:cs typeface="Calibri" pitchFamily="34" charset="-120"/>
+                <a:cs typeface="Amiri" pitchFamily="2" charset="-78"/>
               </a:rPr>
               <a:t>Miftah Arabic · Foundation F3 · My Family &amp; Home · F3-L12</a:t>
             </a:r>
@@ -34472,8 +33830,7 @@
                   <a:srgbClr val="FFFFFF"/>
                 </a:solidFill>
                 <a:latin typeface="Calibri" pitchFamily="34" charset="0"/>
-                <a:ea typeface="Calibri" pitchFamily="34" charset="-122"/>
-                <a:cs typeface="Calibri" pitchFamily="34" charset="-120"/>
+                <a:cs typeface="Amiri" pitchFamily="2" charset="-78"/>
               </a:rPr>
               <a:t>Section</a:t>
             </a:r>
@@ -34511,8 +33868,7 @@
                   <a:srgbClr val="FFFFFF"/>
                 </a:solidFill>
                 <a:latin typeface="Calibri" pitchFamily="34" charset="0"/>
-                <a:ea typeface="Calibri" pitchFamily="34" charset="-122"/>
-                <a:cs typeface="Calibri" pitchFamily="34" charset="-120"/>
+                <a:cs typeface="Amiri" pitchFamily="2" charset="-78"/>
               </a:rPr>
               <a:t>What you do</a:t>
             </a:r>
@@ -34550,8 +33906,7 @@
                   <a:srgbClr val="FFFFFF"/>
                 </a:solidFill>
                 <a:latin typeface="Calibri" pitchFamily="34" charset="0"/>
-                <a:ea typeface="Calibri" pitchFamily="34" charset="-122"/>
-                <a:cs typeface="Calibri" pitchFamily="34" charset="-120"/>
+                <a:cs typeface="Amiri" pitchFamily="2" charset="-78"/>
               </a:rPr>
               <a:t>Marks</a:t>
             </a:r>
@@ -34616,8 +33971,7 @@
                   <a:srgbClr val="5A6472"/>
                 </a:solidFill>
                 <a:latin typeface="Calibri" pitchFamily="34" charset="0"/>
-                <a:ea typeface="Calibri" pitchFamily="34" charset="-122"/>
-                <a:cs typeface="Calibri" pitchFamily="34" charset="-120"/>
+                <a:cs typeface="Amiri" pitchFamily="2" charset="-78"/>
               </a:rPr>
               <a:t>A · Listening</a:t>
             </a:r>
@@ -34655,8 +34009,7 @@
                   <a:srgbClr val="5A6472"/>
                 </a:solidFill>
                 <a:latin typeface="Calibri" pitchFamily="34" charset="0"/>
-                <a:ea typeface="Calibri" pitchFamily="34" charset="-122"/>
-                <a:cs typeface="Calibri" pitchFamily="34" charset="-120"/>
+                <a:cs typeface="Amiri" pitchFamily="2" charset="-78"/>
               </a:rPr>
               <a:t>Two texts: 8 multiple-choice · 4 “who?” · 4 true / false · write 2 words you heard (4)</a:t>
             </a:r>
@@ -34694,8 +34047,7 @@
                   <a:srgbClr val="5A6472"/>
                 </a:solidFill>
                 <a:latin typeface="Calibri" pitchFamily="34" charset="0"/>
-                <a:ea typeface="Calibri" pitchFamily="34" charset="-122"/>
-                <a:cs typeface="Calibri" pitchFamily="34" charset="-120"/>
+                <a:cs typeface="Amiri" pitchFamily="2" charset="-78"/>
               </a:rPr>
               <a:t>20</a:t>
             </a:r>
@@ -34760,8 +34112,7 @@
                   <a:srgbClr val="FFFFFF"/>
                 </a:solidFill>
                 <a:latin typeface="Calibri" pitchFamily="34" charset="0"/>
-                <a:ea typeface="Calibri" pitchFamily="34" charset="-122"/>
-                <a:cs typeface="Calibri" pitchFamily="34" charset="-120"/>
+                <a:cs typeface="Amiri" pitchFamily="2" charset="-78"/>
               </a:rPr>
               <a:t>CORE</a:t>
             </a:r>
@@ -34826,8 +34177,7 @@
                   <a:srgbClr val="5A6472"/>
                 </a:solidFill>
                 <a:latin typeface="Calibri" pitchFamily="34" charset="0"/>
-                <a:ea typeface="Calibri" pitchFamily="34" charset="-122"/>
-                <a:cs typeface="Calibri" pitchFamily="34" charset="-120"/>
+                <a:cs typeface="Amiri" pitchFamily="2" charset="-78"/>
               </a:rPr>
               <a:t>B · Reading</a:t>
             </a:r>
@@ -34865,8 +34215,7 @@
                   <a:srgbClr val="5A6472"/>
                 </a:solidFill>
                 <a:latin typeface="Calibri" pitchFamily="34" charset="0"/>
-                <a:ea typeface="Calibri" pitchFamily="34" charset="-122"/>
-                <a:cs typeface="Calibri" pitchFamily="34" charset="-120"/>
+                <a:cs typeface="Amiri" pitchFamily="2" charset="-78"/>
               </a:rPr>
               <a:t>Read Samir’s text · answer six questions in complete Arabic sentences</a:t>
             </a:r>
@@ -34904,8 +34253,7 @@
                   <a:srgbClr val="5A6472"/>
                 </a:solidFill>
                 <a:latin typeface="Calibri" pitchFamily="34" charset="0"/>
-                <a:ea typeface="Calibri" pitchFamily="34" charset="-122"/>
-                <a:cs typeface="Calibri" pitchFamily="34" charset="-120"/>
+                <a:cs typeface="Amiri" pitchFamily="2" charset="-78"/>
               </a:rPr>
               <a:t>10</a:t>
             </a:r>
@@ -34970,8 +34318,7 @@
                   <a:srgbClr val="FFFFFF"/>
                 </a:solidFill>
                 <a:latin typeface="Calibri" pitchFamily="34" charset="0"/>
-                <a:ea typeface="Calibri" pitchFamily="34" charset="-122"/>
-                <a:cs typeface="Calibri" pitchFamily="34" charset="-120"/>
+                <a:cs typeface="Amiri" pitchFamily="2" charset="-78"/>
               </a:rPr>
               <a:t>CORE</a:t>
             </a:r>
@@ -35036,8 +34383,7 @@
                   <a:srgbClr val="5A6472"/>
                 </a:solidFill>
                 <a:latin typeface="Calibri" pitchFamily="34" charset="0"/>
-                <a:ea typeface="Calibri" pitchFamily="34" charset="-122"/>
-                <a:cs typeface="Calibri" pitchFamily="34" charset="-120"/>
+                <a:cs typeface="Amiri" pitchFamily="2" charset="-78"/>
               </a:rPr>
               <a:t>C · Writing</a:t>
             </a:r>
@@ -35075,8 +34421,7 @@
                   <a:srgbClr val="5A6472"/>
                 </a:solidFill>
                 <a:latin typeface="Calibri" pitchFamily="34" charset="0"/>
-                <a:ea typeface="Calibri" pitchFamily="34" charset="-122"/>
-                <a:cs typeface="Calibri" pitchFamily="34" charset="-120"/>
+                <a:cs typeface="Amiri" pitchFamily="2" charset="-78"/>
               </a:rPr>
               <a:t>Label five room items (5) · write 60–80 words about home and family (15)</a:t>
             </a:r>
@@ -35114,8 +34459,7 @@
                   <a:srgbClr val="5A6472"/>
                 </a:solidFill>
                 <a:latin typeface="Calibri" pitchFamily="34" charset="0"/>
-                <a:ea typeface="Calibri" pitchFamily="34" charset="-122"/>
-                <a:cs typeface="Calibri" pitchFamily="34" charset="-120"/>
+                <a:cs typeface="Amiri" pitchFamily="2" charset="-78"/>
               </a:rPr>
               <a:t>20</a:t>
             </a:r>
@@ -35180,8 +34524,7 @@
                   <a:srgbClr val="FFFFFF"/>
                 </a:solidFill>
                 <a:latin typeface="Calibri" pitchFamily="34" charset="0"/>
-                <a:ea typeface="Calibri" pitchFamily="34" charset="-122"/>
-                <a:cs typeface="Calibri" pitchFamily="34" charset="-120"/>
+                <a:cs typeface="Amiri" pitchFamily="2" charset="-78"/>
               </a:rPr>
               <a:t>CORE</a:t>
             </a:r>
@@ -35246,8 +34589,7 @@
                   <a:srgbClr val="5A6472"/>
                 </a:solidFill>
                 <a:latin typeface="Calibri" pitchFamily="34" charset="0"/>
-                <a:ea typeface="Calibri" pitchFamily="34" charset="-122"/>
-                <a:cs typeface="Calibri" pitchFamily="34" charset="-120"/>
+                <a:cs typeface="Amiri" pitchFamily="2" charset="-78"/>
               </a:rPr>
               <a:t>D · Speaking</a:t>
             </a:r>
@@ -35285,8 +34627,7 @@
                   <a:srgbClr val="5A6472"/>
                 </a:solidFill>
                 <a:latin typeface="Calibri" pitchFamily="34" charset="0"/>
-                <a:ea typeface="Calibri" pitchFamily="34" charset="-122"/>
-                <a:cs typeface="Calibri" pitchFamily="34" charset="-120"/>
+                <a:cs typeface="Amiri" pitchFamily="2" charset="-78"/>
               </a:rPr>
               <a:t>Answer five family-and-home questions: communication (5) · accuracy and fluency (5)</a:t>
             </a:r>
@@ -35324,8 +34665,7 @@
                   <a:srgbClr val="5A6472"/>
                 </a:solidFill>
                 <a:latin typeface="Calibri" pitchFamily="34" charset="0"/>
-                <a:ea typeface="Calibri" pitchFamily="34" charset="-122"/>
-                <a:cs typeface="Calibri" pitchFamily="34" charset="-120"/>
+                <a:cs typeface="Amiri" pitchFamily="2" charset="-78"/>
               </a:rPr>
               <a:t>10</a:t>
             </a:r>
@@ -35390,8 +34730,7 @@
                   <a:srgbClr val="FFFFFF"/>
                 </a:solidFill>
                 <a:latin typeface="Calibri" pitchFamily="34" charset="0"/>
-                <a:ea typeface="Calibri" pitchFamily="34" charset="-122"/>
-                <a:cs typeface="Calibri" pitchFamily="34" charset="-120"/>
+                <a:cs typeface="Amiri" pitchFamily="2" charset="-78"/>
               </a:rPr>
               <a:t>CORE</a:t>
             </a:r>
@@ -35429,8 +34768,7 @@
                   <a:srgbClr val="8A93A0"/>
                 </a:solidFill>
                 <a:latin typeface="Calibri" pitchFamily="34" charset="0"/>
-                <a:ea typeface="Calibri" pitchFamily="34" charset="-122"/>
-                <a:cs typeface="Calibri" pitchFamily="34" charset="-120"/>
+                <a:cs typeface="Amiri" pitchFamily="2" charset="-78"/>
               </a:rPr>
               <a:t>6 / 22</a:t>
             </a:r>
@@ -35524,9 +34862,8 @@
                 <a:solidFill>
                   <a:srgbClr val="D4AF37"/>
                 </a:solidFill>
-                <a:latin typeface="Amiri" pitchFamily="34" charset="0"/>
-                <a:ea typeface="Amiri" pitchFamily="34" charset="-122"/>
-                <a:cs typeface="Amiri" pitchFamily="34" charset="-120"/>
+                <a:latin typeface="Amiri" pitchFamily="2" charset="-78"/>
+                <a:cs typeface="Amiri" pitchFamily="2" charset="-78"/>
               </a:rPr>
               <a:t>م</a:t>
             </a:r>
@@ -35564,8 +34901,7 @@
                   <a:srgbClr val="1B3B6F"/>
                 </a:solidFill>
                 <a:latin typeface="Cambria" pitchFamily="34" charset="0"/>
-                <a:ea typeface="Cambria" pitchFamily="34" charset="-122"/>
-                <a:cs typeface="Cambria" pitchFamily="34" charset="-120"/>
+                <a:cs typeface="Amiri" pitchFamily="2" charset="-78"/>
               </a:rPr>
               <a:t>Al Madina Online School</a:t>
             </a:r>
@@ -35603,8 +34939,7 @@
                   <a:srgbClr val="8A6D1E"/>
                 </a:solidFill>
                 <a:latin typeface="Calibri" pitchFamily="34" charset="0"/>
-                <a:ea typeface="Calibri" pitchFamily="34" charset="-122"/>
-                <a:cs typeface="Calibri" pitchFamily="34" charset="-120"/>
+                <a:cs typeface="Amiri" pitchFamily="2" charset="-78"/>
               </a:rPr>
               <a:t>ARABIC DEPARTMENT · MIFTAH ARABIC · IGCSE 0544</a:t>
             </a:r>
@@ -35669,8 +35004,7 @@
                   <a:srgbClr val="FFFFFF"/>
                 </a:solidFill>
                 <a:latin typeface="Calibri" pitchFamily="34" charset="0"/>
-                <a:ea typeface="Calibri" pitchFamily="34" charset="-122"/>
-                <a:cs typeface="Calibri" pitchFamily="34" charset="-120"/>
+                <a:cs typeface="Amiri" pitchFamily="2" charset="-78"/>
               </a:rPr>
               <a:t>F3-L12 · F3 Assessment</a:t>
             </a:r>
@@ -35735,8 +35069,7 @@
                   <a:srgbClr val="FFFFFF"/>
                 </a:solidFill>
                 <a:latin typeface="Calibri" pitchFamily="34" charset="0"/>
-                <a:ea typeface="Calibri" pitchFamily="34" charset="-122"/>
-                <a:cs typeface="Calibri" pitchFamily="34" charset="-120"/>
+                <a:cs typeface="Amiri" pitchFamily="2" charset="-78"/>
               </a:rPr>
               <a:t>I DO · 5 MIN</a:t>
             </a:r>
@@ -35774,8 +35107,7 @@
                   <a:srgbClr val="6B4C9A"/>
                 </a:solidFill>
                 <a:latin typeface="Calibri" pitchFamily="34" charset="0"/>
-                <a:ea typeface="Calibri" pitchFamily="34" charset="-122"/>
-                <a:cs typeface="Calibri" pitchFamily="34" charset="-120"/>
+                <a:cs typeface="Amiri" pitchFamily="2" charset="-78"/>
               </a:rPr>
               <a:t>LISTENING · TEXT 1 · FATIMA’S HOME IN CAIRO · 8 MARKS (WEBSITE)</a:t>
             </a:r>
@@ -35813,8 +35145,7 @@
                   <a:srgbClr val="1B3B6F"/>
                 </a:solidFill>
                 <a:latin typeface="Cambria" pitchFamily="34" charset="0"/>
-                <a:ea typeface="Cambria" pitchFamily="34" charset="-122"/>
-                <a:cs typeface="Cambria" pitchFamily="34" charset="-120"/>
+                <a:cs typeface="Amiri" pitchFamily="2" charset="-78"/>
               </a:rPr>
               <a:t>Listening · Text 1</a:t>
             </a:r>
@@ -35851,9 +35182,8 @@
                 <a:solidFill>
                   <a:srgbClr val="8A6D1E"/>
                 </a:solidFill>
-                <a:latin typeface="Amiri" pitchFamily="34" charset="0"/>
-                <a:ea typeface="Amiri" pitchFamily="34" charset="-122"/>
-                <a:cs typeface="Amiri" pitchFamily="34" charset="-120"/>
+                <a:latin typeface="Amiri" pitchFamily="2" charset="-78"/>
+                <a:cs typeface="Amiri" pitchFamily="2" charset="-78"/>
               </a:rPr>
               <a:t>الاِسْتِمَاعُ · النَّصُّ الأَوَّلُ</a:t>
             </a:r>
@@ -35891,8 +35221,7 @@
                   <a:srgbClr val="8A93A0"/>
                 </a:solidFill>
                 <a:latin typeface="Calibri" pitchFamily="34" charset="0"/>
-                <a:ea typeface="Calibri" pitchFamily="34" charset="-122"/>
-                <a:cs typeface="Calibri" pitchFamily="34" charset="-120"/>
+                <a:cs typeface="Amiri" pitchFamily="2" charset="-78"/>
               </a:rPr>
               <a:t>Miftah Arabic · Foundation F3 · My Family &amp; Home · F3-L12</a:t>
             </a:r>
@@ -35989,8 +35318,7 @@
                   <a:srgbClr val="FFFFFF"/>
                 </a:solidFill>
                 <a:latin typeface="Calibri" pitchFamily="34" charset="0"/>
-                <a:ea typeface="Calibri" pitchFamily="34" charset="-122"/>
-                <a:cs typeface="Calibri" pitchFamily="34" charset="-120"/>
+                <a:cs typeface="Amiri" pitchFamily="2" charset="-78"/>
               </a:rPr>
               <a:t>1</a:t>
             </a:r>
@@ -36028,8 +35356,7 @@
                   <a:srgbClr val="1B3B6F"/>
                 </a:solidFill>
                 <a:latin typeface="Calibri" pitchFamily="34" charset="0"/>
-                <a:ea typeface="Calibri" pitchFamily="34" charset="-122"/>
-                <a:cs typeface="Calibri" pitchFamily="34" charset="-120"/>
+                <a:cs typeface="Amiri" pitchFamily="2" charset="-78"/>
               </a:rPr>
               <a:t>Where does Fatima live?</a:t>
             </a:r>
@@ -36092,8 +35419,7 @@
                   <a:srgbClr val="1B3B6F"/>
                 </a:solidFill>
                 <a:latin typeface="Calibri" pitchFamily="34" charset="0"/>
-                <a:ea typeface="Calibri" pitchFamily="34" charset="-122"/>
-                <a:cs typeface="Calibri" pitchFamily="34" charset="-120"/>
+                <a:cs typeface="Amiri" pitchFamily="2" charset="-78"/>
               </a:rPr>
               <a:t>A</a:t>
             </a:r>
@@ -36131,8 +35457,7 @@
                   <a:srgbClr val="1F2A37"/>
                 </a:solidFill>
                 <a:latin typeface="Calibri" pitchFamily="34" charset="0"/>
-                <a:ea typeface="Calibri" pitchFamily="34" charset="-122"/>
-                <a:cs typeface="Calibri" pitchFamily="34" charset="-120"/>
+                <a:cs typeface="Amiri" pitchFamily="2" charset="-78"/>
               </a:rPr>
               <a:t>Riyadh</a:t>
             </a:r>
@@ -36195,8 +35520,7 @@
                   <a:srgbClr val="1B3B6F"/>
                 </a:solidFill>
                 <a:latin typeface="Calibri" pitchFamily="34" charset="0"/>
-                <a:ea typeface="Calibri" pitchFamily="34" charset="-122"/>
-                <a:cs typeface="Calibri" pitchFamily="34" charset="-120"/>
+                <a:cs typeface="Amiri" pitchFamily="2" charset="-78"/>
               </a:rPr>
               <a:t>B</a:t>
             </a:r>
@@ -36234,8 +35558,7 @@
                   <a:srgbClr val="1F2A37"/>
                 </a:solidFill>
                 <a:latin typeface="Calibri" pitchFamily="34" charset="0"/>
-                <a:ea typeface="Calibri" pitchFamily="34" charset="-122"/>
-                <a:cs typeface="Calibri" pitchFamily="34" charset="-120"/>
+                <a:cs typeface="Amiri" pitchFamily="2" charset="-78"/>
               </a:rPr>
               <a:t>London</a:t>
             </a:r>
@@ -36298,8 +35621,7 @@
                   <a:srgbClr val="1B3B6F"/>
                 </a:solidFill>
                 <a:latin typeface="Calibri" pitchFamily="34" charset="0"/>
-                <a:ea typeface="Calibri" pitchFamily="34" charset="-122"/>
-                <a:cs typeface="Calibri" pitchFamily="34" charset="-120"/>
+                <a:cs typeface="Amiri" pitchFamily="2" charset="-78"/>
               </a:rPr>
               <a:t>C</a:t>
             </a:r>
@@ -36337,8 +35659,7 @@
                   <a:srgbClr val="1F2A37"/>
                 </a:solidFill>
                 <a:latin typeface="Calibri" pitchFamily="34" charset="0"/>
-                <a:ea typeface="Calibri" pitchFamily="34" charset="-122"/>
-                <a:cs typeface="Calibri" pitchFamily="34" charset="-120"/>
+                <a:cs typeface="Amiri" pitchFamily="2" charset="-78"/>
               </a:rPr>
               <a:t>Cairo</a:t>
             </a:r>
@@ -36435,8 +35756,7 @@
                   <a:srgbClr val="FFFFFF"/>
                 </a:solidFill>
                 <a:latin typeface="Calibri" pitchFamily="34" charset="0"/>
-                <a:ea typeface="Calibri" pitchFamily="34" charset="-122"/>
-                <a:cs typeface="Calibri" pitchFamily="34" charset="-120"/>
+                <a:cs typeface="Amiri" pitchFamily="2" charset="-78"/>
               </a:rPr>
               <a:t>2</a:t>
             </a:r>
@@ -36474,8 +35794,7 @@
                   <a:srgbClr val="1B3B6F"/>
                 </a:solidFill>
                 <a:latin typeface="Calibri" pitchFamily="34" charset="0"/>
-                <a:ea typeface="Calibri" pitchFamily="34" charset="-122"/>
-                <a:cs typeface="Calibri" pitchFamily="34" charset="-120"/>
+                <a:cs typeface="Amiri" pitchFamily="2" charset="-78"/>
               </a:rPr>
               <a:t>How many rooms are in the house?</a:t>
             </a:r>
@@ -36538,8 +35857,7 @@
                   <a:srgbClr val="1B3B6F"/>
                 </a:solidFill>
                 <a:latin typeface="Calibri" pitchFamily="34" charset="0"/>
-                <a:ea typeface="Calibri" pitchFamily="34" charset="-122"/>
-                <a:cs typeface="Calibri" pitchFamily="34" charset="-120"/>
+                <a:cs typeface="Amiri" pitchFamily="2" charset="-78"/>
               </a:rPr>
               <a:t>A</a:t>
             </a:r>
@@ -36577,8 +35895,7 @@
                   <a:srgbClr val="1F2A37"/>
                 </a:solidFill>
                 <a:latin typeface="Calibri" pitchFamily="34" charset="0"/>
-                <a:ea typeface="Calibri" pitchFamily="34" charset="-122"/>
-                <a:cs typeface="Calibri" pitchFamily="34" charset="-120"/>
+                <a:cs typeface="Amiri" pitchFamily="2" charset="-78"/>
               </a:rPr>
               <a:t>Four</a:t>
             </a:r>
@@ -36641,8 +35958,7 @@
                   <a:srgbClr val="1B3B6F"/>
                 </a:solidFill>
                 <a:latin typeface="Calibri" pitchFamily="34" charset="0"/>
-                <a:ea typeface="Calibri" pitchFamily="34" charset="-122"/>
-                <a:cs typeface="Calibri" pitchFamily="34" charset="-120"/>
+                <a:cs typeface="Amiri" pitchFamily="2" charset="-78"/>
               </a:rPr>
               <a:t>B</a:t>
             </a:r>
@@ -36680,8 +35996,7 @@
                   <a:srgbClr val="1F2A37"/>
                 </a:solidFill>
                 <a:latin typeface="Calibri" pitchFamily="34" charset="0"/>
-                <a:ea typeface="Calibri" pitchFamily="34" charset="-122"/>
-                <a:cs typeface="Calibri" pitchFamily="34" charset="-120"/>
+                <a:cs typeface="Amiri" pitchFamily="2" charset="-78"/>
               </a:rPr>
               <a:t>Six</a:t>
             </a:r>
@@ -36744,8 +36059,7 @@
                   <a:srgbClr val="1B3B6F"/>
                 </a:solidFill>
                 <a:latin typeface="Calibri" pitchFamily="34" charset="0"/>
-                <a:ea typeface="Calibri" pitchFamily="34" charset="-122"/>
-                <a:cs typeface="Calibri" pitchFamily="34" charset="-120"/>
+                <a:cs typeface="Amiri" pitchFamily="2" charset="-78"/>
               </a:rPr>
               <a:t>C</a:t>
             </a:r>
@@ -36783,8 +36097,7 @@
                   <a:srgbClr val="1F2A37"/>
                 </a:solidFill>
                 <a:latin typeface="Calibri" pitchFamily="34" charset="0"/>
-                <a:ea typeface="Calibri" pitchFamily="34" charset="-122"/>
-                <a:cs typeface="Calibri" pitchFamily="34" charset="-120"/>
+                <a:cs typeface="Amiri" pitchFamily="2" charset="-78"/>
               </a:rPr>
               <a:t>Eight</a:t>
             </a:r>
@@ -36881,8 +36194,7 @@
                   <a:srgbClr val="FFFFFF"/>
                 </a:solidFill>
                 <a:latin typeface="Calibri" pitchFamily="34" charset="0"/>
-                <a:ea typeface="Calibri" pitchFamily="34" charset="-122"/>
-                <a:cs typeface="Calibri" pitchFamily="34" charset="-120"/>
+                <a:cs typeface="Amiri" pitchFamily="2" charset="-78"/>
               </a:rPr>
               <a:t>3</a:t>
             </a:r>
@@ -36920,8 +36232,7 @@
                   <a:srgbClr val="1B3B6F"/>
                 </a:solidFill>
                 <a:latin typeface="Calibri" pitchFamily="34" charset="0"/>
-                <a:ea typeface="Calibri" pitchFamily="34" charset="-122"/>
-                <a:cs typeface="Calibri" pitchFamily="34" charset="-120"/>
+                <a:cs typeface="Amiri" pitchFamily="2" charset="-78"/>
               </a:rPr>
               <a:t>Where is the living room?</a:t>
             </a:r>
@@ -36984,8 +36295,7 @@
                   <a:srgbClr val="1B3B6F"/>
                 </a:solidFill>
                 <a:latin typeface="Calibri" pitchFamily="34" charset="0"/>
-                <a:ea typeface="Calibri" pitchFamily="34" charset="-122"/>
-                <a:cs typeface="Calibri" pitchFamily="34" charset="-120"/>
+                <a:cs typeface="Amiri" pitchFamily="2" charset="-78"/>
               </a:rPr>
               <a:t>A</a:t>
             </a:r>
@@ -37023,8 +36333,7 @@
                   <a:srgbClr val="1F2A37"/>
                 </a:solidFill>
                 <a:latin typeface="Calibri" pitchFamily="34" charset="0"/>
-                <a:ea typeface="Calibri" pitchFamily="34" charset="-122"/>
-                <a:cs typeface="Calibri" pitchFamily="34" charset="-120"/>
+                <a:cs typeface="Amiri" pitchFamily="2" charset="-78"/>
               </a:rPr>
               <a:t>On the first floor</a:t>
             </a:r>
@@ -37087,8 +36396,7 @@
                   <a:srgbClr val="1B3B6F"/>
                 </a:solidFill>
                 <a:latin typeface="Calibri" pitchFamily="34" charset="0"/>
-                <a:ea typeface="Calibri" pitchFamily="34" charset="-122"/>
-                <a:cs typeface="Calibri" pitchFamily="34" charset="-120"/>
+                <a:cs typeface="Amiri" pitchFamily="2" charset="-78"/>
               </a:rPr>
               <a:t>B</a:t>
             </a:r>
@@ -37126,8 +36434,7 @@
                   <a:srgbClr val="1F2A37"/>
                 </a:solidFill>
                 <a:latin typeface="Calibri" pitchFamily="34" charset="0"/>
-                <a:ea typeface="Calibri" pitchFamily="34" charset="-122"/>
-                <a:cs typeface="Calibri" pitchFamily="34" charset="-120"/>
+                <a:cs typeface="Amiri" pitchFamily="2" charset="-78"/>
               </a:rPr>
               <a:t>On the ground floor</a:t>
             </a:r>
@@ -37190,8 +36497,7 @@
                   <a:srgbClr val="1B3B6F"/>
                 </a:solidFill>
                 <a:latin typeface="Calibri" pitchFamily="34" charset="0"/>
-                <a:ea typeface="Calibri" pitchFamily="34" charset="-122"/>
-                <a:cs typeface="Calibri" pitchFamily="34" charset="-120"/>
+                <a:cs typeface="Amiri" pitchFamily="2" charset="-78"/>
               </a:rPr>
               <a:t>C</a:t>
             </a:r>
@@ -37229,8 +36535,7 @@
                   <a:srgbClr val="1F2A37"/>
                 </a:solidFill>
                 <a:latin typeface="Calibri" pitchFamily="34" charset="0"/>
-                <a:ea typeface="Calibri" pitchFamily="34" charset="-122"/>
-                <a:cs typeface="Calibri" pitchFamily="34" charset="-120"/>
+                <a:cs typeface="Amiri" pitchFamily="2" charset="-78"/>
               </a:rPr>
               <a:t>Beside the garden</a:t>
             </a:r>
@@ -37327,8 +36632,7 @@
                   <a:srgbClr val="FFFFFF"/>
                 </a:solidFill>
                 <a:latin typeface="Calibri" pitchFamily="34" charset="0"/>
-                <a:ea typeface="Calibri" pitchFamily="34" charset="-122"/>
-                <a:cs typeface="Calibri" pitchFamily="34" charset="-120"/>
+                <a:cs typeface="Amiri" pitchFamily="2" charset="-78"/>
               </a:rPr>
               <a:t>4</a:t>
             </a:r>
@@ -37366,8 +36670,7 @@
                   <a:srgbClr val="1B3B6F"/>
                 </a:solidFill>
                 <a:latin typeface="Calibri" pitchFamily="34" charset="0"/>
-                <a:ea typeface="Calibri" pitchFamily="34" charset="-122"/>
-                <a:cs typeface="Calibri" pitchFamily="34" charset="-120"/>
+                <a:cs typeface="Amiri" pitchFamily="2" charset="-78"/>
               </a:rPr>
               <a:t>What colour is the sofa?</a:t>
             </a:r>
@@ -37430,8 +36733,7 @@
                   <a:srgbClr val="1B3B6F"/>
                 </a:solidFill>
                 <a:latin typeface="Calibri" pitchFamily="34" charset="0"/>
-                <a:ea typeface="Calibri" pitchFamily="34" charset="-122"/>
-                <a:cs typeface="Calibri" pitchFamily="34" charset="-120"/>
+                <a:cs typeface="Amiri" pitchFamily="2" charset="-78"/>
               </a:rPr>
               <a:t>A</a:t>
             </a:r>
@@ -37469,8 +36771,7 @@
                   <a:srgbClr val="1F2A37"/>
                 </a:solidFill>
                 <a:latin typeface="Calibri" pitchFamily="34" charset="0"/>
-                <a:ea typeface="Calibri" pitchFamily="34" charset="-122"/>
-                <a:cs typeface="Calibri" pitchFamily="34" charset="-120"/>
+                <a:cs typeface="Amiri" pitchFamily="2" charset="-78"/>
               </a:rPr>
               <a:t>Blue</a:t>
             </a:r>
@@ -37533,8 +36834,7 @@
                   <a:srgbClr val="1B3B6F"/>
                 </a:solidFill>
                 <a:latin typeface="Calibri" pitchFamily="34" charset="0"/>
-                <a:ea typeface="Calibri" pitchFamily="34" charset="-122"/>
-                <a:cs typeface="Calibri" pitchFamily="34" charset="-120"/>
+                <a:cs typeface="Amiri" pitchFamily="2" charset="-78"/>
               </a:rPr>
               <a:t>B</a:t>
             </a:r>
@@ -37572,8 +36872,7 @@
                   <a:srgbClr val="1F2A37"/>
                 </a:solidFill>
                 <a:latin typeface="Calibri" pitchFamily="34" charset="0"/>
-                <a:ea typeface="Calibri" pitchFamily="34" charset="-122"/>
-                <a:cs typeface="Calibri" pitchFamily="34" charset="-120"/>
+                <a:cs typeface="Amiri" pitchFamily="2" charset="-78"/>
               </a:rPr>
               <a:t>White</a:t>
             </a:r>
@@ -37636,8 +36935,7 @@
                   <a:srgbClr val="1B3B6F"/>
                 </a:solidFill>
                 <a:latin typeface="Calibri" pitchFamily="34" charset="0"/>
-                <a:ea typeface="Calibri" pitchFamily="34" charset="-122"/>
-                <a:cs typeface="Calibri" pitchFamily="34" charset="-120"/>
+                <a:cs typeface="Amiri" pitchFamily="2" charset="-78"/>
               </a:rPr>
               <a:t>C</a:t>
             </a:r>
@@ -37675,8 +36973,7 @@
                   <a:srgbClr val="1F2A37"/>
                 </a:solidFill>
                 <a:latin typeface="Calibri" pitchFamily="34" charset="0"/>
-                <a:ea typeface="Calibri" pitchFamily="34" charset="-122"/>
-                <a:cs typeface="Calibri" pitchFamily="34" charset="-120"/>
+                <a:cs typeface="Amiri" pitchFamily="2" charset="-78"/>
               </a:rPr>
               <a:t>Brown</a:t>
             </a:r>
@@ -37773,8 +37070,7 @@
                   <a:srgbClr val="FFFFFF"/>
                 </a:solidFill>
                 <a:latin typeface="Calibri" pitchFamily="34" charset="0"/>
-                <a:ea typeface="Calibri" pitchFamily="34" charset="-122"/>
-                <a:cs typeface="Calibri" pitchFamily="34" charset="-120"/>
+                <a:cs typeface="Amiri" pitchFamily="2" charset="-78"/>
               </a:rPr>
               <a:t>5</a:t>
             </a:r>
@@ -37812,8 +37108,7 @@
                   <a:srgbClr val="1B3B6F"/>
                 </a:solidFill>
                 <a:latin typeface="Calibri" pitchFamily="34" charset="0"/>
-                <a:ea typeface="Calibri" pitchFamily="34" charset="-122"/>
-                <a:cs typeface="Calibri" pitchFamily="34" charset="-120"/>
+                <a:cs typeface="Amiri" pitchFamily="2" charset="-78"/>
               </a:rPr>
               <a:t>What colour is the rug?</a:t>
             </a:r>
@@ -37876,8 +37171,7 @@
                   <a:srgbClr val="1B3B6F"/>
                 </a:solidFill>
                 <a:latin typeface="Calibri" pitchFamily="34" charset="0"/>
-                <a:ea typeface="Calibri" pitchFamily="34" charset="-122"/>
-                <a:cs typeface="Calibri" pitchFamily="34" charset="-120"/>
+                <a:cs typeface="Amiri" pitchFamily="2" charset="-78"/>
               </a:rPr>
               <a:t>A</a:t>
             </a:r>
@@ -37915,8 +37209,7 @@
                   <a:srgbClr val="1F2A37"/>
                 </a:solidFill>
                 <a:latin typeface="Calibri" pitchFamily="34" charset="0"/>
-                <a:ea typeface="Calibri" pitchFamily="34" charset="-122"/>
-                <a:cs typeface="Calibri" pitchFamily="34" charset="-120"/>
+                <a:cs typeface="Amiri" pitchFamily="2" charset="-78"/>
               </a:rPr>
               <a:t>Blue</a:t>
             </a:r>
@@ -37979,8 +37272,7 @@
                   <a:srgbClr val="1B3B6F"/>
                 </a:solidFill>
                 <a:latin typeface="Calibri" pitchFamily="34" charset="0"/>
-                <a:ea typeface="Calibri" pitchFamily="34" charset="-122"/>
-                <a:cs typeface="Calibri" pitchFamily="34" charset="-120"/>
+                <a:cs typeface="Amiri" pitchFamily="2" charset="-78"/>
               </a:rPr>
               <a:t>B</a:t>
             </a:r>
@@ -38018,8 +37310,7 @@
                   <a:srgbClr val="1F2A37"/>
                 </a:solidFill>
                 <a:latin typeface="Calibri" pitchFamily="34" charset="0"/>
-                <a:ea typeface="Calibri" pitchFamily="34" charset="-122"/>
-                <a:cs typeface="Calibri" pitchFamily="34" charset="-120"/>
+                <a:cs typeface="Amiri" pitchFamily="2" charset="-78"/>
               </a:rPr>
               <a:t>Pink</a:t>
             </a:r>
@@ -38082,8 +37373,7 @@
                   <a:srgbClr val="1B3B6F"/>
                 </a:solidFill>
                 <a:latin typeface="Calibri" pitchFamily="34" charset="0"/>
-                <a:ea typeface="Calibri" pitchFamily="34" charset="-122"/>
-                <a:cs typeface="Calibri" pitchFamily="34" charset="-120"/>
+                <a:cs typeface="Amiri" pitchFamily="2" charset="-78"/>
               </a:rPr>
               <a:t>C</a:t>
             </a:r>
@@ -38121,8 +37411,7 @@
                   <a:srgbClr val="1F2A37"/>
                 </a:solidFill>
                 <a:latin typeface="Calibri" pitchFamily="34" charset="0"/>
-                <a:ea typeface="Calibri" pitchFamily="34" charset="-122"/>
-                <a:cs typeface="Calibri" pitchFamily="34" charset="-120"/>
+                <a:cs typeface="Amiri" pitchFamily="2" charset="-78"/>
               </a:rPr>
               <a:t>Brown</a:t>
             </a:r>
@@ -38219,8 +37508,7 @@
                   <a:srgbClr val="FFFFFF"/>
                 </a:solidFill>
                 <a:latin typeface="Calibri" pitchFamily="34" charset="0"/>
-                <a:ea typeface="Calibri" pitchFamily="34" charset="-122"/>
-                <a:cs typeface="Calibri" pitchFamily="34" charset="-120"/>
+                <a:cs typeface="Amiri" pitchFamily="2" charset="-78"/>
               </a:rPr>
               <a:t>6</a:t>
             </a:r>
@@ -38258,8 +37546,7 @@
                   <a:srgbClr val="1B3B6F"/>
                 </a:solidFill>
                 <a:latin typeface="Calibri" pitchFamily="34" charset="0"/>
-                <a:ea typeface="Calibri" pitchFamily="34" charset="-122"/>
-                <a:cs typeface="Calibri" pitchFamily="34" charset="-120"/>
+                <a:cs typeface="Amiri" pitchFamily="2" charset="-78"/>
               </a:rPr>
               <a:t>What is opposite the house?</a:t>
             </a:r>
@@ -38322,8 +37609,7 @@
                   <a:srgbClr val="1B3B6F"/>
                 </a:solidFill>
                 <a:latin typeface="Calibri" pitchFamily="34" charset="0"/>
-                <a:ea typeface="Calibri" pitchFamily="34" charset="-122"/>
-                <a:cs typeface="Calibri" pitchFamily="34" charset="-120"/>
+                <a:cs typeface="Amiri" pitchFamily="2" charset="-78"/>
               </a:rPr>
               <a:t>A</a:t>
             </a:r>
@@ -38361,8 +37647,7 @@
                   <a:srgbClr val="1F2A37"/>
                 </a:solidFill>
                 <a:latin typeface="Calibri" pitchFamily="34" charset="0"/>
-                <a:ea typeface="Calibri" pitchFamily="34" charset="-122"/>
-                <a:cs typeface="Calibri" pitchFamily="34" charset="-120"/>
+                <a:cs typeface="Amiri" pitchFamily="2" charset="-78"/>
               </a:rPr>
               <a:t>A bakery</a:t>
             </a:r>
@@ -38425,8 +37710,7 @@
                   <a:srgbClr val="1B3B6F"/>
                 </a:solidFill>
                 <a:latin typeface="Calibri" pitchFamily="34" charset="0"/>
-                <a:ea typeface="Calibri" pitchFamily="34" charset="-122"/>
-                <a:cs typeface="Calibri" pitchFamily="34" charset="-120"/>
+                <a:cs typeface="Amiri" pitchFamily="2" charset="-78"/>
               </a:rPr>
               <a:t>B</a:t>
             </a:r>
@@ -38464,8 +37748,7 @@
                   <a:srgbClr val="1F2A37"/>
                 </a:solidFill>
                 <a:latin typeface="Calibri" pitchFamily="34" charset="0"/>
-                <a:ea typeface="Calibri" pitchFamily="34" charset="-122"/>
-                <a:cs typeface="Calibri" pitchFamily="34" charset="-120"/>
+                <a:cs typeface="Amiri" pitchFamily="2" charset="-78"/>
               </a:rPr>
               <a:t>A public park</a:t>
             </a:r>
@@ -38528,8 +37811,7 @@
                   <a:srgbClr val="1B3B6F"/>
                 </a:solidFill>
                 <a:latin typeface="Calibri" pitchFamily="34" charset="0"/>
-                <a:ea typeface="Calibri" pitchFamily="34" charset="-122"/>
-                <a:cs typeface="Calibri" pitchFamily="34" charset="-120"/>
+                <a:cs typeface="Amiri" pitchFamily="2" charset="-78"/>
               </a:rPr>
               <a:t>C</a:t>
             </a:r>
@@ -38567,8 +37849,7 @@
                   <a:srgbClr val="1F2A37"/>
                 </a:solidFill>
                 <a:latin typeface="Calibri" pitchFamily="34" charset="0"/>
-                <a:ea typeface="Calibri" pitchFamily="34" charset="-122"/>
-                <a:cs typeface="Calibri" pitchFamily="34" charset="-120"/>
+                <a:cs typeface="Amiri" pitchFamily="2" charset="-78"/>
               </a:rPr>
               <a:t>A school</a:t>
             </a:r>
@@ -38665,8 +37946,7 @@
                   <a:srgbClr val="FFFFFF"/>
                 </a:solidFill>
                 <a:latin typeface="Calibri" pitchFamily="34" charset="0"/>
-                <a:ea typeface="Calibri" pitchFamily="34" charset="-122"/>
-                <a:cs typeface="Calibri" pitchFamily="34" charset="-120"/>
+                <a:cs typeface="Amiri" pitchFamily="2" charset="-78"/>
               </a:rPr>
               <a:t>7</a:t>
             </a:r>
@@ -38704,8 +37984,7 @@
                   <a:srgbClr val="1B3B6F"/>
                 </a:solidFill>
                 <a:latin typeface="Calibri" pitchFamily="34" charset="0"/>
-                <a:ea typeface="Calibri" pitchFamily="34" charset="-122"/>
-                <a:cs typeface="Calibri" pitchFamily="34" charset="-120"/>
+                <a:cs typeface="Amiri" pitchFamily="2" charset="-78"/>
               </a:rPr>
               <a:t>Who lives with Fatima?</a:t>
             </a:r>
@@ -38768,8 +38047,7 @@
                   <a:srgbClr val="1B3B6F"/>
                 </a:solidFill>
                 <a:latin typeface="Calibri" pitchFamily="34" charset="0"/>
-                <a:ea typeface="Calibri" pitchFamily="34" charset="-122"/>
-                <a:cs typeface="Calibri" pitchFamily="34" charset="-120"/>
+                <a:cs typeface="Amiri" pitchFamily="2" charset="-78"/>
               </a:rPr>
               <a:t>A</a:t>
             </a:r>
@@ -38807,8 +38085,7 @@
                   <a:srgbClr val="1F2A37"/>
                 </a:solidFill>
                 <a:latin typeface="Calibri" pitchFamily="34" charset="0"/>
-                <a:ea typeface="Calibri" pitchFamily="34" charset="-122"/>
-                <a:cs typeface="Calibri" pitchFamily="34" charset="-120"/>
+                <a:cs typeface="Amiri" pitchFamily="2" charset="-78"/>
               </a:rPr>
               <a:t>Her parents, brother and sister</a:t>
             </a:r>
@@ -38871,8 +38148,7 @@
                   <a:srgbClr val="1B3B6F"/>
                 </a:solidFill>
                 <a:latin typeface="Calibri" pitchFamily="34" charset="0"/>
-                <a:ea typeface="Calibri" pitchFamily="34" charset="-122"/>
-                <a:cs typeface="Calibri" pitchFamily="34" charset="-120"/>
+                <a:cs typeface="Amiri" pitchFamily="2" charset="-78"/>
               </a:rPr>
               <a:t>B</a:t>
             </a:r>
@@ -38910,8 +38186,7 @@
                   <a:srgbClr val="1F2A37"/>
                 </a:solidFill>
                 <a:latin typeface="Calibri" pitchFamily="34" charset="0"/>
-                <a:ea typeface="Calibri" pitchFamily="34" charset="-122"/>
-                <a:cs typeface="Calibri" pitchFamily="34" charset="-120"/>
+                <a:cs typeface="Amiri" pitchFamily="2" charset="-78"/>
               </a:rPr>
               <a:t>Her grandmother only</a:t>
             </a:r>
@@ -38974,8 +38249,7 @@
                   <a:srgbClr val="1B3B6F"/>
                 </a:solidFill>
                 <a:latin typeface="Calibri" pitchFamily="34" charset="0"/>
-                <a:ea typeface="Calibri" pitchFamily="34" charset="-122"/>
-                <a:cs typeface="Calibri" pitchFamily="34" charset="-120"/>
+                <a:cs typeface="Amiri" pitchFamily="2" charset="-78"/>
               </a:rPr>
               <a:t>C</a:t>
             </a:r>
@@ -39013,8 +38287,7 @@
                   <a:srgbClr val="1F2A37"/>
                 </a:solidFill>
                 <a:latin typeface="Calibri" pitchFamily="34" charset="0"/>
-                <a:ea typeface="Calibri" pitchFamily="34" charset="-122"/>
-                <a:cs typeface="Calibri" pitchFamily="34" charset="-120"/>
+                <a:cs typeface="Amiri" pitchFamily="2" charset="-78"/>
               </a:rPr>
               <a:t>Two cousins</a:t>
             </a:r>
@@ -39111,8 +38384,7 @@
                   <a:srgbClr val="FFFFFF"/>
                 </a:solidFill>
                 <a:latin typeface="Calibri" pitchFamily="34" charset="0"/>
-                <a:ea typeface="Calibri" pitchFamily="34" charset="-122"/>
-                <a:cs typeface="Calibri" pitchFamily="34" charset="-120"/>
+                <a:cs typeface="Amiri" pitchFamily="2" charset="-78"/>
               </a:rPr>
               <a:t>8</a:t>
             </a:r>
@@ -39150,8 +38422,7 @@
                   <a:srgbClr val="1B3B6F"/>
                 </a:solidFill>
                 <a:latin typeface="Calibri" pitchFamily="34" charset="0"/>
-                <a:ea typeface="Calibri" pitchFamily="34" charset="-122"/>
-                <a:cs typeface="Calibri" pitchFamily="34" charset="-120"/>
+                <a:cs typeface="Amiri" pitchFamily="2" charset="-78"/>
               </a:rPr>
               <a:t>Why does she like her neighbourhood?</a:t>
             </a:r>
@@ -39214,8 +38485,7 @@
                   <a:srgbClr val="1B3B6F"/>
                 </a:solidFill>
                 <a:latin typeface="Calibri" pitchFamily="34" charset="0"/>
-                <a:ea typeface="Calibri" pitchFamily="34" charset="-122"/>
-                <a:cs typeface="Calibri" pitchFamily="34" charset="-120"/>
+                <a:cs typeface="Amiri" pitchFamily="2" charset="-78"/>
               </a:rPr>
               <a:t>A</a:t>
             </a:r>
@@ -39253,8 +38523,7 @@
                   <a:srgbClr val="1F2A37"/>
                 </a:solidFill>
                 <a:latin typeface="Calibri" pitchFamily="34" charset="0"/>
-                <a:ea typeface="Calibri" pitchFamily="34" charset="-122"/>
-                <a:cs typeface="Calibri" pitchFamily="34" charset="-120"/>
+                <a:cs typeface="Amiri" pitchFamily="2" charset="-78"/>
               </a:rPr>
               <a:t>It is very busy</a:t>
             </a:r>
@@ -39317,8 +38586,7 @@
                   <a:srgbClr val="1B3B6F"/>
                 </a:solidFill>
                 <a:latin typeface="Calibri" pitchFamily="34" charset="0"/>
-                <a:ea typeface="Calibri" pitchFamily="34" charset="-122"/>
-                <a:cs typeface="Calibri" pitchFamily="34" charset="-120"/>
+                <a:cs typeface="Amiri" pitchFamily="2" charset="-78"/>
               </a:rPr>
               <a:t>B</a:t>
             </a:r>
@@ -39356,8 +38624,7 @@
                   <a:srgbClr val="1F2A37"/>
                 </a:solidFill>
                 <a:latin typeface="Calibri" pitchFamily="34" charset="0"/>
-                <a:ea typeface="Calibri" pitchFamily="34" charset="-122"/>
-                <a:cs typeface="Calibri" pitchFamily="34" charset="-120"/>
+                <a:cs typeface="Amiri" pitchFamily="2" charset="-78"/>
               </a:rPr>
               <a:t>It is near the airport</a:t>
             </a:r>
@@ -39420,8 +38687,7 @@
                   <a:srgbClr val="1B3B6F"/>
                 </a:solidFill>
                 <a:latin typeface="Calibri" pitchFamily="34" charset="0"/>
-                <a:ea typeface="Calibri" pitchFamily="34" charset="-122"/>
-                <a:cs typeface="Calibri" pitchFamily="34" charset="-120"/>
+                <a:cs typeface="Amiri" pitchFamily="2" charset="-78"/>
               </a:rPr>
               <a:t>C</a:t>
             </a:r>
@@ -39459,8 +38725,7 @@
                   <a:srgbClr val="1F2A37"/>
                 </a:solidFill>
                 <a:latin typeface="Calibri" pitchFamily="34" charset="0"/>
-                <a:ea typeface="Calibri" pitchFamily="34" charset="-122"/>
-                <a:cs typeface="Calibri" pitchFamily="34" charset="-120"/>
+                <a:cs typeface="Amiri" pitchFamily="2" charset="-78"/>
               </a:rPr>
               <a:t>It is quiet</a:t>
             </a:r>
@@ -39498,8 +38763,7 @@
                   <a:srgbClr val="8A93A0"/>
                 </a:solidFill>
                 <a:latin typeface="Calibri" pitchFamily="34" charset="0"/>
-                <a:ea typeface="Calibri" pitchFamily="34" charset="-122"/>
-                <a:cs typeface="Calibri" pitchFamily="34" charset="-120"/>
+                <a:cs typeface="Amiri" pitchFamily="2" charset="-78"/>
               </a:rPr>
               <a:t>7 / 22</a:t>
             </a:r>
@@ -39593,9 +38857,8 @@
                 <a:solidFill>
                   <a:srgbClr val="D4AF37"/>
                 </a:solidFill>
-                <a:latin typeface="Amiri" pitchFamily="34" charset="0"/>
-                <a:ea typeface="Amiri" pitchFamily="34" charset="-122"/>
-                <a:cs typeface="Amiri" pitchFamily="34" charset="-120"/>
+                <a:latin typeface="Amiri" pitchFamily="2" charset="-78"/>
+                <a:cs typeface="Amiri" pitchFamily="2" charset="-78"/>
               </a:rPr>
               <a:t>م</a:t>
             </a:r>
@@ -39633,8 +38896,7 @@
                   <a:srgbClr val="1B3B6F"/>
                 </a:solidFill>
                 <a:latin typeface="Cambria" pitchFamily="34" charset="0"/>
-                <a:ea typeface="Cambria" pitchFamily="34" charset="-122"/>
-                <a:cs typeface="Cambria" pitchFamily="34" charset="-120"/>
+                <a:cs typeface="Amiri" pitchFamily="2" charset="-78"/>
               </a:rPr>
               <a:t>Al Madina Online School</a:t>
             </a:r>
@@ -39672,8 +38934,7 @@
                   <a:srgbClr val="8A6D1E"/>
                 </a:solidFill>
                 <a:latin typeface="Calibri" pitchFamily="34" charset="0"/>
-                <a:ea typeface="Calibri" pitchFamily="34" charset="-122"/>
-                <a:cs typeface="Calibri" pitchFamily="34" charset="-120"/>
+                <a:cs typeface="Amiri" pitchFamily="2" charset="-78"/>
               </a:rPr>
               <a:t>ARABIC DEPARTMENT · MIFTAH ARABIC · IGCSE 0544</a:t>
             </a:r>
@@ -39738,8 +38999,7 @@
                   <a:srgbClr val="FFFFFF"/>
                 </a:solidFill>
                 <a:latin typeface="Calibri" pitchFamily="34" charset="0"/>
-                <a:ea typeface="Calibri" pitchFamily="34" charset="-122"/>
-                <a:cs typeface="Calibri" pitchFamily="34" charset="-120"/>
+                <a:cs typeface="Amiri" pitchFamily="2" charset="-78"/>
               </a:rPr>
               <a:t>F3-L12 · F3 Assessment</a:t>
             </a:r>
@@ -39804,8 +39064,7 @@
                   <a:srgbClr val="FFFFFF"/>
                 </a:solidFill>
                 <a:latin typeface="Calibri" pitchFamily="34" charset="0"/>
-                <a:ea typeface="Calibri" pitchFamily="34" charset="-122"/>
-                <a:cs typeface="Calibri" pitchFamily="34" charset="-120"/>
+                <a:cs typeface="Amiri" pitchFamily="2" charset="-78"/>
               </a:rPr>
               <a:t>I DO</a:t>
             </a:r>
@@ -39843,8 +39102,7 @@
                   <a:srgbClr val="6B4C9A"/>
                 </a:solidFill>
                 <a:latin typeface="Calibri" pitchFamily="34" charset="0"/>
-                <a:ea typeface="Calibri" pitchFamily="34" charset="-122"/>
-                <a:cs typeface="Calibri" pitchFamily="34" charset="-120"/>
+                <a:cs typeface="Amiri" pitchFamily="2" charset="-78"/>
               </a:rPr>
               <a:t>LISTENING · TEXT 1 · ANSWERS</a:t>
             </a:r>
@@ -39882,8 +39140,7 @@
                   <a:srgbClr val="1B3B6F"/>
                 </a:solidFill>
                 <a:latin typeface="Cambria" pitchFamily="34" charset="0"/>
-                <a:ea typeface="Cambria" pitchFamily="34" charset="-122"/>
-                <a:cs typeface="Cambria" pitchFamily="34" charset="-120"/>
+                <a:cs typeface="Amiri" pitchFamily="2" charset="-78"/>
               </a:rPr>
               <a:t>Text 1 · Answers</a:t>
             </a:r>
@@ -39920,9 +39177,8 @@
                 <a:solidFill>
                   <a:srgbClr val="8A6D1E"/>
                 </a:solidFill>
-                <a:latin typeface="Amiri" pitchFamily="34" charset="0"/>
-                <a:ea typeface="Amiri" pitchFamily="34" charset="-122"/>
-                <a:cs typeface="Amiri" pitchFamily="34" charset="-120"/>
+                <a:latin typeface="Amiri" pitchFamily="2" charset="-78"/>
+                <a:cs typeface="Amiri" pitchFamily="2" charset="-78"/>
               </a:rPr>
               <a:t>الإِجَابَاتُ</a:t>
             </a:r>
@@ -39960,8 +39216,7 @@
                   <a:srgbClr val="8A93A0"/>
                 </a:solidFill>
                 <a:latin typeface="Calibri" pitchFamily="34" charset="0"/>
-                <a:ea typeface="Calibri" pitchFamily="34" charset="-122"/>
-                <a:cs typeface="Calibri" pitchFamily="34" charset="-120"/>
+                <a:cs typeface="Amiri" pitchFamily="2" charset="-78"/>
               </a:rPr>
               <a:t>Miftah Arabic · Foundation F3 · My Family &amp; Home · F3-L12</a:t>
             </a:r>
@@ -40058,8 +39313,7 @@
                   <a:srgbClr val="FFFFFF"/>
                 </a:solidFill>
                 <a:latin typeface="Calibri" pitchFamily="34" charset="0"/>
-                <a:ea typeface="Calibri" pitchFamily="34" charset="-122"/>
-                <a:cs typeface="Calibri" pitchFamily="34" charset="-120"/>
+                <a:cs typeface="Amiri" pitchFamily="2" charset="-78"/>
               </a:rPr>
               <a:t>1</a:t>
             </a:r>
@@ -40097,8 +39351,7 @@
                   <a:srgbClr val="1B3B6F"/>
                 </a:solidFill>
                 <a:latin typeface="Calibri" pitchFamily="34" charset="0"/>
-                <a:ea typeface="Calibri" pitchFamily="34" charset="-122"/>
-                <a:cs typeface="Calibri" pitchFamily="34" charset="-120"/>
+                <a:cs typeface="Amiri" pitchFamily="2" charset="-78"/>
               </a:rPr>
               <a:t>Where does Fatima live?</a:t>
             </a:r>
@@ -40161,8 +39414,7 @@
                   <a:srgbClr val="1B3B6F"/>
                 </a:solidFill>
                 <a:latin typeface="Calibri" pitchFamily="34" charset="0"/>
-                <a:ea typeface="Calibri" pitchFamily="34" charset="-122"/>
-                <a:cs typeface="Calibri" pitchFamily="34" charset="-120"/>
+                <a:cs typeface="Amiri" pitchFamily="2" charset="-78"/>
               </a:rPr>
               <a:t>A</a:t>
             </a:r>
@@ -40200,8 +39452,7 @@
                   <a:srgbClr val="9AA1AB"/>
                 </a:solidFill>
                 <a:latin typeface="Calibri" pitchFamily="34" charset="0"/>
-                <a:ea typeface="Calibri" pitchFamily="34" charset="-122"/>
-                <a:cs typeface="Calibri" pitchFamily="34" charset="-120"/>
+                <a:cs typeface="Amiri" pitchFamily="2" charset="-78"/>
               </a:rPr>
               <a:t>Riyadh</a:t>
             </a:r>
@@ -40264,8 +39515,7 @@
                   <a:srgbClr val="1B3B6F"/>
                 </a:solidFill>
                 <a:latin typeface="Calibri" pitchFamily="34" charset="0"/>
-                <a:ea typeface="Calibri" pitchFamily="34" charset="-122"/>
-                <a:cs typeface="Calibri" pitchFamily="34" charset="-120"/>
+                <a:cs typeface="Amiri" pitchFamily="2" charset="-78"/>
               </a:rPr>
               <a:t>B</a:t>
             </a:r>
@@ -40303,8 +39553,7 @@
                   <a:srgbClr val="9AA1AB"/>
                 </a:solidFill>
                 <a:latin typeface="Calibri" pitchFamily="34" charset="0"/>
-                <a:ea typeface="Calibri" pitchFamily="34" charset="-122"/>
-                <a:cs typeface="Calibri" pitchFamily="34" charset="-120"/>
+                <a:cs typeface="Amiri" pitchFamily="2" charset="-78"/>
               </a:rPr>
               <a:t>London</a:t>
             </a:r>
@@ -40394,8 +39643,7 @@
                   <a:srgbClr val="FFFFFF"/>
                 </a:solidFill>
                 <a:latin typeface="Calibri" pitchFamily="34" charset="0"/>
-                <a:ea typeface="Calibri" pitchFamily="34" charset="-122"/>
-                <a:cs typeface="Calibri" pitchFamily="34" charset="-120"/>
+                <a:cs typeface="Amiri" pitchFamily="2" charset="-78"/>
               </a:rPr>
               <a:t>C</a:t>
             </a:r>
@@ -40433,8 +39681,7 @@
                   <a:srgbClr val="1F2A37"/>
                 </a:solidFill>
                 <a:latin typeface="Calibri" pitchFamily="34" charset="0"/>
-                <a:ea typeface="Calibri" pitchFamily="34" charset="-122"/>
-                <a:cs typeface="Calibri" pitchFamily="34" charset="-120"/>
+                <a:cs typeface="Amiri" pitchFamily="2" charset="-78"/>
               </a:rPr>
               <a:t>Cairo</a:t>
             </a:r>
@@ -40472,8 +39719,7 @@
                   <a:srgbClr val="8A6D1E"/>
                 </a:solidFill>
                 <a:latin typeface="Calibri" pitchFamily="34" charset="0"/>
-                <a:ea typeface="Calibri" pitchFamily="34" charset="-122"/>
-                <a:cs typeface="Calibri" pitchFamily="34" charset="-120"/>
+                <a:cs typeface="Amiri" pitchFamily="2" charset="-78"/>
               </a:rPr>
               <a:t>She says </a:t>
             </a:r>
@@ -40485,9 +39731,8 @@
                 <a:solidFill>
                   <a:srgbClr val="8A6D1E"/>
                 </a:solidFill>
-                <a:latin typeface="Amiri" pitchFamily="34" charset="0"/>
-                <a:ea typeface="Amiri" pitchFamily="34" charset="-122"/>
-                <a:cs typeface="Amiri" pitchFamily="34" charset="-120"/>
+                <a:latin typeface="Amiri" pitchFamily="2" charset="-78"/>
+                <a:cs typeface="Amiri" pitchFamily="2" charset="-78"/>
               </a:rPr>
               <a:t>فِي القَاهِرَةِ</a:t>
             </a:r>
@@ -40500,8 +39745,7 @@
                   <a:srgbClr val="8A6D1E"/>
                 </a:solidFill>
                 <a:latin typeface="Calibri" pitchFamily="34" charset="0"/>
-                <a:ea typeface="Calibri" pitchFamily="34" charset="-122"/>
-                <a:cs typeface="Calibri" pitchFamily="34" charset="-120"/>
+                <a:cs typeface="Amiri" pitchFamily="2" charset="-78"/>
               </a:rPr>
               <a:t>.</a:t>
             </a:r>
@@ -40598,8 +39842,7 @@
                   <a:srgbClr val="FFFFFF"/>
                 </a:solidFill>
                 <a:latin typeface="Calibri" pitchFamily="34" charset="0"/>
-                <a:ea typeface="Calibri" pitchFamily="34" charset="-122"/>
-                <a:cs typeface="Calibri" pitchFamily="34" charset="-120"/>
+                <a:cs typeface="Amiri" pitchFamily="2" charset="-78"/>
               </a:rPr>
               <a:t>2</a:t>
             </a:r>
@@ -40637,8 +39880,7 @@
                   <a:srgbClr val="1B3B6F"/>
                 </a:solidFill>
                 <a:latin typeface="Calibri" pitchFamily="34" charset="0"/>
-                <a:ea typeface="Calibri" pitchFamily="34" charset="-122"/>
-                <a:cs typeface="Calibri" pitchFamily="34" charset="-120"/>
+                <a:cs typeface="Amiri" pitchFamily="2" charset="-78"/>
               </a:rPr>
               <a:t>How many rooms are in the house?</a:t>
             </a:r>
@@ -40701,8 +39943,7 @@
                   <a:srgbClr val="1B3B6F"/>
                 </a:solidFill>
                 <a:latin typeface="Calibri" pitchFamily="34" charset="0"/>
-                <a:ea typeface="Calibri" pitchFamily="34" charset="-122"/>
-                <a:cs typeface="Calibri" pitchFamily="34" charset="-120"/>
+                <a:cs typeface="Amiri" pitchFamily="2" charset="-78"/>
               </a:rPr>
               <a:t>A</a:t>
             </a:r>
@@ -40740,8 +39981,7 @@
                   <a:srgbClr val="9AA1AB"/>
                 </a:solidFill>
                 <a:latin typeface="Calibri" pitchFamily="34" charset="0"/>
-                <a:ea typeface="Calibri" pitchFamily="34" charset="-122"/>
-                <a:cs typeface="Calibri" pitchFamily="34" charset="-120"/>
+                <a:cs typeface="Amiri" pitchFamily="2" charset="-78"/>
               </a:rPr>
               <a:t>Four</a:t>
             </a:r>
@@ -40831,8 +40071,7 @@
                   <a:srgbClr val="FFFFFF"/>
                 </a:solidFill>
                 <a:latin typeface="Calibri" pitchFamily="34" charset="0"/>
-                <a:ea typeface="Calibri" pitchFamily="34" charset="-122"/>
-                <a:cs typeface="Calibri" pitchFamily="34" charset="-120"/>
+                <a:cs typeface="Amiri" pitchFamily="2" charset="-78"/>
               </a:rPr>
               <a:t>B</a:t>
             </a:r>
@@ -40870,8 +40109,7 @@
                   <a:srgbClr val="1F2A37"/>
                 </a:solidFill>
                 <a:latin typeface="Calibri" pitchFamily="34" charset="0"/>
-                <a:ea typeface="Calibri" pitchFamily="34" charset="-122"/>
-                <a:cs typeface="Calibri" pitchFamily="34" charset="-120"/>
+                <a:cs typeface="Amiri" pitchFamily="2" charset="-78"/>
               </a:rPr>
               <a:t>Six</a:t>
             </a:r>
@@ -40934,8 +40172,7 @@
                   <a:srgbClr val="1B3B6F"/>
                 </a:solidFill>
                 <a:latin typeface="Calibri" pitchFamily="34" charset="0"/>
-                <a:ea typeface="Calibri" pitchFamily="34" charset="-122"/>
-                <a:cs typeface="Calibri" pitchFamily="34" charset="-120"/>
+                <a:cs typeface="Amiri" pitchFamily="2" charset="-78"/>
               </a:rPr>
               <a:t>C</a:t>
             </a:r>
@@ -40973,8 +40210,7 @@
                   <a:srgbClr val="9AA1AB"/>
                 </a:solidFill>
                 <a:latin typeface="Calibri" pitchFamily="34" charset="0"/>
-                <a:ea typeface="Calibri" pitchFamily="34" charset="-122"/>
-                <a:cs typeface="Calibri" pitchFamily="34" charset="-120"/>
+                <a:cs typeface="Amiri" pitchFamily="2" charset="-78"/>
               </a:rPr>
               <a:t>Eight</a:t>
             </a:r>
@@ -41012,8 +40248,7 @@
                   <a:srgbClr val="8A6D1E"/>
                 </a:solidFill>
                 <a:latin typeface="Calibri" pitchFamily="34" charset="0"/>
-                <a:ea typeface="Calibri" pitchFamily="34" charset="-122"/>
-                <a:cs typeface="Calibri" pitchFamily="34" charset="-120"/>
+                <a:cs typeface="Amiri" pitchFamily="2" charset="-78"/>
               </a:rPr>
               <a:t>She says </a:t>
             </a:r>
@@ -41025,9 +40260,8 @@
                 <a:solidFill>
                   <a:srgbClr val="8A6D1E"/>
                 </a:solidFill>
-                <a:latin typeface="Amiri" pitchFamily="34" charset="0"/>
-                <a:ea typeface="Amiri" pitchFamily="34" charset="-122"/>
-                <a:cs typeface="Amiri" pitchFamily="34" charset="-120"/>
+                <a:latin typeface="Amiri" pitchFamily="2" charset="-78"/>
+                <a:cs typeface="Amiri" pitchFamily="2" charset="-78"/>
               </a:rPr>
               <a:t>سِتُّ غُرَفٍ</a:t>
             </a:r>
@@ -41040,8 +40274,7 @@
                   <a:srgbClr val="8A6D1E"/>
                 </a:solidFill>
                 <a:latin typeface="Calibri" pitchFamily="34" charset="0"/>
-                <a:ea typeface="Calibri" pitchFamily="34" charset="-122"/>
-                <a:cs typeface="Calibri" pitchFamily="34" charset="-120"/>
+                <a:cs typeface="Amiri" pitchFamily="2" charset="-78"/>
               </a:rPr>
               <a:t>.</a:t>
             </a:r>
@@ -41138,8 +40371,7 @@
                   <a:srgbClr val="FFFFFF"/>
                 </a:solidFill>
                 <a:latin typeface="Calibri" pitchFamily="34" charset="0"/>
-                <a:ea typeface="Calibri" pitchFamily="34" charset="-122"/>
-                <a:cs typeface="Calibri" pitchFamily="34" charset="-120"/>
+                <a:cs typeface="Amiri" pitchFamily="2" charset="-78"/>
               </a:rPr>
               <a:t>3</a:t>
             </a:r>
@@ -41177,8 +40409,7 @@
                   <a:srgbClr val="1B3B6F"/>
                 </a:solidFill>
                 <a:latin typeface="Calibri" pitchFamily="34" charset="0"/>
-                <a:ea typeface="Calibri" pitchFamily="34" charset="-122"/>
-                <a:cs typeface="Calibri" pitchFamily="34" charset="-120"/>
+                <a:cs typeface="Amiri" pitchFamily="2" charset="-78"/>
               </a:rPr>
               <a:t>Where is the living room?</a:t>
             </a:r>
@@ -41241,8 +40472,7 @@
                   <a:srgbClr val="1B3B6F"/>
                 </a:solidFill>
                 <a:latin typeface="Calibri" pitchFamily="34" charset="0"/>
-                <a:ea typeface="Calibri" pitchFamily="34" charset="-122"/>
-                <a:cs typeface="Calibri" pitchFamily="34" charset="-120"/>
+                <a:cs typeface="Amiri" pitchFamily="2" charset="-78"/>
               </a:rPr>
               <a:t>A</a:t>
             </a:r>
@@ -41280,8 +40510,7 @@
                   <a:srgbClr val="9AA1AB"/>
                 </a:solidFill>
                 <a:latin typeface="Calibri" pitchFamily="34" charset="0"/>
-                <a:ea typeface="Calibri" pitchFamily="34" charset="-122"/>
-                <a:cs typeface="Calibri" pitchFamily="34" charset="-120"/>
+                <a:cs typeface="Amiri" pitchFamily="2" charset="-78"/>
               </a:rPr>
               <a:t>On the first floor</a:t>
             </a:r>
@@ -41371,8 +40600,7 @@
                   <a:srgbClr val="FFFFFF"/>
                 </a:solidFill>
                 <a:latin typeface="Calibri" pitchFamily="34" charset="0"/>
-                <a:ea typeface="Calibri" pitchFamily="34" charset="-122"/>
-                <a:cs typeface="Calibri" pitchFamily="34" charset="-120"/>
+                <a:cs typeface="Amiri" pitchFamily="2" charset="-78"/>
               </a:rPr>
               <a:t>B</a:t>
             </a:r>
@@ -41410,8 +40638,7 @@
                   <a:srgbClr val="1F2A37"/>
                 </a:solidFill>
                 <a:latin typeface="Calibri" pitchFamily="34" charset="0"/>
-                <a:ea typeface="Calibri" pitchFamily="34" charset="-122"/>
-                <a:cs typeface="Calibri" pitchFamily="34" charset="-120"/>
+                <a:cs typeface="Amiri" pitchFamily="2" charset="-78"/>
               </a:rPr>
               <a:t>On the ground floor</a:t>
             </a:r>
@@ -41474,8 +40701,7 @@
                   <a:srgbClr val="1B3B6F"/>
                 </a:solidFill>
                 <a:latin typeface="Calibri" pitchFamily="34" charset="0"/>
-                <a:ea typeface="Calibri" pitchFamily="34" charset="-122"/>
-                <a:cs typeface="Calibri" pitchFamily="34" charset="-120"/>
+                <a:cs typeface="Amiri" pitchFamily="2" charset="-78"/>
               </a:rPr>
               <a:t>C</a:t>
             </a:r>
@@ -41513,8 +40739,7 @@
                   <a:srgbClr val="9AA1AB"/>
                 </a:solidFill>
                 <a:latin typeface="Calibri" pitchFamily="34" charset="0"/>
-                <a:ea typeface="Calibri" pitchFamily="34" charset="-122"/>
-                <a:cs typeface="Calibri" pitchFamily="34" charset="-120"/>
+                <a:cs typeface="Amiri" pitchFamily="2" charset="-78"/>
               </a:rPr>
               <a:t>Beside the garden</a:t>
             </a:r>
@@ -41552,8 +40777,7 @@
                   <a:srgbClr val="8A6D1E"/>
                 </a:solidFill>
                 <a:latin typeface="Calibri" pitchFamily="34" charset="0"/>
-                <a:ea typeface="Calibri" pitchFamily="34" charset="-122"/>
-                <a:cs typeface="Calibri" pitchFamily="34" charset="-120"/>
+                <a:cs typeface="Amiri" pitchFamily="2" charset="-78"/>
               </a:rPr>
               <a:t>It is </a:t>
             </a:r>
@@ -41565,9 +40789,8 @@
                 <a:solidFill>
                   <a:srgbClr val="8A6D1E"/>
                 </a:solidFill>
-                <a:latin typeface="Amiri" pitchFamily="34" charset="0"/>
-                <a:ea typeface="Amiri" pitchFamily="34" charset="-122"/>
-                <a:cs typeface="Amiri" pitchFamily="34" charset="-120"/>
+                <a:latin typeface="Amiri" pitchFamily="2" charset="-78"/>
+                <a:cs typeface="Amiri" pitchFamily="2" charset="-78"/>
               </a:rPr>
               <a:t>فِي الطَّابِقِ الأَرْضِيِّ</a:t>
             </a:r>
@@ -41580,8 +40803,7 @@
                   <a:srgbClr val="8A6D1E"/>
                 </a:solidFill>
                 <a:latin typeface="Calibri" pitchFamily="34" charset="0"/>
-                <a:ea typeface="Calibri" pitchFamily="34" charset="-122"/>
-                <a:cs typeface="Calibri" pitchFamily="34" charset="-120"/>
+                <a:cs typeface="Amiri" pitchFamily="2" charset="-78"/>
               </a:rPr>
               <a:t>.</a:t>
             </a:r>
@@ -41678,8 +40900,7 @@
                   <a:srgbClr val="FFFFFF"/>
                 </a:solidFill>
                 <a:latin typeface="Calibri" pitchFamily="34" charset="0"/>
-                <a:ea typeface="Calibri" pitchFamily="34" charset="-122"/>
-                <a:cs typeface="Calibri" pitchFamily="34" charset="-120"/>
+                <a:cs typeface="Amiri" pitchFamily="2" charset="-78"/>
               </a:rPr>
               <a:t>4</a:t>
             </a:r>
@@ -41717,8 +40938,7 @@
                   <a:srgbClr val="1B3B6F"/>
                 </a:solidFill>
                 <a:latin typeface="Calibri" pitchFamily="34" charset="0"/>
-                <a:ea typeface="Calibri" pitchFamily="34" charset="-122"/>
-                <a:cs typeface="Calibri" pitchFamily="34" charset="-120"/>
+                <a:cs typeface="Amiri" pitchFamily="2" charset="-78"/>
               </a:rPr>
               <a:t>What colour is the sofa?</a:t>
             </a:r>
@@ -41781,8 +41001,7 @@
                   <a:srgbClr val="1B3B6F"/>
                 </a:solidFill>
                 <a:latin typeface="Calibri" pitchFamily="34" charset="0"/>
-                <a:ea typeface="Calibri" pitchFamily="34" charset="-122"/>
-                <a:cs typeface="Calibri" pitchFamily="34" charset="-120"/>
+                <a:cs typeface="Amiri" pitchFamily="2" charset="-78"/>
               </a:rPr>
               <a:t>A</a:t>
             </a:r>
@@ -41820,8 +41039,7 @@
                   <a:srgbClr val="9AA1AB"/>
                 </a:solidFill>
                 <a:latin typeface="Calibri" pitchFamily="34" charset="0"/>
-                <a:ea typeface="Calibri" pitchFamily="34" charset="-122"/>
-                <a:cs typeface="Calibri" pitchFamily="34" charset="-120"/>
+                <a:cs typeface="Amiri" pitchFamily="2" charset="-78"/>
               </a:rPr>
               <a:t>Blue</a:t>
             </a:r>
@@ -41884,8 +41102,7 @@
                   <a:srgbClr val="1B3B6F"/>
                 </a:solidFill>
                 <a:latin typeface="Calibri" pitchFamily="34" charset="0"/>
-                <a:ea typeface="Calibri" pitchFamily="34" charset="-122"/>
-                <a:cs typeface="Calibri" pitchFamily="34" charset="-120"/>
+                <a:cs typeface="Amiri" pitchFamily="2" charset="-78"/>
               </a:rPr>
               <a:t>B</a:t>
             </a:r>
@@ -41923,8 +41140,7 @@
                   <a:srgbClr val="9AA1AB"/>
                 </a:solidFill>
                 <a:latin typeface="Calibri" pitchFamily="34" charset="0"/>
-                <a:ea typeface="Calibri" pitchFamily="34" charset="-122"/>
-                <a:cs typeface="Calibri" pitchFamily="34" charset="-120"/>
+                <a:cs typeface="Amiri" pitchFamily="2" charset="-78"/>
               </a:rPr>
               <a:t>White</a:t>
             </a:r>
@@ -42014,8 +41230,7 @@
                   <a:srgbClr val="FFFFFF"/>
                 </a:solidFill>
                 <a:latin typeface="Calibri" pitchFamily="34" charset="0"/>
-                <a:ea typeface="Calibri" pitchFamily="34" charset="-122"/>
-                <a:cs typeface="Calibri" pitchFamily="34" charset="-120"/>
+                <a:cs typeface="Amiri" pitchFamily="2" charset="-78"/>
               </a:rPr>
               <a:t>C</a:t>
             </a:r>
@@ -42053,8 +41268,7 @@
                   <a:srgbClr val="1F2A37"/>
                 </a:solidFill>
                 <a:latin typeface="Calibri" pitchFamily="34" charset="0"/>
-                <a:ea typeface="Calibri" pitchFamily="34" charset="-122"/>
-                <a:cs typeface="Calibri" pitchFamily="34" charset="-120"/>
+                <a:cs typeface="Amiri" pitchFamily="2" charset="-78"/>
               </a:rPr>
               <a:t>Brown</a:t>
             </a:r>
@@ -42092,8 +41306,7 @@
                   <a:srgbClr val="8A6D1E"/>
                 </a:solidFill>
                 <a:latin typeface="Calibri" pitchFamily="34" charset="0"/>
-                <a:ea typeface="Calibri" pitchFamily="34" charset="-122"/>
-                <a:cs typeface="Calibri" pitchFamily="34" charset="-120"/>
+                <a:cs typeface="Amiri" pitchFamily="2" charset="-78"/>
               </a:rPr>
               <a:t>The sofa is </a:t>
             </a:r>
@@ -42105,9 +41318,8 @@
                 <a:solidFill>
                   <a:srgbClr val="8A6D1E"/>
                 </a:solidFill>
-                <a:latin typeface="Amiri" pitchFamily="34" charset="0"/>
-                <a:ea typeface="Amiri" pitchFamily="34" charset="-122"/>
-                <a:cs typeface="Amiri" pitchFamily="34" charset="-120"/>
+                <a:latin typeface="Amiri" pitchFamily="2" charset="-78"/>
+                <a:cs typeface="Amiri" pitchFamily="2" charset="-78"/>
               </a:rPr>
               <a:t>أَرِيكَةٌ بُنِّيَّةٌ</a:t>
             </a:r>
@@ -42120,8 +41332,7 @@
                   <a:srgbClr val="8A6D1E"/>
                 </a:solidFill>
                 <a:latin typeface="Calibri" pitchFamily="34" charset="0"/>
-                <a:ea typeface="Calibri" pitchFamily="34" charset="-122"/>
-                <a:cs typeface="Calibri" pitchFamily="34" charset="-120"/>
+                <a:cs typeface="Amiri" pitchFamily="2" charset="-78"/>
               </a:rPr>
               <a:t>.</a:t>
             </a:r>
@@ -42218,8 +41429,7 @@
                   <a:srgbClr val="FFFFFF"/>
                 </a:solidFill>
                 <a:latin typeface="Calibri" pitchFamily="34" charset="0"/>
-                <a:ea typeface="Calibri" pitchFamily="34" charset="-122"/>
-                <a:cs typeface="Calibri" pitchFamily="34" charset="-120"/>
+                <a:cs typeface="Amiri" pitchFamily="2" charset="-78"/>
               </a:rPr>
               <a:t>5</a:t>
             </a:r>
@@ -42257,8 +41467,7 @@
                   <a:srgbClr val="1B3B6F"/>
                 </a:solidFill>
                 <a:latin typeface="Calibri" pitchFamily="34" charset="0"/>
-                <a:ea typeface="Calibri" pitchFamily="34" charset="-122"/>
-                <a:cs typeface="Calibri" pitchFamily="34" charset="-120"/>
+                <a:cs typeface="Amiri" pitchFamily="2" charset="-78"/>
               </a:rPr>
               <a:t>What colour is the rug?</a:t>
             </a:r>
@@ -42348,8 +41557,7 @@
                   <a:srgbClr val="FFFFFF"/>
                 </a:solidFill>
                 <a:latin typeface="Calibri" pitchFamily="34" charset="0"/>
-                <a:ea typeface="Calibri" pitchFamily="34" charset="-122"/>
-                <a:cs typeface="Calibri" pitchFamily="34" charset="-120"/>
+                <a:cs typeface="Amiri" pitchFamily="2" charset="-78"/>
               </a:rPr>
               <a:t>A</a:t>
             </a:r>
@@ -42387,8 +41595,7 @@
                   <a:srgbClr val="1F2A37"/>
                 </a:solidFill>
                 <a:latin typeface="Calibri" pitchFamily="34" charset="0"/>
-                <a:ea typeface="Calibri" pitchFamily="34" charset="-122"/>
-                <a:cs typeface="Calibri" pitchFamily="34" charset="-120"/>
+                <a:cs typeface="Amiri" pitchFamily="2" charset="-78"/>
               </a:rPr>
               <a:t>Blue</a:t>
             </a:r>
@@ -42451,8 +41658,7 @@
                   <a:srgbClr val="1B3B6F"/>
                 </a:solidFill>
                 <a:latin typeface="Calibri" pitchFamily="34" charset="0"/>
-                <a:ea typeface="Calibri" pitchFamily="34" charset="-122"/>
-                <a:cs typeface="Calibri" pitchFamily="34" charset="-120"/>
+                <a:cs typeface="Amiri" pitchFamily="2" charset="-78"/>
               </a:rPr>
               <a:t>B</a:t>
             </a:r>
@@ -42490,8 +41696,7 @@
                   <a:srgbClr val="9AA1AB"/>
                 </a:solidFill>
                 <a:latin typeface="Calibri" pitchFamily="34" charset="0"/>
-                <a:ea typeface="Calibri" pitchFamily="34" charset="-122"/>
-                <a:cs typeface="Calibri" pitchFamily="34" charset="-120"/>
+                <a:cs typeface="Amiri" pitchFamily="2" charset="-78"/>
               </a:rPr>
               <a:t>Pink</a:t>
             </a:r>
@@ -42554,8 +41759,7 @@
                   <a:srgbClr val="1B3B6F"/>
                 </a:solidFill>
                 <a:latin typeface="Calibri" pitchFamily="34" charset="0"/>
-                <a:ea typeface="Calibri" pitchFamily="34" charset="-122"/>
-                <a:cs typeface="Calibri" pitchFamily="34" charset="-120"/>
+                <a:cs typeface="Amiri" pitchFamily="2" charset="-78"/>
               </a:rPr>
               <a:t>C</a:t>
             </a:r>
@@ -42593,8 +41797,7 @@
                   <a:srgbClr val="9AA1AB"/>
                 </a:solidFill>
                 <a:latin typeface="Calibri" pitchFamily="34" charset="0"/>
-                <a:ea typeface="Calibri" pitchFamily="34" charset="-122"/>
-                <a:cs typeface="Calibri" pitchFamily="34" charset="-120"/>
+                <a:cs typeface="Amiri" pitchFamily="2" charset="-78"/>
               </a:rPr>
               <a:t>Brown</a:t>
             </a:r>
@@ -42632,8 +41835,7 @@
                   <a:srgbClr val="8A6D1E"/>
                 </a:solidFill>
                 <a:latin typeface="Calibri" pitchFamily="34" charset="0"/>
-                <a:ea typeface="Calibri" pitchFamily="34" charset="-122"/>
-                <a:cs typeface="Calibri" pitchFamily="34" charset="-120"/>
+                <a:cs typeface="Amiri" pitchFamily="2" charset="-78"/>
               </a:rPr>
               <a:t>The rug is </a:t>
             </a:r>
@@ -42645,9 +41847,8 @@
                 <a:solidFill>
                   <a:srgbClr val="8A6D1E"/>
                 </a:solidFill>
-                <a:latin typeface="Amiri" pitchFamily="34" charset="0"/>
-                <a:ea typeface="Amiri" pitchFamily="34" charset="-122"/>
-                <a:cs typeface="Amiri" pitchFamily="34" charset="-120"/>
+                <a:latin typeface="Amiri" pitchFamily="2" charset="-78"/>
+                <a:cs typeface="Amiri" pitchFamily="2" charset="-78"/>
               </a:rPr>
               <a:t>سَجَّادَةٌ زَرْقَاءُ</a:t>
             </a:r>
@@ -42660,8 +41861,7 @@
                   <a:srgbClr val="8A6D1E"/>
                 </a:solidFill>
                 <a:latin typeface="Calibri" pitchFamily="34" charset="0"/>
-                <a:ea typeface="Calibri" pitchFamily="34" charset="-122"/>
-                <a:cs typeface="Calibri" pitchFamily="34" charset="-120"/>
+                <a:cs typeface="Amiri" pitchFamily="2" charset="-78"/>
               </a:rPr>
               <a:t>.</a:t>
             </a:r>
@@ -42758,8 +41958,7 @@
                   <a:srgbClr val="FFFFFF"/>
                 </a:solidFill>
                 <a:latin typeface="Calibri" pitchFamily="34" charset="0"/>
-                <a:ea typeface="Calibri" pitchFamily="34" charset="-122"/>
-                <a:cs typeface="Calibri" pitchFamily="34" charset="-120"/>
+                <a:cs typeface="Amiri" pitchFamily="2" charset="-78"/>
               </a:rPr>
               <a:t>6</a:t>
             </a:r>
@@ -42797,8 +41996,7 @@
                   <a:srgbClr val="1B3B6F"/>
                 </a:solidFill>
                 <a:latin typeface="Calibri" pitchFamily="34" charset="0"/>
-                <a:ea typeface="Calibri" pitchFamily="34" charset="-122"/>
-                <a:cs typeface="Calibri" pitchFamily="34" charset="-120"/>
+                <a:cs typeface="Amiri" pitchFamily="2" charset="-78"/>
               </a:rPr>
               <a:t>What is opposite the house?</a:t>
             </a:r>
@@ -42861,8 +42059,7 @@
                   <a:srgbClr val="1B3B6F"/>
                 </a:solidFill>
                 <a:latin typeface="Calibri" pitchFamily="34" charset="0"/>
-                <a:ea typeface="Calibri" pitchFamily="34" charset="-122"/>
-                <a:cs typeface="Calibri" pitchFamily="34" charset="-120"/>
+                <a:cs typeface="Amiri" pitchFamily="2" charset="-78"/>
               </a:rPr>
               <a:t>A</a:t>
             </a:r>
@@ -42900,8 +42097,7 @@
                   <a:srgbClr val="9AA1AB"/>
                 </a:solidFill>
                 <a:latin typeface="Calibri" pitchFamily="34" charset="0"/>
-                <a:ea typeface="Calibri" pitchFamily="34" charset="-122"/>
-                <a:cs typeface="Calibri" pitchFamily="34" charset="-120"/>
+                <a:cs typeface="Amiri" pitchFamily="2" charset="-78"/>
               </a:rPr>
               <a:t>A bakery</a:t>
             </a:r>
@@ -42991,8 +42187,7 @@
                   <a:srgbClr val="FFFFFF"/>
                 </a:solidFill>
                 <a:latin typeface="Calibri" pitchFamily="34" charset="0"/>
-                <a:ea typeface="Calibri" pitchFamily="34" charset="-122"/>
-                <a:cs typeface="Calibri" pitchFamily="34" charset="-120"/>
+                <a:cs typeface="Amiri" pitchFamily="2" charset="-78"/>
               </a:rPr>
               <a:t>B</a:t>
             </a:r>
@@ -43030,8 +42225,7 @@
                   <a:srgbClr val="1F2A37"/>
                 </a:solidFill>
                 <a:latin typeface="Calibri" pitchFamily="34" charset="0"/>
-                <a:ea typeface="Calibri" pitchFamily="34" charset="-122"/>
-                <a:cs typeface="Calibri" pitchFamily="34" charset="-120"/>
+                <a:cs typeface="Amiri" pitchFamily="2" charset="-78"/>
               </a:rPr>
               <a:t>A public park</a:t>
             </a:r>
@@ -43094,8 +42288,7 @@
                   <a:srgbClr val="1B3B6F"/>
                 </a:solidFill>
                 <a:latin typeface="Calibri" pitchFamily="34" charset="0"/>
-                <a:ea typeface="Calibri" pitchFamily="34" charset="-122"/>
-                <a:cs typeface="Calibri" pitchFamily="34" charset="-120"/>
+                <a:cs typeface="Amiri" pitchFamily="2" charset="-78"/>
               </a:rPr>
               <a:t>C</a:t>
             </a:r>
@@ -43133,8 +42326,7 @@
                   <a:srgbClr val="9AA1AB"/>
                 </a:solidFill>
                 <a:latin typeface="Calibri" pitchFamily="34" charset="0"/>
-                <a:ea typeface="Calibri" pitchFamily="34" charset="-122"/>
-                <a:cs typeface="Calibri" pitchFamily="34" charset="-120"/>
+                <a:cs typeface="Amiri" pitchFamily="2" charset="-78"/>
               </a:rPr>
               <a:t>A school</a:t>
             </a:r>
@@ -43172,8 +42364,7 @@
                   <a:srgbClr val="8A6D1E"/>
                 </a:solidFill>
                 <a:latin typeface="Calibri" pitchFamily="34" charset="0"/>
-                <a:ea typeface="Calibri" pitchFamily="34" charset="-122"/>
-                <a:cs typeface="Calibri" pitchFamily="34" charset="-120"/>
+                <a:cs typeface="Amiri" pitchFamily="2" charset="-78"/>
               </a:rPr>
               <a:t>A public park is opposite the house.</a:t>
             </a:r>
@@ -43270,8 +42461,7 @@
                   <a:srgbClr val="FFFFFF"/>
                 </a:solidFill>
                 <a:latin typeface="Calibri" pitchFamily="34" charset="0"/>
-                <a:ea typeface="Calibri" pitchFamily="34" charset="-122"/>
-                <a:cs typeface="Calibri" pitchFamily="34" charset="-120"/>
+                <a:cs typeface="Amiri" pitchFamily="2" charset="-78"/>
               </a:rPr>
               <a:t>7</a:t>
             </a:r>
@@ -43309,8 +42499,7 @@
                   <a:srgbClr val="1B3B6F"/>
                 </a:solidFill>
                 <a:latin typeface="Calibri" pitchFamily="34" charset="0"/>
-                <a:ea typeface="Calibri" pitchFamily="34" charset="-122"/>
-                <a:cs typeface="Calibri" pitchFamily="34" charset="-120"/>
+                <a:cs typeface="Amiri" pitchFamily="2" charset="-78"/>
               </a:rPr>
               <a:t>Who lives with Fatima?</a:t>
             </a:r>
@@ -43400,8 +42589,7 @@
                   <a:srgbClr val="FFFFFF"/>
                 </a:solidFill>
                 <a:latin typeface="Calibri" pitchFamily="34" charset="0"/>
-                <a:ea typeface="Calibri" pitchFamily="34" charset="-122"/>
-                <a:cs typeface="Calibri" pitchFamily="34" charset="-120"/>
+                <a:cs typeface="Amiri" pitchFamily="2" charset="-78"/>
               </a:rPr>
               <a:t>A</a:t>
             </a:r>
@@ -43439,8 +42627,7 @@
                   <a:srgbClr val="1F2A37"/>
                 </a:solidFill>
                 <a:latin typeface="Calibri" pitchFamily="34" charset="0"/>
-                <a:ea typeface="Calibri" pitchFamily="34" charset="-122"/>
-                <a:cs typeface="Calibri" pitchFamily="34" charset="-120"/>
+                <a:cs typeface="Amiri" pitchFamily="2" charset="-78"/>
               </a:rPr>
               <a:t>Her parents, brother and sister</a:t>
             </a:r>
@@ -43503,8 +42690,7 @@
                   <a:srgbClr val="1B3B6F"/>
                 </a:solidFill>
                 <a:latin typeface="Calibri" pitchFamily="34" charset="0"/>
-                <a:ea typeface="Calibri" pitchFamily="34" charset="-122"/>
-                <a:cs typeface="Calibri" pitchFamily="34" charset="-120"/>
+                <a:cs typeface="Amiri" pitchFamily="2" charset="-78"/>
               </a:rPr>
               <a:t>B</a:t>
             </a:r>
@@ -43542,8 +42728,7 @@
                   <a:srgbClr val="9AA1AB"/>
                 </a:solidFill>
                 <a:latin typeface="Calibri" pitchFamily="34" charset="0"/>
-                <a:ea typeface="Calibri" pitchFamily="34" charset="-122"/>
-                <a:cs typeface="Calibri" pitchFamily="34" charset="-120"/>
+                <a:cs typeface="Amiri" pitchFamily="2" charset="-78"/>
               </a:rPr>
               <a:t>Her grandmother only</a:t>
             </a:r>
@@ -43606,8 +42791,7 @@
                   <a:srgbClr val="1B3B6F"/>
                 </a:solidFill>
                 <a:latin typeface="Calibri" pitchFamily="34" charset="0"/>
-                <a:ea typeface="Calibri" pitchFamily="34" charset="-122"/>
-                <a:cs typeface="Calibri" pitchFamily="34" charset="-120"/>
+                <a:cs typeface="Amiri" pitchFamily="2" charset="-78"/>
               </a:rPr>
               <a:t>C</a:t>
             </a:r>
@@ -43645,8 +42829,7 @@
                   <a:srgbClr val="9AA1AB"/>
                 </a:solidFill>
                 <a:latin typeface="Calibri" pitchFamily="34" charset="0"/>
-                <a:ea typeface="Calibri" pitchFamily="34" charset="-122"/>
-                <a:cs typeface="Calibri" pitchFamily="34" charset="-120"/>
+                <a:cs typeface="Amiri" pitchFamily="2" charset="-78"/>
               </a:rPr>
               <a:t>Two cousins</a:t>
             </a:r>
@@ -43684,8 +42867,7 @@
                   <a:srgbClr val="8A6D1E"/>
                 </a:solidFill>
                 <a:latin typeface="Calibri" pitchFamily="34" charset="0"/>
-                <a:ea typeface="Calibri" pitchFamily="34" charset="-122"/>
-                <a:cs typeface="Calibri" pitchFamily="34" charset="-120"/>
+                <a:cs typeface="Amiri" pitchFamily="2" charset="-78"/>
               </a:rPr>
               <a:t>She names her father, mother, brother and sister.</a:t>
             </a:r>
@@ -43782,8 +42964,7 @@
                   <a:srgbClr val="FFFFFF"/>
                 </a:solidFill>
                 <a:latin typeface="Calibri" pitchFamily="34" charset="0"/>
-                <a:ea typeface="Calibri" pitchFamily="34" charset="-122"/>
-                <a:cs typeface="Calibri" pitchFamily="34" charset="-120"/>
+                <a:cs typeface="Amiri" pitchFamily="2" charset="-78"/>
               </a:rPr>
               <a:t>8</a:t>
             </a:r>
@@ -43821,8 +43002,7 @@
                   <a:srgbClr val="1B3B6F"/>
                 </a:solidFill>
                 <a:latin typeface="Calibri" pitchFamily="34" charset="0"/>
-                <a:ea typeface="Calibri" pitchFamily="34" charset="-122"/>
-                <a:cs typeface="Calibri" pitchFamily="34" charset="-120"/>
+                <a:cs typeface="Amiri" pitchFamily="2" charset="-78"/>
               </a:rPr>
               <a:t>Why does she like her neighbourhood?</a:t>
             </a:r>
@@ -43885,8 +43065,7 @@
                   <a:srgbClr val="1B3B6F"/>
                 </a:solidFill>
                 <a:latin typeface="Calibri" pitchFamily="34" charset="0"/>
-                <a:ea typeface="Calibri" pitchFamily="34" charset="-122"/>
-                <a:cs typeface="Calibri" pitchFamily="34" charset="-120"/>
+                <a:cs typeface="Amiri" pitchFamily="2" charset="-78"/>
               </a:rPr>
               <a:t>A</a:t>
             </a:r>
@@ -43924,8 +43103,7 @@
                   <a:srgbClr val="9AA1AB"/>
                 </a:solidFill>
                 <a:latin typeface="Calibri" pitchFamily="34" charset="0"/>
-                <a:ea typeface="Calibri" pitchFamily="34" charset="-122"/>
-                <a:cs typeface="Calibri" pitchFamily="34" charset="-120"/>
+                <a:cs typeface="Amiri" pitchFamily="2" charset="-78"/>
               </a:rPr>
               <a:t>It is very busy</a:t>
             </a:r>
@@ -43988,8 +43166,7 @@
                   <a:srgbClr val="1B3B6F"/>
                 </a:solidFill>
                 <a:latin typeface="Calibri" pitchFamily="34" charset="0"/>
-                <a:ea typeface="Calibri" pitchFamily="34" charset="-122"/>
-                <a:cs typeface="Calibri" pitchFamily="34" charset="-120"/>
+                <a:cs typeface="Amiri" pitchFamily="2" charset="-78"/>
               </a:rPr>
               <a:t>B</a:t>
             </a:r>
@@ -44027,8 +43204,7 @@
                   <a:srgbClr val="9AA1AB"/>
                 </a:solidFill>
                 <a:latin typeface="Calibri" pitchFamily="34" charset="0"/>
-                <a:ea typeface="Calibri" pitchFamily="34" charset="-122"/>
-                <a:cs typeface="Calibri" pitchFamily="34" charset="-120"/>
+                <a:cs typeface="Amiri" pitchFamily="2" charset="-78"/>
               </a:rPr>
               <a:t>It is near the airport</a:t>
             </a:r>
@@ -44118,8 +43294,7 @@
                   <a:srgbClr val="FFFFFF"/>
                 </a:solidFill>
                 <a:latin typeface="Calibri" pitchFamily="34" charset="0"/>
-                <a:ea typeface="Calibri" pitchFamily="34" charset="-122"/>
-                <a:cs typeface="Calibri" pitchFamily="34" charset="-120"/>
+                <a:cs typeface="Amiri" pitchFamily="2" charset="-78"/>
               </a:rPr>
               <a:t>C</a:t>
             </a:r>
@@ -44157,8 +43332,7 @@
                   <a:srgbClr val="1F2A37"/>
                 </a:solidFill>
                 <a:latin typeface="Calibri" pitchFamily="34" charset="0"/>
-                <a:ea typeface="Calibri" pitchFamily="34" charset="-122"/>
-                <a:cs typeface="Calibri" pitchFamily="34" charset="-120"/>
+                <a:cs typeface="Amiri" pitchFamily="2" charset="-78"/>
               </a:rPr>
               <a:t>It is quiet</a:t>
             </a:r>
@@ -44196,8 +43370,7 @@
                   <a:srgbClr val="8A6D1E"/>
                 </a:solidFill>
                 <a:latin typeface="Calibri" pitchFamily="34" charset="0"/>
-                <a:ea typeface="Calibri" pitchFamily="34" charset="-122"/>
-                <a:cs typeface="Calibri" pitchFamily="34" charset="-120"/>
+                <a:cs typeface="Amiri" pitchFamily="2" charset="-78"/>
               </a:rPr>
               <a:t>She says </a:t>
             </a:r>
@@ -44209,9 +43382,8 @@
                 <a:solidFill>
                   <a:srgbClr val="8A6D1E"/>
                 </a:solidFill>
-                <a:latin typeface="Amiri" pitchFamily="34" charset="0"/>
-                <a:ea typeface="Amiri" pitchFamily="34" charset="-122"/>
-                <a:cs typeface="Amiri" pitchFamily="34" charset="-120"/>
+                <a:latin typeface="Amiri" pitchFamily="2" charset="-78"/>
+                <a:cs typeface="Amiri" pitchFamily="2" charset="-78"/>
               </a:rPr>
               <a:t>لِأَنَّهُ هَادِئٌ</a:t>
             </a:r>
@@ -44224,8 +43396,7 @@
                   <a:srgbClr val="8A6D1E"/>
                 </a:solidFill>
                 <a:latin typeface="Calibri" pitchFamily="34" charset="0"/>
-                <a:ea typeface="Calibri" pitchFamily="34" charset="-122"/>
-                <a:cs typeface="Calibri" pitchFamily="34" charset="-120"/>
+                <a:cs typeface="Amiri" pitchFamily="2" charset="-78"/>
               </a:rPr>
               <a:t>.</a:t>
             </a:r>
@@ -44263,8 +43434,7 @@
                   <a:srgbClr val="8A93A0"/>
                 </a:solidFill>
                 <a:latin typeface="Calibri" pitchFamily="34" charset="0"/>
-                <a:ea typeface="Calibri" pitchFamily="34" charset="-122"/>
-                <a:cs typeface="Calibri" pitchFamily="34" charset="-120"/>
+                <a:cs typeface="Amiri" pitchFamily="2" charset="-78"/>
               </a:rPr>
               <a:t>8 / 22</a:t>
             </a:r>
@@ -44358,9 +43528,8 @@
                 <a:solidFill>
                   <a:srgbClr val="D4AF37"/>
                 </a:solidFill>
-                <a:latin typeface="Amiri" pitchFamily="34" charset="0"/>
-                <a:ea typeface="Amiri" pitchFamily="34" charset="-122"/>
-                <a:cs typeface="Amiri" pitchFamily="34" charset="-120"/>
+                <a:latin typeface="Amiri" pitchFamily="2" charset="-78"/>
+                <a:cs typeface="Amiri" pitchFamily="2" charset="-78"/>
               </a:rPr>
               <a:t>م</a:t>
             </a:r>
@@ -44398,8 +43567,7 @@
                   <a:srgbClr val="1B3B6F"/>
                 </a:solidFill>
                 <a:latin typeface="Cambria" pitchFamily="34" charset="0"/>
-                <a:ea typeface="Cambria" pitchFamily="34" charset="-122"/>
-                <a:cs typeface="Cambria" pitchFamily="34" charset="-120"/>
+                <a:cs typeface="Amiri" pitchFamily="2" charset="-78"/>
               </a:rPr>
               <a:t>Al Madina Online School</a:t>
             </a:r>
@@ -44437,8 +43605,7 @@
                   <a:srgbClr val="8A6D1E"/>
                 </a:solidFill>
                 <a:latin typeface="Calibri" pitchFamily="34" charset="0"/>
-                <a:ea typeface="Calibri" pitchFamily="34" charset="-122"/>
-                <a:cs typeface="Calibri" pitchFamily="34" charset="-120"/>
+                <a:cs typeface="Amiri" pitchFamily="2" charset="-78"/>
               </a:rPr>
               <a:t>ARABIC DEPARTMENT · MIFTAH ARABIC · IGCSE 0544</a:t>
             </a:r>
@@ -44503,8 +43670,7 @@
                   <a:srgbClr val="FFFFFF"/>
                 </a:solidFill>
                 <a:latin typeface="Calibri" pitchFamily="34" charset="0"/>
-                <a:ea typeface="Calibri" pitchFamily="34" charset="-122"/>
-                <a:cs typeface="Calibri" pitchFamily="34" charset="-120"/>
+                <a:cs typeface="Amiri" pitchFamily="2" charset="-78"/>
               </a:rPr>
               <a:t>F3-L12 · F3 Assessment</a:t>
             </a:r>
@@ -44569,8 +43735,7 @@
                   <a:srgbClr val="FFFFFF"/>
                 </a:solidFill>
                 <a:latin typeface="Calibri" pitchFamily="34" charset="0"/>
-                <a:ea typeface="Calibri" pitchFamily="34" charset="-122"/>
-                <a:cs typeface="Calibri" pitchFamily="34" charset="-120"/>
+                <a:cs typeface="Amiri" pitchFamily="2" charset="-78"/>
               </a:rPr>
               <a:t>I DO · 5 MIN</a:t>
             </a:r>
@@ -44608,8 +43773,7 @@
                   <a:srgbClr val="6B4C9A"/>
                 </a:solidFill>
                 <a:latin typeface="Calibri" pitchFamily="34" charset="0"/>
-                <a:ea typeface="Calibri" pitchFamily="34" charset="-122"/>
-                <a:cs typeface="Calibri" pitchFamily="34" charset="-120"/>
+                <a:cs typeface="Amiri" pitchFamily="2" charset="-78"/>
               </a:rPr>
               <a:t>LISTENING · TEXT 2 · TWO SIBLINGS · 8 MARKS (WEBSITE)</a:t>
             </a:r>
@@ -44647,8 +43811,7 @@
                   <a:srgbClr val="1B3B6F"/>
                 </a:solidFill>
                 <a:latin typeface="Cambria" pitchFamily="34" charset="0"/>
-                <a:ea typeface="Cambria" pitchFamily="34" charset="-122"/>
-                <a:cs typeface="Cambria" pitchFamily="34" charset="-120"/>
+                <a:cs typeface="Amiri" pitchFamily="2" charset="-78"/>
               </a:rPr>
               <a:t>Listening · Text 2</a:t>
             </a:r>
@@ -44685,9 +43848,8 @@
                 <a:solidFill>
                   <a:srgbClr val="8A6D1E"/>
                 </a:solidFill>
-                <a:latin typeface="Amiri" pitchFamily="34" charset="0"/>
-                <a:ea typeface="Amiri" pitchFamily="34" charset="-122"/>
-                <a:cs typeface="Amiri" pitchFamily="34" charset="-120"/>
+                <a:latin typeface="Amiri" pitchFamily="2" charset="-78"/>
+                <a:cs typeface="Amiri" pitchFamily="2" charset="-78"/>
               </a:rPr>
               <a:t>الاِسْتِمَاعُ · النَّصُّ الثَّانِي</a:t>
             </a:r>
@@ -44725,8 +43887,7 @@
                   <a:srgbClr val="8A93A0"/>
                 </a:solidFill>
                 <a:latin typeface="Calibri" pitchFamily="34" charset="0"/>
-                <a:ea typeface="Calibri" pitchFamily="34" charset="-122"/>
-                <a:cs typeface="Calibri" pitchFamily="34" charset="-120"/>
+                <a:cs typeface="Amiri" pitchFamily="2" charset="-78"/>
               </a:rPr>
               <a:t>Miftah Arabic · Foundation F3 · My Family &amp; Home · F3-L12</a:t>
             </a:r>
@@ -44823,8 +43984,7 @@
                   <a:srgbClr val="FFFFFF"/>
                 </a:solidFill>
                 <a:latin typeface="Calibri" pitchFamily="34" charset="0"/>
-                <a:ea typeface="Calibri" pitchFamily="34" charset="-122"/>
-                <a:cs typeface="Calibri" pitchFamily="34" charset="-120"/>
+                <a:cs typeface="Amiri" pitchFamily="2" charset="-78"/>
               </a:rPr>
               <a:t>1</a:t>
             </a:r>
@@ -44862,8 +44022,7 @@
                   <a:srgbClr val="1B3B6F"/>
                 </a:solidFill>
                 <a:latin typeface="Calibri" pitchFamily="34" charset="0"/>
-                <a:ea typeface="Calibri" pitchFamily="34" charset="-122"/>
-                <a:cs typeface="Calibri" pitchFamily="34" charset="-120"/>
+                <a:cs typeface="Amiri" pitchFamily="2" charset="-78"/>
               </a:rPr>
               <a:t>Who is the older sibling?</a:t>
             </a:r>
@@ -44926,8 +44085,7 @@
                   <a:srgbClr val="1B3B6F"/>
                 </a:solidFill>
                 <a:latin typeface="Calibri" pitchFamily="34" charset="0"/>
-                <a:ea typeface="Calibri" pitchFamily="34" charset="-122"/>
-                <a:cs typeface="Calibri" pitchFamily="34" charset="-120"/>
+                <a:cs typeface="Amiri" pitchFamily="2" charset="-78"/>
               </a:rPr>
               <a:t>A</a:t>
             </a:r>
@@ -44965,8 +44123,7 @@
                   <a:srgbClr val="1F2A37"/>
                 </a:solidFill>
                 <a:latin typeface="Calibri" pitchFamily="34" charset="0"/>
-                <a:ea typeface="Calibri" pitchFamily="34" charset="-122"/>
-                <a:cs typeface="Calibri" pitchFamily="34" charset="-120"/>
+                <a:cs typeface="Amiri" pitchFamily="2" charset="-78"/>
               </a:rPr>
               <a:t>Maryam</a:t>
             </a:r>
@@ -45029,8 +44186,7 @@
                   <a:srgbClr val="1B3B6F"/>
                 </a:solidFill>
                 <a:latin typeface="Calibri" pitchFamily="34" charset="0"/>
-                <a:ea typeface="Calibri" pitchFamily="34" charset="-122"/>
-                <a:cs typeface="Calibri" pitchFamily="34" charset="-120"/>
+                <a:cs typeface="Amiri" pitchFamily="2" charset="-78"/>
               </a:rPr>
               <a:t>B</a:t>
             </a:r>
@@ -45068,8 +44224,7 @@
                   <a:srgbClr val="1F2A37"/>
                 </a:solidFill>
                 <a:latin typeface="Calibri" pitchFamily="34" charset="0"/>
-                <a:ea typeface="Calibri" pitchFamily="34" charset="-122"/>
-                <a:cs typeface="Calibri" pitchFamily="34" charset="-120"/>
+                <a:cs typeface="Amiri" pitchFamily="2" charset="-78"/>
               </a:rPr>
               <a:t>Yusuf</a:t>
             </a:r>
@@ -45132,8 +44287,7 @@
                   <a:srgbClr val="1B3B6F"/>
                 </a:solidFill>
                 <a:latin typeface="Calibri" pitchFamily="34" charset="0"/>
-                <a:ea typeface="Calibri" pitchFamily="34" charset="-122"/>
-                <a:cs typeface="Calibri" pitchFamily="34" charset="-120"/>
+                <a:cs typeface="Amiri" pitchFamily="2" charset="-78"/>
               </a:rPr>
               <a:t>C</a:t>
             </a:r>
@@ -45171,8 +44325,7 @@
                   <a:srgbClr val="1F2A37"/>
                 </a:solidFill>
                 <a:latin typeface="Calibri" pitchFamily="34" charset="0"/>
-                <a:ea typeface="Calibri" pitchFamily="34" charset="-122"/>
-                <a:cs typeface="Calibri" pitchFamily="34" charset="-120"/>
+                <a:cs typeface="Amiri" pitchFamily="2" charset="-78"/>
               </a:rPr>
               <a:t>Neither</a:t>
             </a:r>
@@ -45269,8 +44422,7 @@
                   <a:srgbClr val="FFFFFF"/>
                 </a:solidFill>
                 <a:latin typeface="Calibri" pitchFamily="34" charset="0"/>
-                <a:ea typeface="Calibri" pitchFamily="34" charset="-122"/>
-                <a:cs typeface="Calibri" pitchFamily="34" charset="-120"/>
+                <a:cs typeface="Amiri" pitchFamily="2" charset="-78"/>
               </a:rPr>
               <a:t>2</a:t>
             </a:r>
@@ -45308,8 +44460,7 @@
                   <a:srgbClr val="1B3B6F"/>
                 </a:solidFill>
                 <a:latin typeface="Calibri" pitchFamily="34" charset="0"/>
-                <a:ea typeface="Calibri" pitchFamily="34" charset="-122"/>
-                <a:cs typeface="Calibri" pitchFamily="34" charset="-120"/>
+                <a:cs typeface="Amiri" pitchFamily="2" charset="-78"/>
               </a:rPr>
               <a:t>Who likes reading in the bedroom?</a:t>
             </a:r>
@@ -45372,8 +44523,7 @@
                   <a:srgbClr val="1B3B6F"/>
                 </a:solidFill>
                 <a:latin typeface="Calibri" pitchFamily="34" charset="0"/>
-                <a:ea typeface="Calibri" pitchFamily="34" charset="-122"/>
-                <a:cs typeface="Calibri" pitchFamily="34" charset="-120"/>
+                <a:cs typeface="Amiri" pitchFamily="2" charset="-78"/>
               </a:rPr>
               <a:t>A</a:t>
             </a:r>
@@ -45411,8 +44561,7 @@
                   <a:srgbClr val="1F2A37"/>
                 </a:solidFill>
                 <a:latin typeface="Calibri" pitchFamily="34" charset="0"/>
-                <a:ea typeface="Calibri" pitchFamily="34" charset="-122"/>
-                <a:cs typeface="Calibri" pitchFamily="34" charset="-120"/>
+                <a:cs typeface="Amiri" pitchFamily="2" charset="-78"/>
               </a:rPr>
               <a:t>Both</a:t>
             </a:r>
@@ -45475,8 +44624,7 @@
                   <a:srgbClr val="1B3B6F"/>
                 </a:solidFill>
                 <a:latin typeface="Calibri" pitchFamily="34" charset="0"/>
-                <a:ea typeface="Calibri" pitchFamily="34" charset="-122"/>
-                <a:cs typeface="Calibri" pitchFamily="34" charset="-120"/>
+                <a:cs typeface="Amiri" pitchFamily="2" charset="-78"/>
               </a:rPr>
               <a:t>B</a:t>
             </a:r>
@@ -45514,8 +44662,7 @@
                   <a:srgbClr val="1F2A37"/>
                 </a:solidFill>
                 <a:latin typeface="Calibri" pitchFamily="34" charset="0"/>
-                <a:ea typeface="Calibri" pitchFamily="34" charset="-122"/>
-                <a:cs typeface="Calibri" pitchFamily="34" charset="-120"/>
+                <a:cs typeface="Amiri" pitchFamily="2" charset="-78"/>
               </a:rPr>
               <a:t>Yusuf</a:t>
             </a:r>
@@ -45578,8 +44725,7 @@
                   <a:srgbClr val="1B3B6F"/>
                 </a:solidFill>
                 <a:latin typeface="Calibri" pitchFamily="34" charset="0"/>
-                <a:ea typeface="Calibri" pitchFamily="34" charset="-122"/>
-                <a:cs typeface="Calibri" pitchFamily="34" charset="-120"/>
+                <a:cs typeface="Amiri" pitchFamily="2" charset="-78"/>
               </a:rPr>
               <a:t>C</a:t>
             </a:r>
@@ -45617,8 +44763,7 @@
                   <a:srgbClr val="1F2A37"/>
                 </a:solidFill>
                 <a:latin typeface="Calibri" pitchFamily="34" charset="0"/>
-                <a:ea typeface="Calibri" pitchFamily="34" charset="-122"/>
-                <a:cs typeface="Calibri" pitchFamily="34" charset="-120"/>
+                <a:cs typeface="Amiri" pitchFamily="2" charset="-78"/>
               </a:rPr>
               <a:t>Maryam</a:t>
             </a:r>
@@ -45715,8 +44860,7 @@
                   <a:srgbClr val="FFFFFF"/>
                 </a:solidFill>
                 <a:latin typeface="Calibri" pitchFamily="34" charset="0"/>
-                <a:ea typeface="Calibri" pitchFamily="34" charset="-122"/>
-                <a:cs typeface="Calibri" pitchFamily="34" charset="-120"/>
+                <a:cs typeface="Amiri" pitchFamily="2" charset="-78"/>
               </a:rPr>
               <a:t>3</a:t>
             </a:r>
@@ -45754,8 +44898,7 @@
                   <a:srgbClr val="1B3B6F"/>
                 </a:solidFill>
                 <a:latin typeface="Calibri" pitchFamily="34" charset="0"/>
-                <a:ea typeface="Calibri" pitchFamily="34" charset="-122"/>
-                <a:cs typeface="Calibri" pitchFamily="34" charset="-120"/>
+                <a:cs typeface="Amiri" pitchFamily="2" charset="-78"/>
               </a:rPr>
               <a:t>Who is described as funny?</a:t>
             </a:r>
@@ -45818,8 +44961,7 @@
                   <a:srgbClr val="1B3B6F"/>
                 </a:solidFill>
                 <a:latin typeface="Calibri" pitchFamily="34" charset="0"/>
-                <a:ea typeface="Calibri" pitchFamily="34" charset="-122"/>
-                <a:cs typeface="Calibri" pitchFamily="34" charset="-120"/>
+                <a:cs typeface="Amiri" pitchFamily="2" charset="-78"/>
               </a:rPr>
               <a:t>A</a:t>
             </a:r>
@@ -45857,8 +44999,7 @@
                   <a:srgbClr val="1F2A37"/>
                 </a:solidFill>
                 <a:latin typeface="Calibri" pitchFamily="34" charset="0"/>
-                <a:ea typeface="Calibri" pitchFamily="34" charset="-122"/>
-                <a:cs typeface="Calibri" pitchFamily="34" charset="-120"/>
+                <a:cs typeface="Amiri" pitchFamily="2" charset="-78"/>
               </a:rPr>
               <a:t>Both</a:t>
             </a:r>
@@ -45921,8 +45062,7 @@
                   <a:srgbClr val="1B3B6F"/>
                 </a:solidFill>
                 <a:latin typeface="Calibri" pitchFamily="34" charset="0"/>
-                <a:ea typeface="Calibri" pitchFamily="34" charset="-122"/>
-                <a:cs typeface="Calibri" pitchFamily="34" charset="-120"/>
+                <a:cs typeface="Amiri" pitchFamily="2" charset="-78"/>
               </a:rPr>
               <a:t>B</a:t>
             </a:r>
@@ -45960,8 +45100,7 @@
                   <a:srgbClr val="1F2A37"/>
                 </a:solidFill>
                 <a:latin typeface="Calibri" pitchFamily="34" charset="0"/>
-                <a:ea typeface="Calibri" pitchFamily="34" charset="-122"/>
-                <a:cs typeface="Calibri" pitchFamily="34" charset="-120"/>
+                <a:cs typeface="Amiri" pitchFamily="2" charset="-78"/>
               </a:rPr>
               <a:t>Yusuf</a:t>
             </a:r>
@@ -46024,8 +45163,7 @@
                   <a:srgbClr val="1B3B6F"/>
                 </a:solidFill>
                 <a:latin typeface="Calibri" pitchFamily="34" charset="0"/>
-                <a:ea typeface="Calibri" pitchFamily="34" charset="-122"/>
-                <a:cs typeface="Calibri" pitchFamily="34" charset="-120"/>
+                <a:cs typeface="Amiri" pitchFamily="2" charset="-78"/>
               </a:rPr>
               <a:t>C</a:t>
             </a:r>
@@ -46063,8 +45201,7 @@
                   <a:srgbClr val="1F2A37"/>
                 </a:solidFill>
                 <a:latin typeface="Calibri" pitchFamily="34" charset="0"/>
-                <a:ea typeface="Calibri" pitchFamily="34" charset="-122"/>
-                <a:cs typeface="Calibri" pitchFamily="34" charset="-120"/>
+                <a:cs typeface="Amiri" pitchFamily="2" charset="-78"/>
               </a:rPr>
               <a:t>Maryam</a:t>
             </a:r>
@@ -46161,8 +45298,7 @@
                   <a:srgbClr val="FFFFFF"/>
                 </a:solidFill>
                 <a:latin typeface="Calibri" pitchFamily="34" charset="0"/>
-                <a:ea typeface="Calibri" pitchFamily="34" charset="-122"/>
-                <a:cs typeface="Calibri" pitchFamily="34" charset="-120"/>
+                <a:cs typeface="Amiri" pitchFamily="2" charset="-78"/>
               </a:rPr>
               <a:t>4</a:t>
             </a:r>
@@ -46200,8 +45336,7 @@
                   <a:srgbClr val="1B3B6F"/>
                 </a:solidFill>
                 <a:latin typeface="Calibri" pitchFamily="34" charset="0"/>
-                <a:ea typeface="Calibri" pitchFamily="34" charset="-122"/>
-                <a:cs typeface="Calibri" pitchFamily="34" charset="-120"/>
+                <a:cs typeface="Amiri" pitchFamily="2" charset="-78"/>
               </a:rPr>
               <a:t>Who has a computer in the bedroom?</a:t>
             </a:r>
@@ -46264,8 +45399,7 @@
                   <a:srgbClr val="1B3B6F"/>
                 </a:solidFill>
                 <a:latin typeface="Calibri" pitchFamily="34" charset="0"/>
-                <a:ea typeface="Calibri" pitchFamily="34" charset="-122"/>
-                <a:cs typeface="Calibri" pitchFamily="34" charset="-120"/>
+                <a:cs typeface="Amiri" pitchFamily="2" charset="-78"/>
               </a:rPr>
               <a:t>A</a:t>
             </a:r>
@@ -46303,8 +45437,7 @@
                   <a:srgbClr val="1F2A37"/>
                 </a:solidFill>
                 <a:latin typeface="Calibri" pitchFamily="34" charset="0"/>
-                <a:ea typeface="Calibri" pitchFamily="34" charset="-122"/>
-                <a:cs typeface="Calibri" pitchFamily="34" charset="-120"/>
+                <a:cs typeface="Amiri" pitchFamily="2" charset="-78"/>
               </a:rPr>
               <a:t>Yusuf</a:t>
             </a:r>
@@ -46367,8 +45500,7 @@
                   <a:srgbClr val="1B3B6F"/>
                 </a:solidFill>
                 <a:latin typeface="Calibri" pitchFamily="34" charset="0"/>
-                <a:ea typeface="Calibri" pitchFamily="34" charset="-122"/>
-                <a:cs typeface="Calibri" pitchFamily="34" charset="-120"/>
+                <a:cs typeface="Amiri" pitchFamily="2" charset="-78"/>
               </a:rPr>
               <a:t>B</a:t>
             </a:r>
@@ -46406,8 +45538,7 @@
                   <a:srgbClr val="1F2A37"/>
                 </a:solidFill>
                 <a:latin typeface="Calibri" pitchFamily="34" charset="0"/>
-                <a:ea typeface="Calibri" pitchFamily="34" charset="-122"/>
-                <a:cs typeface="Calibri" pitchFamily="34" charset="-120"/>
+                <a:cs typeface="Amiri" pitchFamily="2" charset="-78"/>
               </a:rPr>
               <a:t>Neither</a:t>
             </a:r>
@@ -46470,8 +45601,7 @@
                   <a:srgbClr val="1B3B6F"/>
                 </a:solidFill>
                 <a:latin typeface="Calibri" pitchFamily="34" charset="0"/>
-                <a:ea typeface="Calibri" pitchFamily="34" charset="-122"/>
-                <a:cs typeface="Calibri" pitchFamily="34" charset="-120"/>
+                <a:cs typeface="Amiri" pitchFamily="2" charset="-78"/>
               </a:rPr>
               <a:t>C</a:t>
             </a:r>
@@ -46509,8 +45639,7 @@
                   <a:srgbClr val="1F2A37"/>
                 </a:solidFill>
                 <a:latin typeface="Calibri" pitchFamily="34" charset="0"/>
-                <a:ea typeface="Calibri" pitchFamily="34" charset="-122"/>
-                <a:cs typeface="Calibri" pitchFamily="34" charset="-120"/>
+                <a:cs typeface="Amiri" pitchFamily="2" charset="-78"/>
               </a:rPr>
               <a:t>Maryam</a:t>
             </a:r>
@@ -46607,8 +45736,7 @@
                   <a:srgbClr val="FFFFFF"/>
                 </a:solidFill>
                 <a:latin typeface="Calibri" pitchFamily="34" charset="0"/>
-                <a:ea typeface="Calibri" pitchFamily="34" charset="-122"/>
-                <a:cs typeface="Calibri" pitchFamily="34" charset="-120"/>
+                <a:cs typeface="Amiri" pitchFamily="2" charset="-78"/>
               </a:rPr>
               <a:t>5</a:t>
             </a:r>
@@ -46646,8 +45774,7 @@
                   <a:srgbClr val="1B3B6F"/>
                 </a:solidFill>
                 <a:latin typeface="Calibri" pitchFamily="34" charset="0"/>
-                <a:ea typeface="Calibri" pitchFamily="34" charset="-122"/>
-                <a:cs typeface="Calibri" pitchFamily="34" charset="-120"/>
+                <a:cs typeface="Amiri" pitchFamily="2" charset="-78"/>
               </a:rPr>
               <a:t>True or false: Maryam's room is blue.</a:t>
             </a:r>
@@ -46710,8 +45837,7 @@
                   <a:srgbClr val="1B3B6F"/>
                 </a:solidFill>
                 <a:latin typeface="Calibri" pitchFamily="34" charset="0"/>
-                <a:ea typeface="Calibri" pitchFamily="34" charset="-122"/>
-                <a:cs typeface="Calibri" pitchFamily="34" charset="-120"/>
+                <a:cs typeface="Amiri" pitchFamily="2" charset="-78"/>
               </a:rPr>
               <a:t>A</a:t>
             </a:r>
@@ -46749,8 +45875,7 @@
                   <a:srgbClr val="1F2A37"/>
                 </a:solidFill>
                 <a:latin typeface="Calibri" pitchFamily="34" charset="0"/>
-                <a:ea typeface="Calibri" pitchFamily="34" charset="-122"/>
-                <a:cs typeface="Calibri" pitchFamily="34" charset="-120"/>
+                <a:cs typeface="Amiri" pitchFamily="2" charset="-78"/>
               </a:rPr>
               <a:t>False</a:t>
             </a:r>
@@ -46813,8 +45938,7 @@
                   <a:srgbClr val="1B3B6F"/>
                 </a:solidFill>
                 <a:latin typeface="Calibri" pitchFamily="34" charset="0"/>
-                <a:ea typeface="Calibri" pitchFamily="34" charset="-122"/>
-                <a:cs typeface="Calibri" pitchFamily="34" charset="-120"/>
+                <a:cs typeface="Amiri" pitchFamily="2" charset="-78"/>
               </a:rPr>
               <a:t>B</a:t>
             </a:r>
@@ -46852,8 +45976,7 @@
                   <a:srgbClr val="1F2A37"/>
                 </a:solidFill>
                 <a:latin typeface="Calibri" pitchFamily="34" charset="0"/>
-                <a:ea typeface="Calibri" pitchFamily="34" charset="-122"/>
-                <a:cs typeface="Calibri" pitchFamily="34" charset="-120"/>
+                <a:cs typeface="Amiri" pitchFamily="2" charset="-78"/>
               </a:rPr>
               <a:t>True</a:t>
             </a:r>
@@ -46950,8 +46073,7 @@
                   <a:srgbClr val="FFFFFF"/>
                 </a:solidFill>
                 <a:latin typeface="Calibri" pitchFamily="34" charset="0"/>
-                <a:ea typeface="Calibri" pitchFamily="34" charset="-122"/>
-                <a:cs typeface="Calibri" pitchFamily="34" charset="-120"/>
+                <a:cs typeface="Amiri" pitchFamily="2" charset="-78"/>
               </a:rPr>
               <a:t>6</a:t>
             </a:r>
@@ -46989,8 +46111,7 @@
                   <a:srgbClr val="1B3B6F"/>
                 </a:solidFill>
                 <a:latin typeface="Calibri" pitchFamily="34" charset="0"/>
-                <a:ea typeface="Calibri" pitchFamily="34" charset="-122"/>
-                <a:cs typeface="Calibri" pitchFamily="34" charset="-120"/>
+                <a:cs typeface="Amiri" pitchFamily="2" charset="-78"/>
               </a:rPr>
               <a:t>True or false: Maryam has a white bed.</a:t>
             </a:r>
@@ -47053,8 +46174,7 @@
                   <a:srgbClr val="1B3B6F"/>
                 </a:solidFill>
                 <a:latin typeface="Calibri" pitchFamily="34" charset="0"/>
-                <a:ea typeface="Calibri" pitchFamily="34" charset="-122"/>
-                <a:cs typeface="Calibri" pitchFamily="34" charset="-120"/>
+                <a:cs typeface="Amiri" pitchFamily="2" charset="-78"/>
               </a:rPr>
               <a:t>A</a:t>
             </a:r>
@@ -47092,8 +46212,7 @@
                   <a:srgbClr val="1F2A37"/>
                 </a:solidFill>
                 <a:latin typeface="Calibri" pitchFamily="34" charset="0"/>
-                <a:ea typeface="Calibri" pitchFamily="34" charset="-122"/>
-                <a:cs typeface="Calibri" pitchFamily="34" charset="-120"/>
+                <a:cs typeface="Amiri" pitchFamily="2" charset="-78"/>
               </a:rPr>
               <a:t>False</a:t>
             </a:r>
@@ -47156,8 +46275,7 @@
                   <a:srgbClr val="1B3B6F"/>
                 </a:solidFill>
                 <a:latin typeface="Calibri" pitchFamily="34" charset="0"/>
-                <a:ea typeface="Calibri" pitchFamily="34" charset="-122"/>
-                <a:cs typeface="Calibri" pitchFamily="34" charset="-120"/>
+                <a:cs typeface="Amiri" pitchFamily="2" charset="-78"/>
               </a:rPr>
               <a:t>B</a:t>
             </a:r>
@@ -47195,8 +46313,7 @@
                   <a:srgbClr val="1F2A37"/>
                 </a:solidFill>
                 <a:latin typeface="Calibri" pitchFamily="34" charset="0"/>
-                <a:ea typeface="Calibri" pitchFamily="34" charset="-122"/>
-                <a:cs typeface="Calibri" pitchFamily="34" charset="-120"/>
+                <a:cs typeface="Amiri" pitchFamily="2" charset="-78"/>
               </a:rPr>
               <a:t>True</a:t>
             </a:r>
@@ -47293,8 +46410,7 @@
                   <a:srgbClr val="FFFFFF"/>
                 </a:solidFill>
                 <a:latin typeface="Calibri" pitchFamily="34" charset="0"/>
-                <a:ea typeface="Calibri" pitchFamily="34" charset="-122"/>
-                <a:cs typeface="Calibri" pitchFamily="34" charset="-120"/>
+                <a:cs typeface="Amiri" pitchFamily="2" charset="-78"/>
               </a:rPr>
               <a:t>7</a:t>
             </a:r>
@@ -47332,8 +46448,7 @@
                   <a:srgbClr val="1B3B6F"/>
                 </a:solidFill>
                 <a:latin typeface="Calibri" pitchFamily="34" charset="0"/>
-                <a:ea typeface="Calibri" pitchFamily="34" charset="-122"/>
-                <a:cs typeface="Calibri" pitchFamily="34" charset="-120"/>
+                <a:cs typeface="Amiri" pitchFamily="2" charset="-78"/>
               </a:rPr>
               <a:t>True or false: Both siblings help their mother.</a:t>
             </a:r>
@@ -47396,8 +46511,7 @@
                   <a:srgbClr val="1B3B6F"/>
                 </a:solidFill>
                 <a:latin typeface="Calibri" pitchFamily="34" charset="0"/>
-                <a:ea typeface="Calibri" pitchFamily="34" charset="-122"/>
-                <a:cs typeface="Calibri" pitchFamily="34" charset="-120"/>
+                <a:cs typeface="Amiri" pitchFamily="2" charset="-78"/>
               </a:rPr>
               <a:t>A</a:t>
             </a:r>
@@ -47435,8 +46549,7 @@
                   <a:srgbClr val="1F2A37"/>
                 </a:solidFill>
                 <a:latin typeface="Calibri" pitchFamily="34" charset="0"/>
-                <a:ea typeface="Calibri" pitchFamily="34" charset="-122"/>
-                <a:cs typeface="Calibri" pitchFamily="34" charset="-120"/>
+                <a:cs typeface="Amiri" pitchFamily="2" charset="-78"/>
               </a:rPr>
               <a:t>False</a:t>
             </a:r>
@@ -47499,8 +46612,7 @@
                   <a:srgbClr val="1B3B6F"/>
                 </a:solidFill>
                 <a:latin typeface="Calibri" pitchFamily="34" charset="0"/>
-                <a:ea typeface="Calibri" pitchFamily="34" charset="-122"/>
-                <a:cs typeface="Calibri" pitchFamily="34" charset="-120"/>
+                <a:cs typeface="Amiri" pitchFamily="2" charset="-78"/>
               </a:rPr>
               <a:t>B</a:t>
             </a:r>
@@ -47538,8 +46650,7 @@
                   <a:srgbClr val="1F2A37"/>
                 </a:solidFill>
                 <a:latin typeface="Calibri" pitchFamily="34" charset="0"/>
-                <a:ea typeface="Calibri" pitchFamily="34" charset="-122"/>
-                <a:cs typeface="Calibri" pitchFamily="34" charset="-120"/>
+                <a:cs typeface="Amiri" pitchFamily="2" charset="-78"/>
               </a:rPr>
               <a:t>True</a:t>
             </a:r>
@@ -47636,8 +46747,7 @@
                   <a:srgbClr val="FFFFFF"/>
                 </a:solidFill>
                 <a:latin typeface="Calibri" pitchFamily="34" charset="0"/>
-                <a:ea typeface="Calibri" pitchFamily="34" charset="-122"/>
-                <a:cs typeface="Calibri" pitchFamily="34" charset="-120"/>
+                <a:cs typeface="Amiri" pitchFamily="2" charset="-78"/>
               </a:rPr>
               <a:t>8</a:t>
             </a:r>
@@ -47675,8 +46785,7 @@
                   <a:srgbClr val="1B3B6F"/>
                 </a:solidFill>
                 <a:latin typeface="Calibri" pitchFamily="34" charset="0"/>
-                <a:ea typeface="Calibri" pitchFamily="34" charset="-122"/>
-                <a:cs typeface="Calibri" pitchFamily="34" charset="-120"/>
+                <a:cs typeface="Amiri" pitchFamily="2" charset="-78"/>
               </a:rPr>
               <a:t>True or false: Yusuf is the younger sibling.</a:t>
             </a:r>
@@ -47739,8 +46848,7 @@
                   <a:srgbClr val="1B3B6F"/>
                 </a:solidFill>
                 <a:latin typeface="Calibri" pitchFamily="34" charset="0"/>
-                <a:ea typeface="Calibri" pitchFamily="34" charset="-122"/>
-                <a:cs typeface="Calibri" pitchFamily="34" charset="-120"/>
+                <a:cs typeface="Amiri" pitchFamily="2" charset="-78"/>
               </a:rPr>
               <a:t>A</a:t>
             </a:r>
@@ -47778,8 +46886,7 @@
                   <a:srgbClr val="1F2A37"/>
                 </a:solidFill>
                 <a:latin typeface="Calibri" pitchFamily="34" charset="0"/>
-                <a:ea typeface="Calibri" pitchFamily="34" charset="-122"/>
-                <a:cs typeface="Calibri" pitchFamily="34" charset="-120"/>
+                <a:cs typeface="Amiri" pitchFamily="2" charset="-78"/>
               </a:rPr>
               <a:t>False</a:t>
             </a:r>
@@ -47842,8 +46949,7 @@
                   <a:srgbClr val="1B3B6F"/>
                 </a:solidFill>
                 <a:latin typeface="Calibri" pitchFamily="34" charset="0"/>
-                <a:ea typeface="Calibri" pitchFamily="34" charset="-122"/>
-                <a:cs typeface="Calibri" pitchFamily="34" charset="-120"/>
+                <a:cs typeface="Amiri" pitchFamily="2" charset="-78"/>
               </a:rPr>
               <a:t>B</a:t>
             </a:r>
@@ -47881,8 +46987,7 @@
                   <a:srgbClr val="1F2A37"/>
                 </a:solidFill>
                 <a:latin typeface="Calibri" pitchFamily="34" charset="0"/>
-                <a:ea typeface="Calibri" pitchFamily="34" charset="-122"/>
-                <a:cs typeface="Calibri" pitchFamily="34" charset="-120"/>
+                <a:cs typeface="Amiri" pitchFamily="2" charset="-78"/>
               </a:rPr>
               <a:t>True</a:t>
             </a:r>
@@ -47920,8 +47025,7 @@
                   <a:srgbClr val="8A93A0"/>
                 </a:solidFill>
                 <a:latin typeface="Calibri" pitchFamily="34" charset="0"/>
-                <a:ea typeface="Calibri" pitchFamily="34" charset="-122"/>
-                <a:cs typeface="Calibri" pitchFamily="34" charset="-120"/>
+                <a:cs typeface="Amiri" pitchFamily="2" charset="-78"/>
               </a:rPr>
               <a:t>9 / 22</a:t>
             </a:r>

--- a/Foundation_F3/F3-L12_Unit_Assessment_My_Family_and_Home.pptx
+++ b/Foundation_F3/F3-L12_Unit_Assessment_My_Family_and_Home.pptx
@@ -709,7 +709,11 @@
           <a:lstStyle/>
           <a:p>
             <a:r>
-              <a:rPr lang="en-US" dirty="0"/>
+              <a:rPr lang="ar-SA" dirty="0">
+                <a:latin typeface="Amiri" pitchFamily="2" charset="-78"/>
+                <a:ea typeface="Amiri" pitchFamily="2" charset="-78"/>
+                <a:cs typeface="Amiri" pitchFamily="2" charset="-78"/>
+              </a:rPr>
               <a:t>HEARD WORDS (website, 4 marks — 2 per word). The website accepts any word from the two scripts, written with or without vowels; it normalises ة/ه and hamza forms (e.g. فاطمه, حديقه, اريكه). Award the marks for a recognisable word from the texts even with a minor spelling slip.
 Examples of accepted words (website list): بَيْتٌ، غُرْفَةٌ، أَرِيكَةٌ، سَجَّادَةٌ، زَرْقَاءُ، المَطْبَخُ، حَدِيقَةٌ، مَكْتَبٌ، حَاسُوبٌ، سَرِيرٌ، خِزَانَةٌ، أَبِي، أُمِّي، أَخِي، أُخْتِي …</a:t>
             </a:r>
@@ -976,7 +980,11 @@
           <a:lstStyle/>
           <a:p>
             <a:r>
-              <a:rPr lang="en-US" dirty="0"/>
+              <a:rPr lang="ar-SA" dirty="0">
+                <a:latin typeface="Amiri" pitchFamily="2" charset="-78"/>
+                <a:ea typeface="Amiri" pitchFamily="2" charset="-78"/>
+                <a:cs typeface="Amiri" pitchFamily="2" charset="-78"/>
+              </a:rPr>
               <a:t>WEBSITE MODEL ANSWERS. Notice the change from “I” in the text (أَدْرُسُ، أُحِبُّ) to “he” in the answers (يَدْرُسُ، يُحِبُّ، غُرْفَتَهُ) — reward it, but at Foundation accept correct information in the “I” form for the first mark. Reading total /10.</a:t>
             </a:r>
             <a:endParaRPr lang="en-US" dirty="0"/>
@@ -1064,7 +1072,11 @@
           <a:lstStyle/>
           <a:p>
             <a:r>
-              <a:rPr lang="en-US" dirty="0"/>
+              <a:rPr lang="ar-SA" dirty="0">
+                <a:latin typeface="Amiri" pitchFamily="2" charset="-78"/>
+                <a:ea typeface="Amiri" pitchFamily="2" charset="-78"/>
+                <a:cs typeface="Amiri" pitchFamily="2" charset="-78"/>
+              </a:rPr>
               <a:t>WRITING QUESTION 1 (website, 5 marks: “label five room items in Arabic”). The website shows a room picture; on this deck the five items are named in English. If you prefer a picture task, share a bedroom image in the chat and number five items.
 ANSWERS: ١ سَرِيرٌ · ٢ خِزَانَةٌ · ٣ مَكْتَبٌ · ٤ نَافِذَةٌ · ٥ مِصْبَاحٌ.</a:t>
             </a:r>
@@ -1243,7 +1255,11 @@
           <a:lstStyle/>
           <a:p>
             <a:r>
-              <a:rPr lang="en-US" dirty="0"/>
+              <a:rPr lang="ar-SA" dirty="0">
+                <a:latin typeface="Amiri" pitchFamily="2" charset="-78"/>
+                <a:ea typeface="Amiri" pitchFamily="2" charset="-78"/>
+                <a:cs typeface="Amiri" pitchFamily="2" charset="-78"/>
+              </a:rPr>
               <a:t>WEBSITE FULL-MARK MODEL (as published it ends here; an opinion + reason — e.g. أُحِبُّ بَيْتِي لِأَنَّهُ مُرِيحٌ — completes point 5). Students compare and add ONE improvement in green pen (self-assessment only — the mark stands).</a:t>
             </a:r>
             <a:endParaRPr lang="en-US" dirty="0"/>
@@ -1331,7 +1347,11 @@
           <a:lstStyle/>
           <a:p>
             <a:r>
-              <a:rPr lang="en-US" dirty="0"/>
+              <a:rPr lang="ar-SA" dirty="0">
+                <a:latin typeface="Amiri" pitchFamily="2" charset="-78"/>
+                <a:ea typeface="Amiri" pitchFamily="2" charset="-78"/>
+                <a:cs typeface="Amiri" pitchFamily="2" charset="-78"/>
+              </a:rPr>
               <a:t>SPEAKING (website, 10 marks): Communication /5 (relevant, understandable answers covering family and home) · Accuracy and fluency /5 (controlled gender and reference, manageable hesitation, intelligible pronunciation).
 ORGANISATION: one-to-one with the teacher while others finish writing, or trusted pairs with the teacher listening. Website 3-minute preparation timer. Female forms: صِفِي، عَائِلَتِكِ، بَيْتِكِ.</a:t>
             </a:r>
@@ -1420,7 +1440,11 @@
           <a:lstStyle/>
           <a:p>
             <a:r>
-              <a:rPr lang="en-US" dirty="0"/>
+              <a:rPr lang="ar-SA" dirty="0">
+                <a:latin typeface="Amiri" pitchFamily="2" charset="-78"/>
+                <a:ea typeface="Amiri" pitchFamily="2" charset="-78"/>
+                <a:cs typeface="Amiri" pitchFamily="2" charset="-78"/>
+              </a:rPr>
               <a:t>RESULTS (website “Results and F4 target”): total /60 and an evidence-based reflection — one achievement with evidence, one difficulty and one precise F4 target:
 أَنَا فَخُورٌ / فَخُورَةٌ بِـ… · تَقَدَّمْتُ فِي… · هَدَفِي فِي F4 هُوَ…
 The bands are a teacher guide in line with the F1 and F2 assessments (the website totals the four sections but does not print bands). Compare percentages across sections, as the sections have different totals (20 · 10 · 20 · 10).</a:t>
@@ -1510,7 +1534,11 @@
           <a:lstStyle/>
           <a:p>
             <a:r>
-              <a:rPr lang="en-US" dirty="0"/>
+              <a:rPr lang="ar-SA" dirty="0">
+                <a:latin typeface="Amiri" pitchFamily="2" charset="-78"/>
+                <a:ea typeface="Amiri" pitchFamily="2" charset="-78"/>
+                <a:cs typeface="Amiri" pitchFamily="2" charset="-78"/>
+              </a:rPr>
               <a:t>WELCOME (1 min) — while students join.
 • Greet each student by name as they arrive: السَّلَامُ عَلَيْكُمْ. Take the register (Pastoral Tracker: attendance 0/1).
 • 2-MINUTE CHECK-IN (SEND training): a private chat to any student who seemed unsettled last lesson — “Are you okay today? 👍 / 👎”.
@@ -1692,7 +1720,11 @@
           <a:lstStyle/>
           <a:p>
             <a:r>
-              <a:rPr lang="en-US" dirty="0"/>
+              <a:rPr lang="ar-SA" dirty="0">
+                <a:latin typeface="Amiri" pitchFamily="2" charset="-78"/>
+                <a:ea typeface="Amiri" pitchFamily="2" charset="-78"/>
+                <a:cs typeface="Amiri" pitchFamily="2" charset="-78"/>
+              </a:rPr>
               <a:t>PREPARATION — flipped learning (2 min to explain).
 Next lesson (F4-L01 · School Subjects — What Do You Study?) will spend class time USING this language, so students prepare it tonight — short, simple, easy to access (school guidance: “Simple, Short, Interesting, Relevant, Easy to access”). F4 begins with school subjects (website F4-L01 “School Subjects — What Do You Study?”); the لِأَنَّهُ / لِأَنَّهَا notes are the website’s.
 Follow-up: the next Do Now tests two of these words (Flipped Learning: keep it short AND follow up).
@@ -2141,7 +2173,11 @@
           <a:lstStyle/>
           <a:p>
             <a:r>
-              <a:rPr lang="en-US" dirty="0"/>
+              <a:rPr lang="ar-SA" dirty="0">
+                <a:latin typeface="Amiri" pitchFamily="2" charset="-78"/>
+                <a:ea typeface="Amiri" pitchFamily="2" charset="-78"/>
+                <a:cs typeface="Amiri" pitchFamily="2" charset="-78"/>
+              </a:rPr>
               <a:t>ASSESSMENT MAP (website). Website assessment vocabulary: تَقْيِيمٌ assessment · إِنْجَازٌ achievement · تَقَدُّمٌ progress · هَدَفٌ target · ثِقَةٌ confidence. Website “By the end”: understand two connected listening texts · read a partly vowelled description · label room items · write 60–80 connected words · answer five speaking questions · identify one evidence-based F4 target.</a:t>
             </a:r>
             <a:endParaRPr lang="en-US" dirty="0"/>
@@ -2229,7 +2265,11 @@
           <a:lstStyle/>
           <a:p>
             <a:r>
-              <a:rPr lang="en-US" dirty="0"/>
+              <a:rPr lang="ar-SA" dirty="0">
+                <a:latin typeface="Amiri" pitchFamily="2" charset="-78"/>
+                <a:ea typeface="Amiri" pitchFamily="2" charset="-78"/>
+                <a:cs typeface="Amiri" pitchFamily="2" charset="-78"/>
+              </a:rPr>
               <a:t>LISTENING TEXT 1 (website, 8 marks). Read twice at natural pace; students answer after the second reading.
 SCRIPT: أَنَا فَاطِمَةُ، وَأَسْكُنُ مَعَ عَائِلَتِي فِي بَيْتٍ كَبِيرٍ فِي القَاهِرَةِ. فِي بَيْتِنَا سِتُّ غُرَفٍ، وَغُرْفَةُ الجُلُوسِ فِي الطَّابِقِ الأَرْضِيِّ. فِيهَا أَرِيكَةٌ بُنِّيَّةٌ، وَتِلْفَازٌ كَبِيرٌ، وَسَجَّادَةٌ زَرْقَاءُ. المَطْبَخُ أَبْيَضُ وَمُضِيءٌ. بِجَانِبِ بَيْتِنَا مَخْبَزٌ، وَمُقَابِلَهُ حَدِيقَةٌ عَامَّةٌ. أَسْكُنُ مَعَ أَبِي وَأُمِّي وَأَخِي وَأُخْتِي. أُحِبُّ حَيَّنَا لِأَنَّهُ هَادِئٌ، وَغُرْفَتِي المُفَضَّلَةُ هِيَ غُرْفَةُ النَّوْمِ لِأَنَّهَا مُرِيحَةٌ.
 Private chat: 1_ 2_ 3_ 4_ 5_ 6_ 7_ 8_</a:t>
@@ -2407,7 +2447,11 @@
           <a:lstStyle/>
           <a:p>
             <a:r>
-              <a:rPr lang="en-US" dirty="0"/>
+              <a:rPr lang="ar-SA" dirty="0">
+                <a:latin typeface="Amiri" pitchFamily="2" charset="-78"/>
+                <a:ea typeface="Amiri" pitchFamily="2" charset="-78"/>
+                <a:cs typeface="Amiri" pitchFamily="2" charset="-78"/>
+              </a:rPr>
               <a:t>LISTENING TEXT 2 (website, 8 marks: 4 speaker matches + 4 true / false). Read twice — use two voices if possible (Yusuf / Maryam).
 SCRIPT: يُوسُفُ: أَنَا الأَخُ الأَكْبَرُ. أَنَا طَوِيلٌ وَهَادِئٌ، وَأُحِبُّ القِرَاءَةَ فِي غُرْفَتِي. مَرْيَمُ: أَنَا الأُخْتُ الصُّغْرَى. أَنَا قَصِيرَةٌ وَمُضْحِكَةٌ، وَأُحِبُّ الجُلُوسَ فِي الحَدِيقَةِ. يُوسُفُ: غُرْفَتِي زَرْقَاءُ، وَفِيهَا مَكْتَبٌ وَحَاسُوبٌ. مَرْيَمُ: غُرْفَتِي وَرْدِيَّةٌ، وَفِيهَا سَرِيرٌ أَبْيَضُ وَخِزَانَةٌ كَبِيرَةٌ. كِلَانَا يُسَاعِدُ أُمَّنَا فِي البَيْتِ.
 Private chat: 9_ 10_ … 16_</a:t>
@@ -2893,6 +2937,7 @@
                   <a:srgbClr val="D4AF37"/>
                 </a:solidFill>
                 <a:latin typeface="Amiri" pitchFamily="2" charset="-78"/>
+                <a:ea typeface="Amiri" pitchFamily="2" charset="-78"/>
                 <a:cs typeface="Amiri" pitchFamily="2" charset="-78"/>
               </a:rPr>
               <a:t>م</a:t>
@@ -3099,6 +3144,7 @@
                   <a:srgbClr val="D4AF37"/>
                 </a:solidFill>
                 <a:latin typeface="Amiri" pitchFamily="2" charset="-78"/>
+                <a:ea typeface="Amiri" pitchFamily="2" charset="-78"/>
                 <a:cs typeface="Amiri" pitchFamily="2" charset="-78"/>
               </a:rPr>
               <a:t>تَقْيِيمُ الوَحْدَةِ — عَائِلَتِي وَبَيْتِي</a:t>
@@ -3556,6 +3602,7 @@
                   <a:srgbClr val="D4AF37"/>
                 </a:solidFill>
                 <a:latin typeface="Amiri" pitchFamily="2" charset="-78"/>
+                <a:ea typeface="Amiri" pitchFamily="2" charset="-78"/>
                 <a:cs typeface="Amiri" pitchFamily="2" charset="-78"/>
               </a:rPr>
               <a:t>م</a:t>
@@ -3876,6 +3923,7 @@
                   <a:srgbClr val="8A6D1E"/>
                 </a:solidFill>
                 <a:latin typeface="Amiri" pitchFamily="2" charset="-78"/>
+                <a:ea typeface="Amiri" pitchFamily="2" charset="-78"/>
                 <a:cs typeface="Amiri" pitchFamily="2" charset="-78"/>
               </a:rPr>
               <a:t>الإِجَابَاتُ</a:t>
@@ -4430,6 +4478,7 @@
                   <a:srgbClr val="8A6D1E"/>
                 </a:solidFill>
                 <a:latin typeface="Amiri" pitchFamily="2" charset="-78"/>
+                <a:ea typeface="Amiri" pitchFamily="2" charset="-78"/>
                 <a:cs typeface="Amiri" pitchFamily="2" charset="-78"/>
               </a:rPr>
               <a:t>أَنَا الأَخُ الأَكْبَرُ</a:t>
@@ -4959,6 +5008,7 @@
                   <a:srgbClr val="8A6D1E"/>
                 </a:solidFill>
                 <a:latin typeface="Amiri" pitchFamily="2" charset="-78"/>
+                <a:ea typeface="Amiri" pitchFamily="2" charset="-78"/>
                 <a:cs typeface="Amiri" pitchFamily="2" charset="-78"/>
               </a:rPr>
               <a:t>أُحِبُّ القِرَاءَةَ فِي غُرْفَتِي</a:t>
@@ -5488,6 +5538,7 @@
                   <a:srgbClr val="8A6D1E"/>
                 </a:solidFill>
                 <a:latin typeface="Amiri" pitchFamily="2" charset="-78"/>
+                <a:ea typeface="Amiri" pitchFamily="2" charset="-78"/>
                 <a:cs typeface="Amiri" pitchFamily="2" charset="-78"/>
               </a:rPr>
               <a:t>أَنَا</a:t>
@@ -5514,6 +5565,7 @@
                   <a:srgbClr val="8A6D1E"/>
                 </a:solidFill>
                 <a:latin typeface="Amiri" pitchFamily="2" charset="-78"/>
+                <a:ea typeface="Amiri" pitchFamily="2" charset="-78"/>
                 <a:cs typeface="Amiri" pitchFamily="2" charset="-78"/>
               </a:rPr>
               <a:t>مُضْحِكَةٌ</a:t>
@@ -6043,6 +6095,7 @@
                   <a:srgbClr val="8A6D1E"/>
                 </a:solidFill>
                 <a:latin typeface="Amiri" pitchFamily="2" charset="-78"/>
+                <a:ea typeface="Amiri" pitchFamily="2" charset="-78"/>
                 <a:cs typeface="Amiri" pitchFamily="2" charset="-78"/>
               </a:rPr>
               <a:t>فِيهَا مَكْتَبٌ وَحَاسُوبٌ</a:t>
@@ -6471,6 +6524,7 @@
                   <a:srgbClr val="8A6D1E"/>
                 </a:solidFill>
                 <a:latin typeface="Amiri" pitchFamily="2" charset="-78"/>
+                <a:ea typeface="Amiri" pitchFamily="2" charset="-78"/>
                 <a:cs typeface="Amiri" pitchFamily="2" charset="-78"/>
               </a:rPr>
               <a:t>غُرْفَتِي وَرْدِيَّةٌ</a:t>
@@ -6899,6 +6953,7 @@
                   <a:srgbClr val="8A6D1E"/>
                 </a:solidFill>
                 <a:latin typeface="Amiri" pitchFamily="2" charset="-78"/>
+                <a:ea typeface="Amiri" pitchFamily="2" charset="-78"/>
                 <a:cs typeface="Amiri" pitchFamily="2" charset="-78"/>
               </a:rPr>
               <a:t>سَرِيرٌ أَبْيَضُ</a:t>
@@ -7327,6 +7382,7 @@
                   <a:srgbClr val="8A6D1E"/>
                 </a:solidFill>
                 <a:latin typeface="Amiri" pitchFamily="2" charset="-78"/>
+                <a:ea typeface="Amiri" pitchFamily="2" charset="-78"/>
                 <a:cs typeface="Amiri" pitchFamily="2" charset="-78"/>
               </a:rPr>
               <a:t>كِلَانَا يُسَاعِدُ أُمَّنَا</a:t>
@@ -7875,6 +7931,7 @@
                   <a:srgbClr val="D4AF37"/>
                 </a:solidFill>
                 <a:latin typeface="Amiri" pitchFamily="2" charset="-78"/>
+                <a:ea typeface="Amiri" pitchFamily="2" charset="-78"/>
                 <a:cs typeface="Amiri" pitchFamily="2" charset="-78"/>
               </a:rPr>
               <a:t>م</a:t>
@@ -8195,6 +8252,7 @@
                   <a:srgbClr val="8A6D1E"/>
                 </a:solidFill>
                 <a:latin typeface="Amiri" pitchFamily="2" charset="-78"/>
+                <a:ea typeface="Amiri" pitchFamily="2" charset="-78"/>
                 <a:cs typeface="Amiri" pitchFamily="2" charset="-78"/>
               </a:rPr>
               <a:t>كَلِمَتَانِ سَمِعْتَهُمَا</a:t>
@@ -8841,6 +8899,7 @@
                   <a:srgbClr val="D4AF37"/>
                 </a:solidFill>
                 <a:latin typeface="Amiri" pitchFamily="2" charset="-78"/>
+                <a:ea typeface="Amiri" pitchFamily="2" charset="-78"/>
                 <a:cs typeface="Amiri" pitchFamily="2" charset="-78"/>
               </a:rPr>
               <a:t>م</a:t>
@@ -9161,6 +9220,7 @@
                   <a:srgbClr val="8A6D1E"/>
                 </a:solidFill>
                 <a:latin typeface="Amiri" pitchFamily="2" charset="-78"/>
+                <a:ea typeface="Amiri" pitchFamily="2" charset="-78"/>
                 <a:cs typeface="Amiri" pitchFamily="2" charset="-78"/>
               </a:rPr>
               <a:t>القِرَاءَةُ</a:t>
@@ -9274,6 +9334,7 @@
                   <a:srgbClr val="1F2A37"/>
                 </a:solidFill>
                 <a:latin typeface="Amiri" pitchFamily="2" charset="-78"/>
+                <a:ea typeface="Amiri" pitchFamily="2" charset="-78"/>
                 <a:cs typeface="Amiri" pitchFamily="2" charset="-78"/>
               </a:rPr>
               <a:t>اِسْمِي سَامِرٌ، وَأَسْكُنُ مَعَ أُسْرَتِي فِي شَقَّةٍ وَاسِعَةٍ قَرِيبَةٍ مِنَ المَدْرَسَةِ. عِنْدِي أَخٌ أَصْغَرُ وَأُخْتٌ كُبْرَى. أَبِي مُعَلِّمٌ هَادِئٌ، وَأُمِّي طَبِيبَةٌ لَطِيفَةٌ. فِي شَقَّتِنَا ثَلَاثُ غُرَفِ نَوْمٍ وَغُرْفَةُ جُلُوسٍ كَبِيرَةٌ. فِي غُرْفَتِي سَرِيرٌ وَمَكْتَبٌ وَرُفُوفٌ. المَكْتَبُ تَحْتَ النَّافِذَةِ، وَالحَاسُوبُ عَلَيْهِ. أُحِبُّ غُرْفَتِي لِأَنَّهَا مُرَتَّبَةٌ وَمُضِيئَةٌ. فِي المَسَاءِ أَدْرُسُ أَوَّلًا، ثُمَّ أَجْلِسُ مَعَ عَائِلَتِي فِي غُرْفَةِ الجُلُوسِ.</a:t>
@@ -9407,6 +9468,7 @@
                   <a:srgbClr val="D4AF37"/>
                 </a:solidFill>
                 <a:latin typeface="Amiri" pitchFamily="2" charset="-78"/>
+                <a:ea typeface="Amiri" pitchFamily="2" charset="-78"/>
                 <a:cs typeface="Amiri" pitchFamily="2" charset="-78"/>
               </a:rPr>
               <a:t>م</a:t>
@@ -9727,6 +9789,7 @@
                   <a:srgbClr val="8A6D1E"/>
                 </a:solidFill>
                 <a:latin typeface="Amiri" pitchFamily="2" charset="-78"/>
+                <a:ea typeface="Amiri" pitchFamily="2" charset="-78"/>
                 <a:cs typeface="Amiri" pitchFamily="2" charset="-78"/>
               </a:rPr>
               <a:t>أَسْئِلَةُ القِرَاءَةِ</a:t>
@@ -10007,6 +10070,7 @@
                   <a:srgbClr val="1B3B6F"/>
                 </a:solidFill>
                 <a:latin typeface="Amiri" pitchFamily="2" charset="-78"/>
+                <a:ea typeface="Amiri" pitchFamily="2" charset="-78"/>
                 <a:cs typeface="Amiri" pitchFamily="2" charset="-78"/>
               </a:rPr>
               <a:t>١ مَعَ مَنْ يَسْكُنُ سَامِرٌ؟</a:t>
@@ -10213,6 +10277,7 @@
                   <a:srgbClr val="1B3B6F"/>
                 </a:solidFill>
                 <a:latin typeface="Amiri" pitchFamily="2" charset="-78"/>
+                <a:ea typeface="Amiri" pitchFamily="2" charset="-78"/>
                 <a:cs typeface="Amiri" pitchFamily="2" charset="-78"/>
               </a:rPr>
               <a:t>٢ مَا عَمَلُ أَبِيهِ؟</a:t>
@@ -10419,6 +10484,7 @@
                   <a:srgbClr val="1B3B6F"/>
                 </a:solidFill>
                 <a:latin typeface="Amiri" pitchFamily="2" charset="-78"/>
+                <a:ea typeface="Amiri" pitchFamily="2" charset="-78"/>
                 <a:cs typeface="Amiri" pitchFamily="2" charset="-78"/>
               </a:rPr>
               <a:t>٣ كَمْ غُرْفَةَ نَوْمٍ فِي الشَّقَّةِ؟</a:t>
@@ -10625,6 +10691,7 @@
                   <a:srgbClr val="1B3B6F"/>
                 </a:solidFill>
                 <a:latin typeface="Amiri" pitchFamily="2" charset="-78"/>
+                <a:ea typeface="Amiri" pitchFamily="2" charset="-78"/>
                 <a:cs typeface="Amiri" pitchFamily="2" charset="-78"/>
               </a:rPr>
               <a:t>٤ أَيْنَ المَكْتَبُ وَالحَاسُوبُ؟</a:t>
@@ -10766,6 +10833,7 @@
                   <a:srgbClr val="1B3B6F"/>
                 </a:solidFill>
                 <a:latin typeface="Amiri" pitchFamily="2" charset="-78"/>
+                <a:ea typeface="Amiri" pitchFamily="2" charset="-78"/>
                 <a:cs typeface="Amiri" pitchFamily="2" charset="-78"/>
               </a:rPr>
               <a:t>٥ مَاذَا يُحِبُّ سَامِرٌ فِي بَيْتِهِ؟ وَلِمَاذَا؟</a:t>
@@ -10907,6 +10975,7 @@
                   <a:srgbClr val="1B3B6F"/>
                 </a:solidFill>
                 <a:latin typeface="Amiri" pitchFamily="2" charset="-78"/>
+                <a:ea typeface="Amiri" pitchFamily="2" charset="-78"/>
                 <a:cs typeface="Amiri" pitchFamily="2" charset="-78"/>
               </a:rPr>
               <a:t>٦ مَاذَا يَفْعَلُ فِي المَسَاءِ؟</a:t>
@@ -11116,6 +11185,7 @@
                   <a:srgbClr val="D4AF37"/>
                 </a:solidFill>
                 <a:latin typeface="Amiri" pitchFamily="2" charset="-78"/>
+                <a:ea typeface="Amiri" pitchFamily="2" charset="-78"/>
                 <a:cs typeface="Amiri" pitchFamily="2" charset="-78"/>
               </a:rPr>
               <a:t>م</a:t>
@@ -11436,6 +11506,7 @@
                   <a:srgbClr val="8A6D1E"/>
                 </a:solidFill>
                 <a:latin typeface="Amiri" pitchFamily="2" charset="-78"/>
+                <a:ea typeface="Amiri" pitchFamily="2" charset="-78"/>
                 <a:cs typeface="Amiri" pitchFamily="2" charset="-78"/>
               </a:rPr>
               <a:t>الإِجَابَاتُ النَّمُوذَجِيَّةُ</a:t>
@@ -11539,6 +11610,7 @@
                   <a:srgbClr val="1B3B6F"/>
                 </a:solidFill>
                 <a:latin typeface="Amiri" pitchFamily="2" charset="-78"/>
+                <a:ea typeface="Amiri" pitchFamily="2" charset="-78"/>
                 <a:cs typeface="Amiri" pitchFamily="2" charset="-78"/>
               </a:rPr>
               <a:t>١ يَسْكُنُ سَامِرٌ مَعَ أُسْرَتِهِ. · ٢ أَبُوهُ مُعَلِّمٌ.</a:t>
@@ -11642,6 +11714,7 @@
                   <a:srgbClr val="1B3B6F"/>
                 </a:solidFill>
                 <a:latin typeface="Amiri" pitchFamily="2" charset="-78"/>
+                <a:ea typeface="Amiri" pitchFamily="2" charset="-78"/>
                 <a:cs typeface="Amiri" pitchFamily="2" charset="-78"/>
               </a:rPr>
               <a:t>٣ فِي الشَّقَّةِ ثَلَاثُ غُرَفِ نَوْمٍ.</a:t>
@@ -11745,6 +11818,7 @@
                   <a:srgbClr val="1B3B6F"/>
                 </a:solidFill>
                 <a:latin typeface="Amiri" pitchFamily="2" charset="-78"/>
+                <a:ea typeface="Amiri" pitchFamily="2" charset="-78"/>
                 <a:cs typeface="Amiri" pitchFamily="2" charset="-78"/>
               </a:rPr>
               <a:t>٤ المَكْتَبُ تَحْتَ النَّافِذَةِ، وَالحَاسُوبُ عَلَى المَكْتَبِ.</a:t>
@@ -11848,6 +11922,7 @@
                   <a:srgbClr val="1B3B6F"/>
                 </a:solidFill>
                 <a:latin typeface="Amiri" pitchFamily="2" charset="-78"/>
+                <a:ea typeface="Amiri" pitchFamily="2" charset="-78"/>
                 <a:cs typeface="Amiri" pitchFamily="2" charset="-78"/>
               </a:rPr>
               <a:t>٥ يُحِبُّ غُرْفَتَهُ لِأَنَّهَا مُرَتَّبَةٌ وَمُضِيئَةٌ.</a:t>
@@ -11951,6 +12026,7 @@
                   <a:srgbClr val="1B3B6F"/>
                 </a:solidFill>
                 <a:latin typeface="Amiri" pitchFamily="2" charset="-78"/>
+                <a:ea typeface="Amiri" pitchFamily="2" charset="-78"/>
                 <a:cs typeface="Amiri" pitchFamily="2" charset="-78"/>
               </a:rPr>
               <a:t>٦ يَدْرُسُ أَوَّلًا، ثُمَّ يَجْلِسُ مَعَ عَائِلَتِهِ.</a:t>
@@ -12122,6 +12198,7 @@
                   <a:srgbClr val="D4AF37"/>
                 </a:solidFill>
                 <a:latin typeface="Amiri" pitchFamily="2" charset="-78"/>
+                <a:ea typeface="Amiri" pitchFamily="2" charset="-78"/>
                 <a:cs typeface="Amiri" pitchFamily="2" charset="-78"/>
               </a:rPr>
               <a:t>م</a:t>
@@ -12442,6 +12519,7 @@
                   <a:srgbClr val="8A6D1E"/>
                 </a:solidFill>
                 <a:latin typeface="Amiri" pitchFamily="2" charset="-78"/>
+                <a:ea typeface="Amiri" pitchFamily="2" charset="-78"/>
                 <a:cs typeface="Amiri" pitchFamily="2" charset="-78"/>
               </a:rPr>
               <a:t>السُّؤَالُ الأَوَّلُ</a:t>
@@ -13820,6 +13898,7 @@
                   <a:srgbClr val="D4AF37"/>
                 </a:solidFill>
                 <a:latin typeface="Amiri" pitchFamily="2" charset="-78"/>
+                <a:ea typeface="Amiri" pitchFamily="2" charset="-78"/>
                 <a:cs typeface="Amiri" pitchFamily="2" charset="-78"/>
               </a:rPr>
               <a:t>م</a:t>
@@ -14140,6 +14219,7 @@
                   <a:srgbClr val="8A6D1E"/>
                 </a:solidFill>
                 <a:latin typeface="Amiri" pitchFamily="2" charset="-78"/>
+                <a:ea typeface="Amiri" pitchFamily="2" charset="-78"/>
                 <a:cs typeface="Amiri" pitchFamily="2" charset="-78"/>
               </a:rPr>
               <a:t>السُّؤَالُ الثَّانِي</a:t>
@@ -15290,6 +15370,7 @@
                   <a:srgbClr val="D4AF37"/>
                 </a:solidFill>
                 <a:latin typeface="Amiri" pitchFamily="2" charset="-78"/>
+                <a:ea typeface="Amiri" pitchFamily="2" charset="-78"/>
                 <a:cs typeface="Amiri" pitchFamily="2" charset="-78"/>
               </a:rPr>
               <a:t>م</a:t>
@@ -15610,6 +15691,7 @@
                   <a:srgbClr val="8A6D1E"/>
                 </a:solidFill>
                 <a:latin typeface="Amiri" pitchFamily="2" charset="-78"/>
+                <a:ea typeface="Amiri" pitchFamily="2" charset="-78"/>
                 <a:cs typeface="Amiri" pitchFamily="2" charset="-78"/>
               </a:rPr>
               <a:t>نَمُوذَجُ الدَّرَجَةِ الكَامِلَةِ</a:t>
@@ -15713,6 +15795,7 @@
                   <a:srgbClr val="1B3B6F"/>
                 </a:solidFill>
                 <a:latin typeface="Amiri" pitchFamily="2" charset="-78"/>
+                <a:ea typeface="Amiri" pitchFamily="2" charset="-78"/>
                 <a:cs typeface="Amiri" pitchFamily="2" charset="-78"/>
               </a:rPr>
               <a:t>أَسْكُنُ مَعَ عَائِلَتِي فِي بَيْتٍ مُتَوَسِّطٍ. عِنْدِي أَبٌ وَأُمٌّ وَأُخْتَانِ.</a:t>
@@ -15816,6 +15899,7 @@
                   <a:srgbClr val="1B3B6F"/>
                 </a:solidFill>
                 <a:latin typeface="Amiri" pitchFamily="2" charset="-78"/>
+                <a:ea typeface="Amiri" pitchFamily="2" charset="-78"/>
                 <a:cs typeface="Amiri" pitchFamily="2" charset="-78"/>
               </a:rPr>
               <a:t>أَبِي طَوِيلٌ وَهَادِئٌ، وَأُمِّي لَطِيفَةٌ وَمُتَعَاوِنَةٌ.</a:t>
@@ -15919,6 +16003,7 @@
                   <a:srgbClr val="1B3B6F"/>
                 </a:solidFill>
                 <a:latin typeface="Amiri" pitchFamily="2" charset="-78"/>
+                <a:ea typeface="Amiri" pitchFamily="2" charset="-78"/>
                 <a:cs typeface="Amiri" pitchFamily="2" charset="-78"/>
               </a:rPr>
               <a:t>فِي بَيْتِنَا أَرْبَعُ غُرَفٍ وَمَطْبَخٌ وَحَمَّامَانِ. غُرْفَتِي المُفَضَّلَةُ هِيَ غُرْفَةُ النَّوْمِ.</a:t>
@@ -16022,6 +16107,7 @@
                   <a:srgbClr val="1B3B6F"/>
                 </a:solidFill>
                 <a:latin typeface="Amiri" pitchFamily="2" charset="-78"/>
+                <a:ea typeface="Amiri" pitchFamily="2" charset="-78"/>
                 <a:cs typeface="Amiri" pitchFamily="2" charset="-78"/>
               </a:rPr>
               <a:t>فِيهَا سَرِيرٌ أَبْيَضُ وَمَكْتَبٌ بُنِّيٌّ بِجَانِبِ النَّافِذَةِ.</a:t>
@@ -16125,6 +16211,7 @@
                   <a:srgbClr val="1B3B6F"/>
                 </a:solidFill>
                 <a:latin typeface="Amiri" pitchFamily="2" charset="-78"/>
+                <a:ea typeface="Amiri" pitchFamily="2" charset="-78"/>
                 <a:cs typeface="Amiri" pitchFamily="2" charset="-78"/>
               </a:rPr>
               <a:t>حَيُّنَا هَادِئٌ، وَقُرْبَ بَيْتِنَا حَدِيقَةٌ عَامَّةٌ.</a:t>
@@ -16296,6 +16383,7 @@
                   <a:srgbClr val="D4AF37"/>
                 </a:solidFill>
                 <a:latin typeface="Amiri" pitchFamily="2" charset="-78"/>
+                <a:ea typeface="Amiri" pitchFamily="2" charset="-78"/>
                 <a:cs typeface="Amiri" pitchFamily="2" charset="-78"/>
               </a:rPr>
               <a:t>م</a:t>
@@ -16616,6 +16704,7 @@
                   <a:srgbClr val="8A6D1E"/>
                 </a:solidFill>
                 <a:latin typeface="Amiri" pitchFamily="2" charset="-78"/>
+                <a:ea typeface="Amiri" pitchFamily="2" charset="-78"/>
                 <a:cs typeface="Amiri" pitchFamily="2" charset="-78"/>
               </a:rPr>
               <a:t>القِسْمُ الرَّابِعُ — التَّحَدُّثُ</a:t>
@@ -16820,6 +16909,7 @@
                   <a:srgbClr val="1B3B6F"/>
                 </a:solidFill>
                 <a:latin typeface="Amiri" pitchFamily="2" charset="-78"/>
+                <a:ea typeface="Amiri" pitchFamily="2" charset="-78"/>
                 <a:cs typeface="Amiri" pitchFamily="2" charset="-78"/>
               </a:rPr>
               <a:t>١ صِفْ عَائِلَتَكَ. / صِفِي عَائِلَتَكِ.</a:t>
@@ -16988,6 +17078,7 @@
                   <a:srgbClr val="1B3B6F"/>
                 </a:solidFill>
                 <a:latin typeface="Amiri" pitchFamily="2" charset="-78"/>
+                <a:ea typeface="Amiri" pitchFamily="2" charset="-78"/>
                 <a:cs typeface="Amiri" pitchFamily="2" charset="-78"/>
               </a:rPr>
               <a:t>٢ صِفْ شَخْصًا وَاحِدًا مِنْ عَائِلَتِكَ.</a:t>
@@ -17156,6 +17247,7 @@
                   <a:srgbClr val="1B3B6F"/>
                 </a:solidFill>
                 <a:latin typeface="Amiri" pitchFamily="2" charset="-78"/>
+                <a:ea typeface="Amiri" pitchFamily="2" charset="-78"/>
                 <a:cs typeface="Amiri" pitchFamily="2" charset="-78"/>
               </a:rPr>
               <a:t>٣ صِفْ بَيْتَكَ. / صِفِي بَيْتَكِ.</a:t>
@@ -17324,6 +17416,7 @@
                   <a:srgbClr val="1B3B6F"/>
                 </a:solidFill>
                 <a:latin typeface="Amiri" pitchFamily="2" charset="-78"/>
+                <a:ea typeface="Amiri" pitchFamily="2" charset="-78"/>
                 <a:cs typeface="Amiri" pitchFamily="2" charset="-78"/>
               </a:rPr>
               <a:t>٤ مَا هِيَ غُرْفَتُكَ المُفَضَّلَةُ؟ وَلِمَاذَا؟</a:t>
@@ -17492,6 +17585,7 @@
                   <a:srgbClr val="1B3B6F"/>
                 </a:solidFill>
                 <a:latin typeface="Amiri" pitchFamily="2" charset="-78"/>
+                <a:ea typeface="Amiri" pitchFamily="2" charset="-78"/>
                 <a:cs typeface="Amiri" pitchFamily="2" charset="-78"/>
               </a:rPr>
               <a:t>٥ مَاذَا يُوجَدُ قُرْبَ بَيْتِكَ؟</a:t>
@@ -17766,6 +17860,7 @@
                   <a:srgbClr val="D4AF37"/>
                 </a:solidFill>
                 <a:latin typeface="Amiri" pitchFamily="2" charset="-78"/>
+                <a:ea typeface="Amiri" pitchFamily="2" charset="-78"/>
                 <a:cs typeface="Amiri" pitchFamily="2" charset="-78"/>
               </a:rPr>
               <a:t>م</a:t>
@@ -18086,6 +18181,7 @@
                   <a:srgbClr val="8A6D1E"/>
                 </a:solidFill>
                 <a:latin typeface="Amiri" pitchFamily="2" charset="-78"/>
+                <a:ea typeface="Amiri" pitchFamily="2" charset="-78"/>
                 <a:cs typeface="Amiri" pitchFamily="2" charset="-78"/>
               </a:rPr>
               <a:t>النَّتِيجَةُ وَهَدَفُ الوَحْدَةِ الرَّابِعَةِ</a:t>
@@ -19258,6 +19354,7 @@
                   <a:srgbClr val="D4AF37"/>
                 </a:solidFill>
                 <a:latin typeface="Amiri" pitchFamily="2" charset="-78"/>
+                <a:ea typeface="Amiri" pitchFamily="2" charset="-78"/>
                 <a:cs typeface="Amiri" pitchFamily="2" charset="-78"/>
               </a:rPr>
               <a:t>م</a:t>
@@ -19578,6 +19675,7 @@
                   <a:srgbClr val="8A6D1E"/>
                 </a:solidFill>
                 <a:latin typeface="Amiri" pitchFamily="2" charset="-78"/>
+                <a:ea typeface="Amiri" pitchFamily="2" charset="-78"/>
                 <a:cs typeface="Amiri" pitchFamily="2" charset="-78"/>
               </a:rPr>
               <a:t>آدَابُ الصَّفِّ</a:t>
@@ -21109,6 +21207,7 @@
                   <a:srgbClr val="D4AF37"/>
                 </a:solidFill>
                 <a:latin typeface="Amiri" pitchFamily="2" charset="-78"/>
+                <a:ea typeface="Amiri" pitchFamily="2" charset="-78"/>
                 <a:cs typeface="Amiri" pitchFamily="2" charset="-78"/>
               </a:rPr>
               <a:t>م</a:t>
@@ -21429,6 +21528,7 @@
                   <a:srgbClr val="8A6D1E"/>
                 </a:solidFill>
                 <a:latin typeface="Amiri" pitchFamily="2" charset="-78"/>
+                <a:ea typeface="Amiri" pitchFamily="2" charset="-78"/>
                 <a:cs typeface="Amiri" pitchFamily="2" charset="-78"/>
               </a:rPr>
               <a:t>قَيِّمْ عَمَلَكَ</a:t>
@@ -22586,6 +22686,7 @@
                   <a:srgbClr val="D4AF37"/>
                 </a:solidFill>
                 <a:latin typeface="Amiri" pitchFamily="2" charset="-78"/>
+                <a:ea typeface="Amiri" pitchFamily="2" charset="-78"/>
                 <a:cs typeface="Amiri" pitchFamily="2" charset="-78"/>
               </a:rPr>
               <a:t>م</a:t>
@@ -22906,6 +23007,7 @@
                   <a:srgbClr val="8A6D1E"/>
                 </a:solidFill>
                 <a:latin typeface="Amiri" pitchFamily="2" charset="-78"/>
+                <a:ea typeface="Amiri" pitchFamily="2" charset="-78"/>
                 <a:cs typeface="Amiri" pitchFamily="2" charset="-78"/>
               </a:rPr>
               <a:t>التَّحْضِيرُ لِلدَّرْسِ القَادِمِ</a:t>
@@ -23119,6 +23221,7 @@
                   <a:srgbClr val="1B3B6F"/>
                 </a:solidFill>
                 <a:latin typeface="Amiri" pitchFamily="2" charset="-78"/>
+                <a:ea typeface="Amiri" pitchFamily="2" charset="-78"/>
                 <a:cs typeface="Amiri" pitchFamily="2" charset="-78"/>
               </a:rPr>
               <a:t>الرِّيَاضِيَّاتُ</a:t>
@@ -23208,6 +23311,7 @@
                   <a:srgbClr val="1B3B6F"/>
                 </a:solidFill>
                 <a:latin typeface="Amiri" pitchFamily="2" charset="-78"/>
+                <a:ea typeface="Amiri" pitchFamily="2" charset="-78"/>
                 <a:cs typeface="Amiri" pitchFamily="2" charset="-78"/>
               </a:rPr>
               <a:t>العُلُومُ</a:t>
@@ -23297,6 +23401,7 @@
                   <a:srgbClr val="1B3B6F"/>
                 </a:solidFill>
                 <a:latin typeface="Amiri" pitchFamily="2" charset="-78"/>
+                <a:ea typeface="Amiri" pitchFamily="2" charset="-78"/>
                 <a:cs typeface="Amiri" pitchFamily="2" charset="-78"/>
               </a:rPr>
               <a:t>التَّارِيخُ</a:t>
@@ -23386,6 +23491,7 @@
                   <a:srgbClr val="1B3B6F"/>
                 </a:solidFill>
                 <a:latin typeface="Amiri" pitchFamily="2" charset="-78"/>
+                <a:ea typeface="Amiri" pitchFamily="2" charset="-78"/>
                 <a:cs typeface="Amiri" pitchFamily="2" charset="-78"/>
               </a:rPr>
               <a:t>الجُغْرَافِيَا</a:t>
@@ -23475,6 +23581,7 @@
                   <a:srgbClr val="1B3B6F"/>
                 </a:solidFill>
                 <a:latin typeface="Amiri" pitchFamily="2" charset="-78"/>
+                <a:ea typeface="Amiri" pitchFamily="2" charset="-78"/>
                 <a:cs typeface="Amiri" pitchFamily="2" charset="-78"/>
               </a:rPr>
               <a:t>الفَنُّ</a:t>
@@ -23640,6 +23747,7 @@
                   <a:srgbClr val="1B3B6F"/>
                 </a:solidFill>
                 <a:latin typeface="Amiri" pitchFamily="2" charset="-78"/>
+                <a:ea typeface="Amiri" pitchFamily="2" charset="-78"/>
                 <a:cs typeface="Amiri" pitchFamily="2" charset="-78"/>
               </a:rPr>
               <a:t>هَدَفِي …</a:t>
@@ -24309,6 +24417,7 @@
                   <a:srgbClr val="FFFFFF"/>
                 </a:solidFill>
                 <a:latin typeface="Amiri" pitchFamily="2" charset="-78"/>
+                <a:ea typeface="Amiri" pitchFamily="2" charset="-78"/>
                 <a:cs typeface="Amiri" pitchFamily="2" charset="-78"/>
               </a:rPr>
               <a:t>أَحْسَنْتُمْ! إِلَى اللِّقَاءِ</a:t>
@@ -24461,6 +24570,7 @@
                   <a:srgbClr val="D4AF37"/>
                 </a:solidFill>
                 <a:latin typeface="Amiri" pitchFamily="2" charset="-78"/>
+                <a:ea typeface="Amiri" pitchFamily="2" charset="-78"/>
                 <a:cs typeface="Amiri" pitchFamily="2" charset="-78"/>
               </a:rPr>
               <a:t>المَوَادُّ الدِّرَاسِيَّةُ</a:t>
@@ -24594,6 +24704,7 @@
                   <a:srgbClr val="D4AF37"/>
                 </a:solidFill>
                 <a:latin typeface="Amiri" pitchFamily="2" charset="-78"/>
+                <a:ea typeface="Amiri" pitchFamily="2" charset="-78"/>
                 <a:cs typeface="Amiri" pitchFamily="2" charset="-78"/>
               </a:rPr>
               <a:t>م</a:t>
@@ -24914,6 +25025,7 @@
                   <a:srgbClr val="8A6D1E"/>
                 </a:solidFill>
                 <a:latin typeface="Amiri" pitchFamily="2" charset="-78"/>
+                <a:ea typeface="Amiri" pitchFamily="2" charset="-78"/>
                 <a:cs typeface="Amiri" pitchFamily="2" charset="-78"/>
               </a:rPr>
               <a:t>خَرِيطَةُ الدَّرْسِ</a:t>
@@ -25228,6 +25340,7 @@
                   <a:srgbClr val="0E7C86"/>
                 </a:solidFill>
                 <a:latin typeface="Amiri" pitchFamily="2" charset="-78"/>
+                <a:ea typeface="Amiri" pitchFamily="2" charset="-78"/>
                 <a:cs typeface="Amiri" pitchFamily="2" charset="-78"/>
               </a:rPr>
               <a:t>تَهْيِئَةٌ</a:t>
@@ -25504,6 +25617,7 @@
                   <a:srgbClr val="1B3B6F"/>
                 </a:solidFill>
                 <a:latin typeface="Amiri" pitchFamily="2" charset="-78"/>
+                <a:ea typeface="Amiri" pitchFamily="2" charset="-78"/>
                 <a:cs typeface="Amiri" pitchFamily="2" charset="-78"/>
               </a:rPr>
               <a:t>خُطَّةُ التَّقْيِيمِ</a:t>
@@ -25780,6 +25894,7 @@
                   <a:srgbClr val="6B4C9A"/>
                 </a:solidFill>
                 <a:latin typeface="Amiri" pitchFamily="2" charset="-78"/>
+                <a:ea typeface="Amiri" pitchFamily="2" charset="-78"/>
                 <a:cs typeface="Amiri" pitchFamily="2" charset="-78"/>
               </a:rPr>
               <a:t>الاِسْتِمَاعُ</a:t>
@@ -26056,6 +26171,7 @@
                   <a:srgbClr val="2F6FB0"/>
                 </a:solidFill>
                 <a:latin typeface="Amiri" pitchFamily="2" charset="-78"/>
+                <a:ea typeface="Amiri" pitchFamily="2" charset="-78"/>
                 <a:cs typeface="Amiri" pitchFamily="2" charset="-78"/>
               </a:rPr>
               <a:t>القِرَاءَةُ</a:t>
@@ -26332,6 +26448,7 @@
                   <a:srgbClr val="1E6B52"/>
                 </a:solidFill>
                 <a:latin typeface="Amiri" pitchFamily="2" charset="-78"/>
+                <a:ea typeface="Amiri" pitchFamily="2" charset="-78"/>
                 <a:cs typeface="Amiri" pitchFamily="2" charset="-78"/>
               </a:rPr>
               <a:t>الكِتَابَةُ وَالتَّحَدُّثُ</a:t>
@@ -26608,6 +26725,7 @@
                   <a:srgbClr val="8A6D1E"/>
                 </a:solidFill>
                 <a:latin typeface="Amiri" pitchFamily="2" charset="-78"/>
+                <a:ea typeface="Amiri" pitchFamily="2" charset="-78"/>
                 <a:cs typeface="Amiri" pitchFamily="2" charset="-78"/>
               </a:rPr>
               <a:t>الهَدَفُ</a:t>
@@ -26884,6 +27002,7 @@
                   <a:srgbClr val="C45A3C"/>
                 </a:solidFill>
                 <a:latin typeface="Amiri" pitchFamily="2" charset="-78"/>
+                <a:ea typeface="Amiri" pitchFamily="2" charset="-78"/>
                 <a:cs typeface="Amiri" pitchFamily="2" charset="-78"/>
               </a:rPr>
               <a:t>اِسْتَعِدَّ</a:t>
@@ -27127,6 +27246,7 @@
                   <a:srgbClr val="D4AF37"/>
                 </a:solidFill>
                 <a:latin typeface="Amiri" pitchFamily="2" charset="-78"/>
+                <a:ea typeface="Amiri" pitchFamily="2" charset="-78"/>
                 <a:cs typeface="Amiri" pitchFamily="2" charset="-78"/>
               </a:rPr>
               <a:t>م</a:t>
@@ -27447,6 +27567,7 @@
                   <a:srgbClr val="8A6D1E"/>
                 </a:solidFill>
                 <a:latin typeface="Amiri" pitchFamily="2" charset="-78"/>
+                <a:ea typeface="Amiri" pitchFamily="2" charset="-78"/>
                 <a:cs typeface="Amiri" pitchFamily="2" charset="-78"/>
               </a:rPr>
               <a:t>اِبْدَأِ الآنَ</a:t>
@@ -27633,6 +27754,7 @@
                   <a:srgbClr val="1B3B6F"/>
                 </a:solidFill>
                 <a:latin typeface="Amiri" pitchFamily="2" charset="-78"/>
+                <a:ea typeface="Amiri" pitchFamily="2" charset="-78"/>
                 <a:cs typeface="Amiri" pitchFamily="2" charset="-78"/>
               </a:rPr>
               <a:t>تَقْيِيمٌ</a:t>
@@ -28097,6 +28219,7 @@
                   <a:srgbClr val="1B3B6F"/>
                 </a:solidFill>
                 <a:latin typeface="Amiri" pitchFamily="2" charset="-78"/>
+                <a:ea typeface="Amiri" pitchFamily="2" charset="-78"/>
                 <a:cs typeface="Amiri" pitchFamily="2" charset="-78"/>
               </a:rPr>
               <a:t>ثِقَةٌ</a:t>
@@ -28586,6 +28709,7 @@
                   <a:srgbClr val="1B3B6F"/>
                 </a:solidFill>
                 <a:latin typeface="Amiri" pitchFamily="2" charset="-78"/>
+                <a:ea typeface="Amiri" pitchFamily="2" charset="-78"/>
                 <a:cs typeface="Amiri" pitchFamily="2" charset="-78"/>
               </a:rPr>
               <a:t>غُرْفَةُ النَّوْمِ ___ مِنَ المَطْبَخِ.</a:t>
@@ -28687,6 +28811,7 @@
                   <a:srgbClr val="1F2A37"/>
                 </a:solidFill>
                 <a:latin typeface="Amiri" pitchFamily="2" charset="-78"/>
+                <a:ea typeface="Amiri" pitchFamily="2" charset="-78"/>
                 <a:cs typeface="Amiri" pitchFamily="2" charset="-78"/>
               </a:rPr>
               <a:t>قَرِيبٌ</a:t>
@@ -28788,6 +28913,7 @@
                   <a:srgbClr val="1F2A37"/>
                 </a:solidFill>
                 <a:latin typeface="Amiri" pitchFamily="2" charset="-78"/>
+                <a:ea typeface="Amiri" pitchFamily="2" charset="-78"/>
                 <a:cs typeface="Amiri" pitchFamily="2" charset="-78"/>
               </a:rPr>
               <a:t>قَرِيبَاتٌ</a:t>
@@ -28889,6 +29015,7 @@
                   <a:srgbClr val="1F2A37"/>
                 </a:solidFill>
                 <a:latin typeface="Amiri" pitchFamily="2" charset="-78"/>
+                <a:ea typeface="Amiri" pitchFamily="2" charset="-78"/>
                 <a:cs typeface="Amiri" pitchFamily="2" charset="-78"/>
               </a:rPr>
               <a:t>قَرِيبَةٌ</a:t>
@@ -29125,6 +29252,7 @@
                   <a:srgbClr val="1F2A37"/>
                 </a:solidFill>
                 <a:latin typeface="Amiri" pitchFamily="2" charset="-78"/>
+                <a:ea typeface="Amiri" pitchFamily="2" charset="-78"/>
                 <a:cs typeface="Amiri" pitchFamily="2" charset="-78"/>
               </a:rPr>
               <a:t>ثَلَاثَةُ غُرَفٍ</a:t>
@@ -29226,6 +29354,7 @@
                   <a:srgbClr val="1F2A37"/>
                 </a:solidFill>
                 <a:latin typeface="Amiri" pitchFamily="2" charset="-78"/>
+                <a:ea typeface="Amiri" pitchFamily="2" charset="-78"/>
                 <a:cs typeface="Amiri" pitchFamily="2" charset="-78"/>
               </a:rPr>
               <a:t>ثَلَاثٌ غُرْفَةٌ</a:t>
@@ -29327,6 +29456,7 @@
                   <a:srgbClr val="1F2A37"/>
                 </a:solidFill>
                 <a:latin typeface="Amiri" pitchFamily="2" charset="-78"/>
+                <a:ea typeface="Amiri" pitchFamily="2" charset="-78"/>
                 <a:cs typeface="Amiri" pitchFamily="2" charset="-78"/>
               </a:rPr>
               <a:t>ثَلَاثُ غُرَفٍ</a:t>
@@ -29563,6 +29693,7 @@
                   <a:srgbClr val="1F2A37"/>
                 </a:solidFill>
                 <a:latin typeface="Amiri" pitchFamily="2" charset="-78"/>
+                <a:ea typeface="Amiri" pitchFamily="2" charset="-78"/>
                 <a:cs typeface="Amiri" pitchFamily="2" charset="-78"/>
               </a:rPr>
               <a:t>السِّتَارَةُ زَرْقَاءُ.</a:t>
@@ -29664,6 +29795,7 @@
                   <a:srgbClr val="1F2A37"/>
                 </a:solidFill>
                 <a:latin typeface="Amiri" pitchFamily="2" charset="-78"/>
+                <a:ea typeface="Amiri" pitchFamily="2" charset="-78"/>
                 <a:cs typeface="Amiri" pitchFamily="2" charset="-78"/>
               </a:rPr>
               <a:t>السِّتَارَةُ أَزْرَقُ.</a:t>
@@ -29765,6 +29897,7 @@
                   <a:srgbClr val="1F2A37"/>
                 </a:solidFill>
                 <a:latin typeface="Amiri" pitchFamily="2" charset="-78"/>
+                <a:ea typeface="Amiri" pitchFamily="2" charset="-78"/>
                 <a:cs typeface="Amiri" pitchFamily="2" charset="-78"/>
               </a:rPr>
               <a:t>السِّتَارَةُ زَرْقَةٌ.</a:t>
@@ -30100,6 +30233,7 @@
                   <a:srgbClr val="D4AF37"/>
                 </a:solidFill>
                 <a:latin typeface="Amiri" pitchFamily="2" charset="-78"/>
+                <a:ea typeface="Amiri" pitchFamily="2" charset="-78"/>
                 <a:cs typeface="Amiri" pitchFamily="2" charset="-78"/>
               </a:rPr>
               <a:t>م</a:t>
@@ -30420,6 +30554,7 @@
                   <a:srgbClr val="8A6D1E"/>
                 </a:solidFill>
                 <a:latin typeface="Amiri" pitchFamily="2" charset="-78"/>
+                <a:ea typeface="Amiri" pitchFamily="2" charset="-78"/>
                 <a:cs typeface="Amiri" pitchFamily="2" charset="-78"/>
               </a:rPr>
               <a:t>الإِجَابَاتُ وَالتَّعْلِيلُ</a:t>
@@ -30606,6 +30741,7 @@
                   <a:srgbClr val="1B3B6F"/>
                 </a:solidFill>
                 <a:latin typeface="Amiri" pitchFamily="2" charset="-78"/>
+                <a:ea typeface="Amiri" pitchFamily="2" charset="-78"/>
                 <a:cs typeface="Amiri" pitchFamily="2" charset="-78"/>
               </a:rPr>
               <a:t>تَقْيِيمٌ</a:t>
@@ -31135,6 +31271,7 @@
                   <a:srgbClr val="1B3B6F"/>
                 </a:solidFill>
                 <a:latin typeface="Amiri" pitchFamily="2" charset="-78"/>
+                <a:ea typeface="Amiri" pitchFamily="2" charset="-78"/>
                 <a:cs typeface="Amiri" pitchFamily="2" charset="-78"/>
               </a:rPr>
               <a:t>ثِقَةٌ</a:t>
@@ -31689,6 +31826,7 @@
                   <a:srgbClr val="1B3B6F"/>
                 </a:solidFill>
                 <a:latin typeface="Amiri" pitchFamily="2" charset="-78"/>
+                <a:ea typeface="Amiri" pitchFamily="2" charset="-78"/>
                 <a:cs typeface="Amiri" pitchFamily="2" charset="-78"/>
               </a:rPr>
               <a:t>غُرْفَةُ النَّوْمِ ___ مِنَ المَطْبَخِ.</a:t>
@@ -31790,6 +31928,7 @@
                   <a:srgbClr val="9AA1AB"/>
                 </a:solidFill>
                 <a:latin typeface="Amiri" pitchFamily="2" charset="-78"/>
+                <a:ea typeface="Amiri" pitchFamily="2" charset="-78"/>
                 <a:cs typeface="Amiri" pitchFamily="2" charset="-78"/>
               </a:rPr>
               <a:t>قَرِيبٌ</a:t>
@@ -31891,6 +32030,7 @@
                   <a:srgbClr val="9AA1AB"/>
                 </a:solidFill>
                 <a:latin typeface="Amiri" pitchFamily="2" charset="-78"/>
+                <a:ea typeface="Amiri" pitchFamily="2" charset="-78"/>
                 <a:cs typeface="Amiri" pitchFamily="2" charset="-78"/>
               </a:rPr>
               <a:t>قَرِيبَاتٌ</a:t>
@@ -32019,6 +32159,7 @@
                   <a:srgbClr val="1F2A37"/>
                 </a:solidFill>
                 <a:latin typeface="Amiri" pitchFamily="2" charset="-78"/>
+                <a:ea typeface="Amiri" pitchFamily="2" charset="-78"/>
                 <a:cs typeface="Amiri" pitchFamily="2" charset="-78"/>
               </a:rPr>
               <a:t>قَرِيبَةٌ</a:t>
@@ -32057,6 +32198,7 @@
                   <a:srgbClr val="8A6D1E"/>
                 </a:solidFill>
                 <a:latin typeface="Amiri" pitchFamily="2" charset="-78"/>
+                <a:ea typeface="Amiri" pitchFamily="2" charset="-78"/>
                 <a:cs typeface="Amiri" pitchFamily="2" charset="-78"/>
               </a:rPr>
               <a:t>غُرْفَةٌ</a:t>
@@ -32306,6 +32448,7 @@
                   <a:srgbClr val="9AA1AB"/>
                 </a:solidFill>
                 <a:latin typeface="Amiri" pitchFamily="2" charset="-78"/>
+                <a:ea typeface="Amiri" pitchFamily="2" charset="-78"/>
                 <a:cs typeface="Amiri" pitchFamily="2" charset="-78"/>
               </a:rPr>
               <a:t>ثَلَاثَةُ غُرَفٍ</a:t>
@@ -32407,6 +32550,7 @@
                   <a:srgbClr val="9AA1AB"/>
                 </a:solidFill>
                 <a:latin typeface="Amiri" pitchFamily="2" charset="-78"/>
+                <a:ea typeface="Amiri" pitchFamily="2" charset="-78"/>
                 <a:cs typeface="Amiri" pitchFamily="2" charset="-78"/>
               </a:rPr>
               <a:t>ثَلَاثٌ غُرْفَةٌ</a:t>
@@ -32535,6 +32679,7 @@
                   <a:srgbClr val="1F2A37"/>
                 </a:solidFill>
                 <a:latin typeface="Amiri" pitchFamily="2" charset="-78"/>
+                <a:ea typeface="Amiri" pitchFamily="2" charset="-78"/>
                 <a:cs typeface="Amiri" pitchFamily="2" charset="-78"/>
               </a:rPr>
               <a:t>ثَلَاثُ غُرَفٍ</a:t>
@@ -32586,6 +32731,7 @@
                   <a:srgbClr val="8A6D1E"/>
                 </a:solidFill>
                 <a:latin typeface="Amiri" pitchFamily="2" charset="-78"/>
+                <a:ea typeface="Amiri" pitchFamily="2" charset="-78"/>
                 <a:cs typeface="Amiri" pitchFamily="2" charset="-78"/>
               </a:rPr>
               <a:t>غُرْفَةٌ</a:t>
@@ -32862,6 +33008,7 @@
                   <a:srgbClr val="1F2A37"/>
                 </a:solidFill>
                 <a:latin typeface="Amiri" pitchFamily="2" charset="-78"/>
+                <a:ea typeface="Amiri" pitchFamily="2" charset="-78"/>
                 <a:cs typeface="Amiri" pitchFamily="2" charset="-78"/>
               </a:rPr>
               <a:t>السِّتَارَةُ زَرْقَاءُ.</a:t>
@@ -32963,6 +33110,7 @@
                   <a:srgbClr val="9AA1AB"/>
                 </a:solidFill>
                 <a:latin typeface="Amiri" pitchFamily="2" charset="-78"/>
+                <a:ea typeface="Amiri" pitchFamily="2" charset="-78"/>
                 <a:cs typeface="Amiri" pitchFamily="2" charset="-78"/>
               </a:rPr>
               <a:t>السِّتَارَةُ أَزْرَقُ.</a:t>
@@ -33064,6 +33212,7 @@
                   <a:srgbClr val="9AA1AB"/>
                 </a:solidFill>
                 <a:latin typeface="Amiri" pitchFamily="2" charset="-78"/>
+                <a:ea typeface="Amiri" pitchFamily="2" charset="-78"/>
                 <a:cs typeface="Amiri" pitchFamily="2" charset="-78"/>
               </a:rPr>
               <a:t>السِّتَارَةُ زَرْقَةٌ.</a:t>
@@ -33115,6 +33264,7 @@
                   <a:srgbClr val="8A6D1E"/>
                 </a:solidFill>
                 <a:latin typeface="Amiri" pitchFamily="2" charset="-78"/>
+                <a:ea typeface="Amiri" pitchFamily="2" charset="-78"/>
                 <a:cs typeface="Amiri" pitchFamily="2" charset="-78"/>
               </a:rPr>
               <a:t>زَرْقَاءُ</a:t>
@@ -33276,6 +33426,7 @@
                   <a:srgbClr val="1B3B6F"/>
                 </a:solidFill>
                 <a:latin typeface="Amiri" pitchFamily="2" charset="-78"/>
+                <a:ea typeface="Amiri" pitchFamily="2" charset="-78"/>
                 <a:cs typeface="Amiri" pitchFamily="2" charset="-78"/>
               </a:rPr>
               <a:t>اِقْرَأْ · اِبْحَثْ عَنِ الدَّلِيلِ · أَجِبْ</a:t>
@@ -33409,6 +33560,7 @@
                   <a:srgbClr val="D4AF37"/>
                 </a:solidFill>
                 <a:latin typeface="Amiri" pitchFamily="2" charset="-78"/>
+                <a:ea typeface="Amiri" pitchFamily="2" charset="-78"/>
                 <a:cs typeface="Amiri" pitchFamily="2" charset="-78"/>
               </a:rPr>
               <a:t>م</a:t>
@@ -33729,6 +33881,7 @@
                   <a:srgbClr val="8A6D1E"/>
                 </a:solidFill>
                 <a:latin typeface="Amiri" pitchFamily="2" charset="-78"/>
+                <a:ea typeface="Amiri" pitchFamily="2" charset="-78"/>
                 <a:cs typeface="Amiri" pitchFamily="2" charset="-78"/>
               </a:rPr>
               <a:t>خُطَّةُ التَّقْيِيمِ</a:t>
@@ -34863,6 +35016,7 @@
                   <a:srgbClr val="D4AF37"/>
                 </a:solidFill>
                 <a:latin typeface="Amiri" pitchFamily="2" charset="-78"/>
+                <a:ea typeface="Amiri" pitchFamily="2" charset="-78"/>
                 <a:cs typeface="Amiri" pitchFamily="2" charset="-78"/>
               </a:rPr>
               <a:t>م</a:t>
@@ -35183,6 +35337,7 @@
                   <a:srgbClr val="8A6D1E"/>
                 </a:solidFill>
                 <a:latin typeface="Amiri" pitchFamily="2" charset="-78"/>
+                <a:ea typeface="Amiri" pitchFamily="2" charset="-78"/>
                 <a:cs typeface="Amiri" pitchFamily="2" charset="-78"/>
               </a:rPr>
               <a:t>الاِسْتِمَاعُ · النَّصُّ الأَوَّلُ</a:t>
@@ -38858,6 +39013,7 @@
                   <a:srgbClr val="D4AF37"/>
                 </a:solidFill>
                 <a:latin typeface="Amiri" pitchFamily="2" charset="-78"/>
+                <a:ea typeface="Amiri" pitchFamily="2" charset="-78"/>
                 <a:cs typeface="Amiri" pitchFamily="2" charset="-78"/>
               </a:rPr>
               <a:t>م</a:t>
@@ -39178,6 +39334,7 @@
                   <a:srgbClr val="8A6D1E"/>
                 </a:solidFill>
                 <a:latin typeface="Amiri" pitchFamily="2" charset="-78"/>
+                <a:ea typeface="Amiri" pitchFamily="2" charset="-78"/>
                 <a:cs typeface="Amiri" pitchFamily="2" charset="-78"/>
               </a:rPr>
               <a:t>الإِجَابَاتُ</a:t>
@@ -39732,6 +39889,7 @@
                   <a:srgbClr val="8A6D1E"/>
                 </a:solidFill>
                 <a:latin typeface="Amiri" pitchFamily="2" charset="-78"/>
+                <a:ea typeface="Amiri" pitchFamily="2" charset="-78"/>
                 <a:cs typeface="Amiri" pitchFamily="2" charset="-78"/>
               </a:rPr>
               <a:t>فِي القَاهِرَةِ</a:t>
@@ -40261,6 +40419,7 @@
                   <a:srgbClr val="8A6D1E"/>
                 </a:solidFill>
                 <a:latin typeface="Amiri" pitchFamily="2" charset="-78"/>
+                <a:ea typeface="Amiri" pitchFamily="2" charset="-78"/>
                 <a:cs typeface="Amiri" pitchFamily="2" charset="-78"/>
               </a:rPr>
               <a:t>سِتُّ غُرَفٍ</a:t>
@@ -40790,6 +40949,7 @@
                   <a:srgbClr val="8A6D1E"/>
                 </a:solidFill>
                 <a:latin typeface="Amiri" pitchFamily="2" charset="-78"/>
+                <a:ea typeface="Amiri" pitchFamily="2" charset="-78"/>
                 <a:cs typeface="Amiri" pitchFamily="2" charset="-78"/>
               </a:rPr>
               <a:t>فِي الطَّابِقِ الأَرْضِيِّ</a:t>
@@ -41319,6 +41479,7 @@
                   <a:srgbClr val="8A6D1E"/>
                 </a:solidFill>
                 <a:latin typeface="Amiri" pitchFamily="2" charset="-78"/>
+                <a:ea typeface="Amiri" pitchFamily="2" charset="-78"/>
                 <a:cs typeface="Amiri" pitchFamily="2" charset="-78"/>
               </a:rPr>
               <a:t>أَرِيكَةٌ بُنِّيَّةٌ</a:t>
@@ -41848,6 +42009,7 @@
                   <a:srgbClr val="8A6D1E"/>
                 </a:solidFill>
                 <a:latin typeface="Amiri" pitchFamily="2" charset="-78"/>
+                <a:ea typeface="Amiri" pitchFamily="2" charset="-78"/>
                 <a:cs typeface="Amiri" pitchFamily="2" charset="-78"/>
               </a:rPr>
               <a:t>سَجَّادَةٌ زَرْقَاءُ</a:t>
@@ -43383,6 +43545,7 @@
                   <a:srgbClr val="8A6D1E"/>
                 </a:solidFill>
                 <a:latin typeface="Amiri" pitchFamily="2" charset="-78"/>
+                <a:ea typeface="Amiri" pitchFamily="2" charset="-78"/>
                 <a:cs typeface="Amiri" pitchFamily="2" charset="-78"/>
               </a:rPr>
               <a:t>لِأَنَّهُ هَادِئٌ</a:t>
@@ -43529,6 +43692,7 @@
                   <a:srgbClr val="D4AF37"/>
                 </a:solidFill>
                 <a:latin typeface="Amiri" pitchFamily="2" charset="-78"/>
+                <a:ea typeface="Amiri" pitchFamily="2" charset="-78"/>
                 <a:cs typeface="Amiri" pitchFamily="2" charset="-78"/>
               </a:rPr>
               <a:t>م</a:t>
@@ -43849,6 +44013,7 @@
                   <a:srgbClr val="8A6D1E"/>
                 </a:solidFill>
                 <a:latin typeface="Amiri" pitchFamily="2" charset="-78"/>
+                <a:ea typeface="Amiri" pitchFamily="2" charset="-78"/>
                 <a:cs typeface="Amiri" pitchFamily="2" charset="-78"/>
               </a:rPr>
               <a:t>الاِسْتِمَاعُ · النَّصُّ الثَّانِي</a:t>
@@ -47085,13 +47250,9 @@
     <a:fontScheme name="Office">
       <a:majorFont>
         <a:latin typeface="Calibri Light" panose="020F0302020204030204"/>
-        <a:ea typeface=""/>
-        <a:cs typeface=""/>
-        <a:font script="Jpan" typeface="游ゴシック Light"/>
-        <a:font script="Hang" typeface="맑은 고딕"/>
-        <a:font script="Hans" typeface="等线 Light"/>
-        <a:font script="Hant" typeface="新細明體"/>
-        <a:font script="Arab" typeface="Times New Roman"/>
+        <a:ea typeface="Amiri" pitchFamily="2" charset="-78"/>
+        <a:cs typeface="Amiri" pitchFamily="2" charset="-78"/>
+        <a:font script="Arab" typeface="Amiri"/>
         <a:font script="Hebr" typeface="Times New Roman"/>
         <a:font script="Thai" typeface="Angsana New"/>
         <a:font script="Ethi" typeface="Nyala"/>
@@ -47137,13 +47298,9 @@
       </a:majorFont>
       <a:minorFont>
         <a:latin typeface="Calibri" panose="020F0502020204030204"/>
-        <a:ea typeface=""/>
-        <a:cs typeface=""/>
-        <a:font script="Jpan" typeface="游ゴシック"/>
-        <a:font script="Hang" typeface="맑은 고딕"/>
-        <a:font script="Hans" typeface="等线"/>
-        <a:font script="Hant" typeface="新細明體"/>
-        <a:font script="Arab" typeface="Arial"/>
+        <a:ea typeface="Amiri" pitchFamily="2" charset="-78"/>
+        <a:cs typeface="Amiri" pitchFamily="2" charset="-78"/>
+        <a:font script="Arab" typeface="Amiri"/>
         <a:font script="Hebr" typeface="Arial"/>
         <a:font script="Thai" typeface="Cordia New"/>
         <a:font script="Ethi" typeface="Nyala"/>
